--- a/docs/week-7/cen429-week-7-sunum.en.pptx
+++ b/docs/week-7/cen429-week-7-sunum.en.pptx
@@ -40,6 +40,10 @@
     <p:sldId id="288" r:id="rId40"/>
     <p:sldId id="289" r:id="rId41"/>
     <p:sldId id="290" r:id="rId42"/>
+    <p:sldId id="291" r:id="rId43"/>
+    <p:sldId id="292" r:id="rId44"/>
+    <p:sldId id="293" r:id="rId45"/>
+    <p:sldId id="294" r:id="rId46"/>
   </p:sldIdLst>
   <p:sldSz cx="12191695" cy="6858000" type="screen4x3"/>
   <p:notesSz cx="6858000" cy="9144000"/>
@@ -3974,7 +3978,7 @@
                   <a:srgbClr val="006D77"/>
                 </a:solidFill>
               </a:rPr>
-              <a:t>Gelecek hafta</a:t>
+              <a:t>Örnek sorular</a:t>
             </a:r>
           </a:p>
         </p:txBody>
@@ -3988,41 +3992,7 @@
         <p:spPr>
           <a:xfrm>
             <a:off x="640080" y="1325880"/>
-            <a:ext cx="10911535" cy="439928"/>
-          </a:xfrm>
-          <a:prstGeom prst="rect">
-            <a:avLst/>
-          </a:prstGeom>
-          <a:noFill/>
-        </p:spPr>
-        <p:txBody>
-          <a:bodyPr wrap="square" lIns="45720" rIns="45720">
-            <a:spAutoFit/>
-          </a:bodyPr>
-          <a:lstStyle/>
-          <a:p>
-            <a:pPr algn="l"/>
-            <a:r>
-              <a:rPr sz="2000" b="1">
-                <a:solidFill>
-                  <a:srgbClr val="1F2D3A"/>
-                </a:solidFill>
-              </a:rPr>
-              <a:t>Hafta 8 — Ara sınav haftası: Quiz-1</a:t>
-            </a:r>
-          </a:p>
-        </p:txBody>
-      </p:sp>
-      <p:sp>
-        <p:nvSpPr>
-          <p:cNvPr id="8" name="TextBox 7"/>
-          <p:cNvSpPr txBox="1"/>
-          <p:nvPr/>
-        </p:nvSpPr>
-        <p:spPr>
-          <a:xfrm>
-            <a:off x="640080" y="1875536"/>
-            <a:ext cx="10911535" cy="843280"/>
+            <a:ext cx="10911535" cy="2346960"/>
           </a:xfrm>
           <a:prstGeom prst="rect">
             <a:avLst/>
@@ -4054,7 +4024,7 @@
                   <a:srgbClr val="1F2D3A"/>
                 </a:solidFill>
               </a:rPr>
-              <a:t>Kapsam: 1–6. haftalar</a:t>
+              <a:t>Güven sınırını geçen en riskli akış hangisi?</a:t>
             </a:r>
           </a:p>
           <a:p>
@@ -4077,7 +4047,99 @@
                   <a:srgbClr val="1F2D3A"/>
                 </a:solidFill>
               </a:rPr>
-              <a:t>Çalışma rehberi ve örnek sorular: 8. hafta sayfası</a:t>
+              <a:t>Bu varlık bellekte ne kadar açık kalıyor, nerede siliniyor?</a:t>
+            </a:r>
+          </a:p>
+          <a:p>
+            <a:pPr>
+              <a:spcAft>
+                <a:spcPts val="300"/>
+              </a:spcAft>
+            </a:pPr>
+            <a:r>
+              <a:rPr sz="2000" b="1">
+                <a:solidFill>
+                  <a:srgbClr val="006D77"/>
+                </a:solidFill>
+              </a:rPr>
+              <a:t>• </a:t>
+            </a:r>
+            <a:r>
+              <a:rPr sz="2000" b="0">
+                <a:solidFill>
+                  <a:srgbClr val="1F2D3A"/>
+                </a:solidFill>
+              </a:rPr>
+              <a:t>Anahtar nereden geliyor, nerede duruyor? Nonce tekrar edebilir mi?</a:t>
+            </a:r>
+          </a:p>
+          <a:p>
+            <a:pPr>
+              <a:spcAft>
+                <a:spcPts val="300"/>
+              </a:spcAft>
+            </a:pPr>
+            <a:r>
+              <a:rPr sz="2000" b="1">
+                <a:solidFill>
+                  <a:srgbClr val="006D77"/>
+                </a:solidFill>
+              </a:rPr>
+              <a:t>• </a:t>
+            </a:r>
+            <a:r>
+              <a:rPr sz="2000" b="0">
+                <a:solidFill>
+                  <a:srgbClr val="1F2D3A"/>
+                </a:solidFill>
+              </a:rPr>
+              <a:t>Hangi derleyici koruması kapalı, neden?</a:t>
+            </a:r>
+          </a:p>
+          <a:p>
+            <a:pPr>
+              <a:spcAft>
+                <a:spcPts val="300"/>
+              </a:spcAft>
+            </a:pPr>
+            <a:r>
+              <a:rPr sz="2000" b="1">
+                <a:solidFill>
+                  <a:srgbClr val="006D77"/>
+                </a:solidFill>
+              </a:rPr>
+              <a:t>• </a:t>
+            </a:r>
+            <a:r>
+              <a:rPr sz="2000" b="0">
+                <a:solidFill>
+                  <a:srgbClr val="1F2D3A"/>
+                </a:solidFill>
+              </a:rPr>
+              <a:t>RASP denetimi başarısız olunca ne oluyor?</a:t>
+            </a:r>
+          </a:p>
+          <a:p>
+            <a:pPr>
+              <a:spcAft>
+                <a:spcPts val="300"/>
+              </a:spcAft>
+            </a:pPr>
+            <a:r>
+              <a:rPr sz="2000" b="1">
+                <a:solidFill>
+                  <a:srgbClr val="006D77"/>
+                </a:solidFill>
+              </a:rPr>
+              <a:t>• </a:t>
+            </a:r>
+            <a:r>
+              <a:rPr sz="2000" b="0">
+                <a:solidFill>
+                  <a:srgbClr val="1F2D3A"/>
+                </a:solidFill>
+              </a:rPr>
+              <a:t>SBOM'da zafiyetli bileşen var mı? Etkileniyor musunuz?</a:t>
             </a:r>
           </a:p>
         </p:txBody>
@@ -4093,14 +4155,6 @@
 <file path=ppt/slides/slide11.xml><?xml version="1.0" encoding="utf-8"?>
 <p:sld xmlns:a="http://schemas.openxmlformats.org/drawingml/2006/main" xmlns:p="http://schemas.openxmlformats.org/presentationml/2006/main" xmlns:r="http://schemas.openxmlformats.org/officeDocument/2006/relationships">
   <p:cSld>
-    <p:bg>
-      <p:bgPr>
-        <a:solidFill>
-          <a:srgbClr val="006D77"/>
-        </a:solidFill>
-        <a:effectLst/>
-      </p:bgPr>
-    </p:bg>
     <p:spTree>
       <p:nvGrpSpPr>
         <p:cNvPr id="1" name=""/>
@@ -4108,9 +4162,33 @@
         <p:nvPr/>
       </p:nvGrpSpPr>
       <p:grpSpPr/>
-      <p:sp>
-        <p:nvSpPr>
-          <p:cNvPr id="2" name="TextBox 1"/>
+      <p:pic>
+        <p:nvPicPr>
+          <p:cNvPr id="2" name="Picture 1" descr="rteu_logo_kucuk.jpg"/>
+          <p:cNvPicPr>
+            <a:picLocks noChangeAspect="1"/>
+          </p:cNvPicPr>
+          <p:nvPr/>
+        </p:nvPicPr>
+        <p:blipFill>
+          <a:blip r:embed="rId2"/>
+          <a:stretch>
+            <a:fillRect/>
+          </a:stretch>
+        </p:blipFill>
+        <p:spPr>
+          <a:xfrm>
+            <a:off x="640080" y="164592"/>
+            <a:ext cx="242773" cy="329184"/>
+          </a:xfrm>
+          <a:prstGeom prst="rect">
+            <a:avLst/>
+          </a:prstGeom>
+        </p:spPr>
+      </p:pic>
+      <p:sp>
+        <p:nvSpPr>
+          <p:cNvPr id="3" name="TextBox 2"/>
           <p:cNvSpPr txBox="1"/>
           <p:nvPr/>
         </p:nvSpPr>
@@ -4133,7 +4211,7 @@
             <a:r>
               <a:rPr sz="1100" b="0">
                 <a:solidFill>
-                  <a:srgbClr val="D8F0F2"/>
+                  <a:srgbClr val="5B6770"/>
                 </a:solidFill>
               </a:rPr>
               <a:t>CEN429 Güvenli Programlama · Hafta 7</a:t>
@@ -4143,7 +4221,7 @@
       </p:sp>
       <p:sp>
         <p:nvSpPr>
-          <p:cNvPr id="3" name="TextBox 2"/>
+          <p:cNvPr id="4" name="TextBox 3"/>
           <p:cNvSpPr txBox="1"/>
           <p:nvPr/>
         </p:nvSpPr>
@@ -4166,7 +4244,7 @@
             <a:r>
               <a:rPr sz="1000" b="0">
                 <a:solidFill>
-                  <a:srgbClr val="D8F0F2"/>
+                  <a:srgbClr val="5B6770"/>
                 </a:solidFill>
               </a:rPr>
               <a:t>RTEÜ Bilgisayar Mühendisliği · 2026-2027 Güz</a:t>
@@ -4176,7 +4254,7 @@
       </p:sp>
       <p:sp>
         <p:nvSpPr>
-          <p:cNvPr id="4" name="TextBox 3"/>
+          <p:cNvPr id="5" name="TextBox 4"/>
           <p:cNvSpPr txBox="1"/>
           <p:nvPr/>
         </p:nvSpPr>
@@ -4200,7 +4278,7 @@
             <a:r>
               <a:rPr sz="1000" b="0">
                 <a:solidFill>
-                  <a:srgbClr val="D8F0F2"/>
+                  <a:srgbClr val="5B6770"/>
                 </a:solidFill>
               </a:rPr>
               <a:t>11</a:t>
@@ -4210,38 +4288,379 @@
       </p:sp>
       <p:sp>
         <p:nvSpPr>
-          <p:cNvPr id="5" name="TextBox 4"/>
-          <p:cNvSpPr txBox="1"/>
-          <p:nvPr/>
-        </p:nvSpPr>
-        <p:spPr>
-          <a:xfrm>
-            <a:off x="640080" y="2743200"/>
-            <a:ext cx="10911535" cy="1280160"/>
-          </a:xfrm>
-          <a:prstGeom prst="rect">
-            <a:avLst/>
-          </a:prstGeom>
-          <a:noFill/>
-        </p:spPr>
-        <p:txBody>
-          <a:bodyPr wrap="square" lIns="45720" rIns="45720">
-            <a:spAutoFit/>
-          </a:bodyPr>
-          <a:lstStyle/>
-          <a:p>
-            <a:pPr algn="l"/>
-            <a:r>
-              <a:rPr sz="4000" b="1">
-                <a:solidFill>
-                  <a:srgbClr val="FFFFFF"/>
-                </a:solidFill>
-              </a:rPr>
-              <a:t>Ek · Rubrik madde madde</a:t>
-            </a:r>
-          </a:p>
-        </p:txBody>
-      </p:sp>
+          <p:cNvPr id="6" name="TextBox 5"/>
+          <p:cNvSpPr txBox="1"/>
+          <p:nvPr/>
+        </p:nvSpPr>
+        <p:spPr>
+          <a:xfrm>
+            <a:off x="640080" y="548640"/>
+            <a:ext cx="10911535" cy="731520"/>
+          </a:xfrm>
+          <a:prstGeom prst="rect">
+            <a:avLst/>
+          </a:prstGeom>
+          <a:noFill/>
+        </p:spPr>
+        <p:txBody>
+          <a:bodyPr wrap="square" lIns="45720" rIns="45720" anchor="ctr">
+            <a:spAutoFit/>
+          </a:bodyPr>
+          <a:lstStyle/>
+          <a:p>
+            <a:r>
+              <a:rPr sz="2600" b="1">
+                <a:solidFill>
+                  <a:srgbClr val="006D77"/>
+                </a:solidFill>
+              </a:rPr>
+              <a:t>Sık yapılan hatalar</a:t>
+            </a:r>
+          </a:p>
+        </p:txBody>
+      </p:sp>
+      <p:graphicFrame>
+        <p:nvGraphicFramePr>
+          <p:cNvPr id="7" name="Table 6"/>
+          <p:cNvGraphicFramePr>
+            <a:graphicFrameLocks noGrp="1"/>
+          </p:cNvGraphicFramePr>
+          <p:nvPr/>
+        </p:nvGraphicFramePr>
+        <p:xfrm>
+          <a:off x="640080" y="1325880"/>
+          <a:ext cx="10911535" cy="2403043"/>
+        </p:xfrm>
+        <a:graphic>
+          <a:graphicData uri="http://schemas.openxmlformats.org/drawingml/2006/table">
+            <a:tbl>
+              <a:tblPr firstRow="1" bandRow="1">
+                <a:tableStyleId>{5C22544A-7EE6-4342-B048-85BDC9FD1C3A}</a:tableStyleId>
+              </a:tblPr>
+              <a:tblGrid>
+                <a:gridCol w="5279775"/>
+                <a:gridCol w="5631760"/>
+              </a:tblGrid>
+              <a:tr h="343291">
+                <a:tc>
+                  <a:txBody>
+                    <a:bodyPr wrap="square"/>
+                    <a:lstStyle/>
+                    <a:p>
+                      <a:r>
+                        <a:rPr sz="1296" b="1">
+                          <a:solidFill>
+                            <a:srgbClr val="FFFFFF"/>
+                          </a:solidFill>
+                        </a:rPr>
+                        <a:t>Hata</a:t>
+                      </a:r>
+                    </a:p>
+                  </a:txBody>
+                  <a:tcPr marL="54864" marR="54864" marT="27432" marB="27432" anchor="ctr">
+                    <a:solidFill>
+                      <a:srgbClr val="006D77"/>
+                    </a:solidFill>
+                  </a:tcPr>
+                </a:tc>
+                <a:tc>
+                  <a:txBody>
+                    <a:bodyPr wrap="square"/>
+                    <a:lstStyle/>
+                    <a:p>
+                      <a:r>
+                        <a:rPr sz="1296" b="1">
+                          <a:solidFill>
+                            <a:srgbClr val="FFFFFF"/>
+                          </a:solidFill>
+                        </a:rPr>
+                        <a:t>Neden sorun?</a:t>
+                      </a:r>
+                    </a:p>
+                  </a:txBody>
+                  <a:tcPr marL="54864" marR="54864" marT="27432" marB="27432" anchor="ctr">
+                    <a:solidFill>
+                      <a:srgbClr val="006D77"/>
+                    </a:solidFill>
+                  </a:tcPr>
+                </a:tc>
+              </a:tr>
+              <a:tr h="343291">
+                <a:tc>
+                  <a:txBody>
+                    <a:bodyPr wrap="square"/>
+                    <a:lstStyle/>
+                    <a:p>
+                      <a:r>
+                        <a:rPr sz="1296" b="0">
+                          <a:solidFill>
+                            <a:srgbClr val="1F2D3A"/>
+                          </a:solidFill>
+                        </a:rPr>
+                        <a:t>Kılavuz ile kod tutarsız</a:t>
+                      </a:r>
+                    </a:p>
+                  </a:txBody>
+                  <a:tcPr marL="54864" marR="54864" marT="27432" marB="27432" anchor="ctr">
+                    <a:solidFill>
+                      <a:srgbClr val="FFFFFF"/>
+                    </a:solidFill>
+                  </a:tcPr>
+                </a:tc>
+                <a:tc>
+                  <a:txBody>
+                    <a:bodyPr wrap="square"/>
+                    <a:lstStyle/>
+                    <a:p>
+                      <a:r>
+                        <a:rPr sz="1296" b="0">
+                          <a:solidFill>
+                            <a:srgbClr val="1F2D3A"/>
+                          </a:solidFill>
+                        </a:rPr>
+                        <a:t>En ciddi bulgulardan biri</a:t>
+                      </a:r>
+                    </a:p>
+                  </a:txBody>
+                  <a:tcPr marL="54864" marR="54864" marT="27432" marB="27432" anchor="ctr">
+                    <a:solidFill>
+                      <a:srgbClr val="FFFFFF"/>
+                    </a:solidFill>
+                  </a:tcPr>
+                </a:tc>
+              </a:tr>
+              <a:tr h="343291">
+                <a:tc>
+                  <a:txBody>
+                    <a:bodyPr wrap="square"/>
+                    <a:lstStyle/>
+                    <a:p>
+                      <a:r>
+                        <a:rPr sz="1296" b="0">
+                          <a:solidFill>
+                            <a:srgbClr val="1F2D3A"/>
+                          </a:solidFill>
+                        </a:rPr>
+                        <a:t>Kanıtsız "güvenli" iddiası</a:t>
+                      </a:r>
+                    </a:p>
+                  </a:txBody>
+                  <a:tcPr marL="54864" marR="54864" marT="27432" marB="27432" anchor="ctr">
+                    <a:solidFill>
+                      <a:srgbClr val="EEF7F8"/>
+                    </a:solidFill>
+                  </a:tcPr>
+                </a:tc>
+                <a:tc>
+                  <a:txBody>
+                    <a:bodyPr wrap="square"/>
+                    <a:lstStyle/>
+                    <a:p>
+                      <a:r>
+                        <a:rPr sz="1296" b="0">
+                          <a:solidFill>
+                            <a:srgbClr val="1F2D3A"/>
+                          </a:solidFill>
+                        </a:rPr>
+                        <a:t>Puanlanmaz</a:t>
+                      </a:r>
+                    </a:p>
+                  </a:txBody>
+                  <a:tcPr marL="54864" marR="54864" marT="27432" marB="27432" anchor="ctr">
+                    <a:solidFill>
+                      <a:srgbClr val="EEF7F8"/>
+                    </a:solidFill>
+                  </a:tcPr>
+                </a:tc>
+              </a:tr>
+              <a:tr h="343291">
+                <a:tc>
+                  <a:txBody>
+                    <a:bodyPr wrap="square"/>
+                    <a:lstStyle/>
+                    <a:p>
+                      <a:r>
+                        <a:rPr sz="1296" b="0">
+                          <a:solidFill>
+                            <a:srgbClr val="1F2D3A"/>
+                          </a:solidFill>
+                        </a:rPr>
+                        <a:t>Varlık listesinde anahtar/günlük/kod yok</a:t>
+                      </a:r>
+                    </a:p>
+                  </a:txBody>
+                  <a:tcPr marL="54864" marR="54864" marT="27432" marB="27432" anchor="ctr">
+                    <a:solidFill>
+                      <a:srgbClr val="FFFFFF"/>
+                    </a:solidFill>
+                  </a:tcPr>
+                </a:tc>
+                <a:tc>
+                  <a:txBody>
+                    <a:bodyPr wrap="square"/>
+                    <a:lstStyle/>
+                    <a:p>
+                      <a:r>
+                        <a:rPr sz="1296" b="0">
+                          <a:solidFill>
+                            <a:srgbClr val="1F2D3A"/>
+                          </a:solidFill>
+                        </a:rPr>
+                        <a:t>Listede olmayan korunmuyor</a:t>
+                      </a:r>
+                    </a:p>
+                  </a:txBody>
+                  <a:tcPr marL="54864" marR="54864" marT="27432" marB="27432" anchor="ctr">
+                    <a:solidFill>
+                      <a:srgbClr val="FFFFFF"/>
+                    </a:solidFill>
+                  </a:tcPr>
+                </a:tc>
+              </a:tr>
+              <a:tr h="343291">
+                <a:tc>
+                  <a:txBody>
+                    <a:bodyPr wrap="square"/>
+                    <a:lstStyle/>
+                    <a:p>
+                      <a:r>
+                        <a:rPr sz="1296" b="0">
+                          <a:solidFill>
+                            <a:srgbClr val="1F2D3A"/>
+                          </a:solidFill>
+                        </a:rPr>
+                        <a:t>Genel bilgiden tehdit tablosu</a:t>
+                      </a:r>
+                    </a:p>
+                  </a:txBody>
+                  <a:tcPr marL="54864" marR="54864" marT="27432" marB="27432" anchor="ctr">
+                    <a:solidFill>
+                      <a:srgbClr val="EEF7F8"/>
+                    </a:solidFill>
+                  </a:tcPr>
+                </a:tc>
+                <a:tc>
+                  <a:txBody>
+                    <a:bodyPr wrap="square"/>
+                    <a:lstStyle/>
+                    <a:p>
+                      <a:r>
+                        <a:rPr sz="1296" b="0">
+                          <a:solidFill>
+                            <a:srgbClr val="1F2D3A"/>
+                          </a:solidFill>
+                        </a:rPr>
+                        <a:t>Projeye özgü tehditler kaçar</a:t>
+                      </a:r>
+                    </a:p>
+                  </a:txBody>
+                  <a:tcPr marL="54864" marR="54864" marT="27432" marB="27432" anchor="ctr">
+                    <a:solidFill>
+                      <a:srgbClr val="EEF7F8"/>
+                    </a:solidFill>
+                  </a:tcPr>
+                </a:tc>
+              </a:tr>
+              <a:tr h="343291">
+                <a:tc>
+                  <a:txBody>
+                    <a:bodyPr wrap="square"/>
+                    <a:lstStyle/>
+                    <a:p>
+                      <a:r>
+                        <a:rPr sz="1296" b="0">
+                          <a:solidFill>
+                            <a:srgbClr val="1F2D3A"/>
+                          </a:solidFill>
+                        </a:rPr>
+                        <a:t>Prova edilmemiş gösterim</a:t>
+                      </a:r>
+                    </a:p>
+                  </a:txBody>
+                  <a:tcPr marL="54864" marR="54864" marT="27432" marB="27432" anchor="ctr">
+                    <a:solidFill>
+                      <a:srgbClr val="FFFFFF"/>
+                    </a:solidFill>
+                  </a:tcPr>
+                </a:tc>
+                <a:tc>
+                  <a:txBody>
+                    <a:bodyPr wrap="square"/>
+                    <a:lstStyle/>
+                    <a:p>
+                      <a:r>
+                        <a:rPr sz="1296" b="0">
+                          <a:solidFill>
+                            <a:srgbClr val="1F2D3A"/>
+                          </a:solidFill>
+                        </a:rPr>
+                        <a:t>Süre boşa gider</a:t>
+                      </a:r>
+                    </a:p>
+                  </a:txBody>
+                  <a:tcPr marL="54864" marR="54864" marT="27432" marB="27432" anchor="ctr">
+                    <a:solidFill>
+                      <a:srgbClr val="FFFFFF"/>
+                    </a:solidFill>
+                  </a:tcPr>
+                </a:tc>
+              </a:tr>
+              <a:tr h="343297">
+                <a:tc>
+                  <a:txBody>
+                    <a:bodyPr wrap="square"/>
+                    <a:lstStyle/>
+                    <a:p>
+                      <a:r>
+                        <a:rPr sz="1296" b="0">
+                          <a:solidFill>
+                            <a:srgbClr val="1F2D3A"/>
+                          </a:solidFill>
+                        </a:rPr>
+                        <a:t>Depoda gerçek parola/anahtar/kişisel veri</a:t>
+                      </a:r>
+                    </a:p>
+                  </a:txBody>
+                  <a:tcPr marL="54864" marR="54864" marT="27432" marB="27432" anchor="ctr">
+                    <a:solidFill>
+                      <a:srgbClr val="EEF7F8"/>
+                    </a:solidFill>
+                  </a:tcPr>
+                </a:tc>
+                <a:tc>
+                  <a:txBody>
+                    <a:bodyPr wrap="square"/>
+                    <a:lstStyle/>
+                    <a:p>
+                      <a:r>
+                        <a:rPr sz="1296" b="0">
+                          <a:solidFill>
+                            <a:srgbClr val="1F2D3A"/>
+                          </a:solidFill>
+                        </a:rPr>
+                        <a:t>Ciddi güvenlik hatası; değerler </a:t>
+                      </a:r>
+                      <a:r>
+                        <a:rPr sz="1296" b="1">
+                          <a:solidFill>
+                            <a:srgbClr val="1F2D3A"/>
+                          </a:solidFill>
+                        </a:rPr>
+                        <a:t>sentetik</a:t>
+                      </a:r>
+                    </a:p>
+                  </a:txBody>
+                  <a:tcPr marL="54864" marR="54864" marT="27432" marB="27432" anchor="ctr">
+                    <a:solidFill>
+                      <a:srgbClr val="EEF7F8"/>
+                    </a:solidFill>
+                  </a:tcPr>
+                </a:tc>
+              </a:tr>
+            </a:tbl>
+          </a:graphicData>
+        </a:graphic>
+      </p:graphicFrame>
     </p:spTree>
   </p:cSld>
   <p:clrMapOvr>
@@ -4412,176 +4831,35 @@
                   <a:srgbClr val="006D77"/>
                 </a:solidFill>
               </a:rPr>
-              <a:t>Rubrik neyi ölçer?</a:t>
-            </a:r>
-          </a:p>
-        </p:txBody>
-      </p:sp>
-      <p:sp>
-        <p:nvSpPr>
-          <p:cNvPr id="7" name="TextBox 6"/>
-          <p:cNvSpPr txBox="1"/>
-          <p:nvPr/>
-        </p:nvSpPr>
-        <p:spPr>
-          <a:xfrm>
-            <a:off x="640080" y="1325880"/>
-            <a:ext cx="10911535" cy="439928"/>
-          </a:xfrm>
-          <a:prstGeom prst="rect">
-            <a:avLst/>
-          </a:prstGeom>
-          <a:noFill/>
-        </p:spPr>
-        <p:txBody>
-          <a:bodyPr wrap="square" lIns="45720" rIns="45720">
-            <a:spAutoFit/>
-          </a:bodyPr>
-          <a:lstStyle/>
-          <a:p>
-            <a:pPr algn="l"/>
-            <a:r>
-              <a:rPr sz="2000" b="0">
-                <a:solidFill>
-                  <a:srgbClr val="1F2D3A"/>
-                </a:solidFill>
-              </a:rPr>
-              <a:t>Vize gösterimi projenizin </a:t>
-            </a:r>
-            <a:r>
-              <a:rPr sz="2000" b="1">
-                <a:solidFill>
-                  <a:srgbClr val="1F2D3A"/>
-                </a:solidFill>
-              </a:rPr>
-              <a:t>ilk yarısını</a:t>
-            </a:r>
-            <a:r>
-              <a:rPr sz="2000" b="0">
-                <a:solidFill>
-                  <a:srgbClr val="1F2D3A"/>
-                </a:solidFill>
-              </a:rPr>
-              <a:t> ölçer:</a:t>
-            </a:r>
-          </a:p>
-        </p:txBody>
-      </p:sp>
-      <p:sp>
-        <p:nvSpPr>
-          <p:cNvPr id="8" name="TextBox 7"/>
-          <p:cNvSpPr txBox="1"/>
-          <p:nvPr/>
-        </p:nvSpPr>
-        <p:spPr>
-          <a:xfrm>
-            <a:off x="640080" y="1875536"/>
-            <a:ext cx="10911535" cy="1595120"/>
-          </a:xfrm>
-          <a:prstGeom prst="rect">
-            <a:avLst/>
-          </a:prstGeom>
-          <a:noFill/>
-        </p:spPr>
-        <p:txBody>
-          <a:bodyPr wrap="square" lIns="45720" rIns="45720">
-            <a:spAutoFit/>
-          </a:bodyPr>
-          <a:lstStyle/>
-          <a:p>
-            <a:pPr>
-              <a:spcAft>
-                <a:spcPts val="300"/>
-              </a:spcAft>
-            </a:pPr>
-            <a:r>
-              <a:rPr sz="2000" b="1">
-                <a:solidFill>
-                  <a:srgbClr val="006D77"/>
-                </a:solidFill>
-              </a:rPr>
-              <a:t>• </a:t>
-            </a:r>
-            <a:r>
-              <a:rPr sz="2000" b="0">
-                <a:solidFill>
-                  <a:srgbClr val="1F2D3A"/>
-                </a:solidFill>
-              </a:rPr>
-              <a:t>ürün, mimari, tehdit modeli</a:t>
-            </a:r>
-          </a:p>
-          <a:p>
-            <a:pPr>
-              <a:spcAft>
-                <a:spcPts val="300"/>
-              </a:spcAft>
-            </a:pPr>
-            <a:r>
-              <a:rPr sz="2000" b="1">
-                <a:solidFill>
-                  <a:srgbClr val="006D77"/>
-                </a:solidFill>
-              </a:rPr>
-              <a:t>• </a:t>
-            </a:r>
-            <a:r>
-              <a:rPr sz="2000" b="0">
-                <a:solidFill>
-                  <a:srgbClr val="1F2D3A"/>
-                </a:solidFill>
-              </a:rPr>
-              <a:t>varlık yönetimi</a:t>
-            </a:r>
-          </a:p>
-          <a:p>
-            <a:pPr>
-              <a:spcAft>
-                <a:spcPts val="300"/>
-              </a:spcAft>
-            </a:pPr>
-            <a:r>
-              <a:rPr sz="2000" b="1">
-                <a:solidFill>
-                  <a:srgbClr val="006D77"/>
-                </a:solidFill>
-              </a:rPr>
-              <a:t>• </a:t>
-            </a:r>
-            <a:r>
-              <a:rPr sz="2000" b="0">
-                <a:solidFill>
-                  <a:srgbClr val="1F2D3A"/>
-                </a:solidFill>
-              </a:rPr>
-              <a:t>temel korumalar</a:t>
-            </a:r>
-          </a:p>
-          <a:p>
-            <a:pPr>
-              <a:spcAft>
-                <a:spcPts val="300"/>
-              </a:spcAft>
-            </a:pPr>
-            <a:r>
-              <a:rPr sz="2000" b="1">
-                <a:solidFill>
-                  <a:srgbClr val="006D77"/>
-                </a:solidFill>
-              </a:rPr>
-              <a:t>• </a:t>
-            </a:r>
-            <a:r>
-              <a:rPr sz="2000" b="0">
-                <a:solidFill>
-                  <a:srgbClr val="1F2D3A"/>
-                </a:solidFill>
-              </a:rPr>
-              <a:t>belge ve sunum</a:t>
-            </a:r>
-          </a:p>
-        </p:txBody>
-      </p:sp>
+              <a:t>Sık yapılan hatalar — şema</a:t>
+            </a:r>
+          </a:p>
+        </p:txBody>
+      </p:sp>
+      <p:pic>
+        <p:nvPicPr>
+          <p:cNvPr id="7" name="Picture 6" descr="h07-03-sik-hatalar.png"/>
+          <p:cNvPicPr>
+            <a:picLocks noChangeAspect="1"/>
+          </p:cNvPicPr>
+          <p:nvPr/>
+        </p:nvPicPr>
+        <p:blipFill>
+          <a:blip r:embed="rId3"/>
+          <a:stretch>
+            <a:fillRect/>
+          </a:stretch>
+        </p:blipFill>
+        <p:spPr>
+          <a:xfrm>
+            <a:off x="2046645" y="1325880"/>
+            <a:ext cx="8098404" cy="3473778"/>
+          </a:xfrm>
+          <a:prstGeom prst="rect">
+            <a:avLst/>
+          </a:prstGeom>
+        </p:spPr>
+      </p:pic>
     </p:spTree>
   </p:cSld>
   <p:clrMapOvr>
@@ -4752,7 +5030,7 @@
                   <a:srgbClr val="006D77"/>
                 </a:solidFill>
               </a:rPr>
-              <a:t>Madde · ürün ve mimari</a:t>
+              <a:t>Akademik dürüstlük ve sonrası</a:t>
             </a:r>
           </a:p>
         </p:txBody>
@@ -4798,7 +5076,15 @@
                   <a:srgbClr val="1F2D3A"/>
                 </a:solidFill>
               </a:rPr>
-              <a:t>Ne yapıyor, hangi bileşenler?</a:t>
+              <a:t>Kaynaksız kod/metin, takım dışı çalışma, uydurma sonuç </a:t>
+            </a:r>
+            <a:r>
+              <a:rPr sz="2000" b="1">
+                <a:solidFill>
+                  <a:srgbClr val="1F2D3A"/>
+                </a:solidFill>
+              </a:rPr>
+              <a:t>kabul edilmez</a:t>
             </a:r>
           </a:p>
           <a:p>
@@ -4821,7 +5107,7 @@
                   <a:srgbClr val="1F2D3A"/>
                 </a:solidFill>
               </a:rPr>
-              <a:t>Tek şema + en kritik üç varlık.</a:t>
+              <a:t>Teslim edilen her satır açıklanabilmeli</a:t>
             </a:r>
           </a:p>
           <a:p>
@@ -4839,12 +5125,46 @@
               <a:t>• </a:t>
             </a:r>
             <a:r>
+              <a:rPr sz="2000" b="0">
+                <a:solidFill>
+                  <a:srgbClr val="1F2D3A"/>
+                </a:solidFill>
+              </a:rPr>
+              <a:t>Her takım üyesine soru sorulabilir</a:t>
+            </a:r>
+          </a:p>
+        </p:txBody>
+      </p:sp>
+      <p:sp>
+        <p:nvSpPr>
+          <p:cNvPr id="8" name="TextBox 7"/>
+          <p:cNvSpPr txBox="1"/>
+          <p:nvPr/>
+        </p:nvSpPr>
+        <p:spPr>
+          <a:xfrm>
+            <a:off x="640080" y="2654808"/>
+            <a:ext cx="10911535" cy="770128"/>
+          </a:xfrm>
+          <a:prstGeom prst="rect">
+            <a:avLst/>
+          </a:prstGeom>
+          <a:noFill/>
+        </p:spPr>
+        <p:txBody>
+          <a:bodyPr wrap="square" lIns="45720" rIns="45720">
+            <a:spAutoFit/>
+          </a:bodyPr>
+          <a:lstStyle/>
+          <a:p>
+            <a:pPr algn="l"/>
+            <a:r>
               <a:rPr sz="2000" b="1">
                 <a:solidFill>
                   <a:srgbClr val="1F2D3A"/>
                 </a:solidFill>
               </a:rPr>
-              <a:t>Kanıt:</a:t>
+              <a:t>Gösterimden sonra:</a:t>
             </a:r>
             <a:r>
               <a:rPr sz="2000" b="0">
@@ -4852,7 +5172,57 @@
                   <a:srgbClr val="1F2D3A"/>
                 </a:solidFill>
               </a:rPr>
-              <a:t> S2–S4 belgesi.</a:t>
+              <a:t> geri bildirimi </a:t>
+            </a:r>
+            <a:r>
+              <a:rPr sz="2000" b="1">
+                <a:solidFill>
+                  <a:srgbClr val="1F2D3A"/>
+                </a:solidFill>
+              </a:rPr>
+              <a:t>bulgu listesi</a:t>
+            </a:r>
+            <a:r>
+              <a:rPr sz="2000" b="0">
+                <a:solidFill>
+                  <a:srgbClr val="1F2D3A"/>
+                </a:solidFill>
+              </a:rPr>
+              <a:t> olarak yaz (bulgu · önem · düzeltme · tarih) → 12. haftanın küçük modeli</a:t>
+            </a:r>
+          </a:p>
+        </p:txBody>
+      </p:sp>
+      <p:sp>
+        <p:nvSpPr>
+          <p:cNvPr id="9" name="TextBox 8"/>
+          <p:cNvSpPr txBox="1"/>
+          <p:nvPr/>
+        </p:nvSpPr>
+        <p:spPr>
+          <a:xfrm>
+            <a:off x="640080" y="3534664"/>
+            <a:ext cx="10911535" cy="439928"/>
+          </a:xfrm>
+          <a:prstGeom prst="rect">
+            <a:avLst/>
+          </a:prstGeom>
+          <a:noFill/>
+        </p:spPr>
+        <p:txBody>
+          <a:bodyPr wrap="square" lIns="45720" rIns="45720">
+            <a:spAutoFit/>
+          </a:bodyPr>
+          <a:lstStyle/>
+          <a:p>
+            <a:pPr algn="l"/>
+            <a:r>
+              <a:rPr sz="2000" b="0">
+                <a:solidFill>
+                  <a:srgbClr val="1F2D3A"/>
+                </a:solidFill>
+              </a:rPr>
+              <a:t>Final bölümleri: S6 · S8 · S11 · S14 · S15 · S16 sonuç · S17</a:t>
             </a:r>
           </a:p>
         </p:txBody>
@@ -5027,7 +5397,7 @@
                   <a:srgbClr val="006D77"/>
                 </a:solidFill>
               </a:rPr>
-              <a:t>Madde · tehdit modeli</a:t>
+              <a:t>Gelecek hafta</a:t>
             </a:r>
           </a:p>
         </p:txBody>
@@ -5041,7 +5411,41 @@
         <p:spPr>
           <a:xfrm>
             <a:off x="640080" y="1325880"/>
-            <a:ext cx="10911535" cy="1219200"/>
+            <a:ext cx="10911535" cy="439928"/>
+          </a:xfrm>
+          <a:prstGeom prst="rect">
+            <a:avLst/>
+          </a:prstGeom>
+          <a:noFill/>
+        </p:spPr>
+        <p:txBody>
+          <a:bodyPr wrap="square" lIns="45720" rIns="45720">
+            <a:spAutoFit/>
+          </a:bodyPr>
+          <a:lstStyle/>
+          <a:p>
+            <a:pPr algn="l"/>
+            <a:r>
+              <a:rPr sz="2000" b="1">
+                <a:solidFill>
+                  <a:srgbClr val="1F2D3A"/>
+                </a:solidFill>
+              </a:rPr>
+              <a:t>Hafta 8 — Ara sınav haftası: Quiz-1</a:t>
+            </a:r>
+          </a:p>
+        </p:txBody>
+      </p:sp>
+      <p:sp>
+        <p:nvSpPr>
+          <p:cNvPr id="8" name="TextBox 7"/>
+          <p:cNvSpPr txBox="1"/>
+          <p:nvPr/>
+        </p:nvSpPr>
+        <p:spPr>
+          <a:xfrm>
+            <a:off x="640080" y="1875536"/>
+            <a:ext cx="10911535" cy="843280"/>
           </a:xfrm>
           <a:prstGeom prst="rect">
             <a:avLst/>
@@ -5073,7 +5477,7 @@
                   <a:srgbClr val="1F2D3A"/>
                 </a:solidFill>
               </a:rPr>
-              <a:t>STRIDE / saldırı ağacı.</a:t>
+              <a:t>Kapsam: 1–6. haftalar</a:t>
             </a:r>
           </a:p>
           <a:p>
@@ -5096,38 +5500,7 @@
                   <a:srgbClr val="1F2D3A"/>
                 </a:solidFill>
               </a:rPr>
-              <a:t>Her tehdide bir önlem.</a:t>
-            </a:r>
-          </a:p>
-          <a:p>
-            <a:pPr>
-              <a:spcAft>
-                <a:spcPts val="300"/>
-              </a:spcAft>
-            </a:pPr>
-            <a:r>
-              <a:rPr sz="2000" b="1">
-                <a:solidFill>
-                  <a:srgbClr val="006D77"/>
-                </a:solidFill>
-              </a:rPr>
-              <a:t>• </a:t>
-            </a:r>
-            <a:r>
-              <a:rPr sz="2000" b="1">
-                <a:solidFill>
-                  <a:srgbClr val="1F2D3A"/>
-                </a:solidFill>
-              </a:rPr>
-              <a:t>Kanıt:</a:t>
-            </a:r>
-            <a:r>
-              <a:rPr sz="2000" b="0">
-                <a:solidFill>
-                  <a:srgbClr val="1F2D3A"/>
-                </a:solidFill>
-              </a:rPr>
-              <a:t> S4 tehdit tablosu.</a:t>
+              <a:t>Çalışma rehberi ve örnek sorular: 8. hafta sayfası</a:t>
             </a:r>
           </a:p>
         </p:txBody>
@@ -5143,6 +5516,14 @@
 <file path=ppt/slides/slide15.xml><?xml version="1.0" encoding="utf-8"?>
 <p:sld xmlns:a="http://schemas.openxmlformats.org/drawingml/2006/main" xmlns:p="http://schemas.openxmlformats.org/presentationml/2006/main" xmlns:r="http://schemas.openxmlformats.org/officeDocument/2006/relationships">
   <p:cSld>
+    <p:bg>
+      <p:bgPr>
+        <a:solidFill>
+          <a:srgbClr val="006D77"/>
+        </a:solidFill>
+        <a:effectLst/>
+      </p:bgPr>
+    </p:bg>
     <p:spTree>
       <p:nvGrpSpPr>
         <p:cNvPr id="1" name=""/>
@@ -5150,33 +5531,9 @@
         <p:nvPr/>
       </p:nvGrpSpPr>
       <p:grpSpPr/>
-      <p:pic>
-        <p:nvPicPr>
-          <p:cNvPr id="2" name="Picture 1" descr="rteu_logo_kucuk.jpg"/>
-          <p:cNvPicPr>
-            <a:picLocks noChangeAspect="1"/>
-          </p:cNvPicPr>
-          <p:nvPr/>
-        </p:nvPicPr>
-        <p:blipFill>
-          <a:blip r:embed="rId2"/>
-          <a:stretch>
-            <a:fillRect/>
-          </a:stretch>
-        </p:blipFill>
-        <p:spPr>
-          <a:xfrm>
-            <a:off x="640080" y="164592"/>
-            <a:ext cx="242773" cy="329184"/>
-          </a:xfrm>
-          <a:prstGeom prst="rect">
-            <a:avLst/>
-          </a:prstGeom>
-        </p:spPr>
-      </p:pic>
-      <p:sp>
-        <p:nvSpPr>
-          <p:cNvPr id="3" name="TextBox 2"/>
+      <p:sp>
+        <p:nvSpPr>
+          <p:cNvPr id="2" name="TextBox 1"/>
           <p:cNvSpPr txBox="1"/>
           <p:nvPr/>
         </p:nvSpPr>
@@ -5199,7 +5556,7 @@
             <a:r>
               <a:rPr sz="1100" b="0">
                 <a:solidFill>
-                  <a:srgbClr val="5B6770"/>
+                  <a:srgbClr val="D8F0F2"/>
                 </a:solidFill>
               </a:rPr>
               <a:t>CEN429 Güvenli Programlama · Hafta 7</a:t>
@@ -5209,7 +5566,7 @@
       </p:sp>
       <p:sp>
         <p:nvSpPr>
-          <p:cNvPr id="4" name="TextBox 3"/>
+          <p:cNvPr id="3" name="TextBox 2"/>
           <p:cNvSpPr txBox="1"/>
           <p:nvPr/>
         </p:nvSpPr>
@@ -5232,7 +5589,7 @@
             <a:r>
               <a:rPr sz="1000" b="0">
                 <a:solidFill>
-                  <a:srgbClr val="5B6770"/>
+                  <a:srgbClr val="D8F0F2"/>
                 </a:solidFill>
               </a:rPr>
               <a:t>RTEÜ Bilgisayar Mühendisliği · 2026-2027 Güz</a:t>
@@ -5242,7 +5599,7 @@
       </p:sp>
       <p:sp>
         <p:nvSpPr>
-          <p:cNvPr id="5" name="TextBox 4"/>
+          <p:cNvPr id="4" name="TextBox 3"/>
           <p:cNvSpPr txBox="1"/>
           <p:nvPr/>
         </p:nvSpPr>
@@ -5266,7 +5623,7 @@
             <a:r>
               <a:rPr sz="1000" b="0">
                 <a:solidFill>
-                  <a:srgbClr val="5B6770"/>
+                  <a:srgbClr val="D8F0F2"/>
                 </a:solidFill>
               </a:rPr>
               <a:t>15</a:t>
@@ -5276,133 +5633,34 @@
       </p:sp>
       <p:sp>
         <p:nvSpPr>
-          <p:cNvPr id="6" name="TextBox 5"/>
-          <p:cNvSpPr txBox="1"/>
-          <p:nvPr/>
-        </p:nvSpPr>
-        <p:spPr>
-          <a:xfrm>
-            <a:off x="640080" y="548640"/>
-            <a:ext cx="10911535" cy="731520"/>
-          </a:xfrm>
-          <a:prstGeom prst="rect">
-            <a:avLst/>
-          </a:prstGeom>
-          <a:noFill/>
-        </p:spPr>
-        <p:txBody>
-          <a:bodyPr wrap="square" lIns="45720" rIns="45720" anchor="ctr">
-            <a:spAutoFit/>
-          </a:bodyPr>
-          <a:lstStyle/>
-          <a:p>
-            <a:r>
-              <a:rPr sz="3000" b="1">
-                <a:solidFill>
-                  <a:srgbClr val="006D77"/>
-                </a:solidFill>
-              </a:rPr>
-              <a:t>Madde · varlık yönetimi</a:t>
-            </a:r>
-          </a:p>
-        </p:txBody>
-      </p:sp>
-      <p:sp>
-        <p:nvSpPr>
-          <p:cNvPr id="7" name="TextBox 6"/>
-          <p:cNvSpPr txBox="1"/>
-          <p:nvPr/>
-        </p:nvSpPr>
-        <p:spPr>
-          <a:xfrm>
-            <a:off x="640080" y="1325880"/>
-            <a:ext cx="10911535" cy="1219200"/>
-          </a:xfrm>
-          <a:prstGeom prst="rect">
-            <a:avLst/>
-          </a:prstGeom>
-          <a:noFill/>
-        </p:spPr>
-        <p:txBody>
-          <a:bodyPr wrap="square" lIns="45720" rIns="45720">
-            <a:spAutoFit/>
-          </a:bodyPr>
-          <a:lstStyle/>
-          <a:p>
-            <a:pPr>
-              <a:spcAft>
-                <a:spcPts val="300"/>
-              </a:spcAft>
-            </a:pPr>
-            <a:r>
-              <a:rPr sz="2000" b="1">
-                <a:solidFill>
-                  <a:srgbClr val="006D77"/>
-                </a:solidFill>
-              </a:rPr>
-              <a:t>• </a:t>
-            </a:r>
-            <a:r>
-              <a:rPr sz="2000" b="0">
-                <a:solidFill>
-                  <a:srgbClr val="1F2D3A"/>
-                </a:solidFill>
-              </a:rPr>
-              <a:t>Varlık listesi + C/I/I+.</a:t>
-            </a:r>
-          </a:p>
-          <a:p>
-            <a:pPr>
-              <a:spcAft>
-                <a:spcPts val="300"/>
-              </a:spcAft>
-            </a:pPr>
-            <a:r>
-              <a:rPr sz="2000" b="1">
-                <a:solidFill>
-                  <a:srgbClr val="006D77"/>
-                </a:solidFill>
-              </a:rPr>
-              <a:t>• </a:t>
-            </a:r>
-            <a:r>
-              <a:rPr sz="2000" b="0">
-                <a:solidFill>
-                  <a:srgbClr val="1F2D3A"/>
-                </a:solidFill>
-              </a:rPr>
-              <a:t>Yaşam döngüsü.</a:t>
-            </a:r>
-          </a:p>
-          <a:p>
-            <a:pPr>
-              <a:spcAft>
-                <a:spcPts val="300"/>
-              </a:spcAft>
-            </a:pPr>
-            <a:r>
-              <a:rPr sz="2000" b="1">
-                <a:solidFill>
-                  <a:srgbClr val="006D77"/>
-                </a:solidFill>
-              </a:rPr>
-              <a:t>• </a:t>
-            </a:r>
-            <a:r>
-              <a:rPr sz="2000" b="1">
-                <a:solidFill>
-                  <a:srgbClr val="1F2D3A"/>
-                </a:solidFill>
-              </a:rPr>
-              <a:t>Kanıt:</a:t>
-            </a:r>
-            <a:r>
-              <a:rPr sz="2000" b="0">
-                <a:solidFill>
-                  <a:srgbClr val="1F2D3A"/>
-                </a:solidFill>
-              </a:rPr>
-              <a:t> S5.</a:t>
+          <p:cNvPr id="5" name="TextBox 4"/>
+          <p:cNvSpPr txBox="1"/>
+          <p:nvPr/>
+        </p:nvSpPr>
+        <p:spPr>
+          <a:xfrm>
+            <a:off x="640080" y="2743200"/>
+            <a:ext cx="10911535" cy="1280160"/>
+          </a:xfrm>
+          <a:prstGeom prst="rect">
+            <a:avLst/>
+          </a:prstGeom>
+          <a:noFill/>
+        </p:spPr>
+        <p:txBody>
+          <a:bodyPr wrap="square" lIns="45720" rIns="45720">
+            <a:spAutoFit/>
+          </a:bodyPr>
+          <a:lstStyle/>
+          <a:p>
+            <a:pPr algn="l"/>
+            <a:r>
+              <a:rPr sz="4000" b="1">
+                <a:solidFill>
+                  <a:srgbClr val="FFFFFF"/>
+                </a:solidFill>
+              </a:rPr>
+              <a:t>Ek · Rubrik madde madde</a:t>
             </a:r>
           </a:p>
         </p:txBody>
@@ -5577,7 +5835,7 @@
                   <a:srgbClr val="006D77"/>
                 </a:solidFill>
               </a:rPr>
-              <a:t>Madde · temel korumalar</a:t>
+              <a:t>Rubrik neyi ölçer?</a:t>
             </a:r>
           </a:p>
         </p:txBody>
@@ -5591,7 +5849,57 @@
         <p:spPr>
           <a:xfrm>
             <a:off x="640080" y="1325880"/>
-            <a:ext cx="10911535" cy="843280"/>
+            <a:ext cx="10911535" cy="439928"/>
+          </a:xfrm>
+          <a:prstGeom prst="rect">
+            <a:avLst/>
+          </a:prstGeom>
+          <a:noFill/>
+        </p:spPr>
+        <p:txBody>
+          <a:bodyPr wrap="square" lIns="45720" rIns="45720">
+            <a:spAutoFit/>
+          </a:bodyPr>
+          <a:lstStyle/>
+          <a:p>
+            <a:pPr algn="l"/>
+            <a:r>
+              <a:rPr sz="2000" b="0">
+                <a:solidFill>
+                  <a:srgbClr val="1F2D3A"/>
+                </a:solidFill>
+              </a:rPr>
+              <a:t>Vize gösterimi projenizin </a:t>
+            </a:r>
+            <a:r>
+              <a:rPr sz="2000" b="1">
+                <a:solidFill>
+                  <a:srgbClr val="1F2D3A"/>
+                </a:solidFill>
+              </a:rPr>
+              <a:t>ilk yarısını</a:t>
+            </a:r>
+            <a:r>
+              <a:rPr sz="2000" b="0">
+                <a:solidFill>
+                  <a:srgbClr val="1F2D3A"/>
+                </a:solidFill>
+              </a:rPr>
+              <a:t> ölçer:</a:t>
+            </a:r>
+          </a:p>
+        </p:txBody>
+      </p:sp>
+      <p:sp>
+        <p:nvSpPr>
+          <p:cNvPr id="8" name="TextBox 7"/>
+          <p:cNvSpPr txBox="1"/>
+          <p:nvPr/>
+        </p:nvSpPr>
+        <p:spPr>
+          <a:xfrm>
+            <a:off x="640080" y="1875536"/>
+            <a:ext cx="10911535" cy="1595120"/>
           </a:xfrm>
           <a:prstGeom prst="rect">
             <a:avLst/>
@@ -5623,7 +5931,7 @@
                   <a:srgbClr val="1F2D3A"/>
                 </a:solidFill>
               </a:rPr>
-              <a:t>Kripto (S8, kısmi), güvenli kod (S9, kısmi).</a:t>
+              <a:t>ürün, mimari, tehdit modeli</a:t>
             </a:r>
           </a:p>
           <a:p>
@@ -5641,12 +5949,50 @@
               <a:t>• </a:t>
             </a:r>
             <a:r>
+              <a:rPr sz="2000" b="0">
+                <a:solidFill>
+                  <a:srgbClr val="1F2D3A"/>
+                </a:solidFill>
+              </a:rPr>
+              <a:t>varlık yönetimi</a:t>
+            </a:r>
+          </a:p>
+          <a:p>
+            <a:pPr>
+              <a:spcAft>
+                <a:spcPts val="300"/>
+              </a:spcAft>
+            </a:pPr>
+            <a:r>
               <a:rPr sz="2000" b="1">
                 <a:solidFill>
+                  <a:srgbClr val="006D77"/>
+                </a:solidFill>
+              </a:rPr>
+              <a:t>• </a:t>
+            </a:r>
+            <a:r>
+              <a:rPr sz="2000" b="0">
+                <a:solidFill>
                   <a:srgbClr val="1F2D3A"/>
                 </a:solidFill>
               </a:rPr>
-              <a:t>Kanıt:</a:t>
+              <a:t>temel korumalar</a:t>
+            </a:r>
+          </a:p>
+          <a:p>
+            <a:pPr>
+              <a:spcAft>
+                <a:spcPts val="300"/>
+              </a:spcAft>
+            </a:pPr>
+            <a:r>
+              <a:rPr sz="2000" b="1">
+                <a:solidFill>
+                  <a:srgbClr val="006D77"/>
+                </a:solidFill>
+              </a:rPr>
+              <a:t>• </a:t>
             </a:r>
             <a:r>
               <a:rPr sz="2000" b="0">
@@ -5654,7 +6000,7 @@
                   <a:srgbClr val="1F2D3A"/>
                 </a:solidFill>
               </a:rPr>
-              <a:t> kod + test.</a:t>
+              <a:t>belge ve sunum</a:t>
             </a:r>
           </a:p>
         </p:txBody>
@@ -5829,7 +6175,7 @@
                   <a:srgbClr val="006D77"/>
                 </a:solidFill>
               </a:rPr>
-              <a:t>Madde · belge ve sunum</a:t>
+              <a:t>Madde · ürün ve mimari</a:t>
             </a:r>
           </a:p>
         </p:txBody>
@@ -5875,7 +6221,7 @@
                   <a:srgbClr val="1F2D3A"/>
                 </a:solidFill>
               </a:rPr>
-              <a:t>Tutarlılık, sürüm kimliği.</a:t>
+              <a:t>Ne yapıyor, hangi bileşenler?</a:t>
             </a:r>
           </a:p>
           <a:p>
@@ -5898,7 +6244,7 @@
                   <a:srgbClr val="1F2D3A"/>
                 </a:solidFill>
               </a:rPr>
-              <a:t>Anlaşılır anlatım.</a:t>
+              <a:t>Tek şema + en kritik üç varlık.</a:t>
             </a:r>
           </a:p>
           <a:p>
@@ -5929,7 +6275,7 @@
                   <a:srgbClr val="1F2D3A"/>
                 </a:solidFill>
               </a:rPr>
-              <a:t> kılavuzun tamamı.</a:t>
+              <a:t> S2–S4 belgesi.</a:t>
             </a:r>
           </a:p>
         </p:txBody>
@@ -5945,14 +6291,6 @@
 <file path=ppt/slides/slide18.xml><?xml version="1.0" encoding="utf-8"?>
 <p:sld xmlns:a="http://schemas.openxmlformats.org/drawingml/2006/main" xmlns:p="http://schemas.openxmlformats.org/presentationml/2006/main" xmlns:r="http://schemas.openxmlformats.org/officeDocument/2006/relationships">
   <p:cSld>
-    <p:bg>
-      <p:bgPr>
-        <a:solidFill>
-          <a:srgbClr val="006D77"/>
-        </a:solidFill>
-        <a:effectLst/>
-      </p:bgPr>
-    </p:bg>
     <p:spTree>
       <p:nvGrpSpPr>
         <p:cNvPr id="1" name=""/>
@@ -5960,9 +6298,33 @@
         <p:nvPr/>
       </p:nvGrpSpPr>
       <p:grpSpPr/>
-      <p:sp>
-        <p:nvSpPr>
-          <p:cNvPr id="2" name="TextBox 1"/>
+      <p:pic>
+        <p:nvPicPr>
+          <p:cNvPr id="2" name="Picture 1" descr="rteu_logo_kucuk.jpg"/>
+          <p:cNvPicPr>
+            <a:picLocks noChangeAspect="1"/>
+          </p:cNvPicPr>
+          <p:nvPr/>
+        </p:nvPicPr>
+        <p:blipFill>
+          <a:blip r:embed="rId2"/>
+          <a:stretch>
+            <a:fillRect/>
+          </a:stretch>
+        </p:blipFill>
+        <p:spPr>
+          <a:xfrm>
+            <a:off x="640080" y="164592"/>
+            <a:ext cx="242773" cy="329184"/>
+          </a:xfrm>
+          <a:prstGeom prst="rect">
+            <a:avLst/>
+          </a:prstGeom>
+        </p:spPr>
+      </p:pic>
+      <p:sp>
+        <p:nvSpPr>
+          <p:cNvPr id="3" name="TextBox 2"/>
           <p:cNvSpPr txBox="1"/>
           <p:nvPr/>
         </p:nvSpPr>
@@ -5985,7 +6347,7 @@
             <a:r>
               <a:rPr sz="1100" b="0">
                 <a:solidFill>
-                  <a:srgbClr val="D8F0F2"/>
+                  <a:srgbClr val="5B6770"/>
                 </a:solidFill>
               </a:rPr>
               <a:t>CEN429 Güvenli Programlama · Hafta 7</a:t>
@@ -5995,7 +6357,7 @@
       </p:sp>
       <p:sp>
         <p:nvSpPr>
-          <p:cNvPr id="3" name="TextBox 2"/>
+          <p:cNvPr id="4" name="TextBox 3"/>
           <p:cNvSpPr txBox="1"/>
           <p:nvPr/>
         </p:nvSpPr>
@@ -6018,7 +6380,7 @@
             <a:r>
               <a:rPr sz="1000" b="0">
                 <a:solidFill>
-                  <a:srgbClr val="D8F0F2"/>
+                  <a:srgbClr val="5B6770"/>
                 </a:solidFill>
               </a:rPr>
               <a:t>RTEÜ Bilgisayar Mühendisliği · 2026-2027 Güz</a:t>
@@ -6028,7 +6390,7 @@
       </p:sp>
       <p:sp>
         <p:nvSpPr>
-          <p:cNvPr id="4" name="TextBox 3"/>
+          <p:cNvPr id="5" name="TextBox 4"/>
           <p:cNvSpPr txBox="1"/>
           <p:nvPr/>
         </p:nvSpPr>
@@ -6052,7 +6414,7 @@
             <a:r>
               <a:rPr sz="1000" b="0">
                 <a:solidFill>
-                  <a:srgbClr val="D8F0F2"/>
+                  <a:srgbClr val="5B6770"/>
                 </a:solidFill>
               </a:rPr>
               <a:t>18</a:t>
@@ -6062,34 +6424,133 @@
       </p:sp>
       <p:sp>
         <p:nvSpPr>
-          <p:cNvPr id="5" name="TextBox 4"/>
-          <p:cNvSpPr txBox="1"/>
-          <p:nvPr/>
-        </p:nvSpPr>
-        <p:spPr>
-          <a:xfrm>
-            <a:off x="640080" y="2743200"/>
-            <a:ext cx="10911535" cy="1280160"/>
-          </a:xfrm>
-          <a:prstGeom prst="rect">
-            <a:avLst/>
-          </a:prstGeom>
-          <a:noFill/>
-        </p:spPr>
-        <p:txBody>
-          <a:bodyPr wrap="square" lIns="45720" rIns="45720">
-            <a:spAutoFit/>
-          </a:bodyPr>
-          <a:lstStyle/>
-          <a:p>
-            <a:pPr algn="l"/>
-            <a:r>
-              <a:rPr sz="4000" b="1">
-                <a:solidFill>
-                  <a:srgbClr val="FFFFFF"/>
-                </a:solidFill>
-              </a:rPr>
-              <a:t>Ek · Gösterim akışı</a:t>
+          <p:cNvPr id="6" name="TextBox 5"/>
+          <p:cNvSpPr txBox="1"/>
+          <p:nvPr/>
+        </p:nvSpPr>
+        <p:spPr>
+          <a:xfrm>
+            <a:off x="640080" y="548640"/>
+            <a:ext cx="10911535" cy="731520"/>
+          </a:xfrm>
+          <a:prstGeom prst="rect">
+            <a:avLst/>
+          </a:prstGeom>
+          <a:noFill/>
+        </p:spPr>
+        <p:txBody>
+          <a:bodyPr wrap="square" lIns="45720" rIns="45720" anchor="ctr">
+            <a:spAutoFit/>
+          </a:bodyPr>
+          <a:lstStyle/>
+          <a:p>
+            <a:r>
+              <a:rPr sz="3000" b="1">
+                <a:solidFill>
+                  <a:srgbClr val="006D77"/>
+                </a:solidFill>
+              </a:rPr>
+              <a:t>Madde · tehdit modeli</a:t>
+            </a:r>
+          </a:p>
+        </p:txBody>
+      </p:sp>
+      <p:sp>
+        <p:nvSpPr>
+          <p:cNvPr id="7" name="TextBox 6"/>
+          <p:cNvSpPr txBox="1"/>
+          <p:nvPr/>
+        </p:nvSpPr>
+        <p:spPr>
+          <a:xfrm>
+            <a:off x="640080" y="1325880"/>
+            <a:ext cx="10911535" cy="1219200"/>
+          </a:xfrm>
+          <a:prstGeom prst="rect">
+            <a:avLst/>
+          </a:prstGeom>
+          <a:noFill/>
+        </p:spPr>
+        <p:txBody>
+          <a:bodyPr wrap="square" lIns="45720" rIns="45720">
+            <a:spAutoFit/>
+          </a:bodyPr>
+          <a:lstStyle/>
+          <a:p>
+            <a:pPr>
+              <a:spcAft>
+                <a:spcPts val="300"/>
+              </a:spcAft>
+            </a:pPr>
+            <a:r>
+              <a:rPr sz="2000" b="1">
+                <a:solidFill>
+                  <a:srgbClr val="006D77"/>
+                </a:solidFill>
+              </a:rPr>
+              <a:t>• </a:t>
+            </a:r>
+            <a:r>
+              <a:rPr sz="2000" b="0">
+                <a:solidFill>
+                  <a:srgbClr val="1F2D3A"/>
+                </a:solidFill>
+              </a:rPr>
+              <a:t>STRIDE / saldırı ağacı.</a:t>
+            </a:r>
+          </a:p>
+          <a:p>
+            <a:pPr>
+              <a:spcAft>
+                <a:spcPts val="300"/>
+              </a:spcAft>
+            </a:pPr>
+            <a:r>
+              <a:rPr sz="2000" b="1">
+                <a:solidFill>
+                  <a:srgbClr val="006D77"/>
+                </a:solidFill>
+              </a:rPr>
+              <a:t>• </a:t>
+            </a:r>
+            <a:r>
+              <a:rPr sz="2000" b="0">
+                <a:solidFill>
+                  <a:srgbClr val="1F2D3A"/>
+                </a:solidFill>
+              </a:rPr>
+              <a:t>Her tehdide bir önlem.</a:t>
+            </a:r>
+          </a:p>
+          <a:p>
+            <a:pPr>
+              <a:spcAft>
+                <a:spcPts val="300"/>
+              </a:spcAft>
+            </a:pPr>
+            <a:r>
+              <a:rPr sz="2000" b="1">
+                <a:solidFill>
+                  <a:srgbClr val="006D77"/>
+                </a:solidFill>
+              </a:rPr>
+              <a:t>• </a:t>
+            </a:r>
+            <a:r>
+              <a:rPr sz="2000" b="1">
+                <a:solidFill>
+                  <a:srgbClr val="1F2D3A"/>
+                </a:solidFill>
+              </a:rPr>
+              <a:t>Kanıt:</a:t>
+            </a:r>
+            <a:r>
+              <a:rPr sz="2000" b="0">
+                <a:solidFill>
+                  <a:srgbClr val="1F2D3A"/>
+                </a:solidFill>
+              </a:rPr>
+              <a:t> S4 tehdit tablosu.</a:t>
             </a:r>
           </a:p>
         </p:txBody>
@@ -6264,7 +6725,7 @@
                   <a:srgbClr val="006D77"/>
                 </a:solidFill>
               </a:rPr>
-              <a:t>Akış · 1. özet</a:t>
+              <a:t>Madde · varlık yönetimi</a:t>
             </a:r>
           </a:p>
         </p:txBody>
@@ -6278,7 +6739,7 @@
         <p:spPr>
           <a:xfrm>
             <a:off x="640080" y="1325880"/>
-            <a:ext cx="10911535" cy="843280"/>
+            <a:ext cx="10911535" cy="1219200"/>
           </a:xfrm>
           <a:prstGeom prst="rect">
             <a:avLst/>
@@ -6310,7 +6771,7 @@
                   <a:srgbClr val="1F2D3A"/>
                 </a:solidFill>
               </a:rPr>
-              <a:t>Ürün, mimari, en kritik üç varlık.</a:t>
+              <a:t>Varlık listesi + C/I/I+.</a:t>
             </a:r>
           </a:p>
           <a:p>
@@ -6333,7 +6794,38 @@
                   <a:srgbClr val="1F2D3A"/>
                 </a:solidFill>
               </a:rPr>
-              <a:t>Tek şema, iki dakika.</a:t>
+              <a:t>Yaşam döngüsü.</a:t>
+            </a:r>
+          </a:p>
+          <a:p>
+            <a:pPr>
+              <a:spcAft>
+                <a:spcPts val="300"/>
+              </a:spcAft>
+            </a:pPr>
+            <a:r>
+              <a:rPr sz="2000" b="1">
+                <a:solidFill>
+                  <a:srgbClr val="006D77"/>
+                </a:solidFill>
+              </a:rPr>
+              <a:t>• </a:t>
+            </a:r>
+            <a:r>
+              <a:rPr sz="2000" b="1">
+                <a:solidFill>
+                  <a:srgbClr val="1F2D3A"/>
+                </a:solidFill>
+              </a:rPr>
+              <a:t>Kanıt:</a:t>
+            </a:r>
+            <a:r>
+              <a:rPr sz="2000" b="0">
+                <a:solidFill>
+                  <a:srgbClr val="1F2D3A"/>
+                </a:solidFill>
+              </a:rPr>
+              <a:t> S5.</a:t>
             </a:r>
           </a:p>
         </p:txBody>
@@ -6863,7 +7355,7 @@
                   <a:srgbClr val="006D77"/>
                 </a:solidFill>
               </a:rPr>
-              <a:t>Akış · 2. tehdit modeli</a:t>
+              <a:t>Madde · temel korumalar</a:t>
             </a:r>
           </a:p>
         </p:txBody>
@@ -6909,7 +7401,7 @@
                   <a:srgbClr val="1F2D3A"/>
                 </a:solidFill>
               </a:rPr>
-              <a:t>STRIDE ve saldırı ağacından bir örnek.</a:t>
+              <a:t>Kripto (S8, kısmi), güvenli kod (S9, kısmi).</a:t>
             </a:r>
           </a:p>
           <a:p>
@@ -6927,12 +7419,20 @@
               <a:t>• </a:t>
             </a:r>
             <a:r>
+              <a:rPr sz="2000" b="1">
+                <a:solidFill>
+                  <a:srgbClr val="1F2D3A"/>
+                </a:solidFill>
+              </a:rPr>
+              <a:t>Kanıt:</a:t>
+            </a:r>
+            <a:r>
               <a:rPr sz="2000" b="0">
                 <a:solidFill>
                   <a:srgbClr val="1F2D3A"/>
                 </a:solidFill>
               </a:rPr>
-              <a:t>"Bu tehdide şu önlem."</a:t>
+              <a:t> kod + test.</a:t>
             </a:r>
           </a:p>
         </p:txBody>
@@ -7107,7 +7607,7 @@
                   <a:srgbClr val="006D77"/>
                 </a:solidFill>
               </a:rPr>
-              <a:t>Akış · 3. canlı gösterim</a:t>
+              <a:t>Madde · belge ve sunum</a:t>
             </a:r>
           </a:p>
         </p:txBody>
@@ -7121,7 +7621,7 @@
         <p:spPr>
           <a:xfrm>
             <a:off x="640080" y="1325880"/>
-            <a:ext cx="10911535" cy="843280"/>
+            <a:ext cx="10911535" cy="1219200"/>
           </a:xfrm>
           <a:prstGeom prst="rect">
             <a:avLst/>
@@ -7153,23 +7653,7 @@
                   <a:srgbClr val="1F2D3A"/>
                 </a:solidFill>
               </a:rPr>
-              <a:t>Bir korumayı </a:t>
-            </a:r>
-            <a:r>
-              <a:rPr sz="2000" b="1">
-                <a:solidFill>
-                  <a:srgbClr val="1F2D3A"/>
-                </a:solidFill>
-              </a:rPr>
-              <a:t>çalışırken</a:t>
-            </a:r>
-            <a:r>
-              <a:rPr sz="2000" b="0">
-                <a:solidFill>
-                  <a:srgbClr val="1F2D3A"/>
-                </a:solidFill>
-              </a:rPr>
-              <a:t> göster.</a:t>
+              <a:t>Tutarlılık, sürüm kimliği.</a:t>
             </a:r>
           </a:p>
           <a:p>
@@ -7192,7 +7676,38 @@
                   <a:srgbClr val="1F2D3A"/>
                 </a:solidFill>
               </a:rPr>
-              <a:t>Ör. şifreli veri, doğrulanan imza.</a:t>
+              <a:t>Anlaşılır anlatım.</a:t>
+            </a:r>
+          </a:p>
+          <a:p>
+            <a:pPr>
+              <a:spcAft>
+                <a:spcPts val="300"/>
+              </a:spcAft>
+            </a:pPr>
+            <a:r>
+              <a:rPr sz="2000" b="1">
+                <a:solidFill>
+                  <a:srgbClr val="006D77"/>
+                </a:solidFill>
+              </a:rPr>
+              <a:t>• </a:t>
+            </a:r>
+            <a:r>
+              <a:rPr sz="2000" b="1">
+                <a:solidFill>
+                  <a:srgbClr val="1F2D3A"/>
+                </a:solidFill>
+              </a:rPr>
+              <a:t>Kanıt:</a:t>
+            </a:r>
+            <a:r>
+              <a:rPr sz="2000" b="0">
+                <a:solidFill>
+                  <a:srgbClr val="1F2D3A"/>
+                </a:solidFill>
+              </a:rPr>
+              <a:t> kılavuzun tamamı.</a:t>
             </a:r>
           </a:p>
         </p:txBody>
@@ -7208,6 +7723,14 @@
 <file path=ppt/slides/slide22.xml><?xml version="1.0" encoding="utf-8"?>
 <p:sld xmlns:a="http://schemas.openxmlformats.org/drawingml/2006/main" xmlns:p="http://schemas.openxmlformats.org/presentationml/2006/main" xmlns:r="http://schemas.openxmlformats.org/officeDocument/2006/relationships">
   <p:cSld>
+    <p:bg>
+      <p:bgPr>
+        <a:solidFill>
+          <a:srgbClr val="006D77"/>
+        </a:solidFill>
+        <a:effectLst/>
+      </p:bgPr>
+    </p:bg>
     <p:spTree>
       <p:nvGrpSpPr>
         <p:cNvPr id="1" name=""/>
@@ -7215,33 +7738,9 @@
         <p:nvPr/>
       </p:nvGrpSpPr>
       <p:grpSpPr/>
-      <p:pic>
-        <p:nvPicPr>
-          <p:cNvPr id="2" name="Picture 1" descr="rteu_logo_kucuk.jpg"/>
-          <p:cNvPicPr>
-            <a:picLocks noChangeAspect="1"/>
-          </p:cNvPicPr>
-          <p:nvPr/>
-        </p:nvPicPr>
-        <p:blipFill>
-          <a:blip r:embed="rId2"/>
-          <a:stretch>
-            <a:fillRect/>
-          </a:stretch>
-        </p:blipFill>
-        <p:spPr>
-          <a:xfrm>
-            <a:off x="640080" y="164592"/>
-            <a:ext cx="242773" cy="329184"/>
-          </a:xfrm>
-          <a:prstGeom prst="rect">
-            <a:avLst/>
-          </a:prstGeom>
-        </p:spPr>
-      </p:pic>
-      <p:sp>
-        <p:nvSpPr>
-          <p:cNvPr id="3" name="TextBox 2"/>
+      <p:sp>
+        <p:nvSpPr>
+          <p:cNvPr id="2" name="TextBox 1"/>
           <p:cNvSpPr txBox="1"/>
           <p:nvPr/>
         </p:nvSpPr>
@@ -7264,7 +7763,7 @@
             <a:r>
               <a:rPr sz="1100" b="0">
                 <a:solidFill>
-                  <a:srgbClr val="5B6770"/>
+                  <a:srgbClr val="D8F0F2"/>
                 </a:solidFill>
               </a:rPr>
               <a:t>CEN429 Güvenli Programlama · Hafta 7</a:t>
@@ -7274,7 +7773,7 @@
       </p:sp>
       <p:sp>
         <p:nvSpPr>
-          <p:cNvPr id="4" name="TextBox 3"/>
+          <p:cNvPr id="3" name="TextBox 2"/>
           <p:cNvSpPr txBox="1"/>
           <p:nvPr/>
         </p:nvSpPr>
@@ -7297,7 +7796,7 @@
             <a:r>
               <a:rPr sz="1000" b="0">
                 <a:solidFill>
-                  <a:srgbClr val="5B6770"/>
+                  <a:srgbClr val="D8F0F2"/>
                 </a:solidFill>
               </a:rPr>
               <a:t>RTEÜ Bilgisayar Mühendisliği · 2026-2027 Güz</a:t>
@@ -7307,7 +7806,7 @@
       </p:sp>
       <p:sp>
         <p:nvSpPr>
-          <p:cNvPr id="5" name="TextBox 4"/>
+          <p:cNvPr id="4" name="TextBox 3"/>
           <p:cNvSpPr txBox="1"/>
           <p:nvPr/>
         </p:nvSpPr>
@@ -7331,7 +7830,7 @@
             <a:r>
               <a:rPr sz="1000" b="0">
                 <a:solidFill>
-                  <a:srgbClr val="5B6770"/>
+                  <a:srgbClr val="D8F0F2"/>
                 </a:solidFill>
               </a:rPr>
               <a:t>22</a:t>
@@ -7341,102 +7840,34 @@
       </p:sp>
       <p:sp>
         <p:nvSpPr>
-          <p:cNvPr id="6" name="TextBox 5"/>
-          <p:cNvSpPr txBox="1"/>
-          <p:nvPr/>
-        </p:nvSpPr>
-        <p:spPr>
-          <a:xfrm>
-            <a:off x="640080" y="548640"/>
-            <a:ext cx="10911535" cy="731520"/>
-          </a:xfrm>
-          <a:prstGeom prst="rect">
-            <a:avLst/>
-          </a:prstGeom>
-          <a:noFill/>
-        </p:spPr>
-        <p:txBody>
-          <a:bodyPr wrap="square" lIns="45720" rIns="45720" anchor="ctr">
-            <a:spAutoFit/>
-          </a:bodyPr>
-          <a:lstStyle/>
-          <a:p>
-            <a:r>
-              <a:rPr sz="3000" b="1">
-                <a:solidFill>
-                  <a:srgbClr val="006D77"/>
-                </a:solidFill>
-              </a:rPr>
-              <a:t>Akış · 4. kanıt</a:t>
-            </a:r>
-          </a:p>
-        </p:txBody>
-      </p:sp>
-      <p:sp>
-        <p:nvSpPr>
-          <p:cNvPr id="7" name="TextBox 6"/>
-          <p:cNvSpPr txBox="1"/>
-          <p:nvPr/>
-        </p:nvSpPr>
-        <p:spPr>
-          <a:xfrm>
-            <a:off x="640080" y="1325880"/>
-            <a:ext cx="10911535" cy="843280"/>
-          </a:xfrm>
-          <a:prstGeom prst="rect">
-            <a:avLst/>
-          </a:prstGeom>
-          <a:noFill/>
-        </p:spPr>
-        <p:txBody>
-          <a:bodyPr wrap="square" lIns="45720" rIns="45720">
-            <a:spAutoFit/>
-          </a:bodyPr>
-          <a:lstStyle/>
-          <a:p>
-            <a:pPr>
-              <a:spcAft>
-                <a:spcPts val="300"/>
-              </a:spcAft>
-            </a:pPr>
-            <a:r>
-              <a:rPr sz="2000" b="1">
-                <a:solidFill>
-                  <a:srgbClr val="006D77"/>
-                </a:solidFill>
-              </a:rPr>
-              <a:t>• </a:t>
-            </a:r>
-            <a:r>
-              <a:rPr sz="2000" b="0">
-                <a:solidFill>
-                  <a:srgbClr val="1F2D3A"/>
-                </a:solidFill>
-              </a:rPr>
-              <a:t>Testler, koruma tablosu.</a:t>
-            </a:r>
-          </a:p>
-          <a:p>
-            <a:pPr>
-              <a:spcAft>
-                <a:spcPts val="300"/>
-              </a:spcAft>
-            </a:pPr>
-            <a:r>
-              <a:rPr sz="2000" b="1">
-                <a:solidFill>
-                  <a:srgbClr val="006D77"/>
-                </a:solidFill>
-              </a:rPr>
-              <a:t>• </a:t>
-            </a:r>
-            <a:r>
-              <a:rPr sz="2000" b="0">
-                <a:solidFill>
-                  <a:srgbClr val="1F2D3A"/>
-                </a:solidFill>
-              </a:rPr>
-              <a:t>"Şu komutla şu çıktı."</a:t>
+          <p:cNvPr id="5" name="TextBox 4"/>
+          <p:cNvSpPr txBox="1"/>
+          <p:nvPr/>
+        </p:nvSpPr>
+        <p:spPr>
+          <a:xfrm>
+            <a:off x="640080" y="2743200"/>
+            <a:ext cx="10911535" cy="1280160"/>
+          </a:xfrm>
+          <a:prstGeom prst="rect">
+            <a:avLst/>
+          </a:prstGeom>
+          <a:noFill/>
+        </p:spPr>
+        <p:txBody>
+          <a:bodyPr wrap="square" lIns="45720" rIns="45720">
+            <a:spAutoFit/>
+          </a:bodyPr>
+          <a:lstStyle/>
+          <a:p>
+            <a:pPr algn="l"/>
+            <a:r>
+              <a:rPr sz="4000" b="1">
+                <a:solidFill>
+                  <a:srgbClr val="FFFFFF"/>
+                </a:solidFill>
+              </a:rPr>
+              <a:t>Ek · Gösterim akışı</a:t>
             </a:r>
           </a:p>
         </p:txBody>
@@ -7611,7 +8042,7 @@
                   <a:srgbClr val="006D77"/>
                 </a:solidFill>
               </a:rPr>
-              <a:t>Akış · 5. kalan risk</a:t>
+              <a:t>Akış · 1. özet</a:t>
             </a:r>
           </a:p>
         </p:txBody>
@@ -7657,7 +8088,7 @@
                   <a:srgbClr val="1F2D3A"/>
                 </a:solidFill>
               </a:rPr>
-              <a:t>Neyi bilerek kapsam dışı bıraktınız?</a:t>
+              <a:t>Ürün, mimari, en kritik üç varlık.</a:t>
             </a:r>
           </a:p>
           <a:p>
@@ -7680,7 +8111,7 @@
                   <a:srgbClr val="1F2D3A"/>
                 </a:solidFill>
               </a:rPr>
-              <a:t>Dürüst analiz puan getirir.</a:t>
+              <a:t>Tek şema, iki dakika.</a:t>
             </a:r>
           </a:p>
         </p:txBody>
@@ -7696,14 +8127,6 @@
 <file path=ppt/slides/slide24.xml><?xml version="1.0" encoding="utf-8"?>
 <p:sld xmlns:a="http://schemas.openxmlformats.org/drawingml/2006/main" xmlns:p="http://schemas.openxmlformats.org/presentationml/2006/main" xmlns:r="http://schemas.openxmlformats.org/officeDocument/2006/relationships">
   <p:cSld>
-    <p:bg>
-      <p:bgPr>
-        <a:solidFill>
-          <a:srgbClr val="006D77"/>
-        </a:solidFill>
-        <a:effectLst/>
-      </p:bgPr>
-    </p:bg>
     <p:spTree>
       <p:nvGrpSpPr>
         <p:cNvPr id="1" name=""/>
@@ -7711,9 +8134,33 @@
         <p:nvPr/>
       </p:nvGrpSpPr>
       <p:grpSpPr/>
-      <p:sp>
-        <p:nvSpPr>
-          <p:cNvPr id="2" name="TextBox 1"/>
+      <p:pic>
+        <p:nvPicPr>
+          <p:cNvPr id="2" name="Picture 1" descr="rteu_logo_kucuk.jpg"/>
+          <p:cNvPicPr>
+            <a:picLocks noChangeAspect="1"/>
+          </p:cNvPicPr>
+          <p:nvPr/>
+        </p:nvPicPr>
+        <p:blipFill>
+          <a:blip r:embed="rId2"/>
+          <a:stretch>
+            <a:fillRect/>
+          </a:stretch>
+        </p:blipFill>
+        <p:spPr>
+          <a:xfrm>
+            <a:off x="640080" y="164592"/>
+            <a:ext cx="242773" cy="329184"/>
+          </a:xfrm>
+          <a:prstGeom prst="rect">
+            <a:avLst/>
+          </a:prstGeom>
+        </p:spPr>
+      </p:pic>
+      <p:sp>
+        <p:nvSpPr>
+          <p:cNvPr id="3" name="TextBox 2"/>
           <p:cNvSpPr txBox="1"/>
           <p:nvPr/>
         </p:nvSpPr>
@@ -7736,7 +8183,7 @@
             <a:r>
               <a:rPr sz="1100" b="0">
                 <a:solidFill>
-                  <a:srgbClr val="D8F0F2"/>
+                  <a:srgbClr val="5B6770"/>
                 </a:solidFill>
               </a:rPr>
               <a:t>CEN429 Güvenli Programlama · Hafta 7</a:t>
@@ -7746,7 +8193,7 @@
       </p:sp>
       <p:sp>
         <p:nvSpPr>
-          <p:cNvPr id="3" name="TextBox 2"/>
+          <p:cNvPr id="4" name="TextBox 3"/>
           <p:cNvSpPr txBox="1"/>
           <p:nvPr/>
         </p:nvSpPr>
@@ -7769,7 +8216,7 @@
             <a:r>
               <a:rPr sz="1000" b="0">
                 <a:solidFill>
-                  <a:srgbClr val="D8F0F2"/>
+                  <a:srgbClr val="5B6770"/>
                 </a:solidFill>
               </a:rPr>
               <a:t>RTEÜ Bilgisayar Mühendisliği · 2026-2027 Güz</a:t>
@@ -7779,7 +8226,7 @@
       </p:sp>
       <p:sp>
         <p:nvSpPr>
-          <p:cNvPr id="4" name="TextBox 3"/>
+          <p:cNvPr id="5" name="TextBox 4"/>
           <p:cNvSpPr txBox="1"/>
           <p:nvPr/>
         </p:nvSpPr>
@@ -7803,7 +8250,7 @@
             <a:r>
               <a:rPr sz="1000" b="0">
                 <a:solidFill>
-                  <a:srgbClr val="D8F0F2"/>
+                  <a:srgbClr val="5B6770"/>
                 </a:solidFill>
               </a:rPr>
               <a:t>24</a:t>
@@ -7813,34 +8260,102 @@
       </p:sp>
       <p:sp>
         <p:nvSpPr>
-          <p:cNvPr id="5" name="TextBox 4"/>
-          <p:cNvSpPr txBox="1"/>
-          <p:nvPr/>
-        </p:nvSpPr>
-        <p:spPr>
-          <a:xfrm>
-            <a:off x="640080" y="2743200"/>
-            <a:ext cx="10911535" cy="1280160"/>
-          </a:xfrm>
-          <a:prstGeom prst="rect">
-            <a:avLst/>
-          </a:prstGeom>
-          <a:noFill/>
-        </p:spPr>
-        <p:txBody>
-          <a:bodyPr wrap="square" lIns="45720" rIns="45720">
-            <a:spAutoFit/>
-          </a:bodyPr>
-          <a:lstStyle/>
-          <a:p>
-            <a:pPr algn="l"/>
-            <a:r>
-              <a:rPr sz="4000" b="1">
-                <a:solidFill>
-                  <a:srgbClr val="FFFFFF"/>
-                </a:solidFill>
-              </a:rPr>
-              <a:t>Ek · Hazırlık kontrol listesi</a:t>
+          <p:cNvPr id="6" name="TextBox 5"/>
+          <p:cNvSpPr txBox="1"/>
+          <p:nvPr/>
+        </p:nvSpPr>
+        <p:spPr>
+          <a:xfrm>
+            <a:off x="640080" y="548640"/>
+            <a:ext cx="10911535" cy="731520"/>
+          </a:xfrm>
+          <a:prstGeom prst="rect">
+            <a:avLst/>
+          </a:prstGeom>
+          <a:noFill/>
+        </p:spPr>
+        <p:txBody>
+          <a:bodyPr wrap="square" lIns="45720" rIns="45720" anchor="ctr">
+            <a:spAutoFit/>
+          </a:bodyPr>
+          <a:lstStyle/>
+          <a:p>
+            <a:r>
+              <a:rPr sz="3000" b="1">
+                <a:solidFill>
+                  <a:srgbClr val="006D77"/>
+                </a:solidFill>
+              </a:rPr>
+              <a:t>Akış · 2. tehdit modeli</a:t>
+            </a:r>
+          </a:p>
+        </p:txBody>
+      </p:sp>
+      <p:sp>
+        <p:nvSpPr>
+          <p:cNvPr id="7" name="TextBox 6"/>
+          <p:cNvSpPr txBox="1"/>
+          <p:nvPr/>
+        </p:nvSpPr>
+        <p:spPr>
+          <a:xfrm>
+            <a:off x="640080" y="1325880"/>
+            <a:ext cx="10911535" cy="843280"/>
+          </a:xfrm>
+          <a:prstGeom prst="rect">
+            <a:avLst/>
+          </a:prstGeom>
+          <a:noFill/>
+        </p:spPr>
+        <p:txBody>
+          <a:bodyPr wrap="square" lIns="45720" rIns="45720">
+            <a:spAutoFit/>
+          </a:bodyPr>
+          <a:lstStyle/>
+          <a:p>
+            <a:pPr>
+              <a:spcAft>
+                <a:spcPts val="300"/>
+              </a:spcAft>
+            </a:pPr>
+            <a:r>
+              <a:rPr sz="2000" b="1">
+                <a:solidFill>
+                  <a:srgbClr val="006D77"/>
+                </a:solidFill>
+              </a:rPr>
+              <a:t>• </a:t>
+            </a:r>
+            <a:r>
+              <a:rPr sz="2000" b="0">
+                <a:solidFill>
+                  <a:srgbClr val="1F2D3A"/>
+                </a:solidFill>
+              </a:rPr>
+              <a:t>STRIDE ve saldırı ağacından bir örnek.</a:t>
+            </a:r>
+          </a:p>
+          <a:p>
+            <a:pPr>
+              <a:spcAft>
+                <a:spcPts val="300"/>
+              </a:spcAft>
+            </a:pPr>
+            <a:r>
+              <a:rPr sz="2000" b="1">
+                <a:solidFill>
+                  <a:srgbClr val="006D77"/>
+                </a:solidFill>
+              </a:rPr>
+              <a:t>• </a:t>
+            </a:r>
+            <a:r>
+              <a:rPr sz="2000" b="0">
+                <a:solidFill>
+                  <a:srgbClr val="1F2D3A"/>
+                </a:solidFill>
+              </a:rPr>
+              <a:t>"Bu tehdide şu önlem."</a:t>
             </a:r>
           </a:p>
         </p:txBody>
@@ -8015,7 +8530,7 @@
                   <a:srgbClr val="006D77"/>
                 </a:solidFill>
               </a:rPr>
-              <a:t>Kontrol · belge</a:t>
+              <a:t>Akış · 3. canlı gösterim</a:t>
             </a:r>
           </a:p>
         </p:txBody>
@@ -8029,7 +8544,7 @@
         <p:spPr>
           <a:xfrm>
             <a:off x="640080" y="1325880"/>
-            <a:ext cx="10911535" cy="1219200"/>
+            <a:ext cx="10911535" cy="843280"/>
           </a:xfrm>
           <a:prstGeom prst="rect">
             <a:avLst/>
@@ -8061,7 +8576,23 @@
                   <a:srgbClr val="1F2D3A"/>
                 </a:solidFill>
               </a:rPr>
-              <a:t> </a:t>
+              <a:t>Bir korumayı </a:t>
+            </a:r>
+            <a:r>
+              <a:rPr sz="2000" b="1">
+                <a:solidFill>
+                  <a:srgbClr val="1F2D3A"/>
+                </a:solidFill>
+              </a:rPr>
+              <a:t>çalışırken</a:t>
+            </a:r>
+            <a:r>
+              <a:rPr sz="2000" b="0">
+                <a:solidFill>
+                  <a:srgbClr val="1F2D3A"/>
+                </a:solidFill>
+              </a:rPr>
+              <a:t> göster.</a:t>
             </a:r>
           </a:p>
           <a:p>
@@ -8084,30 +8615,7 @@
                   <a:srgbClr val="1F2D3A"/>
                 </a:solidFill>
               </a:rPr>
-              <a:t> </a:t>
-            </a:r>
-          </a:p>
-          <a:p>
-            <a:pPr>
-              <a:spcAft>
-                <a:spcPts val="300"/>
-              </a:spcAft>
-            </a:pPr>
-            <a:r>
-              <a:rPr sz="2000" b="1">
-                <a:solidFill>
-                  <a:srgbClr val="006D77"/>
-                </a:solidFill>
-              </a:rPr>
-              <a:t>• </a:t>
-            </a:r>
-            <a:r>
-              <a:rPr sz="2000" b="0">
-                <a:solidFill>
-                  <a:srgbClr val="1F2D3A"/>
-                </a:solidFill>
-              </a:rPr>
-              <a:t> </a:t>
+              <a:t>Ör. şifreli veri, doğrulanan imza.</a:t>
             </a:r>
           </a:p>
         </p:txBody>
@@ -8282,7 +8790,7 @@
                   <a:srgbClr val="006D77"/>
                 </a:solidFill>
               </a:rPr>
-              <a:t>Kontrol · gösterim</a:t>
+              <a:t>Akış · 4. kanıt</a:t>
             </a:r>
           </a:p>
         </p:txBody>
@@ -8296,7 +8804,7 @@
         <p:spPr>
           <a:xfrm>
             <a:off x="640080" y="1325880"/>
-            <a:ext cx="10911535" cy="1219200"/>
+            <a:ext cx="10911535" cy="843280"/>
           </a:xfrm>
           <a:prstGeom prst="rect">
             <a:avLst/>
@@ -8328,7 +8836,7 @@
                   <a:srgbClr val="1F2D3A"/>
                 </a:solidFill>
               </a:rPr>
-              <a:t> </a:t>
+              <a:t>Testler, koruma tablosu.</a:t>
             </a:r>
           </a:p>
           <a:p>
@@ -8351,30 +8859,7 @@
                   <a:srgbClr val="1F2D3A"/>
                 </a:solidFill>
               </a:rPr>
-              <a:t> </a:t>
-            </a:r>
-          </a:p>
-          <a:p>
-            <a:pPr>
-              <a:spcAft>
-                <a:spcPts val="300"/>
-              </a:spcAft>
-            </a:pPr>
-            <a:r>
-              <a:rPr sz="2000" b="1">
-                <a:solidFill>
-                  <a:srgbClr val="006D77"/>
-                </a:solidFill>
-              </a:rPr>
-              <a:t>• </a:t>
-            </a:r>
-            <a:r>
-              <a:rPr sz="2000" b="0">
-                <a:solidFill>
-                  <a:srgbClr val="1F2D3A"/>
-                </a:solidFill>
-              </a:rPr>
-              <a:t> </a:t>
+              <a:t>"Şu komutla şu çıktı."</a:t>
             </a:r>
           </a:p>
         </p:txBody>
@@ -8549,7 +9034,7 @@
                   <a:srgbClr val="006D77"/>
                 </a:solidFill>
               </a:rPr>
-              <a:t>Kontrol · güvenlik</a:t>
+              <a:t>Akış · 5. kalan risk</a:t>
             </a:r>
           </a:p>
         </p:txBody>
@@ -8563,7 +9048,7 @@
         <p:spPr>
           <a:xfrm>
             <a:off x="640080" y="1325880"/>
-            <a:ext cx="10911535" cy="1219200"/>
+            <a:ext cx="10911535" cy="843280"/>
           </a:xfrm>
           <a:prstGeom prst="rect">
             <a:avLst/>
@@ -8595,7 +9080,7 @@
                   <a:srgbClr val="1F2D3A"/>
                 </a:solidFill>
               </a:rPr>
-              <a:t> </a:t>
+              <a:t>Neyi bilerek kapsam dışı bıraktınız?</a:t>
             </a:r>
           </a:p>
           <a:p>
@@ -8618,30 +9103,7 @@
                   <a:srgbClr val="1F2D3A"/>
                 </a:solidFill>
               </a:rPr>
-              <a:t> </a:t>
-            </a:r>
-          </a:p>
-          <a:p>
-            <a:pPr>
-              <a:spcAft>
-                <a:spcPts val="300"/>
-              </a:spcAft>
-            </a:pPr>
-            <a:r>
-              <a:rPr sz="2000" b="1">
-                <a:solidFill>
-                  <a:srgbClr val="006D77"/>
-                </a:solidFill>
-              </a:rPr>
-              <a:t>• </a:t>
-            </a:r>
-            <a:r>
-              <a:rPr sz="2000" b="0">
-                <a:solidFill>
-                  <a:srgbClr val="1F2D3A"/>
-                </a:solidFill>
-              </a:rPr>
-              <a:t> </a:t>
+              <a:t>Dürüst analiz puan getirir.</a:t>
             </a:r>
           </a:p>
         </p:txBody>
@@ -8801,7 +9263,7 @@
                   <a:srgbClr val="FFFFFF"/>
                 </a:solidFill>
               </a:rPr>
-              <a:t>Ek · Örnek sorular</a:t>
+              <a:t>Ek · Hazırlık kontrol listesi</a:t>
             </a:r>
           </a:p>
         </p:txBody>
@@ -8976,7 +9438,7 @@
                   <a:srgbClr val="006D77"/>
                 </a:solidFill>
               </a:rPr>
-              <a:t>Soru 1</a:t>
+              <a:t>Kontrol · belge</a:t>
             </a:r>
           </a:p>
         </p:txBody>
@@ -8990,61 +9452,85 @@
         <p:spPr>
           <a:xfrm>
             <a:off x="640080" y="1325880"/>
-            <a:ext cx="10911535" cy="439928"/>
-          </a:xfrm>
-          <a:prstGeom prst="rect">
-            <a:avLst/>
-          </a:prstGeom>
-          <a:noFill/>
-        </p:spPr>
-        <p:txBody>
-          <a:bodyPr wrap="square" lIns="45720" rIns="45720">
-            <a:spAutoFit/>
-          </a:bodyPr>
-          <a:lstStyle/>
-          <a:p>
-            <a:pPr algn="l"/>
+            <a:ext cx="10911535" cy="1219200"/>
+          </a:xfrm>
+          <a:prstGeom prst="rect">
+            <a:avLst/>
+          </a:prstGeom>
+          <a:noFill/>
+        </p:spPr>
+        <p:txBody>
+          <a:bodyPr wrap="square" lIns="45720" rIns="45720">
+            <a:spAutoFit/>
+          </a:bodyPr>
+          <a:lstStyle/>
+          <a:p>
+            <a:pPr>
+              <a:spcAft>
+                <a:spcPts val="300"/>
+              </a:spcAft>
+            </a:pPr>
             <a:r>
               <a:rPr sz="2000" b="1">
                 <a:solidFill>
+                  <a:srgbClr val="006D77"/>
+                </a:solidFill>
+              </a:rPr>
+              <a:t>• </a:t>
+            </a:r>
+            <a:r>
+              <a:rPr sz="2000" b="0">
+                <a:solidFill>
                   <a:srgbClr val="1F2D3A"/>
                 </a:solidFill>
               </a:rPr>
-              <a:t>En kritik üç varlığınız ve C/I/I+ etiketleri?</a:t>
-            </a:r>
-          </a:p>
-        </p:txBody>
-      </p:sp>
-      <p:sp>
-        <p:nvSpPr>
-          <p:cNvPr id="8" name="TextBox 7"/>
-          <p:cNvSpPr txBox="1"/>
-          <p:nvPr/>
-        </p:nvSpPr>
-        <p:spPr>
-          <a:xfrm>
-            <a:off x="640080" y="1875536"/>
-            <a:ext cx="10911535" cy="439928"/>
-          </a:xfrm>
-          <a:prstGeom prst="rect">
-            <a:avLst/>
-          </a:prstGeom>
-          <a:noFill/>
-        </p:spPr>
-        <p:txBody>
-          <a:bodyPr wrap="square" lIns="45720" rIns="45720">
-            <a:spAutoFit/>
-          </a:bodyPr>
-          <a:lstStyle/>
-          <a:p>
-            <a:pPr algn="l"/>
+              <a:t> </a:t>
+            </a:r>
+          </a:p>
+          <a:p>
+            <a:pPr>
+              <a:spcAft>
+                <a:spcPts val="300"/>
+              </a:spcAft>
+            </a:pPr>
+            <a:r>
+              <a:rPr sz="2000" b="1">
+                <a:solidFill>
+                  <a:srgbClr val="006D77"/>
+                </a:solidFill>
+              </a:rPr>
+              <a:t>• </a:t>
+            </a:r>
             <a:r>
               <a:rPr sz="2000" b="0">
                 <a:solidFill>
                   <a:srgbClr val="1F2D3A"/>
                 </a:solidFill>
               </a:rPr>
-              <a:t>Cevabı hazır tutun; her varlığın yaşam döngüsünü bilin.</a:t>
+              <a:t> </a:t>
+            </a:r>
+          </a:p>
+          <a:p>
+            <a:pPr>
+              <a:spcAft>
+                <a:spcPts val="300"/>
+              </a:spcAft>
+            </a:pPr>
+            <a:r>
+              <a:rPr sz="2000" b="1">
+                <a:solidFill>
+                  <a:srgbClr val="006D77"/>
+                </a:solidFill>
+              </a:rPr>
+              <a:t>• </a:t>
+            </a:r>
+            <a:r>
+              <a:rPr sz="2000" b="0">
+                <a:solidFill>
+                  <a:srgbClr val="1F2D3A"/>
+                </a:solidFill>
+              </a:rPr>
+              <a:t> </a:t>
             </a:r>
           </a:p>
         </p:txBody>
@@ -9811,7 +10297,7 @@
                   <a:srgbClr val="006D77"/>
                 </a:solidFill>
               </a:rPr>
-              <a:t>Soru 2</a:t>
+              <a:t>Kontrol · gösterim</a:t>
             </a:r>
           </a:p>
         </p:txBody>
@@ -9825,61 +10311,85 @@
         <p:spPr>
           <a:xfrm>
             <a:off x="640080" y="1325880"/>
-            <a:ext cx="10911535" cy="439928"/>
-          </a:xfrm>
-          <a:prstGeom prst="rect">
-            <a:avLst/>
-          </a:prstGeom>
-          <a:noFill/>
-        </p:spPr>
-        <p:txBody>
-          <a:bodyPr wrap="square" lIns="45720" rIns="45720">
-            <a:spAutoFit/>
-          </a:bodyPr>
-          <a:lstStyle/>
-          <a:p>
-            <a:pPr algn="l"/>
+            <a:ext cx="10911535" cy="1219200"/>
+          </a:xfrm>
+          <a:prstGeom prst="rect">
+            <a:avLst/>
+          </a:prstGeom>
+          <a:noFill/>
+        </p:spPr>
+        <p:txBody>
+          <a:bodyPr wrap="square" lIns="45720" rIns="45720">
+            <a:spAutoFit/>
+          </a:bodyPr>
+          <a:lstStyle/>
+          <a:p>
+            <a:pPr>
+              <a:spcAft>
+                <a:spcPts val="300"/>
+              </a:spcAft>
+            </a:pPr>
             <a:r>
               <a:rPr sz="2000" b="1">
                 <a:solidFill>
+                  <a:srgbClr val="006D77"/>
+                </a:solidFill>
+              </a:rPr>
+              <a:t>• </a:t>
+            </a:r>
+            <a:r>
+              <a:rPr sz="2000" b="0">
+                <a:solidFill>
                   <a:srgbClr val="1F2D3A"/>
                 </a:solidFill>
               </a:rPr>
-              <a:t>Bu tehdide karşı hangi önlem, nasıl doğrulandı?</a:t>
-            </a:r>
-          </a:p>
-        </p:txBody>
-      </p:sp>
-      <p:sp>
-        <p:nvSpPr>
-          <p:cNvPr id="8" name="TextBox 7"/>
-          <p:cNvSpPr txBox="1"/>
-          <p:nvPr/>
-        </p:nvSpPr>
-        <p:spPr>
-          <a:xfrm>
-            <a:off x="640080" y="1875536"/>
-            <a:ext cx="10911535" cy="439928"/>
-          </a:xfrm>
-          <a:prstGeom prst="rect">
-            <a:avLst/>
-          </a:prstGeom>
-          <a:noFill/>
-        </p:spPr>
-        <p:txBody>
-          <a:bodyPr wrap="square" lIns="45720" rIns="45720">
-            <a:spAutoFit/>
-          </a:bodyPr>
-          <a:lstStyle/>
-          <a:p>
-            <a:pPr algn="l"/>
+              <a:t> </a:t>
+            </a:r>
+          </a:p>
+          <a:p>
+            <a:pPr>
+              <a:spcAft>
+                <a:spcPts val="300"/>
+              </a:spcAft>
+            </a:pPr>
+            <a:r>
+              <a:rPr sz="2000" b="1">
+                <a:solidFill>
+                  <a:srgbClr val="006D77"/>
+                </a:solidFill>
+              </a:rPr>
+              <a:t>• </a:t>
+            </a:r>
             <a:r>
               <a:rPr sz="2000" b="0">
                 <a:solidFill>
                   <a:srgbClr val="1F2D3A"/>
                 </a:solidFill>
               </a:rPr>
-              <a:t>Tehdit → önlem → kanıt zincirini gösterin.</a:t>
+              <a:t> </a:t>
+            </a:r>
+          </a:p>
+          <a:p>
+            <a:pPr>
+              <a:spcAft>
+                <a:spcPts val="300"/>
+              </a:spcAft>
+            </a:pPr>
+            <a:r>
+              <a:rPr sz="2000" b="1">
+                <a:solidFill>
+                  <a:srgbClr val="006D77"/>
+                </a:solidFill>
+              </a:rPr>
+              <a:t>• </a:t>
+            </a:r>
+            <a:r>
+              <a:rPr sz="2000" b="0">
+                <a:solidFill>
+                  <a:srgbClr val="1F2D3A"/>
+                </a:solidFill>
+              </a:rPr>
+              <a:t> </a:t>
             </a:r>
           </a:p>
         </p:txBody>
@@ -10054,7 +10564,7 @@
                   <a:srgbClr val="006D77"/>
                 </a:solidFill>
               </a:rPr>
-              <a:t>Soru 3</a:t>
+              <a:t>Kontrol · güvenlik</a:t>
             </a:r>
           </a:p>
         </p:txBody>
@@ -10068,61 +10578,85 @@
         <p:spPr>
           <a:xfrm>
             <a:off x="640080" y="1325880"/>
-            <a:ext cx="10911535" cy="439928"/>
-          </a:xfrm>
-          <a:prstGeom prst="rect">
-            <a:avLst/>
-          </a:prstGeom>
-          <a:noFill/>
-        </p:spPr>
-        <p:txBody>
-          <a:bodyPr wrap="square" lIns="45720" rIns="45720">
-            <a:spAutoFit/>
-          </a:bodyPr>
-          <a:lstStyle/>
-          <a:p>
-            <a:pPr algn="l"/>
+            <a:ext cx="10911535" cy="1219200"/>
+          </a:xfrm>
+          <a:prstGeom prst="rect">
+            <a:avLst/>
+          </a:prstGeom>
+          <a:noFill/>
+        </p:spPr>
+        <p:txBody>
+          <a:bodyPr wrap="square" lIns="45720" rIns="45720">
+            <a:spAutoFit/>
+          </a:bodyPr>
+          <a:lstStyle/>
+          <a:p>
+            <a:pPr>
+              <a:spcAft>
+                <a:spcPts val="300"/>
+              </a:spcAft>
+            </a:pPr>
             <a:r>
               <a:rPr sz="2000" b="1">
                 <a:solidFill>
+                  <a:srgbClr val="006D77"/>
+                </a:solidFill>
+              </a:rPr>
+              <a:t>• </a:t>
+            </a:r>
+            <a:r>
+              <a:rPr sz="2000" b="0">
+                <a:solidFill>
                   <a:srgbClr val="1F2D3A"/>
                 </a:solidFill>
               </a:rPr>
-              <a:t>Bu anahtar nereden geliyor, nerede duruyor, ne zaman siliniyor?</a:t>
-            </a:r>
-          </a:p>
-        </p:txBody>
-      </p:sp>
-      <p:sp>
-        <p:nvSpPr>
-          <p:cNvPr id="8" name="TextBox 7"/>
-          <p:cNvSpPr txBox="1"/>
-          <p:nvPr/>
-        </p:nvSpPr>
-        <p:spPr>
-          <a:xfrm>
-            <a:off x="640080" y="1875536"/>
-            <a:ext cx="10911535" cy="439928"/>
-          </a:xfrm>
-          <a:prstGeom prst="rect">
-            <a:avLst/>
-          </a:prstGeom>
-          <a:noFill/>
-        </p:spPr>
-        <p:txBody>
-          <a:bodyPr wrap="square" lIns="45720" rIns="45720">
-            <a:spAutoFit/>
-          </a:bodyPr>
-          <a:lstStyle/>
-          <a:p>
-            <a:pPr algn="l"/>
+              <a:t> </a:t>
+            </a:r>
+          </a:p>
+          <a:p>
+            <a:pPr>
+              <a:spcAft>
+                <a:spcPts val="300"/>
+              </a:spcAft>
+            </a:pPr>
+            <a:r>
+              <a:rPr sz="2000" b="1">
+                <a:solidFill>
+                  <a:srgbClr val="006D77"/>
+                </a:solidFill>
+              </a:rPr>
+              <a:t>• </a:t>
+            </a:r>
             <a:r>
               <a:rPr sz="2000" b="0">
                 <a:solidFill>
                   <a:srgbClr val="1F2D3A"/>
                 </a:solidFill>
               </a:rPr>
-              <a:t>Anahtar yaşam döngüsünü açıklayın.</a:t>
+              <a:t> </a:t>
+            </a:r>
+          </a:p>
+          <a:p>
+            <a:pPr>
+              <a:spcAft>
+                <a:spcPts val="300"/>
+              </a:spcAft>
+            </a:pPr>
+            <a:r>
+              <a:rPr sz="2000" b="1">
+                <a:solidFill>
+                  <a:srgbClr val="006D77"/>
+                </a:solidFill>
+              </a:rPr>
+              <a:t>• </a:t>
+            </a:r>
+            <a:r>
+              <a:rPr sz="2000" b="0">
+                <a:solidFill>
+                  <a:srgbClr val="1F2D3A"/>
+                </a:solidFill>
+              </a:rPr>
+              <a:t> </a:t>
             </a:r>
           </a:p>
         </p:txBody>
@@ -10136,249 +10670,6 @@
 </file>
 
 <file path=ppt/slides/slide32.xml><?xml version="1.0" encoding="utf-8"?>
-<p:sld xmlns:a="http://schemas.openxmlformats.org/drawingml/2006/main" xmlns:p="http://schemas.openxmlformats.org/presentationml/2006/main" xmlns:r="http://schemas.openxmlformats.org/officeDocument/2006/relationships">
-  <p:cSld>
-    <p:spTree>
-      <p:nvGrpSpPr>
-        <p:cNvPr id="1" name=""/>
-        <p:cNvGrpSpPr/>
-        <p:nvPr/>
-      </p:nvGrpSpPr>
-      <p:grpSpPr/>
-      <p:pic>
-        <p:nvPicPr>
-          <p:cNvPr id="2" name="Picture 1" descr="rteu_logo_kucuk.jpg"/>
-          <p:cNvPicPr>
-            <a:picLocks noChangeAspect="1"/>
-          </p:cNvPicPr>
-          <p:nvPr/>
-        </p:nvPicPr>
-        <p:blipFill>
-          <a:blip r:embed="rId2"/>
-          <a:stretch>
-            <a:fillRect/>
-          </a:stretch>
-        </p:blipFill>
-        <p:spPr>
-          <a:xfrm>
-            <a:off x="640080" y="164592"/>
-            <a:ext cx="242773" cy="329184"/>
-          </a:xfrm>
-          <a:prstGeom prst="rect">
-            <a:avLst/>
-          </a:prstGeom>
-        </p:spPr>
-      </p:pic>
-      <p:sp>
-        <p:nvSpPr>
-          <p:cNvPr id="3" name="TextBox 2"/>
-          <p:cNvSpPr txBox="1"/>
-          <p:nvPr/>
-        </p:nvSpPr>
-        <p:spPr>
-          <a:xfrm>
-            <a:off x="1051560" y="182880"/>
-            <a:ext cx="7315200" cy="320040"/>
-          </a:xfrm>
-          <a:prstGeom prst="rect">
-            <a:avLst/>
-          </a:prstGeom>
-          <a:noFill/>
-        </p:spPr>
-        <p:txBody>
-          <a:bodyPr wrap="square" lIns="45720" rIns="45720">
-            <a:spAutoFit/>
-          </a:bodyPr>
-          <a:lstStyle/>
-          <a:p>
-            <a:r>
-              <a:rPr sz="1100" b="0">
-                <a:solidFill>
-                  <a:srgbClr val="5B6770"/>
-                </a:solidFill>
-              </a:rPr>
-              <a:t>CEN429 Güvenli Programlama · Hafta 7</a:t>
-            </a:r>
-          </a:p>
-        </p:txBody>
-      </p:sp>
-      <p:sp>
-        <p:nvSpPr>
-          <p:cNvPr id="4" name="TextBox 3"/>
-          <p:cNvSpPr txBox="1"/>
-          <p:nvPr/>
-        </p:nvSpPr>
-        <p:spPr>
-          <a:xfrm>
-            <a:off x="640080" y="6446520"/>
-            <a:ext cx="7315200" cy="274320"/>
-          </a:xfrm>
-          <a:prstGeom prst="rect">
-            <a:avLst/>
-          </a:prstGeom>
-          <a:noFill/>
-        </p:spPr>
-        <p:txBody>
-          <a:bodyPr wrap="square" lIns="45720" rIns="45720">
-            <a:spAutoFit/>
-          </a:bodyPr>
-          <a:lstStyle/>
-          <a:p>
-            <a:r>
-              <a:rPr sz="1000" b="0">
-                <a:solidFill>
-                  <a:srgbClr val="5B6770"/>
-                </a:solidFill>
-              </a:rPr>
-              <a:t>RTEÜ Bilgisayar Mühendisliği · 2026-2027 Güz</a:t>
-            </a:r>
-          </a:p>
-        </p:txBody>
-      </p:sp>
-      <p:sp>
-        <p:nvSpPr>
-          <p:cNvPr id="5" name="TextBox 4"/>
-          <p:cNvSpPr txBox="1"/>
-          <p:nvPr/>
-        </p:nvSpPr>
-        <p:spPr>
-          <a:xfrm>
-            <a:off x="10637215" y="6446520"/>
-            <a:ext cx="914400" cy="274320"/>
-          </a:xfrm>
-          <a:prstGeom prst="rect">
-            <a:avLst/>
-          </a:prstGeom>
-          <a:noFill/>
-        </p:spPr>
-        <p:txBody>
-          <a:bodyPr wrap="square" lIns="45720" rIns="45720">
-            <a:spAutoFit/>
-          </a:bodyPr>
-          <a:lstStyle/>
-          <a:p>
-            <a:pPr algn="r"/>
-            <a:r>
-              <a:rPr sz="1000" b="0">
-                <a:solidFill>
-                  <a:srgbClr val="5B6770"/>
-                </a:solidFill>
-              </a:rPr>
-              <a:t>32</a:t>
-            </a:r>
-          </a:p>
-        </p:txBody>
-      </p:sp>
-      <p:sp>
-        <p:nvSpPr>
-          <p:cNvPr id="6" name="TextBox 5"/>
-          <p:cNvSpPr txBox="1"/>
-          <p:nvPr/>
-        </p:nvSpPr>
-        <p:spPr>
-          <a:xfrm>
-            <a:off x="640080" y="548640"/>
-            <a:ext cx="10911535" cy="731520"/>
-          </a:xfrm>
-          <a:prstGeom prst="rect">
-            <a:avLst/>
-          </a:prstGeom>
-          <a:noFill/>
-        </p:spPr>
-        <p:txBody>
-          <a:bodyPr wrap="square" lIns="45720" rIns="45720" anchor="ctr">
-            <a:spAutoFit/>
-          </a:bodyPr>
-          <a:lstStyle/>
-          <a:p>
-            <a:r>
-              <a:rPr sz="3000" b="1">
-                <a:solidFill>
-                  <a:srgbClr val="006D77"/>
-                </a:solidFill>
-              </a:rPr>
-              <a:t>Soru 4</a:t>
-            </a:r>
-          </a:p>
-        </p:txBody>
-      </p:sp>
-      <p:sp>
-        <p:nvSpPr>
-          <p:cNvPr id="7" name="TextBox 6"/>
-          <p:cNvSpPr txBox="1"/>
-          <p:nvPr/>
-        </p:nvSpPr>
-        <p:spPr>
-          <a:xfrm>
-            <a:off x="640080" y="1325880"/>
-            <a:ext cx="10911535" cy="439928"/>
-          </a:xfrm>
-          <a:prstGeom prst="rect">
-            <a:avLst/>
-          </a:prstGeom>
-          <a:noFill/>
-        </p:spPr>
-        <p:txBody>
-          <a:bodyPr wrap="square" lIns="45720" rIns="45720">
-            <a:spAutoFit/>
-          </a:bodyPr>
-          <a:lstStyle/>
-          <a:p>
-            <a:pPr algn="l"/>
-            <a:r>
-              <a:rPr sz="2000" b="1">
-                <a:solidFill>
-                  <a:srgbClr val="1F2D3A"/>
-                </a:solidFill>
-              </a:rPr>
-              <a:t>Kalan riskiniz ne? Neden kabul edilebilir?</a:t>
-            </a:r>
-          </a:p>
-        </p:txBody>
-      </p:sp>
-      <p:sp>
-        <p:nvSpPr>
-          <p:cNvPr id="8" name="TextBox 7"/>
-          <p:cNvSpPr txBox="1"/>
-          <p:nvPr/>
-        </p:nvSpPr>
-        <p:spPr>
-          <a:xfrm>
-            <a:off x="640080" y="1875536"/>
-            <a:ext cx="10911535" cy="439928"/>
-          </a:xfrm>
-          <a:prstGeom prst="rect">
-            <a:avLst/>
-          </a:prstGeom>
-          <a:noFill/>
-        </p:spPr>
-        <p:txBody>
-          <a:bodyPr wrap="square" lIns="45720" rIns="45720">
-            <a:spAutoFit/>
-          </a:bodyPr>
-          <a:lstStyle/>
-          <a:p>
-            <a:pPr algn="l"/>
-            <a:r>
-              <a:rPr sz="2000" b="0">
-                <a:solidFill>
-                  <a:srgbClr val="1F2D3A"/>
-                </a:solidFill>
-              </a:rPr>
-              <a:t>Dürüst ve gerekçeli yanıtlayın.</a:t>
-            </a:r>
-          </a:p>
-        </p:txBody>
-      </p:sp>
-    </p:spTree>
-  </p:cSld>
-  <p:clrMapOvr>
-    <a:masterClrMapping/>
-  </p:clrMapOvr>
-</p:sld>
-</file>
-
-<file path=ppt/slides/slide33.xml><?xml version="1.0" encoding="utf-8"?>
 <p:sld xmlns:a="http://schemas.openxmlformats.org/drawingml/2006/main" xmlns:p="http://schemas.openxmlformats.org/presentationml/2006/main" xmlns:r="http://schemas.openxmlformats.org/officeDocument/2006/relationships">
   <p:cSld>
     <p:bg>
@@ -10491,7 +10782,7 @@
                   <a:srgbClr val="D8F0F2"/>
                 </a:solidFill>
               </a:rPr>
-              <a:t>33</a:t>
+              <a:t>32</a:t>
             </a:r>
           </a:p>
         </p:txBody>
@@ -10525,7 +10816,250 @@
                   <a:srgbClr val="FFFFFF"/>
                 </a:solidFill>
               </a:rPr>
-              <a:t>Ek · Sık yapılan hatalar</a:t>
+              <a:t>Ek · Örnek sorular</a:t>
+            </a:r>
+          </a:p>
+        </p:txBody>
+      </p:sp>
+    </p:spTree>
+  </p:cSld>
+  <p:clrMapOvr>
+    <a:masterClrMapping/>
+  </p:clrMapOvr>
+</p:sld>
+</file>
+
+<file path=ppt/slides/slide33.xml><?xml version="1.0" encoding="utf-8"?>
+<p:sld xmlns:a="http://schemas.openxmlformats.org/drawingml/2006/main" xmlns:p="http://schemas.openxmlformats.org/presentationml/2006/main" xmlns:r="http://schemas.openxmlformats.org/officeDocument/2006/relationships">
+  <p:cSld>
+    <p:spTree>
+      <p:nvGrpSpPr>
+        <p:cNvPr id="1" name=""/>
+        <p:cNvGrpSpPr/>
+        <p:nvPr/>
+      </p:nvGrpSpPr>
+      <p:grpSpPr/>
+      <p:pic>
+        <p:nvPicPr>
+          <p:cNvPr id="2" name="Picture 1" descr="rteu_logo_kucuk.jpg"/>
+          <p:cNvPicPr>
+            <a:picLocks noChangeAspect="1"/>
+          </p:cNvPicPr>
+          <p:nvPr/>
+        </p:nvPicPr>
+        <p:blipFill>
+          <a:blip r:embed="rId2"/>
+          <a:stretch>
+            <a:fillRect/>
+          </a:stretch>
+        </p:blipFill>
+        <p:spPr>
+          <a:xfrm>
+            <a:off x="640080" y="164592"/>
+            <a:ext cx="242773" cy="329184"/>
+          </a:xfrm>
+          <a:prstGeom prst="rect">
+            <a:avLst/>
+          </a:prstGeom>
+        </p:spPr>
+      </p:pic>
+      <p:sp>
+        <p:nvSpPr>
+          <p:cNvPr id="3" name="TextBox 2"/>
+          <p:cNvSpPr txBox="1"/>
+          <p:nvPr/>
+        </p:nvSpPr>
+        <p:spPr>
+          <a:xfrm>
+            <a:off x="1051560" y="182880"/>
+            <a:ext cx="7315200" cy="320040"/>
+          </a:xfrm>
+          <a:prstGeom prst="rect">
+            <a:avLst/>
+          </a:prstGeom>
+          <a:noFill/>
+        </p:spPr>
+        <p:txBody>
+          <a:bodyPr wrap="square" lIns="45720" rIns="45720">
+            <a:spAutoFit/>
+          </a:bodyPr>
+          <a:lstStyle/>
+          <a:p>
+            <a:r>
+              <a:rPr sz="1100" b="0">
+                <a:solidFill>
+                  <a:srgbClr val="5B6770"/>
+                </a:solidFill>
+              </a:rPr>
+              <a:t>CEN429 Güvenli Programlama · Hafta 7</a:t>
+            </a:r>
+          </a:p>
+        </p:txBody>
+      </p:sp>
+      <p:sp>
+        <p:nvSpPr>
+          <p:cNvPr id="4" name="TextBox 3"/>
+          <p:cNvSpPr txBox="1"/>
+          <p:nvPr/>
+        </p:nvSpPr>
+        <p:spPr>
+          <a:xfrm>
+            <a:off x="640080" y="6446520"/>
+            <a:ext cx="7315200" cy="274320"/>
+          </a:xfrm>
+          <a:prstGeom prst="rect">
+            <a:avLst/>
+          </a:prstGeom>
+          <a:noFill/>
+        </p:spPr>
+        <p:txBody>
+          <a:bodyPr wrap="square" lIns="45720" rIns="45720">
+            <a:spAutoFit/>
+          </a:bodyPr>
+          <a:lstStyle/>
+          <a:p>
+            <a:r>
+              <a:rPr sz="1000" b="0">
+                <a:solidFill>
+                  <a:srgbClr val="5B6770"/>
+                </a:solidFill>
+              </a:rPr>
+              <a:t>RTEÜ Bilgisayar Mühendisliği · 2026-2027 Güz</a:t>
+            </a:r>
+          </a:p>
+        </p:txBody>
+      </p:sp>
+      <p:sp>
+        <p:nvSpPr>
+          <p:cNvPr id="5" name="TextBox 4"/>
+          <p:cNvSpPr txBox="1"/>
+          <p:nvPr/>
+        </p:nvSpPr>
+        <p:spPr>
+          <a:xfrm>
+            <a:off x="10637215" y="6446520"/>
+            <a:ext cx="914400" cy="274320"/>
+          </a:xfrm>
+          <a:prstGeom prst="rect">
+            <a:avLst/>
+          </a:prstGeom>
+          <a:noFill/>
+        </p:spPr>
+        <p:txBody>
+          <a:bodyPr wrap="square" lIns="45720" rIns="45720">
+            <a:spAutoFit/>
+          </a:bodyPr>
+          <a:lstStyle/>
+          <a:p>
+            <a:pPr algn="r"/>
+            <a:r>
+              <a:rPr sz="1000" b="0">
+                <a:solidFill>
+                  <a:srgbClr val="5B6770"/>
+                </a:solidFill>
+              </a:rPr>
+              <a:t>33</a:t>
+            </a:r>
+          </a:p>
+        </p:txBody>
+      </p:sp>
+      <p:sp>
+        <p:nvSpPr>
+          <p:cNvPr id="6" name="TextBox 5"/>
+          <p:cNvSpPr txBox="1"/>
+          <p:nvPr/>
+        </p:nvSpPr>
+        <p:spPr>
+          <a:xfrm>
+            <a:off x="640080" y="548640"/>
+            <a:ext cx="10911535" cy="731520"/>
+          </a:xfrm>
+          <a:prstGeom prst="rect">
+            <a:avLst/>
+          </a:prstGeom>
+          <a:noFill/>
+        </p:spPr>
+        <p:txBody>
+          <a:bodyPr wrap="square" lIns="45720" rIns="45720" anchor="ctr">
+            <a:spAutoFit/>
+          </a:bodyPr>
+          <a:lstStyle/>
+          <a:p>
+            <a:r>
+              <a:rPr sz="3000" b="1">
+                <a:solidFill>
+                  <a:srgbClr val="006D77"/>
+                </a:solidFill>
+              </a:rPr>
+              <a:t>Soru 1</a:t>
+            </a:r>
+          </a:p>
+        </p:txBody>
+      </p:sp>
+      <p:sp>
+        <p:nvSpPr>
+          <p:cNvPr id="7" name="TextBox 6"/>
+          <p:cNvSpPr txBox="1"/>
+          <p:nvPr/>
+        </p:nvSpPr>
+        <p:spPr>
+          <a:xfrm>
+            <a:off x="640080" y="1325880"/>
+            <a:ext cx="10911535" cy="439928"/>
+          </a:xfrm>
+          <a:prstGeom prst="rect">
+            <a:avLst/>
+          </a:prstGeom>
+          <a:noFill/>
+        </p:spPr>
+        <p:txBody>
+          <a:bodyPr wrap="square" lIns="45720" rIns="45720">
+            <a:spAutoFit/>
+          </a:bodyPr>
+          <a:lstStyle/>
+          <a:p>
+            <a:pPr algn="l"/>
+            <a:r>
+              <a:rPr sz="2000" b="1">
+                <a:solidFill>
+                  <a:srgbClr val="1F2D3A"/>
+                </a:solidFill>
+              </a:rPr>
+              <a:t>En kritik üç varlığınız ve C/I/I+ etiketleri?</a:t>
+            </a:r>
+          </a:p>
+        </p:txBody>
+      </p:sp>
+      <p:sp>
+        <p:nvSpPr>
+          <p:cNvPr id="8" name="TextBox 7"/>
+          <p:cNvSpPr txBox="1"/>
+          <p:nvPr/>
+        </p:nvSpPr>
+        <p:spPr>
+          <a:xfrm>
+            <a:off x="640080" y="1875536"/>
+            <a:ext cx="10911535" cy="439928"/>
+          </a:xfrm>
+          <a:prstGeom prst="rect">
+            <a:avLst/>
+          </a:prstGeom>
+          <a:noFill/>
+        </p:spPr>
+        <p:txBody>
+          <a:bodyPr wrap="square" lIns="45720" rIns="45720">
+            <a:spAutoFit/>
+          </a:bodyPr>
+          <a:lstStyle/>
+          <a:p>
+            <a:pPr algn="l"/>
+            <a:r>
+              <a:rPr sz="2000" b="0">
+                <a:solidFill>
+                  <a:srgbClr val="1F2D3A"/>
+                </a:solidFill>
+              </a:rPr>
+              <a:t>Cevabı hazır tutun; her varlığın yaşam döngüsünü bilin.</a:t>
             </a:r>
           </a:p>
         </p:txBody>
@@ -10700,7 +11234,7 @@
                   <a:srgbClr val="006D77"/>
                 </a:solidFill>
               </a:rPr>
-              <a:t>Hata listesi</a:t>
+              <a:t>Soru 2</a:t>
             </a:r>
           </a:p>
         </p:txBody>
@@ -10714,131 +11248,61 @@
         <p:spPr>
           <a:xfrm>
             <a:off x="640080" y="1325880"/>
-            <a:ext cx="10911535" cy="1971040"/>
-          </a:xfrm>
-          <a:prstGeom prst="rect">
-            <a:avLst/>
-          </a:prstGeom>
-          <a:noFill/>
-        </p:spPr>
-        <p:txBody>
-          <a:bodyPr wrap="square" lIns="45720" rIns="45720">
-            <a:spAutoFit/>
-          </a:bodyPr>
-          <a:lstStyle/>
-          <a:p>
-            <a:pPr>
-              <a:spcAft>
-                <a:spcPts val="300"/>
-              </a:spcAft>
-            </a:pPr>
+            <a:ext cx="10911535" cy="439928"/>
+          </a:xfrm>
+          <a:prstGeom prst="rect">
+            <a:avLst/>
+          </a:prstGeom>
+          <a:noFill/>
+        </p:spPr>
+        <p:txBody>
+          <a:bodyPr wrap="square" lIns="45720" rIns="45720">
+            <a:spAutoFit/>
+          </a:bodyPr>
+          <a:lstStyle/>
+          <a:p>
+            <a:pPr algn="l"/>
             <a:r>
               <a:rPr sz="2000" b="1">
                 <a:solidFill>
-                  <a:srgbClr val="006D77"/>
-                </a:solidFill>
-              </a:rPr>
-              <a:t>• </a:t>
-            </a:r>
+                  <a:srgbClr val="1F2D3A"/>
+                </a:solidFill>
+              </a:rPr>
+              <a:t>Bu tehdide karşı hangi önlem, nasıl doğrulandı?</a:t>
+            </a:r>
+          </a:p>
+        </p:txBody>
+      </p:sp>
+      <p:sp>
+        <p:nvSpPr>
+          <p:cNvPr id="8" name="TextBox 7"/>
+          <p:cNvSpPr txBox="1"/>
+          <p:nvPr/>
+        </p:nvSpPr>
+        <p:spPr>
+          <a:xfrm>
+            <a:off x="640080" y="1875536"/>
+            <a:ext cx="10911535" cy="439928"/>
+          </a:xfrm>
+          <a:prstGeom prst="rect">
+            <a:avLst/>
+          </a:prstGeom>
+          <a:noFill/>
+        </p:spPr>
+        <p:txBody>
+          <a:bodyPr wrap="square" lIns="45720" rIns="45720">
+            <a:spAutoFit/>
+          </a:bodyPr>
+          <a:lstStyle/>
+          <a:p>
+            <a:pPr algn="l"/>
             <a:r>
               <a:rPr sz="2000" b="0">
                 <a:solidFill>
                   <a:srgbClr val="1F2D3A"/>
                 </a:solidFill>
               </a:rPr>
-              <a:t>Kılavuz ile kod sürümü farklı.</a:t>
-            </a:r>
-          </a:p>
-          <a:p>
-            <a:pPr>
-              <a:spcAft>
-                <a:spcPts val="300"/>
-              </a:spcAft>
-            </a:pPr>
-            <a:r>
-              <a:rPr sz="2000" b="1">
-                <a:solidFill>
-                  <a:srgbClr val="006D77"/>
-                </a:solidFill>
-              </a:rPr>
-              <a:t>• </a:t>
-            </a:r>
-            <a:r>
-              <a:rPr sz="2000" b="0">
-                <a:solidFill>
-                  <a:srgbClr val="1F2D3A"/>
-                </a:solidFill>
-              </a:rPr>
-              <a:t>Kanıtsız "yapıldı".</a:t>
-            </a:r>
-          </a:p>
-          <a:p>
-            <a:pPr>
-              <a:spcAft>
-                <a:spcPts val="300"/>
-              </a:spcAft>
-            </a:pPr>
-            <a:r>
-              <a:rPr sz="2000" b="1">
-                <a:solidFill>
-                  <a:srgbClr val="006D77"/>
-                </a:solidFill>
-              </a:rPr>
-              <a:t>• </a:t>
-            </a:r>
-            <a:r>
-              <a:rPr sz="2000" b="0">
-                <a:solidFill>
-                  <a:srgbClr val="1F2D3A"/>
-                </a:solidFill>
-              </a:rPr>
-              <a:t>Canlı demo çökmesi (yedek yok).</a:t>
-            </a:r>
-          </a:p>
-          <a:p>
-            <a:pPr>
-              <a:spcAft>
-                <a:spcPts val="300"/>
-              </a:spcAft>
-            </a:pPr>
-            <a:r>
-              <a:rPr sz="2000" b="1">
-                <a:solidFill>
-                  <a:srgbClr val="006D77"/>
-                </a:solidFill>
-              </a:rPr>
-              <a:t>• </a:t>
-            </a:r>
-            <a:r>
-              <a:rPr sz="2000" b="0">
-                <a:solidFill>
-                  <a:srgbClr val="1F2D3A"/>
-                </a:solidFill>
-              </a:rPr>
-              <a:t>Kalan risk bölümü boş.</a:t>
-            </a:r>
-          </a:p>
-          <a:p>
-            <a:pPr>
-              <a:spcAft>
-                <a:spcPts val="300"/>
-              </a:spcAft>
-            </a:pPr>
-            <a:r>
-              <a:rPr sz="2000" b="1">
-                <a:solidFill>
-                  <a:srgbClr val="006D77"/>
-                </a:solidFill>
-              </a:rPr>
-              <a:t>• </a:t>
-            </a:r>
-            <a:r>
-              <a:rPr sz="2000" b="0">
-                <a:solidFill>
-                  <a:srgbClr val="1F2D3A"/>
-                </a:solidFill>
-              </a:rPr>
-              <a:t>Depoda gerçek veri.</a:t>
+              <a:t>Tehdit → önlem → kanıt zincirini gösterin.</a:t>
             </a:r>
           </a:p>
         </p:txBody>
@@ -11013,6 +11477,965 @@
                   <a:srgbClr val="006D77"/>
                 </a:solidFill>
               </a:rPr>
+              <a:t>Soru 3</a:t>
+            </a:r>
+          </a:p>
+        </p:txBody>
+      </p:sp>
+      <p:sp>
+        <p:nvSpPr>
+          <p:cNvPr id="7" name="TextBox 6"/>
+          <p:cNvSpPr txBox="1"/>
+          <p:nvPr/>
+        </p:nvSpPr>
+        <p:spPr>
+          <a:xfrm>
+            <a:off x="640080" y="1325880"/>
+            <a:ext cx="10911535" cy="439928"/>
+          </a:xfrm>
+          <a:prstGeom prst="rect">
+            <a:avLst/>
+          </a:prstGeom>
+          <a:noFill/>
+        </p:spPr>
+        <p:txBody>
+          <a:bodyPr wrap="square" lIns="45720" rIns="45720">
+            <a:spAutoFit/>
+          </a:bodyPr>
+          <a:lstStyle/>
+          <a:p>
+            <a:pPr algn="l"/>
+            <a:r>
+              <a:rPr sz="2000" b="1">
+                <a:solidFill>
+                  <a:srgbClr val="1F2D3A"/>
+                </a:solidFill>
+              </a:rPr>
+              <a:t>Bu anahtar nereden geliyor, nerede duruyor, ne zaman siliniyor?</a:t>
+            </a:r>
+          </a:p>
+        </p:txBody>
+      </p:sp>
+      <p:sp>
+        <p:nvSpPr>
+          <p:cNvPr id="8" name="TextBox 7"/>
+          <p:cNvSpPr txBox="1"/>
+          <p:nvPr/>
+        </p:nvSpPr>
+        <p:spPr>
+          <a:xfrm>
+            <a:off x="640080" y="1875536"/>
+            <a:ext cx="10911535" cy="439928"/>
+          </a:xfrm>
+          <a:prstGeom prst="rect">
+            <a:avLst/>
+          </a:prstGeom>
+          <a:noFill/>
+        </p:spPr>
+        <p:txBody>
+          <a:bodyPr wrap="square" lIns="45720" rIns="45720">
+            <a:spAutoFit/>
+          </a:bodyPr>
+          <a:lstStyle/>
+          <a:p>
+            <a:pPr algn="l"/>
+            <a:r>
+              <a:rPr sz="2000" b="0">
+                <a:solidFill>
+                  <a:srgbClr val="1F2D3A"/>
+                </a:solidFill>
+              </a:rPr>
+              <a:t>Anahtar yaşam döngüsünü açıklayın.</a:t>
+            </a:r>
+          </a:p>
+        </p:txBody>
+      </p:sp>
+    </p:spTree>
+  </p:cSld>
+  <p:clrMapOvr>
+    <a:masterClrMapping/>
+  </p:clrMapOvr>
+</p:sld>
+</file>
+
+<file path=ppt/slides/slide36.xml><?xml version="1.0" encoding="utf-8"?>
+<p:sld xmlns:a="http://schemas.openxmlformats.org/drawingml/2006/main" xmlns:p="http://schemas.openxmlformats.org/presentationml/2006/main" xmlns:r="http://schemas.openxmlformats.org/officeDocument/2006/relationships">
+  <p:cSld>
+    <p:spTree>
+      <p:nvGrpSpPr>
+        <p:cNvPr id="1" name=""/>
+        <p:cNvGrpSpPr/>
+        <p:nvPr/>
+      </p:nvGrpSpPr>
+      <p:grpSpPr/>
+      <p:pic>
+        <p:nvPicPr>
+          <p:cNvPr id="2" name="Picture 1" descr="rteu_logo_kucuk.jpg"/>
+          <p:cNvPicPr>
+            <a:picLocks noChangeAspect="1"/>
+          </p:cNvPicPr>
+          <p:nvPr/>
+        </p:nvPicPr>
+        <p:blipFill>
+          <a:blip r:embed="rId2"/>
+          <a:stretch>
+            <a:fillRect/>
+          </a:stretch>
+        </p:blipFill>
+        <p:spPr>
+          <a:xfrm>
+            <a:off x="640080" y="164592"/>
+            <a:ext cx="242773" cy="329184"/>
+          </a:xfrm>
+          <a:prstGeom prst="rect">
+            <a:avLst/>
+          </a:prstGeom>
+        </p:spPr>
+      </p:pic>
+      <p:sp>
+        <p:nvSpPr>
+          <p:cNvPr id="3" name="TextBox 2"/>
+          <p:cNvSpPr txBox="1"/>
+          <p:nvPr/>
+        </p:nvSpPr>
+        <p:spPr>
+          <a:xfrm>
+            <a:off x="1051560" y="182880"/>
+            <a:ext cx="7315200" cy="320040"/>
+          </a:xfrm>
+          <a:prstGeom prst="rect">
+            <a:avLst/>
+          </a:prstGeom>
+          <a:noFill/>
+        </p:spPr>
+        <p:txBody>
+          <a:bodyPr wrap="square" lIns="45720" rIns="45720">
+            <a:spAutoFit/>
+          </a:bodyPr>
+          <a:lstStyle/>
+          <a:p>
+            <a:r>
+              <a:rPr sz="1100" b="0">
+                <a:solidFill>
+                  <a:srgbClr val="5B6770"/>
+                </a:solidFill>
+              </a:rPr>
+              <a:t>CEN429 Güvenli Programlama · Hafta 7</a:t>
+            </a:r>
+          </a:p>
+        </p:txBody>
+      </p:sp>
+      <p:sp>
+        <p:nvSpPr>
+          <p:cNvPr id="4" name="TextBox 3"/>
+          <p:cNvSpPr txBox="1"/>
+          <p:nvPr/>
+        </p:nvSpPr>
+        <p:spPr>
+          <a:xfrm>
+            <a:off x="640080" y="6446520"/>
+            <a:ext cx="7315200" cy="274320"/>
+          </a:xfrm>
+          <a:prstGeom prst="rect">
+            <a:avLst/>
+          </a:prstGeom>
+          <a:noFill/>
+        </p:spPr>
+        <p:txBody>
+          <a:bodyPr wrap="square" lIns="45720" rIns="45720">
+            <a:spAutoFit/>
+          </a:bodyPr>
+          <a:lstStyle/>
+          <a:p>
+            <a:r>
+              <a:rPr sz="1000" b="0">
+                <a:solidFill>
+                  <a:srgbClr val="5B6770"/>
+                </a:solidFill>
+              </a:rPr>
+              <a:t>RTEÜ Bilgisayar Mühendisliği · 2026-2027 Güz</a:t>
+            </a:r>
+          </a:p>
+        </p:txBody>
+      </p:sp>
+      <p:sp>
+        <p:nvSpPr>
+          <p:cNvPr id="5" name="TextBox 4"/>
+          <p:cNvSpPr txBox="1"/>
+          <p:nvPr/>
+        </p:nvSpPr>
+        <p:spPr>
+          <a:xfrm>
+            <a:off x="10637215" y="6446520"/>
+            <a:ext cx="914400" cy="274320"/>
+          </a:xfrm>
+          <a:prstGeom prst="rect">
+            <a:avLst/>
+          </a:prstGeom>
+          <a:noFill/>
+        </p:spPr>
+        <p:txBody>
+          <a:bodyPr wrap="square" lIns="45720" rIns="45720">
+            <a:spAutoFit/>
+          </a:bodyPr>
+          <a:lstStyle/>
+          <a:p>
+            <a:pPr algn="r"/>
+            <a:r>
+              <a:rPr sz="1000" b="0">
+                <a:solidFill>
+                  <a:srgbClr val="5B6770"/>
+                </a:solidFill>
+              </a:rPr>
+              <a:t>36</a:t>
+            </a:r>
+          </a:p>
+        </p:txBody>
+      </p:sp>
+      <p:sp>
+        <p:nvSpPr>
+          <p:cNvPr id="6" name="TextBox 5"/>
+          <p:cNvSpPr txBox="1"/>
+          <p:nvPr/>
+        </p:nvSpPr>
+        <p:spPr>
+          <a:xfrm>
+            <a:off x="640080" y="548640"/>
+            <a:ext cx="10911535" cy="731520"/>
+          </a:xfrm>
+          <a:prstGeom prst="rect">
+            <a:avLst/>
+          </a:prstGeom>
+          <a:noFill/>
+        </p:spPr>
+        <p:txBody>
+          <a:bodyPr wrap="square" lIns="45720" rIns="45720" anchor="ctr">
+            <a:spAutoFit/>
+          </a:bodyPr>
+          <a:lstStyle/>
+          <a:p>
+            <a:r>
+              <a:rPr sz="3000" b="1">
+                <a:solidFill>
+                  <a:srgbClr val="006D77"/>
+                </a:solidFill>
+              </a:rPr>
+              <a:t>Soru 4</a:t>
+            </a:r>
+          </a:p>
+        </p:txBody>
+      </p:sp>
+      <p:sp>
+        <p:nvSpPr>
+          <p:cNvPr id="7" name="TextBox 6"/>
+          <p:cNvSpPr txBox="1"/>
+          <p:nvPr/>
+        </p:nvSpPr>
+        <p:spPr>
+          <a:xfrm>
+            <a:off x="640080" y="1325880"/>
+            <a:ext cx="10911535" cy="439928"/>
+          </a:xfrm>
+          <a:prstGeom prst="rect">
+            <a:avLst/>
+          </a:prstGeom>
+          <a:noFill/>
+        </p:spPr>
+        <p:txBody>
+          <a:bodyPr wrap="square" lIns="45720" rIns="45720">
+            <a:spAutoFit/>
+          </a:bodyPr>
+          <a:lstStyle/>
+          <a:p>
+            <a:pPr algn="l"/>
+            <a:r>
+              <a:rPr sz="2000" b="1">
+                <a:solidFill>
+                  <a:srgbClr val="1F2D3A"/>
+                </a:solidFill>
+              </a:rPr>
+              <a:t>Kalan riskiniz ne? Neden kabul edilebilir?</a:t>
+            </a:r>
+          </a:p>
+        </p:txBody>
+      </p:sp>
+      <p:sp>
+        <p:nvSpPr>
+          <p:cNvPr id="8" name="TextBox 7"/>
+          <p:cNvSpPr txBox="1"/>
+          <p:nvPr/>
+        </p:nvSpPr>
+        <p:spPr>
+          <a:xfrm>
+            <a:off x="640080" y="1875536"/>
+            <a:ext cx="10911535" cy="439928"/>
+          </a:xfrm>
+          <a:prstGeom prst="rect">
+            <a:avLst/>
+          </a:prstGeom>
+          <a:noFill/>
+        </p:spPr>
+        <p:txBody>
+          <a:bodyPr wrap="square" lIns="45720" rIns="45720">
+            <a:spAutoFit/>
+          </a:bodyPr>
+          <a:lstStyle/>
+          <a:p>
+            <a:pPr algn="l"/>
+            <a:r>
+              <a:rPr sz="2000" b="0">
+                <a:solidFill>
+                  <a:srgbClr val="1F2D3A"/>
+                </a:solidFill>
+              </a:rPr>
+              <a:t>Dürüst ve gerekçeli yanıtlayın.</a:t>
+            </a:r>
+          </a:p>
+        </p:txBody>
+      </p:sp>
+    </p:spTree>
+  </p:cSld>
+  <p:clrMapOvr>
+    <a:masterClrMapping/>
+  </p:clrMapOvr>
+</p:sld>
+</file>
+
+<file path=ppt/slides/slide37.xml><?xml version="1.0" encoding="utf-8"?>
+<p:sld xmlns:a="http://schemas.openxmlformats.org/drawingml/2006/main" xmlns:p="http://schemas.openxmlformats.org/presentationml/2006/main" xmlns:r="http://schemas.openxmlformats.org/officeDocument/2006/relationships">
+  <p:cSld>
+    <p:bg>
+      <p:bgPr>
+        <a:solidFill>
+          <a:srgbClr val="006D77"/>
+        </a:solidFill>
+        <a:effectLst/>
+      </p:bgPr>
+    </p:bg>
+    <p:spTree>
+      <p:nvGrpSpPr>
+        <p:cNvPr id="1" name=""/>
+        <p:cNvGrpSpPr/>
+        <p:nvPr/>
+      </p:nvGrpSpPr>
+      <p:grpSpPr/>
+      <p:sp>
+        <p:nvSpPr>
+          <p:cNvPr id="2" name="TextBox 1"/>
+          <p:cNvSpPr txBox="1"/>
+          <p:nvPr/>
+        </p:nvSpPr>
+        <p:spPr>
+          <a:xfrm>
+            <a:off x="1051560" y="182880"/>
+            <a:ext cx="7315200" cy="320040"/>
+          </a:xfrm>
+          <a:prstGeom prst="rect">
+            <a:avLst/>
+          </a:prstGeom>
+          <a:noFill/>
+        </p:spPr>
+        <p:txBody>
+          <a:bodyPr wrap="square" lIns="45720" rIns="45720">
+            <a:spAutoFit/>
+          </a:bodyPr>
+          <a:lstStyle/>
+          <a:p>
+            <a:r>
+              <a:rPr sz="1100" b="0">
+                <a:solidFill>
+                  <a:srgbClr val="D8F0F2"/>
+                </a:solidFill>
+              </a:rPr>
+              <a:t>CEN429 Güvenli Programlama · Hafta 7</a:t>
+            </a:r>
+          </a:p>
+        </p:txBody>
+      </p:sp>
+      <p:sp>
+        <p:nvSpPr>
+          <p:cNvPr id="3" name="TextBox 2"/>
+          <p:cNvSpPr txBox="1"/>
+          <p:nvPr/>
+        </p:nvSpPr>
+        <p:spPr>
+          <a:xfrm>
+            <a:off x="640080" y="6446520"/>
+            <a:ext cx="7315200" cy="274320"/>
+          </a:xfrm>
+          <a:prstGeom prst="rect">
+            <a:avLst/>
+          </a:prstGeom>
+          <a:noFill/>
+        </p:spPr>
+        <p:txBody>
+          <a:bodyPr wrap="square" lIns="45720" rIns="45720">
+            <a:spAutoFit/>
+          </a:bodyPr>
+          <a:lstStyle/>
+          <a:p>
+            <a:r>
+              <a:rPr sz="1000" b="0">
+                <a:solidFill>
+                  <a:srgbClr val="D8F0F2"/>
+                </a:solidFill>
+              </a:rPr>
+              <a:t>RTEÜ Bilgisayar Mühendisliği · 2026-2027 Güz</a:t>
+            </a:r>
+          </a:p>
+        </p:txBody>
+      </p:sp>
+      <p:sp>
+        <p:nvSpPr>
+          <p:cNvPr id="4" name="TextBox 3"/>
+          <p:cNvSpPr txBox="1"/>
+          <p:nvPr/>
+        </p:nvSpPr>
+        <p:spPr>
+          <a:xfrm>
+            <a:off x="10637215" y="6446520"/>
+            <a:ext cx="914400" cy="274320"/>
+          </a:xfrm>
+          <a:prstGeom prst="rect">
+            <a:avLst/>
+          </a:prstGeom>
+          <a:noFill/>
+        </p:spPr>
+        <p:txBody>
+          <a:bodyPr wrap="square" lIns="45720" rIns="45720">
+            <a:spAutoFit/>
+          </a:bodyPr>
+          <a:lstStyle/>
+          <a:p>
+            <a:pPr algn="r"/>
+            <a:r>
+              <a:rPr sz="1000" b="0">
+                <a:solidFill>
+                  <a:srgbClr val="D8F0F2"/>
+                </a:solidFill>
+              </a:rPr>
+              <a:t>37</a:t>
+            </a:r>
+          </a:p>
+        </p:txBody>
+      </p:sp>
+      <p:sp>
+        <p:nvSpPr>
+          <p:cNvPr id="5" name="TextBox 4"/>
+          <p:cNvSpPr txBox="1"/>
+          <p:nvPr/>
+        </p:nvSpPr>
+        <p:spPr>
+          <a:xfrm>
+            <a:off x="640080" y="2743200"/>
+            <a:ext cx="10911535" cy="1280160"/>
+          </a:xfrm>
+          <a:prstGeom prst="rect">
+            <a:avLst/>
+          </a:prstGeom>
+          <a:noFill/>
+        </p:spPr>
+        <p:txBody>
+          <a:bodyPr wrap="square" lIns="45720" rIns="45720">
+            <a:spAutoFit/>
+          </a:bodyPr>
+          <a:lstStyle/>
+          <a:p>
+            <a:pPr algn="l"/>
+            <a:r>
+              <a:rPr sz="4000" b="1">
+                <a:solidFill>
+                  <a:srgbClr val="FFFFFF"/>
+                </a:solidFill>
+              </a:rPr>
+              <a:t>Ek · Sık yapılan hatalar</a:t>
+            </a:r>
+          </a:p>
+        </p:txBody>
+      </p:sp>
+    </p:spTree>
+  </p:cSld>
+  <p:clrMapOvr>
+    <a:masterClrMapping/>
+  </p:clrMapOvr>
+</p:sld>
+</file>
+
+<file path=ppt/slides/slide38.xml><?xml version="1.0" encoding="utf-8"?>
+<p:sld xmlns:a="http://schemas.openxmlformats.org/drawingml/2006/main" xmlns:p="http://schemas.openxmlformats.org/presentationml/2006/main" xmlns:r="http://schemas.openxmlformats.org/officeDocument/2006/relationships">
+  <p:cSld>
+    <p:spTree>
+      <p:nvGrpSpPr>
+        <p:cNvPr id="1" name=""/>
+        <p:cNvGrpSpPr/>
+        <p:nvPr/>
+      </p:nvGrpSpPr>
+      <p:grpSpPr/>
+      <p:pic>
+        <p:nvPicPr>
+          <p:cNvPr id="2" name="Picture 1" descr="rteu_logo_kucuk.jpg"/>
+          <p:cNvPicPr>
+            <a:picLocks noChangeAspect="1"/>
+          </p:cNvPicPr>
+          <p:nvPr/>
+        </p:nvPicPr>
+        <p:blipFill>
+          <a:blip r:embed="rId2"/>
+          <a:stretch>
+            <a:fillRect/>
+          </a:stretch>
+        </p:blipFill>
+        <p:spPr>
+          <a:xfrm>
+            <a:off x="640080" y="164592"/>
+            <a:ext cx="242773" cy="329184"/>
+          </a:xfrm>
+          <a:prstGeom prst="rect">
+            <a:avLst/>
+          </a:prstGeom>
+        </p:spPr>
+      </p:pic>
+      <p:sp>
+        <p:nvSpPr>
+          <p:cNvPr id="3" name="TextBox 2"/>
+          <p:cNvSpPr txBox="1"/>
+          <p:nvPr/>
+        </p:nvSpPr>
+        <p:spPr>
+          <a:xfrm>
+            <a:off x="1051560" y="182880"/>
+            <a:ext cx="7315200" cy="320040"/>
+          </a:xfrm>
+          <a:prstGeom prst="rect">
+            <a:avLst/>
+          </a:prstGeom>
+          <a:noFill/>
+        </p:spPr>
+        <p:txBody>
+          <a:bodyPr wrap="square" lIns="45720" rIns="45720">
+            <a:spAutoFit/>
+          </a:bodyPr>
+          <a:lstStyle/>
+          <a:p>
+            <a:r>
+              <a:rPr sz="1100" b="0">
+                <a:solidFill>
+                  <a:srgbClr val="5B6770"/>
+                </a:solidFill>
+              </a:rPr>
+              <a:t>CEN429 Güvenli Programlama · Hafta 7</a:t>
+            </a:r>
+          </a:p>
+        </p:txBody>
+      </p:sp>
+      <p:sp>
+        <p:nvSpPr>
+          <p:cNvPr id="4" name="TextBox 3"/>
+          <p:cNvSpPr txBox="1"/>
+          <p:nvPr/>
+        </p:nvSpPr>
+        <p:spPr>
+          <a:xfrm>
+            <a:off x="640080" y="6446520"/>
+            <a:ext cx="7315200" cy="274320"/>
+          </a:xfrm>
+          <a:prstGeom prst="rect">
+            <a:avLst/>
+          </a:prstGeom>
+          <a:noFill/>
+        </p:spPr>
+        <p:txBody>
+          <a:bodyPr wrap="square" lIns="45720" rIns="45720">
+            <a:spAutoFit/>
+          </a:bodyPr>
+          <a:lstStyle/>
+          <a:p>
+            <a:r>
+              <a:rPr sz="1000" b="0">
+                <a:solidFill>
+                  <a:srgbClr val="5B6770"/>
+                </a:solidFill>
+              </a:rPr>
+              <a:t>RTEÜ Bilgisayar Mühendisliği · 2026-2027 Güz</a:t>
+            </a:r>
+          </a:p>
+        </p:txBody>
+      </p:sp>
+      <p:sp>
+        <p:nvSpPr>
+          <p:cNvPr id="5" name="TextBox 4"/>
+          <p:cNvSpPr txBox="1"/>
+          <p:nvPr/>
+        </p:nvSpPr>
+        <p:spPr>
+          <a:xfrm>
+            <a:off x="10637215" y="6446520"/>
+            <a:ext cx="914400" cy="274320"/>
+          </a:xfrm>
+          <a:prstGeom prst="rect">
+            <a:avLst/>
+          </a:prstGeom>
+          <a:noFill/>
+        </p:spPr>
+        <p:txBody>
+          <a:bodyPr wrap="square" lIns="45720" rIns="45720">
+            <a:spAutoFit/>
+          </a:bodyPr>
+          <a:lstStyle/>
+          <a:p>
+            <a:pPr algn="r"/>
+            <a:r>
+              <a:rPr sz="1000" b="0">
+                <a:solidFill>
+                  <a:srgbClr val="5B6770"/>
+                </a:solidFill>
+              </a:rPr>
+              <a:t>38</a:t>
+            </a:r>
+          </a:p>
+        </p:txBody>
+      </p:sp>
+      <p:sp>
+        <p:nvSpPr>
+          <p:cNvPr id="6" name="TextBox 5"/>
+          <p:cNvSpPr txBox="1"/>
+          <p:nvPr/>
+        </p:nvSpPr>
+        <p:spPr>
+          <a:xfrm>
+            <a:off x="640080" y="548640"/>
+            <a:ext cx="10911535" cy="731520"/>
+          </a:xfrm>
+          <a:prstGeom prst="rect">
+            <a:avLst/>
+          </a:prstGeom>
+          <a:noFill/>
+        </p:spPr>
+        <p:txBody>
+          <a:bodyPr wrap="square" lIns="45720" rIns="45720" anchor="ctr">
+            <a:spAutoFit/>
+          </a:bodyPr>
+          <a:lstStyle/>
+          <a:p>
+            <a:r>
+              <a:rPr sz="3000" b="1">
+                <a:solidFill>
+                  <a:srgbClr val="006D77"/>
+                </a:solidFill>
+              </a:rPr>
+              <a:t>Hata listesi</a:t>
+            </a:r>
+          </a:p>
+        </p:txBody>
+      </p:sp>
+      <p:sp>
+        <p:nvSpPr>
+          <p:cNvPr id="7" name="TextBox 6"/>
+          <p:cNvSpPr txBox="1"/>
+          <p:nvPr/>
+        </p:nvSpPr>
+        <p:spPr>
+          <a:xfrm>
+            <a:off x="640080" y="1325880"/>
+            <a:ext cx="10911535" cy="1971040"/>
+          </a:xfrm>
+          <a:prstGeom prst="rect">
+            <a:avLst/>
+          </a:prstGeom>
+          <a:noFill/>
+        </p:spPr>
+        <p:txBody>
+          <a:bodyPr wrap="square" lIns="45720" rIns="45720">
+            <a:spAutoFit/>
+          </a:bodyPr>
+          <a:lstStyle/>
+          <a:p>
+            <a:pPr>
+              <a:spcAft>
+                <a:spcPts val="300"/>
+              </a:spcAft>
+            </a:pPr>
+            <a:r>
+              <a:rPr sz="2000" b="1">
+                <a:solidFill>
+                  <a:srgbClr val="006D77"/>
+                </a:solidFill>
+              </a:rPr>
+              <a:t>• </a:t>
+            </a:r>
+            <a:r>
+              <a:rPr sz="2000" b="0">
+                <a:solidFill>
+                  <a:srgbClr val="1F2D3A"/>
+                </a:solidFill>
+              </a:rPr>
+              <a:t>Kılavuz ile kod sürümü farklı.</a:t>
+            </a:r>
+          </a:p>
+          <a:p>
+            <a:pPr>
+              <a:spcAft>
+                <a:spcPts val="300"/>
+              </a:spcAft>
+            </a:pPr>
+            <a:r>
+              <a:rPr sz="2000" b="1">
+                <a:solidFill>
+                  <a:srgbClr val="006D77"/>
+                </a:solidFill>
+              </a:rPr>
+              <a:t>• </a:t>
+            </a:r>
+            <a:r>
+              <a:rPr sz="2000" b="0">
+                <a:solidFill>
+                  <a:srgbClr val="1F2D3A"/>
+                </a:solidFill>
+              </a:rPr>
+              <a:t>Kanıtsız "yapıldı".</a:t>
+            </a:r>
+          </a:p>
+          <a:p>
+            <a:pPr>
+              <a:spcAft>
+                <a:spcPts val="300"/>
+              </a:spcAft>
+            </a:pPr>
+            <a:r>
+              <a:rPr sz="2000" b="1">
+                <a:solidFill>
+                  <a:srgbClr val="006D77"/>
+                </a:solidFill>
+              </a:rPr>
+              <a:t>• </a:t>
+            </a:r>
+            <a:r>
+              <a:rPr sz="2000" b="0">
+                <a:solidFill>
+                  <a:srgbClr val="1F2D3A"/>
+                </a:solidFill>
+              </a:rPr>
+              <a:t>Canlı demo çökmesi (yedek yok).</a:t>
+            </a:r>
+          </a:p>
+          <a:p>
+            <a:pPr>
+              <a:spcAft>
+                <a:spcPts val="300"/>
+              </a:spcAft>
+            </a:pPr>
+            <a:r>
+              <a:rPr sz="2000" b="1">
+                <a:solidFill>
+                  <a:srgbClr val="006D77"/>
+                </a:solidFill>
+              </a:rPr>
+              <a:t>• </a:t>
+            </a:r>
+            <a:r>
+              <a:rPr sz="2000" b="0">
+                <a:solidFill>
+                  <a:srgbClr val="1F2D3A"/>
+                </a:solidFill>
+              </a:rPr>
+              <a:t>Kalan risk bölümü boş.</a:t>
+            </a:r>
+          </a:p>
+          <a:p>
+            <a:pPr>
+              <a:spcAft>
+                <a:spcPts val="300"/>
+              </a:spcAft>
+            </a:pPr>
+            <a:r>
+              <a:rPr sz="2000" b="1">
+                <a:solidFill>
+                  <a:srgbClr val="006D77"/>
+                </a:solidFill>
+              </a:rPr>
+              <a:t>• </a:t>
+            </a:r>
+            <a:r>
+              <a:rPr sz="2000" b="0">
+                <a:solidFill>
+                  <a:srgbClr val="1F2D3A"/>
+                </a:solidFill>
+              </a:rPr>
+              <a:t>Depoda gerçek veri.</a:t>
+            </a:r>
+          </a:p>
+        </p:txBody>
+      </p:sp>
+    </p:spTree>
+  </p:cSld>
+  <p:clrMapOvr>
+    <a:masterClrMapping/>
+  </p:clrMapOvr>
+</p:sld>
+</file>
+
+<file path=ppt/slides/slide39.xml><?xml version="1.0" encoding="utf-8"?>
+<p:sld xmlns:a="http://schemas.openxmlformats.org/drawingml/2006/main" xmlns:p="http://schemas.openxmlformats.org/presentationml/2006/main" xmlns:r="http://schemas.openxmlformats.org/officeDocument/2006/relationships">
+  <p:cSld>
+    <p:spTree>
+      <p:nvGrpSpPr>
+        <p:cNvPr id="1" name=""/>
+        <p:cNvGrpSpPr/>
+        <p:nvPr/>
+      </p:nvGrpSpPr>
+      <p:grpSpPr/>
+      <p:pic>
+        <p:nvPicPr>
+          <p:cNvPr id="2" name="Picture 1" descr="rteu_logo_kucuk.jpg"/>
+          <p:cNvPicPr>
+            <a:picLocks noChangeAspect="1"/>
+          </p:cNvPicPr>
+          <p:nvPr/>
+        </p:nvPicPr>
+        <p:blipFill>
+          <a:blip r:embed="rId2"/>
+          <a:stretch>
+            <a:fillRect/>
+          </a:stretch>
+        </p:blipFill>
+        <p:spPr>
+          <a:xfrm>
+            <a:off x="640080" y="164592"/>
+            <a:ext cx="242773" cy="329184"/>
+          </a:xfrm>
+          <a:prstGeom prst="rect">
+            <a:avLst/>
+          </a:prstGeom>
+        </p:spPr>
+      </p:pic>
+      <p:sp>
+        <p:nvSpPr>
+          <p:cNvPr id="3" name="TextBox 2"/>
+          <p:cNvSpPr txBox="1"/>
+          <p:nvPr/>
+        </p:nvSpPr>
+        <p:spPr>
+          <a:xfrm>
+            <a:off x="1051560" y="182880"/>
+            <a:ext cx="7315200" cy="320040"/>
+          </a:xfrm>
+          <a:prstGeom prst="rect">
+            <a:avLst/>
+          </a:prstGeom>
+          <a:noFill/>
+        </p:spPr>
+        <p:txBody>
+          <a:bodyPr wrap="square" lIns="45720" rIns="45720">
+            <a:spAutoFit/>
+          </a:bodyPr>
+          <a:lstStyle/>
+          <a:p>
+            <a:r>
+              <a:rPr sz="1100" b="0">
+                <a:solidFill>
+                  <a:srgbClr val="5B6770"/>
+                </a:solidFill>
+              </a:rPr>
+              <a:t>CEN429 Güvenli Programlama · Hafta 7</a:t>
+            </a:r>
+          </a:p>
+        </p:txBody>
+      </p:sp>
+      <p:sp>
+        <p:nvSpPr>
+          <p:cNvPr id="4" name="TextBox 3"/>
+          <p:cNvSpPr txBox="1"/>
+          <p:nvPr/>
+        </p:nvSpPr>
+        <p:spPr>
+          <a:xfrm>
+            <a:off x="640080" y="6446520"/>
+            <a:ext cx="7315200" cy="274320"/>
+          </a:xfrm>
+          <a:prstGeom prst="rect">
+            <a:avLst/>
+          </a:prstGeom>
+          <a:noFill/>
+        </p:spPr>
+        <p:txBody>
+          <a:bodyPr wrap="square" lIns="45720" rIns="45720">
+            <a:spAutoFit/>
+          </a:bodyPr>
+          <a:lstStyle/>
+          <a:p>
+            <a:r>
+              <a:rPr sz="1000" b="0">
+                <a:solidFill>
+                  <a:srgbClr val="5B6770"/>
+                </a:solidFill>
+              </a:rPr>
+              <a:t>RTEÜ Bilgisayar Mühendisliği · 2026-2027 Güz</a:t>
+            </a:r>
+          </a:p>
+        </p:txBody>
+      </p:sp>
+      <p:sp>
+        <p:nvSpPr>
+          <p:cNvPr id="5" name="TextBox 4"/>
+          <p:cNvSpPr txBox="1"/>
+          <p:nvPr/>
+        </p:nvSpPr>
+        <p:spPr>
+          <a:xfrm>
+            <a:off x="10637215" y="6446520"/>
+            <a:ext cx="914400" cy="274320"/>
+          </a:xfrm>
+          <a:prstGeom prst="rect">
+            <a:avLst/>
+          </a:prstGeom>
+          <a:noFill/>
+        </p:spPr>
+        <p:txBody>
+          <a:bodyPr wrap="square" lIns="45720" rIns="45720">
+            <a:spAutoFit/>
+          </a:bodyPr>
+          <a:lstStyle/>
+          <a:p>
+            <a:pPr algn="r"/>
+            <a:r>
+              <a:rPr sz="1000" b="0">
+                <a:solidFill>
+                  <a:srgbClr val="5B6770"/>
+                </a:solidFill>
+              </a:rPr>
+              <a:t>39</a:t>
+            </a:r>
+          </a:p>
+        </p:txBody>
+      </p:sp>
+      <p:sp>
+        <p:nvSpPr>
+          <p:cNvPr id="6" name="TextBox 5"/>
+          <p:cNvSpPr txBox="1"/>
+          <p:nvPr/>
+        </p:nvSpPr>
+        <p:spPr>
+          <a:xfrm>
+            <a:off x="640080" y="548640"/>
+            <a:ext cx="10911535" cy="731520"/>
+          </a:xfrm>
+          <a:prstGeom prst="rect">
+            <a:avLst/>
+          </a:prstGeom>
+          <a:noFill/>
+        </p:spPr>
+        <p:txBody>
+          <a:bodyPr wrap="square" lIns="45720" rIns="45720" anchor="ctr">
+            <a:spAutoFit/>
+          </a:bodyPr>
+          <a:lstStyle/>
+          <a:p>
+            <a:r>
+              <a:rPr sz="3000" b="1">
+                <a:solidFill>
+                  <a:srgbClr val="006D77"/>
+                </a:solidFill>
+              </a:rPr>
               <a:t>Son söz (RAP1)</a:t>
             </a:r>
           </a:p>
@@ -11275,6 +12698,205 @@
                 </a:solidFill>
               </a:rPr>
               <a:t>4</a:t>
+            </a:r>
+          </a:p>
+        </p:txBody>
+      </p:sp>
+      <p:sp>
+        <p:nvSpPr>
+          <p:cNvPr id="6" name="TextBox 5"/>
+          <p:cNvSpPr txBox="1"/>
+          <p:nvPr/>
+        </p:nvSpPr>
+        <p:spPr>
+          <a:xfrm>
+            <a:off x="640080" y="548640"/>
+            <a:ext cx="10911535" cy="731520"/>
+          </a:xfrm>
+          <a:prstGeom prst="rect">
+            <a:avLst/>
+          </a:prstGeom>
+          <a:noFill/>
+        </p:spPr>
+        <p:txBody>
+          <a:bodyPr wrap="square" lIns="45720" rIns="45720" anchor="ctr">
+            <a:spAutoFit/>
+          </a:bodyPr>
+          <a:lstStyle/>
+          <a:p>
+            <a:r>
+              <a:rPr sz="3000" b="1">
+                <a:solidFill>
+                  <a:srgbClr val="006D77"/>
+                </a:solidFill>
+              </a:rPr>
+              <a:t>Rubriğin okunuşu — şema</a:t>
+            </a:r>
+          </a:p>
+        </p:txBody>
+      </p:sp>
+      <p:pic>
+        <p:nvPicPr>
+          <p:cNvPr id="7" name="Picture 6" descr="h07-04-rubrik.png"/>
+          <p:cNvPicPr>
+            <a:picLocks noChangeAspect="1"/>
+          </p:cNvPicPr>
+          <p:nvPr/>
+        </p:nvPicPr>
+        <p:blipFill>
+          <a:blip r:embed="rId3"/>
+          <a:stretch>
+            <a:fillRect/>
+          </a:stretch>
+        </p:blipFill>
+        <p:spPr>
+          <a:xfrm>
+            <a:off x="2046645" y="1325880"/>
+            <a:ext cx="8098404" cy="3210484"/>
+          </a:xfrm>
+          <a:prstGeom prst="rect">
+            <a:avLst/>
+          </a:prstGeom>
+        </p:spPr>
+      </p:pic>
+    </p:spTree>
+  </p:cSld>
+  <p:clrMapOvr>
+    <a:masterClrMapping/>
+  </p:clrMapOvr>
+</p:sld>
+</file>
+
+<file path=ppt/slides/slide5.xml><?xml version="1.0" encoding="utf-8"?>
+<p:sld xmlns:a="http://schemas.openxmlformats.org/drawingml/2006/main" xmlns:p="http://schemas.openxmlformats.org/presentationml/2006/main" xmlns:r="http://schemas.openxmlformats.org/officeDocument/2006/relationships">
+  <p:cSld>
+    <p:spTree>
+      <p:nvGrpSpPr>
+        <p:cNvPr id="1" name=""/>
+        <p:cNvGrpSpPr/>
+        <p:nvPr/>
+      </p:nvGrpSpPr>
+      <p:grpSpPr/>
+      <p:pic>
+        <p:nvPicPr>
+          <p:cNvPr id="2" name="Picture 1" descr="rteu_logo_kucuk.jpg"/>
+          <p:cNvPicPr>
+            <a:picLocks noChangeAspect="1"/>
+          </p:cNvPicPr>
+          <p:nvPr/>
+        </p:nvPicPr>
+        <p:blipFill>
+          <a:blip r:embed="rId2"/>
+          <a:stretch>
+            <a:fillRect/>
+          </a:stretch>
+        </p:blipFill>
+        <p:spPr>
+          <a:xfrm>
+            <a:off x="640080" y="164592"/>
+            <a:ext cx="242773" cy="329184"/>
+          </a:xfrm>
+          <a:prstGeom prst="rect">
+            <a:avLst/>
+          </a:prstGeom>
+        </p:spPr>
+      </p:pic>
+      <p:sp>
+        <p:nvSpPr>
+          <p:cNvPr id="3" name="TextBox 2"/>
+          <p:cNvSpPr txBox="1"/>
+          <p:nvPr/>
+        </p:nvSpPr>
+        <p:spPr>
+          <a:xfrm>
+            <a:off x="1051560" y="182880"/>
+            <a:ext cx="7315200" cy="320040"/>
+          </a:xfrm>
+          <a:prstGeom prst="rect">
+            <a:avLst/>
+          </a:prstGeom>
+          <a:noFill/>
+        </p:spPr>
+        <p:txBody>
+          <a:bodyPr wrap="square" lIns="45720" rIns="45720">
+            <a:spAutoFit/>
+          </a:bodyPr>
+          <a:lstStyle/>
+          <a:p>
+            <a:r>
+              <a:rPr sz="1100" b="0">
+                <a:solidFill>
+                  <a:srgbClr val="5B6770"/>
+                </a:solidFill>
+              </a:rPr>
+              <a:t>CEN429 Güvenli Programlama · Hafta 7</a:t>
+            </a:r>
+          </a:p>
+        </p:txBody>
+      </p:sp>
+      <p:sp>
+        <p:nvSpPr>
+          <p:cNvPr id="4" name="TextBox 3"/>
+          <p:cNvSpPr txBox="1"/>
+          <p:nvPr/>
+        </p:nvSpPr>
+        <p:spPr>
+          <a:xfrm>
+            <a:off x="640080" y="6446520"/>
+            <a:ext cx="7315200" cy="274320"/>
+          </a:xfrm>
+          <a:prstGeom prst="rect">
+            <a:avLst/>
+          </a:prstGeom>
+          <a:noFill/>
+        </p:spPr>
+        <p:txBody>
+          <a:bodyPr wrap="square" lIns="45720" rIns="45720">
+            <a:spAutoFit/>
+          </a:bodyPr>
+          <a:lstStyle/>
+          <a:p>
+            <a:r>
+              <a:rPr sz="1000" b="0">
+                <a:solidFill>
+                  <a:srgbClr val="5B6770"/>
+                </a:solidFill>
+              </a:rPr>
+              <a:t>RTEÜ Bilgisayar Mühendisliği · 2026-2027 Güz</a:t>
+            </a:r>
+          </a:p>
+        </p:txBody>
+      </p:sp>
+      <p:sp>
+        <p:nvSpPr>
+          <p:cNvPr id="5" name="TextBox 4"/>
+          <p:cNvSpPr txBox="1"/>
+          <p:nvPr/>
+        </p:nvSpPr>
+        <p:spPr>
+          <a:xfrm>
+            <a:off x="10637215" y="6446520"/>
+            <a:ext cx="914400" cy="274320"/>
+          </a:xfrm>
+          <a:prstGeom prst="rect">
+            <a:avLst/>
+          </a:prstGeom>
+          <a:noFill/>
+        </p:spPr>
+        <p:txBody>
+          <a:bodyPr wrap="square" lIns="45720" rIns="45720">
+            <a:spAutoFit/>
+          </a:bodyPr>
+          <a:lstStyle/>
+          <a:p>
+            <a:pPr algn="r"/>
+            <a:r>
+              <a:rPr sz="1000" b="0">
+                <a:solidFill>
+                  <a:srgbClr val="5B6770"/>
+                </a:solidFill>
+              </a:rPr>
+              <a:t>5</a:t>
             </a:r>
           </a:p>
         </p:txBody>
@@ -11547,7 +13169,7 @@
 </p:sld>
 </file>
 
-<file path=ppt/slides/slide5.xml><?xml version="1.0" encoding="utf-8"?>
+<file path=ppt/slides/slide6.xml><?xml version="1.0" encoding="utf-8"?>
 <p:sld xmlns:a="http://schemas.openxmlformats.org/drawingml/2006/main" xmlns:p="http://schemas.openxmlformats.org/presentationml/2006/main" xmlns:r="http://schemas.openxmlformats.org/officeDocument/2006/relationships">
   <p:cSld>
     <p:spTree>
@@ -11676,7 +13298,206 @@
                   <a:srgbClr val="5B6770"/>
                 </a:solidFill>
               </a:rPr>
-              <a:t>5</a:t>
+              <a:t>6</a:t>
+            </a:r>
+          </a:p>
+        </p:txBody>
+      </p:sp>
+      <p:sp>
+        <p:nvSpPr>
+          <p:cNvPr id="6" name="TextBox 5"/>
+          <p:cNvSpPr txBox="1"/>
+          <p:nvPr/>
+        </p:nvSpPr>
+        <p:spPr>
+          <a:xfrm>
+            <a:off x="640080" y="548640"/>
+            <a:ext cx="10911535" cy="731520"/>
+          </a:xfrm>
+          <a:prstGeom prst="rect">
+            <a:avLst/>
+          </a:prstGeom>
+          <a:noFill/>
+        </p:spPr>
+        <p:txBody>
+          <a:bodyPr wrap="square" lIns="45720" rIns="45720" anchor="ctr">
+            <a:spAutoFit/>
+          </a:bodyPr>
+          <a:lstStyle/>
+          <a:p>
+            <a:r>
+              <a:rPr sz="3000" b="1">
+                <a:solidFill>
+                  <a:srgbClr val="006D77"/>
+                </a:solidFill>
+              </a:rPr>
+              <a:t>RAP1 teslimi — şema</a:t>
+            </a:r>
+          </a:p>
+        </p:txBody>
+      </p:sp>
+      <p:pic>
+        <p:nvPicPr>
+          <p:cNvPr id="7" name="Picture 6" descr="h07-02-rap1.png"/>
+          <p:cNvPicPr>
+            <a:picLocks noChangeAspect="1"/>
+          </p:cNvPicPr>
+          <p:nvPr/>
+        </p:nvPicPr>
+        <p:blipFill>
+          <a:blip r:embed="rId3"/>
+          <a:stretch>
+            <a:fillRect/>
+          </a:stretch>
+        </p:blipFill>
+        <p:spPr>
+          <a:xfrm>
+            <a:off x="2046645" y="1325880"/>
+            <a:ext cx="8098404" cy="3778947"/>
+          </a:xfrm>
+          <a:prstGeom prst="rect">
+            <a:avLst/>
+          </a:prstGeom>
+        </p:spPr>
+      </p:pic>
+    </p:spTree>
+  </p:cSld>
+  <p:clrMapOvr>
+    <a:masterClrMapping/>
+  </p:clrMapOvr>
+</p:sld>
+</file>
+
+<file path=ppt/slides/slide7.xml><?xml version="1.0" encoding="utf-8"?>
+<p:sld xmlns:a="http://schemas.openxmlformats.org/drawingml/2006/main" xmlns:p="http://schemas.openxmlformats.org/presentationml/2006/main" xmlns:r="http://schemas.openxmlformats.org/officeDocument/2006/relationships">
+  <p:cSld>
+    <p:spTree>
+      <p:nvGrpSpPr>
+        <p:cNvPr id="1" name=""/>
+        <p:cNvGrpSpPr/>
+        <p:nvPr/>
+      </p:nvGrpSpPr>
+      <p:grpSpPr/>
+      <p:pic>
+        <p:nvPicPr>
+          <p:cNvPr id="2" name="Picture 1" descr="rteu_logo_kucuk.jpg"/>
+          <p:cNvPicPr>
+            <a:picLocks noChangeAspect="1"/>
+          </p:cNvPicPr>
+          <p:nvPr/>
+        </p:nvPicPr>
+        <p:blipFill>
+          <a:blip r:embed="rId2"/>
+          <a:stretch>
+            <a:fillRect/>
+          </a:stretch>
+        </p:blipFill>
+        <p:spPr>
+          <a:xfrm>
+            <a:off x="640080" y="164592"/>
+            <a:ext cx="242773" cy="329184"/>
+          </a:xfrm>
+          <a:prstGeom prst="rect">
+            <a:avLst/>
+          </a:prstGeom>
+        </p:spPr>
+      </p:pic>
+      <p:sp>
+        <p:nvSpPr>
+          <p:cNvPr id="3" name="TextBox 2"/>
+          <p:cNvSpPr txBox="1"/>
+          <p:nvPr/>
+        </p:nvSpPr>
+        <p:spPr>
+          <a:xfrm>
+            <a:off x="1051560" y="182880"/>
+            <a:ext cx="7315200" cy="320040"/>
+          </a:xfrm>
+          <a:prstGeom prst="rect">
+            <a:avLst/>
+          </a:prstGeom>
+          <a:noFill/>
+        </p:spPr>
+        <p:txBody>
+          <a:bodyPr wrap="square" lIns="45720" rIns="45720">
+            <a:spAutoFit/>
+          </a:bodyPr>
+          <a:lstStyle/>
+          <a:p>
+            <a:r>
+              <a:rPr sz="1100" b="0">
+                <a:solidFill>
+                  <a:srgbClr val="5B6770"/>
+                </a:solidFill>
+              </a:rPr>
+              <a:t>CEN429 Güvenli Programlama · Hafta 7</a:t>
+            </a:r>
+          </a:p>
+        </p:txBody>
+      </p:sp>
+      <p:sp>
+        <p:nvSpPr>
+          <p:cNvPr id="4" name="TextBox 3"/>
+          <p:cNvSpPr txBox="1"/>
+          <p:nvPr/>
+        </p:nvSpPr>
+        <p:spPr>
+          <a:xfrm>
+            <a:off x="640080" y="6446520"/>
+            <a:ext cx="7315200" cy="274320"/>
+          </a:xfrm>
+          <a:prstGeom prst="rect">
+            <a:avLst/>
+          </a:prstGeom>
+          <a:noFill/>
+        </p:spPr>
+        <p:txBody>
+          <a:bodyPr wrap="square" lIns="45720" rIns="45720">
+            <a:spAutoFit/>
+          </a:bodyPr>
+          <a:lstStyle/>
+          <a:p>
+            <a:r>
+              <a:rPr sz="1000" b="0">
+                <a:solidFill>
+                  <a:srgbClr val="5B6770"/>
+                </a:solidFill>
+              </a:rPr>
+              <a:t>RTEÜ Bilgisayar Mühendisliği · 2026-2027 Güz</a:t>
+            </a:r>
+          </a:p>
+        </p:txBody>
+      </p:sp>
+      <p:sp>
+        <p:nvSpPr>
+          <p:cNvPr id="5" name="TextBox 4"/>
+          <p:cNvSpPr txBox="1"/>
+          <p:nvPr/>
+        </p:nvSpPr>
+        <p:spPr>
+          <a:xfrm>
+            <a:off x="10637215" y="6446520"/>
+            <a:ext cx="914400" cy="274320"/>
+          </a:xfrm>
+          <a:prstGeom prst="rect">
+            <a:avLst/>
+          </a:prstGeom>
+          <a:noFill/>
+        </p:spPr>
+        <p:txBody>
+          <a:bodyPr wrap="square" lIns="45720" rIns="45720">
+            <a:spAutoFit/>
+          </a:bodyPr>
+          <a:lstStyle/>
+          <a:p>
+            <a:pPr algn="r"/>
+            <a:r>
+              <a:rPr sz="1000" b="0">
+                <a:solidFill>
+                  <a:srgbClr val="5B6770"/>
+                </a:solidFill>
+              </a:rPr>
+              <a:t>7</a:t>
             </a:r>
           </a:p>
         </p:txBody>
@@ -12056,745 +13877,6 @@
 </p:sld>
 </file>
 
-<file path=ppt/slides/slide6.xml><?xml version="1.0" encoding="utf-8"?>
-<p:sld xmlns:a="http://schemas.openxmlformats.org/drawingml/2006/main" xmlns:p="http://schemas.openxmlformats.org/presentationml/2006/main" xmlns:r="http://schemas.openxmlformats.org/officeDocument/2006/relationships">
-  <p:cSld>
-    <p:spTree>
-      <p:nvGrpSpPr>
-        <p:cNvPr id="1" name=""/>
-        <p:cNvGrpSpPr/>
-        <p:nvPr/>
-      </p:nvGrpSpPr>
-      <p:grpSpPr/>
-      <p:pic>
-        <p:nvPicPr>
-          <p:cNvPr id="2" name="Picture 1" descr="rteu_logo_kucuk.jpg"/>
-          <p:cNvPicPr>
-            <a:picLocks noChangeAspect="1"/>
-          </p:cNvPicPr>
-          <p:nvPr/>
-        </p:nvPicPr>
-        <p:blipFill>
-          <a:blip r:embed="rId2"/>
-          <a:stretch>
-            <a:fillRect/>
-          </a:stretch>
-        </p:blipFill>
-        <p:spPr>
-          <a:xfrm>
-            <a:off x="640080" y="164592"/>
-            <a:ext cx="242773" cy="329184"/>
-          </a:xfrm>
-          <a:prstGeom prst="rect">
-            <a:avLst/>
-          </a:prstGeom>
-        </p:spPr>
-      </p:pic>
-      <p:sp>
-        <p:nvSpPr>
-          <p:cNvPr id="3" name="TextBox 2"/>
-          <p:cNvSpPr txBox="1"/>
-          <p:nvPr/>
-        </p:nvSpPr>
-        <p:spPr>
-          <a:xfrm>
-            <a:off x="1051560" y="182880"/>
-            <a:ext cx="7315200" cy="320040"/>
-          </a:xfrm>
-          <a:prstGeom prst="rect">
-            <a:avLst/>
-          </a:prstGeom>
-          <a:noFill/>
-        </p:spPr>
-        <p:txBody>
-          <a:bodyPr wrap="square" lIns="45720" rIns="45720">
-            <a:spAutoFit/>
-          </a:bodyPr>
-          <a:lstStyle/>
-          <a:p>
-            <a:r>
-              <a:rPr sz="1100" b="0">
-                <a:solidFill>
-                  <a:srgbClr val="5B6770"/>
-                </a:solidFill>
-              </a:rPr>
-              <a:t>CEN429 Güvenli Programlama · Hafta 7</a:t>
-            </a:r>
-          </a:p>
-        </p:txBody>
-      </p:sp>
-      <p:sp>
-        <p:nvSpPr>
-          <p:cNvPr id="4" name="TextBox 3"/>
-          <p:cNvSpPr txBox="1"/>
-          <p:nvPr/>
-        </p:nvSpPr>
-        <p:spPr>
-          <a:xfrm>
-            <a:off x="640080" y="6446520"/>
-            <a:ext cx="7315200" cy="274320"/>
-          </a:xfrm>
-          <a:prstGeom prst="rect">
-            <a:avLst/>
-          </a:prstGeom>
-          <a:noFill/>
-        </p:spPr>
-        <p:txBody>
-          <a:bodyPr wrap="square" lIns="45720" rIns="45720">
-            <a:spAutoFit/>
-          </a:bodyPr>
-          <a:lstStyle/>
-          <a:p>
-            <a:r>
-              <a:rPr sz="1000" b="0">
-                <a:solidFill>
-                  <a:srgbClr val="5B6770"/>
-                </a:solidFill>
-              </a:rPr>
-              <a:t>RTEÜ Bilgisayar Mühendisliği · 2026-2027 Güz</a:t>
-            </a:r>
-          </a:p>
-        </p:txBody>
-      </p:sp>
-      <p:sp>
-        <p:nvSpPr>
-          <p:cNvPr id="5" name="TextBox 4"/>
-          <p:cNvSpPr txBox="1"/>
-          <p:nvPr/>
-        </p:nvSpPr>
-        <p:spPr>
-          <a:xfrm>
-            <a:off x="10637215" y="6446520"/>
-            <a:ext cx="914400" cy="274320"/>
-          </a:xfrm>
-          <a:prstGeom prst="rect">
-            <a:avLst/>
-          </a:prstGeom>
-          <a:noFill/>
-        </p:spPr>
-        <p:txBody>
-          <a:bodyPr wrap="square" lIns="45720" rIns="45720">
-            <a:spAutoFit/>
-          </a:bodyPr>
-          <a:lstStyle/>
-          <a:p>
-            <a:pPr algn="r"/>
-            <a:r>
-              <a:rPr sz="1000" b="0">
-                <a:solidFill>
-                  <a:srgbClr val="5B6770"/>
-                </a:solidFill>
-              </a:rPr>
-              <a:t>6</a:t>
-            </a:r>
-          </a:p>
-        </p:txBody>
-      </p:sp>
-      <p:sp>
-        <p:nvSpPr>
-          <p:cNvPr id="6" name="TextBox 5"/>
-          <p:cNvSpPr txBox="1"/>
-          <p:nvPr/>
-        </p:nvSpPr>
-        <p:spPr>
-          <a:xfrm>
-            <a:off x="640080" y="548640"/>
-            <a:ext cx="10911535" cy="731520"/>
-          </a:xfrm>
-          <a:prstGeom prst="rect">
-            <a:avLst/>
-          </a:prstGeom>
-          <a:noFill/>
-        </p:spPr>
-        <p:txBody>
-          <a:bodyPr wrap="square" lIns="45720" rIns="45720" anchor="ctr">
-            <a:spAutoFit/>
-          </a:bodyPr>
-          <a:lstStyle/>
-          <a:p>
-            <a:r>
-              <a:rPr sz="3000" b="1">
-                <a:solidFill>
-                  <a:srgbClr val="006D77"/>
-                </a:solidFill>
-              </a:rPr>
-              <a:t>Önerilen gösterim akışı</a:t>
-            </a:r>
-          </a:p>
-        </p:txBody>
-      </p:sp>
-      <p:sp>
-        <p:nvSpPr>
-          <p:cNvPr id="7" name="TextBox 6"/>
-          <p:cNvSpPr txBox="1"/>
-          <p:nvPr/>
-        </p:nvSpPr>
-        <p:spPr>
-          <a:xfrm>
-            <a:off x="640080" y="1325880"/>
-            <a:ext cx="10911535" cy="1971040"/>
-          </a:xfrm>
-          <a:prstGeom prst="rect">
-            <a:avLst/>
-          </a:prstGeom>
-          <a:noFill/>
-        </p:spPr>
-        <p:txBody>
-          <a:bodyPr wrap="square" lIns="45720" rIns="45720">
-            <a:spAutoFit/>
-          </a:bodyPr>
-          <a:lstStyle/>
-          <a:p>
-            <a:pPr>
-              <a:spcAft>
-                <a:spcPts val="300"/>
-              </a:spcAft>
-            </a:pPr>
-            <a:r>
-              <a:rPr sz="2000" b="1">
-                <a:solidFill>
-                  <a:srgbClr val="006D77"/>
-                </a:solidFill>
-              </a:rPr>
-              <a:t>1. </a:t>
-            </a:r>
-            <a:r>
-              <a:rPr sz="2000" b="1">
-                <a:solidFill>
-                  <a:srgbClr val="1F2D3A"/>
-                </a:solidFill>
-              </a:rPr>
-              <a:t>Ürün ve mimari</a:t>
-            </a:r>
-            <a:r>
-              <a:rPr sz="2000" b="0">
-                <a:solidFill>
-                  <a:srgbClr val="1F2D3A"/>
-                </a:solidFill>
-              </a:rPr>
-              <a:t> (S2–S3): tek şema, güven sınırları</a:t>
-            </a:r>
-          </a:p>
-          <a:p>
-            <a:pPr>
-              <a:spcAft>
-                <a:spcPts val="300"/>
-              </a:spcAft>
-            </a:pPr>
-            <a:r>
-              <a:rPr sz="2000" b="1">
-                <a:solidFill>
-                  <a:srgbClr val="006D77"/>
-                </a:solidFill>
-              </a:rPr>
-              <a:t>2. </a:t>
-            </a:r>
-            <a:r>
-              <a:rPr sz="2000" b="1">
-                <a:solidFill>
-                  <a:srgbClr val="1F2D3A"/>
-                </a:solidFill>
-              </a:rPr>
-              <a:t>Tehditler ve varlıklar</a:t>
-            </a:r>
-            <a:r>
-              <a:rPr sz="2000" b="0">
-                <a:solidFill>
-                  <a:srgbClr val="1F2D3A"/>
-                </a:solidFill>
-              </a:rPr>
-              <a:t> (S4–S5): en kritik üç tehdit</a:t>
-            </a:r>
-          </a:p>
-          <a:p>
-            <a:pPr>
-              <a:spcAft>
-                <a:spcPts val="300"/>
-              </a:spcAft>
-            </a:pPr>
-            <a:r>
-              <a:rPr sz="2000" b="1">
-                <a:solidFill>
-                  <a:srgbClr val="006D77"/>
-                </a:solidFill>
-              </a:rPr>
-              <a:t>3. </a:t>
-            </a:r>
-            <a:r>
-              <a:rPr sz="2000" b="1">
-                <a:solidFill>
-                  <a:srgbClr val="1F2D3A"/>
-                </a:solidFill>
-              </a:rPr>
-              <a:t>Canlı gösterim:</a:t>
-            </a:r>
-            <a:r>
-              <a:rPr sz="2000" b="0">
-                <a:solidFill>
-                  <a:srgbClr val="1F2D3A"/>
-                </a:solidFill>
-              </a:rPr>
-              <a:t> en az bir önlem </a:t>
-            </a:r>
-            <a:r>
-              <a:rPr sz="2000" b="1">
-                <a:solidFill>
-                  <a:srgbClr val="1F2D3A"/>
-                </a:solidFill>
-              </a:rPr>
-              <a:t>çalışırken</a:t>
-            </a:r>
-          </a:p>
-          <a:p>
-            <a:pPr>
-              <a:spcAft>
-                <a:spcPts val="300"/>
-              </a:spcAft>
-            </a:pPr>
-            <a:r>
-              <a:rPr sz="2000" b="1">
-                <a:solidFill>
-                  <a:srgbClr val="006D77"/>
-                </a:solidFill>
-              </a:rPr>
-              <a:t>4. </a:t>
-            </a:r>
-            <a:r>
-              <a:rPr sz="2000" b="1">
-                <a:solidFill>
-                  <a:srgbClr val="1F2D3A"/>
-                </a:solidFill>
-              </a:rPr>
-              <a:t>Kanıt:</a:t>
-            </a:r>
-            <a:r>
-              <a:rPr sz="2000" b="0">
-                <a:solidFill>
-                  <a:srgbClr val="1F2D3A"/>
-                </a:solidFill>
-              </a:rPr>
-              <a:t> koruma tablosu, sanitizer/fuzz, SBOM — komut + çıktı</a:t>
-            </a:r>
-          </a:p>
-          <a:p>
-            <a:pPr>
-              <a:spcAft>
-                <a:spcPts val="300"/>
-              </a:spcAft>
-            </a:pPr>
-            <a:r>
-              <a:rPr sz="2000" b="1">
-                <a:solidFill>
-                  <a:srgbClr val="006D77"/>
-                </a:solidFill>
-              </a:rPr>
-              <a:t>5. </a:t>
-            </a:r>
-            <a:r>
-              <a:rPr sz="2000" b="1">
-                <a:solidFill>
-                  <a:srgbClr val="1F2D3A"/>
-                </a:solidFill>
-              </a:rPr>
-              <a:t>Kalan risk ve plan:</a:t>
-            </a:r>
-            <a:r>
-              <a:rPr sz="2000" b="0">
-                <a:solidFill>
-                  <a:srgbClr val="1F2D3A"/>
-                </a:solidFill>
-              </a:rPr>
-              <a:t> finale kadar ne yapılacak?</a:t>
-            </a:r>
-          </a:p>
-        </p:txBody>
-      </p:sp>
-      <p:sp>
-        <p:nvSpPr>
-          <p:cNvPr id="8" name="TextBox 7"/>
-          <p:cNvSpPr txBox="1"/>
-          <p:nvPr/>
-        </p:nvSpPr>
-        <p:spPr>
-          <a:xfrm>
-            <a:off x="640080" y="3406648"/>
-            <a:ext cx="10911535" cy="439928"/>
-          </a:xfrm>
-          <a:prstGeom prst="rect">
-            <a:avLst/>
-          </a:prstGeom>
-          <a:noFill/>
-        </p:spPr>
-        <p:txBody>
-          <a:bodyPr wrap="square" lIns="45720" rIns="45720">
-            <a:spAutoFit/>
-          </a:bodyPr>
-          <a:lstStyle/>
-          <a:p>
-            <a:pPr algn="l"/>
-            <a:r>
-              <a:rPr sz="2000" b="0">
-                <a:solidFill>
-                  <a:srgbClr val="1F2D3A"/>
-                </a:solidFill>
-              </a:rPr>
-              <a:t>Her önlem için: </a:t>
-            </a:r>
-            <a:r>
-              <a:rPr sz="2000" b="1">
-                <a:solidFill>
-                  <a:srgbClr val="1F2D3A"/>
-                </a:solidFill>
-              </a:rPr>
-              <a:t>Neyi korur? · Nasıl yapıldı? · Nasıl kanıtlandı?</a:t>
-            </a:r>
-          </a:p>
-        </p:txBody>
-      </p:sp>
-    </p:spTree>
-  </p:cSld>
-  <p:clrMapOvr>
-    <a:masterClrMapping/>
-  </p:clrMapOvr>
-</p:sld>
-</file>
-
-<file path=ppt/slides/slide7.xml><?xml version="1.0" encoding="utf-8"?>
-<p:sld xmlns:a="http://schemas.openxmlformats.org/drawingml/2006/main" xmlns:p="http://schemas.openxmlformats.org/presentationml/2006/main" xmlns:r="http://schemas.openxmlformats.org/officeDocument/2006/relationships">
-  <p:cSld>
-    <p:spTree>
-      <p:nvGrpSpPr>
-        <p:cNvPr id="1" name=""/>
-        <p:cNvGrpSpPr/>
-        <p:nvPr/>
-      </p:nvGrpSpPr>
-      <p:grpSpPr/>
-      <p:pic>
-        <p:nvPicPr>
-          <p:cNvPr id="2" name="Picture 1" descr="rteu_logo_kucuk.jpg"/>
-          <p:cNvPicPr>
-            <a:picLocks noChangeAspect="1"/>
-          </p:cNvPicPr>
-          <p:nvPr/>
-        </p:nvPicPr>
-        <p:blipFill>
-          <a:blip r:embed="rId2"/>
-          <a:stretch>
-            <a:fillRect/>
-          </a:stretch>
-        </p:blipFill>
-        <p:spPr>
-          <a:xfrm>
-            <a:off x="640080" y="164592"/>
-            <a:ext cx="242773" cy="329184"/>
-          </a:xfrm>
-          <a:prstGeom prst="rect">
-            <a:avLst/>
-          </a:prstGeom>
-        </p:spPr>
-      </p:pic>
-      <p:sp>
-        <p:nvSpPr>
-          <p:cNvPr id="3" name="TextBox 2"/>
-          <p:cNvSpPr txBox="1"/>
-          <p:nvPr/>
-        </p:nvSpPr>
-        <p:spPr>
-          <a:xfrm>
-            <a:off x="1051560" y="182880"/>
-            <a:ext cx="7315200" cy="320040"/>
-          </a:xfrm>
-          <a:prstGeom prst="rect">
-            <a:avLst/>
-          </a:prstGeom>
-          <a:noFill/>
-        </p:spPr>
-        <p:txBody>
-          <a:bodyPr wrap="square" lIns="45720" rIns="45720">
-            <a:spAutoFit/>
-          </a:bodyPr>
-          <a:lstStyle/>
-          <a:p>
-            <a:r>
-              <a:rPr sz="1100" b="0">
-                <a:solidFill>
-                  <a:srgbClr val="5B6770"/>
-                </a:solidFill>
-              </a:rPr>
-              <a:t>CEN429 Güvenli Programlama · Hafta 7</a:t>
-            </a:r>
-          </a:p>
-        </p:txBody>
-      </p:sp>
-      <p:sp>
-        <p:nvSpPr>
-          <p:cNvPr id="4" name="TextBox 3"/>
-          <p:cNvSpPr txBox="1"/>
-          <p:nvPr/>
-        </p:nvSpPr>
-        <p:spPr>
-          <a:xfrm>
-            <a:off x="640080" y="6446520"/>
-            <a:ext cx="7315200" cy="274320"/>
-          </a:xfrm>
-          <a:prstGeom prst="rect">
-            <a:avLst/>
-          </a:prstGeom>
-          <a:noFill/>
-        </p:spPr>
-        <p:txBody>
-          <a:bodyPr wrap="square" lIns="45720" rIns="45720">
-            <a:spAutoFit/>
-          </a:bodyPr>
-          <a:lstStyle/>
-          <a:p>
-            <a:r>
-              <a:rPr sz="1000" b="0">
-                <a:solidFill>
-                  <a:srgbClr val="5B6770"/>
-                </a:solidFill>
-              </a:rPr>
-              <a:t>RTEÜ Bilgisayar Mühendisliği · 2026-2027 Güz</a:t>
-            </a:r>
-          </a:p>
-        </p:txBody>
-      </p:sp>
-      <p:sp>
-        <p:nvSpPr>
-          <p:cNvPr id="5" name="TextBox 4"/>
-          <p:cNvSpPr txBox="1"/>
-          <p:nvPr/>
-        </p:nvSpPr>
-        <p:spPr>
-          <a:xfrm>
-            <a:off x="10637215" y="6446520"/>
-            <a:ext cx="914400" cy="274320"/>
-          </a:xfrm>
-          <a:prstGeom prst="rect">
-            <a:avLst/>
-          </a:prstGeom>
-          <a:noFill/>
-        </p:spPr>
-        <p:txBody>
-          <a:bodyPr wrap="square" lIns="45720" rIns="45720">
-            <a:spAutoFit/>
-          </a:bodyPr>
-          <a:lstStyle/>
-          <a:p>
-            <a:pPr algn="r"/>
-            <a:r>
-              <a:rPr sz="1000" b="0">
-                <a:solidFill>
-                  <a:srgbClr val="5B6770"/>
-                </a:solidFill>
-              </a:rPr>
-              <a:t>7</a:t>
-            </a:r>
-          </a:p>
-        </p:txBody>
-      </p:sp>
-      <p:sp>
-        <p:nvSpPr>
-          <p:cNvPr id="6" name="TextBox 5"/>
-          <p:cNvSpPr txBox="1"/>
-          <p:nvPr/>
-        </p:nvSpPr>
-        <p:spPr>
-          <a:xfrm>
-            <a:off x="640080" y="548640"/>
-            <a:ext cx="10911535" cy="731520"/>
-          </a:xfrm>
-          <a:prstGeom prst="rect">
-            <a:avLst/>
-          </a:prstGeom>
-          <a:noFill/>
-        </p:spPr>
-        <p:txBody>
-          <a:bodyPr wrap="square" lIns="45720" rIns="45720" anchor="ctr">
-            <a:spAutoFit/>
-          </a:bodyPr>
-          <a:lstStyle/>
-          <a:p>
-            <a:r>
-              <a:rPr sz="3000" b="1">
-                <a:solidFill>
-                  <a:srgbClr val="006D77"/>
-                </a:solidFill>
-              </a:rPr>
-              <a:t>Örnek sorular</a:t>
-            </a:r>
-          </a:p>
-        </p:txBody>
-      </p:sp>
-      <p:sp>
-        <p:nvSpPr>
-          <p:cNvPr id="7" name="TextBox 6"/>
-          <p:cNvSpPr txBox="1"/>
-          <p:nvPr/>
-        </p:nvSpPr>
-        <p:spPr>
-          <a:xfrm>
-            <a:off x="640080" y="1325880"/>
-            <a:ext cx="10911535" cy="2346960"/>
-          </a:xfrm>
-          <a:prstGeom prst="rect">
-            <a:avLst/>
-          </a:prstGeom>
-          <a:noFill/>
-        </p:spPr>
-        <p:txBody>
-          <a:bodyPr wrap="square" lIns="45720" rIns="45720">
-            <a:spAutoFit/>
-          </a:bodyPr>
-          <a:lstStyle/>
-          <a:p>
-            <a:pPr>
-              <a:spcAft>
-                <a:spcPts val="300"/>
-              </a:spcAft>
-            </a:pPr>
-            <a:r>
-              <a:rPr sz="2000" b="1">
-                <a:solidFill>
-                  <a:srgbClr val="006D77"/>
-                </a:solidFill>
-              </a:rPr>
-              <a:t>• </a:t>
-            </a:r>
-            <a:r>
-              <a:rPr sz="2000" b="0">
-                <a:solidFill>
-                  <a:srgbClr val="1F2D3A"/>
-                </a:solidFill>
-              </a:rPr>
-              <a:t>Güven sınırını geçen en riskli akış hangisi?</a:t>
-            </a:r>
-          </a:p>
-          <a:p>
-            <a:pPr>
-              <a:spcAft>
-                <a:spcPts val="300"/>
-              </a:spcAft>
-            </a:pPr>
-            <a:r>
-              <a:rPr sz="2000" b="1">
-                <a:solidFill>
-                  <a:srgbClr val="006D77"/>
-                </a:solidFill>
-              </a:rPr>
-              <a:t>• </a:t>
-            </a:r>
-            <a:r>
-              <a:rPr sz="2000" b="0">
-                <a:solidFill>
-                  <a:srgbClr val="1F2D3A"/>
-                </a:solidFill>
-              </a:rPr>
-              <a:t>Bu varlık bellekte ne kadar açık kalıyor, nerede siliniyor?</a:t>
-            </a:r>
-          </a:p>
-          <a:p>
-            <a:pPr>
-              <a:spcAft>
-                <a:spcPts val="300"/>
-              </a:spcAft>
-            </a:pPr>
-            <a:r>
-              <a:rPr sz="2000" b="1">
-                <a:solidFill>
-                  <a:srgbClr val="006D77"/>
-                </a:solidFill>
-              </a:rPr>
-              <a:t>• </a:t>
-            </a:r>
-            <a:r>
-              <a:rPr sz="2000" b="0">
-                <a:solidFill>
-                  <a:srgbClr val="1F2D3A"/>
-                </a:solidFill>
-              </a:rPr>
-              <a:t>Anahtar nereden geliyor, nerede duruyor? Nonce tekrar edebilir mi?</a:t>
-            </a:r>
-          </a:p>
-          <a:p>
-            <a:pPr>
-              <a:spcAft>
-                <a:spcPts val="300"/>
-              </a:spcAft>
-            </a:pPr>
-            <a:r>
-              <a:rPr sz="2000" b="1">
-                <a:solidFill>
-                  <a:srgbClr val="006D77"/>
-                </a:solidFill>
-              </a:rPr>
-              <a:t>• </a:t>
-            </a:r>
-            <a:r>
-              <a:rPr sz="2000" b="0">
-                <a:solidFill>
-                  <a:srgbClr val="1F2D3A"/>
-                </a:solidFill>
-              </a:rPr>
-              <a:t>Hangi derleyici koruması kapalı, neden?</a:t>
-            </a:r>
-          </a:p>
-          <a:p>
-            <a:pPr>
-              <a:spcAft>
-                <a:spcPts val="300"/>
-              </a:spcAft>
-            </a:pPr>
-            <a:r>
-              <a:rPr sz="2000" b="1">
-                <a:solidFill>
-                  <a:srgbClr val="006D77"/>
-                </a:solidFill>
-              </a:rPr>
-              <a:t>• </a:t>
-            </a:r>
-            <a:r>
-              <a:rPr sz="2000" b="0">
-                <a:solidFill>
-                  <a:srgbClr val="1F2D3A"/>
-                </a:solidFill>
-              </a:rPr>
-              <a:t>RASP denetimi başarısız olunca ne oluyor?</a:t>
-            </a:r>
-          </a:p>
-          <a:p>
-            <a:pPr>
-              <a:spcAft>
-                <a:spcPts val="300"/>
-              </a:spcAft>
-            </a:pPr>
-            <a:r>
-              <a:rPr sz="2000" b="1">
-                <a:solidFill>
-                  <a:srgbClr val="006D77"/>
-                </a:solidFill>
-              </a:rPr>
-              <a:t>• </a:t>
-            </a:r>
-            <a:r>
-              <a:rPr sz="2000" b="0">
-                <a:solidFill>
-                  <a:srgbClr val="1F2D3A"/>
-                </a:solidFill>
-              </a:rPr>
-              <a:t>SBOM'da zafiyetli bileşen var mı? Etkileniyor musunuz?</a:t>
-            </a:r>
-          </a:p>
-        </p:txBody>
-      </p:sp>
-    </p:spTree>
-  </p:cSld>
-  <p:clrMapOvr>
-    <a:masterClrMapping/>
-  </p:clrMapOvr>
-</p:sld>
-</file>
-
 <file path=ppt/slides/slide8.xml><?xml version="1.0" encoding="utf-8"?>
 <p:sld xmlns:a="http://schemas.openxmlformats.org/drawingml/2006/main" xmlns:p="http://schemas.openxmlformats.org/presentationml/2006/main" xmlns:r="http://schemas.openxmlformats.org/officeDocument/2006/relationships">
   <p:cSld>
@@ -12952,358 +14034,244 @@
           <a:lstStyle/>
           <a:p>
             <a:r>
-              <a:rPr sz="2600" b="1">
+              <a:rPr sz="3000" b="1">
                 <a:solidFill>
                   <a:srgbClr val="006D77"/>
                 </a:solidFill>
               </a:rPr>
-              <a:t>Sık yapılan hatalar</a:t>
-            </a:r>
-          </a:p>
-        </p:txBody>
-      </p:sp>
-      <p:graphicFrame>
-        <p:nvGraphicFramePr>
-          <p:cNvPr id="7" name="Table 6"/>
-          <p:cNvGraphicFramePr>
-            <a:graphicFrameLocks noGrp="1"/>
-          </p:cNvGraphicFramePr>
-          <p:nvPr/>
-        </p:nvGraphicFramePr>
-        <p:xfrm>
-          <a:off x="640080" y="1325880"/>
-          <a:ext cx="10911535" cy="2403043"/>
-        </p:xfrm>
-        <a:graphic>
-          <a:graphicData uri="http://schemas.openxmlformats.org/drawingml/2006/table">
-            <a:tbl>
-              <a:tblPr firstRow="1" bandRow="1">
-                <a:tableStyleId>{5C22544A-7EE6-4342-B048-85BDC9FD1C3A}</a:tableStyleId>
-              </a:tblPr>
-              <a:tblGrid>
-                <a:gridCol w="5279775"/>
-                <a:gridCol w="5631760"/>
-              </a:tblGrid>
-              <a:tr h="343291">
-                <a:tc>
-                  <a:txBody>
-                    <a:bodyPr wrap="square"/>
-                    <a:lstStyle/>
-                    <a:p>
-                      <a:r>
-                        <a:rPr sz="1296" b="1">
-                          <a:solidFill>
-                            <a:srgbClr val="FFFFFF"/>
-                          </a:solidFill>
-                        </a:rPr>
-                        <a:t>Hata</a:t>
-                      </a:r>
-                    </a:p>
-                  </a:txBody>
-                  <a:tcPr marL="54864" marR="54864" marT="27432" marB="27432" anchor="ctr">
-                    <a:solidFill>
-                      <a:srgbClr val="006D77"/>
-                    </a:solidFill>
-                  </a:tcPr>
-                </a:tc>
-                <a:tc>
-                  <a:txBody>
-                    <a:bodyPr wrap="square"/>
-                    <a:lstStyle/>
-                    <a:p>
-                      <a:r>
-                        <a:rPr sz="1296" b="1">
-                          <a:solidFill>
-                            <a:srgbClr val="FFFFFF"/>
-                          </a:solidFill>
-                        </a:rPr>
-                        <a:t>Neden sorun?</a:t>
-                      </a:r>
-                    </a:p>
-                  </a:txBody>
-                  <a:tcPr marL="54864" marR="54864" marT="27432" marB="27432" anchor="ctr">
-                    <a:solidFill>
-                      <a:srgbClr val="006D77"/>
-                    </a:solidFill>
-                  </a:tcPr>
-                </a:tc>
-              </a:tr>
-              <a:tr h="343291">
-                <a:tc>
-                  <a:txBody>
-                    <a:bodyPr wrap="square"/>
-                    <a:lstStyle/>
-                    <a:p>
-                      <a:r>
-                        <a:rPr sz="1296" b="0">
-                          <a:solidFill>
-                            <a:srgbClr val="1F2D3A"/>
-                          </a:solidFill>
-                        </a:rPr>
-                        <a:t>Kılavuz ile kod tutarsız</a:t>
-                      </a:r>
-                    </a:p>
-                  </a:txBody>
-                  <a:tcPr marL="54864" marR="54864" marT="27432" marB="27432" anchor="ctr">
-                    <a:solidFill>
-                      <a:srgbClr val="FFFFFF"/>
-                    </a:solidFill>
-                  </a:tcPr>
-                </a:tc>
-                <a:tc>
-                  <a:txBody>
-                    <a:bodyPr wrap="square"/>
-                    <a:lstStyle/>
-                    <a:p>
-                      <a:r>
-                        <a:rPr sz="1296" b="0">
-                          <a:solidFill>
-                            <a:srgbClr val="1F2D3A"/>
-                          </a:solidFill>
-                        </a:rPr>
-                        <a:t>En ciddi bulgulardan biri</a:t>
-                      </a:r>
-                    </a:p>
-                  </a:txBody>
-                  <a:tcPr marL="54864" marR="54864" marT="27432" marB="27432" anchor="ctr">
-                    <a:solidFill>
-                      <a:srgbClr val="FFFFFF"/>
-                    </a:solidFill>
-                  </a:tcPr>
-                </a:tc>
-              </a:tr>
-              <a:tr h="343291">
-                <a:tc>
-                  <a:txBody>
-                    <a:bodyPr wrap="square"/>
-                    <a:lstStyle/>
-                    <a:p>
-                      <a:r>
-                        <a:rPr sz="1296" b="0">
-                          <a:solidFill>
-                            <a:srgbClr val="1F2D3A"/>
-                          </a:solidFill>
-                        </a:rPr>
-                        <a:t>Kanıtsız "güvenli" iddiası</a:t>
-                      </a:r>
-                    </a:p>
-                  </a:txBody>
-                  <a:tcPr marL="54864" marR="54864" marT="27432" marB="27432" anchor="ctr">
-                    <a:solidFill>
-                      <a:srgbClr val="EEF7F8"/>
-                    </a:solidFill>
-                  </a:tcPr>
-                </a:tc>
-                <a:tc>
-                  <a:txBody>
-                    <a:bodyPr wrap="square"/>
-                    <a:lstStyle/>
-                    <a:p>
-                      <a:r>
-                        <a:rPr sz="1296" b="0">
-                          <a:solidFill>
-                            <a:srgbClr val="1F2D3A"/>
-                          </a:solidFill>
-                        </a:rPr>
-                        <a:t>Puanlanmaz</a:t>
-                      </a:r>
-                    </a:p>
-                  </a:txBody>
-                  <a:tcPr marL="54864" marR="54864" marT="27432" marB="27432" anchor="ctr">
-                    <a:solidFill>
-                      <a:srgbClr val="EEF7F8"/>
-                    </a:solidFill>
-                  </a:tcPr>
-                </a:tc>
-              </a:tr>
-              <a:tr h="343291">
-                <a:tc>
-                  <a:txBody>
-                    <a:bodyPr wrap="square"/>
-                    <a:lstStyle/>
-                    <a:p>
-                      <a:r>
-                        <a:rPr sz="1296" b="0">
-                          <a:solidFill>
-                            <a:srgbClr val="1F2D3A"/>
-                          </a:solidFill>
-                        </a:rPr>
-                        <a:t>Varlık listesinde anahtar/günlük/kod yok</a:t>
-                      </a:r>
-                    </a:p>
-                  </a:txBody>
-                  <a:tcPr marL="54864" marR="54864" marT="27432" marB="27432" anchor="ctr">
-                    <a:solidFill>
-                      <a:srgbClr val="FFFFFF"/>
-                    </a:solidFill>
-                  </a:tcPr>
-                </a:tc>
-                <a:tc>
-                  <a:txBody>
-                    <a:bodyPr wrap="square"/>
-                    <a:lstStyle/>
-                    <a:p>
-                      <a:r>
-                        <a:rPr sz="1296" b="0">
-                          <a:solidFill>
-                            <a:srgbClr val="1F2D3A"/>
-                          </a:solidFill>
-                        </a:rPr>
-                        <a:t>Listede olmayan korunmuyor</a:t>
-                      </a:r>
-                    </a:p>
-                  </a:txBody>
-                  <a:tcPr marL="54864" marR="54864" marT="27432" marB="27432" anchor="ctr">
-                    <a:solidFill>
-                      <a:srgbClr val="FFFFFF"/>
-                    </a:solidFill>
-                  </a:tcPr>
-                </a:tc>
-              </a:tr>
-              <a:tr h="343291">
-                <a:tc>
-                  <a:txBody>
-                    <a:bodyPr wrap="square"/>
-                    <a:lstStyle/>
-                    <a:p>
-                      <a:r>
-                        <a:rPr sz="1296" b="0">
-                          <a:solidFill>
-                            <a:srgbClr val="1F2D3A"/>
-                          </a:solidFill>
-                        </a:rPr>
-                        <a:t>Genel bilgiden tehdit tablosu</a:t>
-                      </a:r>
-                    </a:p>
-                  </a:txBody>
-                  <a:tcPr marL="54864" marR="54864" marT="27432" marB="27432" anchor="ctr">
-                    <a:solidFill>
-                      <a:srgbClr val="EEF7F8"/>
-                    </a:solidFill>
-                  </a:tcPr>
-                </a:tc>
-                <a:tc>
-                  <a:txBody>
-                    <a:bodyPr wrap="square"/>
-                    <a:lstStyle/>
-                    <a:p>
-                      <a:r>
-                        <a:rPr sz="1296" b="0">
-                          <a:solidFill>
-                            <a:srgbClr val="1F2D3A"/>
-                          </a:solidFill>
-                        </a:rPr>
-                        <a:t>Projeye özgü tehditler kaçar</a:t>
-                      </a:r>
-                    </a:p>
-                  </a:txBody>
-                  <a:tcPr marL="54864" marR="54864" marT="27432" marB="27432" anchor="ctr">
-                    <a:solidFill>
-                      <a:srgbClr val="EEF7F8"/>
-                    </a:solidFill>
-                  </a:tcPr>
-                </a:tc>
-              </a:tr>
-              <a:tr h="343291">
-                <a:tc>
-                  <a:txBody>
-                    <a:bodyPr wrap="square"/>
-                    <a:lstStyle/>
-                    <a:p>
-                      <a:r>
-                        <a:rPr sz="1296" b="0">
-                          <a:solidFill>
-                            <a:srgbClr val="1F2D3A"/>
-                          </a:solidFill>
-                        </a:rPr>
-                        <a:t>Prova edilmemiş gösterim</a:t>
-                      </a:r>
-                    </a:p>
-                  </a:txBody>
-                  <a:tcPr marL="54864" marR="54864" marT="27432" marB="27432" anchor="ctr">
-                    <a:solidFill>
-                      <a:srgbClr val="FFFFFF"/>
-                    </a:solidFill>
-                  </a:tcPr>
-                </a:tc>
-                <a:tc>
-                  <a:txBody>
-                    <a:bodyPr wrap="square"/>
-                    <a:lstStyle/>
-                    <a:p>
-                      <a:r>
-                        <a:rPr sz="1296" b="0">
-                          <a:solidFill>
-                            <a:srgbClr val="1F2D3A"/>
-                          </a:solidFill>
-                        </a:rPr>
-                        <a:t>Süre boşa gider</a:t>
-                      </a:r>
-                    </a:p>
-                  </a:txBody>
-                  <a:tcPr marL="54864" marR="54864" marT="27432" marB="27432" anchor="ctr">
-                    <a:solidFill>
-                      <a:srgbClr val="FFFFFF"/>
-                    </a:solidFill>
-                  </a:tcPr>
-                </a:tc>
-              </a:tr>
-              <a:tr h="343297">
-                <a:tc>
-                  <a:txBody>
-                    <a:bodyPr wrap="square"/>
-                    <a:lstStyle/>
-                    <a:p>
-                      <a:r>
-                        <a:rPr sz="1296" b="0">
-                          <a:solidFill>
-                            <a:srgbClr val="1F2D3A"/>
-                          </a:solidFill>
-                        </a:rPr>
-                        <a:t>Depoda gerçek parola/anahtar/kişisel veri</a:t>
-                      </a:r>
-                    </a:p>
-                  </a:txBody>
-                  <a:tcPr marL="54864" marR="54864" marT="27432" marB="27432" anchor="ctr">
-                    <a:solidFill>
-                      <a:srgbClr val="EEF7F8"/>
-                    </a:solidFill>
-                  </a:tcPr>
-                </a:tc>
-                <a:tc>
-                  <a:txBody>
-                    <a:bodyPr wrap="square"/>
-                    <a:lstStyle/>
-                    <a:p>
-                      <a:r>
-                        <a:rPr sz="1296" b="0">
-                          <a:solidFill>
-                            <a:srgbClr val="1F2D3A"/>
-                          </a:solidFill>
-                        </a:rPr>
-                        <a:t>Ciddi güvenlik hatası; değerler </a:t>
-                      </a:r>
-                      <a:r>
-                        <a:rPr sz="1296" b="1">
-                          <a:solidFill>
-                            <a:srgbClr val="1F2D3A"/>
-                          </a:solidFill>
-                        </a:rPr>
-                        <a:t>sentetik</a:t>
-                      </a:r>
-                    </a:p>
-                  </a:txBody>
-                  <a:tcPr marL="54864" marR="54864" marT="27432" marB="27432" anchor="ctr">
-                    <a:solidFill>
-                      <a:srgbClr val="EEF7F8"/>
-                    </a:solidFill>
-                  </a:tcPr>
-                </a:tc>
-              </a:tr>
-            </a:tbl>
-          </a:graphicData>
-        </a:graphic>
-      </p:graphicFrame>
+              <a:t>Önerilen gösterim akışı</a:t>
+            </a:r>
+          </a:p>
+        </p:txBody>
+      </p:sp>
+      <p:sp>
+        <p:nvSpPr>
+          <p:cNvPr id="7" name="TextBox 6"/>
+          <p:cNvSpPr txBox="1"/>
+          <p:nvPr/>
+        </p:nvSpPr>
+        <p:spPr>
+          <a:xfrm>
+            <a:off x="640080" y="1325880"/>
+            <a:ext cx="10911535" cy="1971040"/>
+          </a:xfrm>
+          <a:prstGeom prst="rect">
+            <a:avLst/>
+          </a:prstGeom>
+          <a:noFill/>
+        </p:spPr>
+        <p:txBody>
+          <a:bodyPr wrap="square" lIns="45720" rIns="45720">
+            <a:spAutoFit/>
+          </a:bodyPr>
+          <a:lstStyle/>
+          <a:p>
+            <a:pPr>
+              <a:spcAft>
+                <a:spcPts val="300"/>
+              </a:spcAft>
+            </a:pPr>
+            <a:r>
+              <a:rPr sz="2000" b="1">
+                <a:solidFill>
+                  <a:srgbClr val="006D77"/>
+                </a:solidFill>
+              </a:rPr>
+              <a:t>1. </a:t>
+            </a:r>
+            <a:r>
+              <a:rPr sz="2000" b="1">
+                <a:solidFill>
+                  <a:srgbClr val="1F2D3A"/>
+                </a:solidFill>
+              </a:rPr>
+              <a:t>Ürün ve mimari</a:t>
+            </a:r>
+            <a:r>
+              <a:rPr sz="2000" b="0">
+                <a:solidFill>
+                  <a:srgbClr val="1F2D3A"/>
+                </a:solidFill>
+              </a:rPr>
+              <a:t> (S2–S3): tek şema, güven sınırları</a:t>
+            </a:r>
+          </a:p>
+          <a:p>
+            <a:pPr>
+              <a:spcAft>
+                <a:spcPts val="300"/>
+              </a:spcAft>
+            </a:pPr>
+            <a:r>
+              <a:rPr sz="2000" b="1">
+                <a:solidFill>
+                  <a:srgbClr val="006D77"/>
+                </a:solidFill>
+              </a:rPr>
+              <a:t>2. </a:t>
+            </a:r>
+            <a:r>
+              <a:rPr sz="2000" b="1">
+                <a:solidFill>
+                  <a:srgbClr val="1F2D3A"/>
+                </a:solidFill>
+              </a:rPr>
+              <a:t>Tehditler ve varlıklar</a:t>
+            </a:r>
+            <a:r>
+              <a:rPr sz="2000" b="0">
+                <a:solidFill>
+                  <a:srgbClr val="1F2D3A"/>
+                </a:solidFill>
+              </a:rPr>
+              <a:t> (S4–S5): en kritik üç tehdit</a:t>
+            </a:r>
+          </a:p>
+          <a:p>
+            <a:pPr>
+              <a:spcAft>
+                <a:spcPts val="300"/>
+              </a:spcAft>
+            </a:pPr>
+            <a:r>
+              <a:rPr sz="2000" b="1">
+                <a:solidFill>
+                  <a:srgbClr val="006D77"/>
+                </a:solidFill>
+              </a:rPr>
+              <a:t>3. </a:t>
+            </a:r>
+            <a:r>
+              <a:rPr sz="2000" b="1">
+                <a:solidFill>
+                  <a:srgbClr val="1F2D3A"/>
+                </a:solidFill>
+              </a:rPr>
+              <a:t>Canlı gösterim:</a:t>
+            </a:r>
+            <a:r>
+              <a:rPr sz="2000" b="0">
+                <a:solidFill>
+                  <a:srgbClr val="1F2D3A"/>
+                </a:solidFill>
+              </a:rPr>
+              <a:t> en az bir önlem </a:t>
+            </a:r>
+            <a:r>
+              <a:rPr sz="2000" b="1">
+                <a:solidFill>
+                  <a:srgbClr val="1F2D3A"/>
+                </a:solidFill>
+              </a:rPr>
+              <a:t>çalışırken</a:t>
+            </a:r>
+          </a:p>
+          <a:p>
+            <a:pPr>
+              <a:spcAft>
+                <a:spcPts val="300"/>
+              </a:spcAft>
+            </a:pPr>
+            <a:r>
+              <a:rPr sz="2000" b="1">
+                <a:solidFill>
+                  <a:srgbClr val="006D77"/>
+                </a:solidFill>
+              </a:rPr>
+              <a:t>4. </a:t>
+            </a:r>
+            <a:r>
+              <a:rPr sz="2000" b="1">
+                <a:solidFill>
+                  <a:srgbClr val="1F2D3A"/>
+                </a:solidFill>
+              </a:rPr>
+              <a:t>Kanıt:</a:t>
+            </a:r>
+            <a:r>
+              <a:rPr sz="2000" b="0">
+                <a:solidFill>
+                  <a:srgbClr val="1F2D3A"/>
+                </a:solidFill>
+              </a:rPr>
+              <a:t> koruma tablosu, sanitizer/fuzz, SBOM — komut + çıktı</a:t>
+            </a:r>
+          </a:p>
+          <a:p>
+            <a:pPr>
+              <a:spcAft>
+                <a:spcPts val="300"/>
+              </a:spcAft>
+            </a:pPr>
+            <a:r>
+              <a:rPr sz="2000" b="1">
+                <a:solidFill>
+                  <a:srgbClr val="006D77"/>
+                </a:solidFill>
+              </a:rPr>
+              <a:t>5. </a:t>
+            </a:r>
+            <a:r>
+              <a:rPr sz="2000" b="1">
+                <a:solidFill>
+                  <a:srgbClr val="1F2D3A"/>
+                </a:solidFill>
+              </a:rPr>
+              <a:t>Kalan risk ve plan:</a:t>
+            </a:r>
+            <a:r>
+              <a:rPr sz="2000" b="0">
+                <a:solidFill>
+                  <a:srgbClr val="1F2D3A"/>
+                </a:solidFill>
+              </a:rPr>
+              <a:t> finale kadar ne yapılacak?</a:t>
+            </a:r>
+          </a:p>
+        </p:txBody>
+      </p:sp>
+      <p:sp>
+        <p:nvSpPr>
+          <p:cNvPr id="8" name="TextBox 7"/>
+          <p:cNvSpPr txBox="1"/>
+          <p:nvPr/>
+        </p:nvSpPr>
+        <p:spPr>
+          <a:xfrm>
+            <a:off x="640080" y="3406648"/>
+            <a:ext cx="10911535" cy="439928"/>
+          </a:xfrm>
+          <a:prstGeom prst="rect">
+            <a:avLst/>
+          </a:prstGeom>
+          <a:noFill/>
+        </p:spPr>
+        <p:txBody>
+          <a:bodyPr wrap="square" lIns="45720" rIns="45720">
+            <a:spAutoFit/>
+          </a:bodyPr>
+          <a:lstStyle/>
+          <a:p>
+            <a:pPr algn="l"/>
+            <a:r>
+              <a:rPr sz="2000" b="0">
+                <a:solidFill>
+                  <a:srgbClr val="1F2D3A"/>
+                </a:solidFill>
+              </a:rPr>
+              <a:t>Her önlem için: </a:t>
+            </a:r>
+            <a:r>
+              <a:rPr sz="2000" b="1">
+                <a:solidFill>
+                  <a:srgbClr val="1F2D3A"/>
+                </a:solidFill>
+              </a:rPr>
+              <a:t>Neyi korur? · Nasıl yapıldı? · Nasıl kanıtlandı?</a:t>
+            </a:r>
+          </a:p>
+        </p:txBody>
+      </p:sp>
     </p:spTree>
   </p:cSld>
   <p:clrMapOvr>
@@ -13474,203 +14442,35 @@
                   <a:srgbClr val="006D77"/>
                 </a:solidFill>
               </a:rPr>
-              <a:t>Akademik dürüstlük ve sonrası</a:t>
-            </a:r>
-          </a:p>
-        </p:txBody>
-      </p:sp>
-      <p:sp>
-        <p:nvSpPr>
-          <p:cNvPr id="7" name="TextBox 6"/>
-          <p:cNvSpPr txBox="1"/>
-          <p:nvPr/>
-        </p:nvSpPr>
-        <p:spPr>
-          <a:xfrm>
-            <a:off x="640080" y="1325880"/>
-            <a:ext cx="10911535" cy="1219200"/>
-          </a:xfrm>
-          <a:prstGeom prst="rect">
-            <a:avLst/>
-          </a:prstGeom>
-          <a:noFill/>
-        </p:spPr>
-        <p:txBody>
-          <a:bodyPr wrap="square" lIns="45720" rIns="45720">
-            <a:spAutoFit/>
-          </a:bodyPr>
-          <a:lstStyle/>
-          <a:p>
-            <a:pPr>
-              <a:spcAft>
-                <a:spcPts val="300"/>
-              </a:spcAft>
-            </a:pPr>
-            <a:r>
-              <a:rPr sz="2000" b="1">
-                <a:solidFill>
-                  <a:srgbClr val="006D77"/>
-                </a:solidFill>
-              </a:rPr>
-              <a:t>• </a:t>
-            </a:r>
-            <a:r>
-              <a:rPr sz="2000" b="0">
-                <a:solidFill>
-                  <a:srgbClr val="1F2D3A"/>
-                </a:solidFill>
-              </a:rPr>
-              <a:t>Kaynaksız kod/metin, takım dışı çalışma, uydurma sonuç </a:t>
-            </a:r>
-            <a:r>
-              <a:rPr sz="2000" b="1">
-                <a:solidFill>
-                  <a:srgbClr val="1F2D3A"/>
-                </a:solidFill>
-              </a:rPr>
-              <a:t>kabul edilmez</a:t>
-            </a:r>
-          </a:p>
-          <a:p>
-            <a:pPr>
-              <a:spcAft>
-                <a:spcPts val="300"/>
-              </a:spcAft>
-            </a:pPr>
-            <a:r>
-              <a:rPr sz="2000" b="1">
-                <a:solidFill>
-                  <a:srgbClr val="006D77"/>
-                </a:solidFill>
-              </a:rPr>
-              <a:t>• </a:t>
-            </a:r>
-            <a:r>
-              <a:rPr sz="2000" b="0">
-                <a:solidFill>
-                  <a:srgbClr val="1F2D3A"/>
-                </a:solidFill>
-              </a:rPr>
-              <a:t>Teslim edilen her satır açıklanabilmeli</a:t>
-            </a:r>
-          </a:p>
-          <a:p>
-            <a:pPr>
-              <a:spcAft>
-                <a:spcPts val="300"/>
-              </a:spcAft>
-            </a:pPr>
-            <a:r>
-              <a:rPr sz="2000" b="1">
-                <a:solidFill>
-                  <a:srgbClr val="006D77"/>
-                </a:solidFill>
-              </a:rPr>
-              <a:t>• </a:t>
-            </a:r>
-            <a:r>
-              <a:rPr sz="2000" b="0">
-                <a:solidFill>
-                  <a:srgbClr val="1F2D3A"/>
-                </a:solidFill>
-              </a:rPr>
-              <a:t>Her takım üyesine soru sorulabilir</a:t>
-            </a:r>
-          </a:p>
-        </p:txBody>
-      </p:sp>
-      <p:sp>
-        <p:nvSpPr>
-          <p:cNvPr id="8" name="TextBox 7"/>
-          <p:cNvSpPr txBox="1"/>
-          <p:nvPr/>
-        </p:nvSpPr>
-        <p:spPr>
-          <a:xfrm>
-            <a:off x="640080" y="2654808"/>
-            <a:ext cx="10911535" cy="770128"/>
-          </a:xfrm>
-          <a:prstGeom prst="rect">
-            <a:avLst/>
-          </a:prstGeom>
-          <a:noFill/>
-        </p:spPr>
-        <p:txBody>
-          <a:bodyPr wrap="square" lIns="45720" rIns="45720">
-            <a:spAutoFit/>
-          </a:bodyPr>
-          <a:lstStyle/>
-          <a:p>
-            <a:pPr algn="l"/>
-            <a:r>
-              <a:rPr sz="2000" b="1">
-                <a:solidFill>
-                  <a:srgbClr val="1F2D3A"/>
-                </a:solidFill>
-              </a:rPr>
-              <a:t>Gösterimden sonra:</a:t>
-            </a:r>
-            <a:r>
-              <a:rPr sz="2000" b="0">
-                <a:solidFill>
-                  <a:srgbClr val="1F2D3A"/>
-                </a:solidFill>
-              </a:rPr>
-              <a:t> geri bildirimi </a:t>
-            </a:r>
-            <a:r>
-              <a:rPr sz="2000" b="1">
-                <a:solidFill>
-                  <a:srgbClr val="1F2D3A"/>
-                </a:solidFill>
-              </a:rPr>
-              <a:t>bulgu listesi</a:t>
-            </a:r>
-            <a:r>
-              <a:rPr sz="2000" b="0">
-                <a:solidFill>
-                  <a:srgbClr val="1F2D3A"/>
-                </a:solidFill>
-              </a:rPr>
-              <a:t> olarak yaz (bulgu · önem · düzeltme · tarih) → 12. haftanın küçük modeli</a:t>
-            </a:r>
-          </a:p>
-        </p:txBody>
-      </p:sp>
-      <p:sp>
-        <p:nvSpPr>
-          <p:cNvPr id="9" name="TextBox 8"/>
-          <p:cNvSpPr txBox="1"/>
-          <p:nvPr/>
-        </p:nvSpPr>
-        <p:spPr>
-          <a:xfrm>
-            <a:off x="640080" y="3534664"/>
-            <a:ext cx="10911535" cy="439928"/>
-          </a:xfrm>
-          <a:prstGeom prst="rect">
-            <a:avLst/>
-          </a:prstGeom>
-          <a:noFill/>
-        </p:spPr>
-        <p:txBody>
-          <a:bodyPr wrap="square" lIns="45720" rIns="45720">
-            <a:spAutoFit/>
-          </a:bodyPr>
-          <a:lstStyle/>
-          <a:p>
-            <a:pPr algn="l"/>
-            <a:r>
-              <a:rPr sz="2000" b="0">
-                <a:solidFill>
-                  <a:srgbClr val="1F2D3A"/>
-                </a:solidFill>
-              </a:rPr>
-              <a:t>Final bölümleri: S6 · S8 · S11 · S14 · S15 · S16 sonuç · S17</a:t>
-            </a:r>
-          </a:p>
-        </p:txBody>
-      </p:sp>
+              <a:t>Gösterim günü akışı — şema</a:t>
+            </a:r>
+          </a:p>
+        </p:txBody>
+      </p:sp>
+      <p:pic>
+        <p:nvPicPr>
+          <p:cNvPr id="7" name="Picture 6" descr="h07-01-gosterim-akisi.png"/>
+          <p:cNvPicPr>
+            <a:picLocks noChangeAspect="1"/>
+          </p:cNvPicPr>
+          <p:nvPr/>
+        </p:nvPicPr>
+        <p:blipFill>
+          <a:blip r:embed="rId3"/>
+          <a:stretch>
+            <a:fillRect/>
+          </a:stretch>
+        </p:blipFill>
+        <p:spPr>
+          <a:xfrm>
+            <a:off x="2046645" y="1325880"/>
+            <a:ext cx="8098404" cy="3864472"/>
+          </a:xfrm>
+          <a:prstGeom prst="rect">
+            <a:avLst/>
+          </a:prstGeom>
+        </p:spPr>
+      </p:pic>
     </p:spTree>
   </p:cSld>
   <p:clrMapOvr>

--- a/docs/week-7/cen429-week-7-sunum.en.pptx
+++ b/docs/week-7/cen429-week-7-sunum.en.pptx
@@ -540,7 +540,7 @@
           <a:lstStyle/>
           <a:p>
             <a:r>
-              <a:t>Bu hafta ders değil gösterim haftası: her takım güvenlik kılavuzunun vize bölümlerini ve çalışan uygulamasını gösterir.</a:t>
+              <a:t>Speaker note: This week is not a lecture but a demonstration week: each team shows the midterm sections of its security guide and its working application.</a:t>
             </a:r>
           </a:p>
         </p:txBody>
@@ -610,7 +610,7 @@
           <a:lstStyle/>
           <a:p>
             <a:r>
-              <a:t>Vize gösteriminde (RAP1) her rubrik maddesini ne kanıtlayacağınızı açıklıyoruz.</a:t>
+              <a:t>Speaker note: For the midterm demonstration (RAP1), we explain what evidence each rubric item expects.</a:t>
             </a:r>
           </a:p>
         </p:txBody>
@@ -3668,7 +3668,7 @@
                   <a:srgbClr val="5B6770"/>
                 </a:solidFill>
               </a:rPr>
-              <a:t>CEN429 Güvenli Programlama · Hafta 7</a:t>
+              <a:t>CEN429 Secure Programming · Week 7</a:t>
             </a:r>
           </a:p>
         </p:txBody>
@@ -3701,7 +3701,7 @@
                   <a:srgbClr val="5B6770"/>
                 </a:solidFill>
               </a:rPr>
-              <a:t>RTEÜ Bilgisayar Mühendisliği · 2026-2027 Güz</a:t>
+              <a:t>RTEU Computer Engineering · 2026-2027 Fall</a:t>
             </a:r>
           </a:p>
         </p:txBody>
@@ -3735,7 +3735,7 @@
                   <a:srgbClr val="006D77"/>
                 </a:solidFill>
               </a:rPr>
-              <a:t>Ara Proje Gösterimleri</a:t>
+              <a:t>Midterm Project Demonstrations</a:t>
             </a:r>
           </a:p>
         </p:txBody>
@@ -3769,7 +3769,7 @@
                   <a:srgbClr val="1F2D3A"/>
                 </a:solidFill>
               </a:rPr>
-              <a:t>CEN429 Güvenli Programlama — Hafta 7</a:t>
+              <a:t>CEN429 Secure Programming — Week 7</a:t>
             </a:r>
           </a:p>
         </p:txBody>
@@ -3803,7 +3803,7 @@
                   <a:srgbClr val="1F2D3A"/>
                 </a:solidFill>
               </a:rPr>
-              <a:t>Dr. Öğr. Üyesi Uğur CORUH · 30.10.2026</a:t>
+              <a:t>Asst. Prof. Dr. Uğur CORUH · 30.10.2026</a:t>
             </a:r>
           </a:p>
         </p:txBody>
@@ -3878,7 +3878,7 @@
                   <a:srgbClr val="5B6770"/>
                 </a:solidFill>
               </a:rPr>
-              <a:t>CEN429 Güvenli Programlama · Hafta 7</a:t>
+              <a:t>CEN429 Secure Programming · Week 7</a:t>
             </a:r>
           </a:p>
         </p:txBody>
@@ -3911,7 +3911,7 @@
                   <a:srgbClr val="5B6770"/>
                 </a:solidFill>
               </a:rPr>
-              <a:t>RTEÜ Bilgisayar Mühendisliği · 2026-2027 Güz</a:t>
+              <a:t>RTEU Computer Engineering · 2026-2027 Fall</a:t>
             </a:r>
           </a:p>
         </p:txBody>
@@ -3978,7 +3978,7 @@
                   <a:srgbClr val="006D77"/>
                 </a:solidFill>
               </a:rPr>
-              <a:t>Örnek sorular</a:t>
+              <a:t>Sample Questions</a:t>
             </a:r>
           </a:p>
         </p:txBody>
@@ -4024,7 +4024,7 @@
                   <a:srgbClr val="1F2D3A"/>
                 </a:solidFill>
               </a:rPr>
-              <a:t>Güven sınırını geçen en riskli akış hangisi?</a:t>
+              <a:t>Which flow crossing a trust boundary is the riskiest?</a:t>
             </a:r>
           </a:p>
           <a:p>
@@ -4047,7 +4047,7 @@
                   <a:srgbClr val="1F2D3A"/>
                 </a:solidFill>
               </a:rPr>
-              <a:t>Bu varlık bellekte ne kadar açık kalıyor, nerede siliniyor?</a:t>
+              <a:t>How long does this asset stay unencrypted in memory, and where is it wiped?</a:t>
             </a:r>
           </a:p>
           <a:p>
@@ -4070,7 +4070,7 @@
                   <a:srgbClr val="1F2D3A"/>
                 </a:solidFill>
               </a:rPr>
-              <a:t>Anahtar nereden geliyor, nerede duruyor? Nonce tekrar edebilir mi?</a:t>
+              <a:t>Where does the key come from, where does it live? Can the nonce repeat?</a:t>
             </a:r>
           </a:p>
           <a:p>
@@ -4093,7 +4093,7 @@
                   <a:srgbClr val="1F2D3A"/>
                 </a:solidFill>
               </a:rPr>
-              <a:t>Hangi derleyici koruması kapalı, neden?</a:t>
+              <a:t>Which compiler protection is turned off, and why?</a:t>
             </a:r>
           </a:p>
           <a:p>
@@ -4116,7 +4116,7 @@
                   <a:srgbClr val="1F2D3A"/>
                 </a:solidFill>
               </a:rPr>
-              <a:t>RASP denetimi başarısız olunca ne oluyor?</a:t>
+              <a:t>What happens when a RASP check fails?</a:t>
             </a:r>
           </a:p>
           <a:p>
@@ -4139,7 +4139,7 @@
                   <a:srgbClr val="1F2D3A"/>
                 </a:solidFill>
               </a:rPr>
-              <a:t>SBOM'da zafiyetli bileşen var mı? Etkileniyor musunuz?</a:t>
+              <a:t>Does the SBOM contain a vulnerable component? Are you affected?</a:t>
             </a:r>
           </a:p>
         </p:txBody>
@@ -4214,7 +4214,7 @@
                   <a:srgbClr val="5B6770"/>
                 </a:solidFill>
               </a:rPr>
-              <a:t>CEN429 Güvenli Programlama · Hafta 7</a:t>
+              <a:t>CEN429 Secure Programming · Week 7</a:t>
             </a:r>
           </a:p>
         </p:txBody>
@@ -4247,7 +4247,7 @@
                   <a:srgbClr val="5B6770"/>
                 </a:solidFill>
               </a:rPr>
-              <a:t>RTEÜ Bilgisayar Mühendisliği · 2026-2027 Güz</a:t>
+              <a:t>RTEU Computer Engineering · 2026-2027 Fall</a:t>
             </a:r>
           </a:p>
         </p:txBody>
@@ -4314,7 +4314,7 @@
                   <a:srgbClr val="006D77"/>
                 </a:solidFill>
               </a:rPr>
-              <a:t>Sık yapılan hatalar</a:t>
+              <a:t>Common Mistakes</a:t>
             </a:r>
           </a:p>
         </p:txBody>
@@ -4329,7 +4329,7 @@
         </p:nvGraphicFramePr>
         <p:xfrm>
           <a:off x="640080" y="1325880"/>
-          <a:ext cx="10911535" cy="2403043"/>
+          <a:ext cx="10911534" cy="2403043"/>
         </p:xfrm>
         <a:graphic>
           <a:graphicData uri="http://schemas.openxmlformats.org/drawingml/2006/table">
@@ -4338,8 +4338,8 @@
                 <a:tableStyleId>{5C22544A-7EE6-4342-B048-85BDC9FD1C3A}</a:tableStyleId>
               </a:tblPr>
               <a:tblGrid>
-                <a:gridCol w="5279775"/>
-                <a:gridCol w="5631760"/>
+                <a:gridCol w="4792917"/>
+                <a:gridCol w="6118617"/>
               </a:tblGrid>
               <a:tr h="343291">
                 <a:tc>
@@ -4353,7 +4353,7 @@
                             <a:srgbClr val="FFFFFF"/>
                           </a:solidFill>
                         </a:rPr>
-                        <a:t>Hata</a:t>
+                        <a:t>Mistake</a:t>
                       </a:r>
                     </a:p>
                   </a:txBody>
@@ -4374,7 +4374,7 @@
                             <a:srgbClr val="FFFFFF"/>
                           </a:solidFill>
                         </a:rPr>
-                        <a:t>Neden sorun?</a:t>
+                        <a:t>Why is it a problem?</a:t>
                       </a:r>
                     </a:p>
                   </a:txBody>
@@ -4397,7 +4397,7 @@
                             <a:srgbClr val="1F2D3A"/>
                           </a:solidFill>
                         </a:rPr>
-                        <a:t>Kılavuz ile kod tutarsız</a:t>
+                        <a:t>Guide and code are inconsistent</a:t>
                       </a:r>
                     </a:p>
                   </a:txBody>
@@ -4418,7 +4418,7 @@
                             <a:srgbClr val="1F2D3A"/>
                           </a:solidFill>
                         </a:rPr>
-                        <a:t>En ciddi bulgulardan biri</a:t>
+                        <a:t>One of the most serious findings</a:t>
                       </a:r>
                     </a:p>
                   </a:txBody>
@@ -4441,7 +4441,7 @@
                             <a:srgbClr val="1F2D3A"/>
                           </a:solidFill>
                         </a:rPr>
-                        <a:t>Kanıtsız "güvenli" iddiası</a:t>
+                        <a:t>"Secure" claimed without evidence</a:t>
                       </a:r>
                     </a:p>
                   </a:txBody>
@@ -4462,7 +4462,7 @@
                             <a:srgbClr val="1F2D3A"/>
                           </a:solidFill>
                         </a:rPr>
-                        <a:t>Puanlanmaz</a:t>
+                        <a:t>Not scored</a:t>
                       </a:r>
                     </a:p>
                   </a:txBody>
@@ -4485,7 +4485,7 @@
                             <a:srgbClr val="1F2D3A"/>
                           </a:solidFill>
                         </a:rPr>
-                        <a:t>Varlık listesinde anahtar/günlük/kod yok</a:t>
+                        <a:t>Keys/logs/code missing from the asset list</a:t>
                       </a:r>
                     </a:p>
                   </a:txBody>
@@ -4506,7 +4506,7 @@
                             <a:srgbClr val="1F2D3A"/>
                           </a:solidFill>
                         </a:rPr>
-                        <a:t>Listede olmayan korunmuyor</a:t>
+                        <a:t>What is not in the list is not protected</a:t>
                       </a:r>
                     </a:p>
                   </a:txBody>
@@ -4529,7 +4529,7 @@
                             <a:srgbClr val="1F2D3A"/>
                           </a:solidFill>
                         </a:rPr>
-                        <a:t>Genel bilgiden tehdit tablosu</a:t>
+                        <a:t>Threat table from general knowledge</a:t>
                       </a:r>
                     </a:p>
                   </a:txBody>
@@ -4550,7 +4550,7 @@
                             <a:srgbClr val="1F2D3A"/>
                           </a:solidFill>
                         </a:rPr>
-                        <a:t>Projeye özgü tehditler kaçar</a:t>
+                        <a:t>Project-specific threats get missed</a:t>
                       </a:r>
                     </a:p>
                   </a:txBody>
@@ -4573,7 +4573,7 @@
                             <a:srgbClr val="1F2D3A"/>
                           </a:solidFill>
                         </a:rPr>
-                        <a:t>Prova edilmemiş gösterim</a:t>
+                        <a:t>Unrehearsed demonstration</a:t>
                       </a:r>
                     </a:p>
                   </a:txBody>
@@ -4594,7 +4594,7 @@
                             <a:srgbClr val="1F2D3A"/>
                           </a:solidFill>
                         </a:rPr>
-                        <a:t>Süre boşa gider</a:t>
+                        <a:t>Time is wasted</a:t>
                       </a:r>
                     </a:p>
                   </a:txBody>
@@ -4617,7 +4617,7 @@
                             <a:srgbClr val="1F2D3A"/>
                           </a:solidFill>
                         </a:rPr>
-                        <a:t>Depoda gerçek parola/anahtar/kişisel veri</a:t>
+                        <a:t>Real password/key/personal data in the repo</a:t>
                       </a:r>
                     </a:p>
                   </a:txBody>
@@ -4638,7 +4638,7 @@
                             <a:srgbClr val="1F2D3A"/>
                           </a:solidFill>
                         </a:rPr>
-                        <a:t>Ciddi güvenlik hatası; değerler </a:t>
+                        <a:t>A serious security mistake; values must be </a:t>
                       </a:r>
                       <a:r>
                         <a:rPr sz="1296" b="1">
@@ -4646,7 +4646,7 @@
                             <a:srgbClr val="1F2D3A"/>
                           </a:solidFill>
                         </a:rPr>
-                        <a:t>sentetik</a:t>
+                        <a:t>synthetic</a:t>
                       </a:r>
                     </a:p>
                   </a:txBody>
@@ -4731,7 +4731,7 @@
                   <a:srgbClr val="5B6770"/>
                 </a:solidFill>
               </a:rPr>
-              <a:t>CEN429 Güvenli Programlama · Hafta 7</a:t>
+              <a:t>CEN429 Secure Programming · Week 7</a:t>
             </a:r>
           </a:p>
         </p:txBody>
@@ -4764,7 +4764,7 @@
                   <a:srgbClr val="5B6770"/>
                 </a:solidFill>
               </a:rPr>
-              <a:t>RTEÜ Bilgisayar Mühendisliği · 2026-2027 Güz</a:t>
+              <a:t>RTEU Computer Engineering · 2026-2027 Fall</a:t>
             </a:r>
           </a:p>
         </p:txBody>
@@ -4831,7 +4831,7 @@
                   <a:srgbClr val="006D77"/>
                 </a:solidFill>
               </a:rPr>
-              <a:t>Sık yapılan hatalar — şema</a:t>
+              <a:t>Common Mistakes — Diagram</a:t>
             </a:r>
           </a:p>
         </p:txBody>
@@ -4930,7 +4930,7 @@
                   <a:srgbClr val="5B6770"/>
                 </a:solidFill>
               </a:rPr>
-              <a:t>CEN429 Güvenli Programlama · Hafta 7</a:t>
+              <a:t>CEN429 Secure Programming · Week 7</a:t>
             </a:r>
           </a:p>
         </p:txBody>
@@ -4963,7 +4963,7 @@
                   <a:srgbClr val="5B6770"/>
                 </a:solidFill>
               </a:rPr>
-              <a:t>RTEÜ Bilgisayar Mühendisliği · 2026-2027 Güz</a:t>
+              <a:t>RTEU Computer Engineering · 2026-2027 Fall</a:t>
             </a:r>
           </a:p>
         </p:txBody>
@@ -5030,7 +5030,7 @@
                   <a:srgbClr val="006D77"/>
                 </a:solidFill>
               </a:rPr>
-              <a:t>Akademik dürüstlük ve sonrası</a:t>
+              <a:t>Academic Integrity and After</a:t>
             </a:r>
           </a:p>
         </p:txBody>
@@ -5044,7 +5044,7 @@
         <p:spPr>
           <a:xfrm>
             <a:off x="640080" y="1325880"/>
-            <a:ext cx="10911535" cy="1219200"/>
+            <a:ext cx="10911535" cy="1549400"/>
           </a:xfrm>
           <a:prstGeom prst="rect">
             <a:avLst/>
@@ -5076,7 +5076,7 @@
                   <a:srgbClr val="1F2D3A"/>
                 </a:solidFill>
               </a:rPr>
-              <a:t>Kaynaksız kod/metin, takım dışı çalışma, uydurma sonuç </a:t>
+              <a:t>Uncredited code/text, work from outside the team, fabricated results </a:t>
             </a:r>
             <a:r>
               <a:rPr sz="2000" b="1">
@@ -5084,7 +5084,7 @@
                   <a:srgbClr val="1F2D3A"/>
                 </a:solidFill>
               </a:rPr>
-              <a:t>kabul edilmez</a:t>
+              <a:t>are not acceptable</a:t>
             </a:r>
           </a:p>
           <a:p>
@@ -5107,7 +5107,7 @@
                   <a:srgbClr val="1F2D3A"/>
                 </a:solidFill>
               </a:rPr>
-              <a:t>Teslim edilen her satır açıklanabilmeli</a:t>
+              <a:t>Every submitted line must be explainable</a:t>
             </a:r>
           </a:p>
           <a:p>
@@ -5130,7 +5130,7 @@
                   <a:srgbClr val="1F2D3A"/>
                 </a:solidFill>
               </a:rPr>
-              <a:t>Her takım üyesine soru sorulabilir</a:t>
+              <a:t>Any team member may be asked a question</a:t>
             </a:r>
           </a:p>
         </p:txBody>
@@ -5143,7 +5143,7 @@
         </p:nvSpPr>
         <p:spPr>
           <a:xfrm>
-            <a:off x="640080" y="2654808"/>
+            <a:off x="640080" y="2985008"/>
             <a:ext cx="10911535" cy="770128"/>
           </a:xfrm>
           <a:prstGeom prst="rect">
@@ -5164,7 +5164,7 @@
                   <a:srgbClr val="1F2D3A"/>
                 </a:solidFill>
               </a:rPr>
-              <a:t>Gösterimden sonra:</a:t>
+              <a:t>After the demonstration:</a:t>
             </a:r>
             <a:r>
               <a:rPr sz="2000" b="0">
@@ -5172,7 +5172,7 @@
                   <a:srgbClr val="1F2D3A"/>
                 </a:solidFill>
               </a:rPr>
-              <a:t> geri bildirimi </a:t>
+              <a:t> write the feedback as a </a:t>
             </a:r>
             <a:r>
               <a:rPr sz="2000" b="1">
@@ -5180,7 +5180,7 @@
                   <a:srgbClr val="1F2D3A"/>
                 </a:solidFill>
               </a:rPr>
-              <a:t>bulgu listesi</a:t>
+              <a:t>finding list</a:t>
             </a:r>
             <a:r>
               <a:rPr sz="2000" b="0">
@@ -5188,7 +5188,7 @@
                   <a:srgbClr val="1F2D3A"/>
                 </a:solidFill>
               </a:rPr>
-              <a:t> olarak yaz (bulgu · önem · düzeltme · tarih) → 12. haftanın küçük modeli</a:t>
+              <a:t> (finding · severity · fix · date) → a small model of Week 12</a:t>
             </a:r>
           </a:p>
         </p:txBody>
@@ -5201,7 +5201,7 @@
         </p:nvSpPr>
         <p:spPr>
           <a:xfrm>
-            <a:off x="640080" y="3534664"/>
+            <a:off x="640080" y="3864864"/>
             <a:ext cx="10911535" cy="439928"/>
           </a:xfrm>
           <a:prstGeom prst="rect">
@@ -5222,7 +5222,7 @@
                   <a:srgbClr val="1F2D3A"/>
                 </a:solidFill>
               </a:rPr>
-              <a:t>Final bölümleri: S6 · S8 · S11 · S14 · S15 · S16 sonuç · S17</a:t>
+              <a:t>Final sections: S6 · S8 · S11 · S14 · S15 · S16 results · S17</a:t>
             </a:r>
           </a:p>
         </p:txBody>
@@ -5297,7 +5297,7 @@
                   <a:srgbClr val="5B6770"/>
                 </a:solidFill>
               </a:rPr>
-              <a:t>CEN429 Güvenli Programlama · Hafta 7</a:t>
+              <a:t>CEN429 Secure Programming · Week 7</a:t>
             </a:r>
           </a:p>
         </p:txBody>
@@ -5330,7 +5330,7 @@
                   <a:srgbClr val="5B6770"/>
                 </a:solidFill>
               </a:rPr>
-              <a:t>RTEÜ Bilgisayar Mühendisliği · 2026-2027 Güz</a:t>
+              <a:t>RTEU Computer Engineering · 2026-2027 Fall</a:t>
             </a:r>
           </a:p>
         </p:txBody>
@@ -5397,7 +5397,7 @@
                   <a:srgbClr val="006D77"/>
                 </a:solidFill>
               </a:rPr>
-              <a:t>Gelecek hafta</a:t>
+              <a:t>Next Week</a:t>
             </a:r>
           </a:p>
         </p:txBody>
@@ -5431,7 +5431,7 @@
                   <a:srgbClr val="1F2D3A"/>
                 </a:solidFill>
               </a:rPr>
-              <a:t>Hafta 8 — Ara sınav haftası: Quiz-1</a:t>
+              <a:t>Week 8 — Midterm Exam Week: Quiz-1</a:t>
             </a:r>
           </a:p>
         </p:txBody>
@@ -5477,7 +5477,7 @@
                   <a:srgbClr val="1F2D3A"/>
                 </a:solidFill>
               </a:rPr>
-              <a:t>Kapsam: 1–6. haftalar</a:t>
+              <a:t>Scope: weeks 1–6</a:t>
             </a:r>
           </a:p>
           <a:p>
@@ -5500,7 +5500,7 @@
                   <a:srgbClr val="1F2D3A"/>
                 </a:solidFill>
               </a:rPr>
-              <a:t>Çalışma rehberi ve örnek sorular: 8. hafta sayfası</a:t>
+              <a:t>Study guide and sample questions: Week 8 page</a:t>
             </a:r>
           </a:p>
         </p:txBody>
@@ -5559,7 +5559,7 @@
                   <a:srgbClr val="D8F0F2"/>
                 </a:solidFill>
               </a:rPr>
-              <a:t>CEN429 Güvenli Programlama · Hafta 7</a:t>
+              <a:t>CEN429 Secure Programming · Week 7</a:t>
             </a:r>
           </a:p>
         </p:txBody>
@@ -5592,7 +5592,7 @@
                   <a:srgbClr val="D8F0F2"/>
                 </a:solidFill>
               </a:rPr>
-              <a:t>RTEÜ Bilgisayar Mühendisliği · 2026-2027 Güz</a:t>
+              <a:t>RTEU Computer Engineering · 2026-2027 Fall</a:t>
             </a:r>
           </a:p>
         </p:txBody>
@@ -5660,7 +5660,7 @@
                   <a:srgbClr val="FFFFFF"/>
                 </a:solidFill>
               </a:rPr>
-              <a:t>Ek · Rubrik madde madde</a:t>
+              <a:t>Appendix · Rubric Item by Item</a:t>
             </a:r>
           </a:p>
         </p:txBody>
@@ -5735,7 +5735,7 @@
                   <a:srgbClr val="5B6770"/>
                 </a:solidFill>
               </a:rPr>
-              <a:t>CEN429 Güvenli Programlama · Hafta 7</a:t>
+              <a:t>CEN429 Secure Programming · Week 7</a:t>
             </a:r>
           </a:p>
         </p:txBody>
@@ -5768,7 +5768,7 @@
                   <a:srgbClr val="5B6770"/>
                 </a:solidFill>
               </a:rPr>
-              <a:t>RTEÜ Bilgisayar Mühendisliği · 2026-2027 Güz</a:t>
+              <a:t>RTEU Computer Engineering · 2026-2027 Fall</a:t>
             </a:r>
           </a:p>
         </p:txBody>
@@ -5835,7 +5835,7 @@
                   <a:srgbClr val="006D77"/>
                 </a:solidFill>
               </a:rPr>
-              <a:t>Rubrik neyi ölçer?</a:t>
+              <a:t>What Does the Rubric Measure?</a:t>
             </a:r>
           </a:p>
         </p:txBody>
@@ -5869,7 +5869,7 @@
                   <a:srgbClr val="1F2D3A"/>
                 </a:solidFill>
               </a:rPr>
-              <a:t>Vize gösterimi projenizin </a:t>
+              <a:t>The midterm demonstration measures the </a:t>
             </a:r>
             <a:r>
               <a:rPr sz="2000" b="1">
@@ -5877,7 +5877,7 @@
                   <a:srgbClr val="1F2D3A"/>
                 </a:solidFill>
               </a:rPr>
-              <a:t>ilk yarısını</a:t>
+              <a:t>first half</a:t>
             </a:r>
             <a:r>
               <a:rPr sz="2000" b="0">
@@ -5885,7 +5885,7 @@
                   <a:srgbClr val="1F2D3A"/>
                 </a:solidFill>
               </a:rPr>
-              <a:t> ölçer:</a:t>
+              <a:t> of your project:</a:t>
             </a:r>
           </a:p>
         </p:txBody>
@@ -5931,7 +5931,7 @@
                   <a:srgbClr val="1F2D3A"/>
                 </a:solidFill>
               </a:rPr>
-              <a:t>ürün, mimari, tehdit modeli</a:t>
+              <a:t>product, architecture, threat model</a:t>
             </a:r>
           </a:p>
           <a:p>
@@ -5954,7 +5954,7 @@
                   <a:srgbClr val="1F2D3A"/>
                 </a:solidFill>
               </a:rPr>
-              <a:t>varlık yönetimi</a:t>
+              <a:t>asset management</a:t>
             </a:r>
           </a:p>
           <a:p>
@@ -5977,7 +5977,7 @@
                   <a:srgbClr val="1F2D3A"/>
                 </a:solidFill>
               </a:rPr>
-              <a:t>temel korumalar</a:t>
+              <a:t>basic protections</a:t>
             </a:r>
           </a:p>
           <a:p>
@@ -6000,7 +6000,7 @@
                   <a:srgbClr val="1F2D3A"/>
                 </a:solidFill>
               </a:rPr>
-              <a:t>belge ve sunum</a:t>
+              <a:t>documentation and presentation</a:t>
             </a:r>
           </a:p>
         </p:txBody>
@@ -6075,7 +6075,7 @@
                   <a:srgbClr val="5B6770"/>
                 </a:solidFill>
               </a:rPr>
-              <a:t>CEN429 Güvenli Programlama · Hafta 7</a:t>
+              <a:t>CEN429 Secure Programming · Week 7</a:t>
             </a:r>
           </a:p>
         </p:txBody>
@@ -6108,7 +6108,7 @@
                   <a:srgbClr val="5B6770"/>
                 </a:solidFill>
               </a:rPr>
-              <a:t>RTEÜ Bilgisayar Mühendisliği · 2026-2027 Güz</a:t>
+              <a:t>RTEU Computer Engineering · 2026-2027 Fall</a:t>
             </a:r>
           </a:p>
         </p:txBody>
@@ -6175,7 +6175,7 @@
                   <a:srgbClr val="006D77"/>
                 </a:solidFill>
               </a:rPr>
-              <a:t>Madde · ürün ve mimari</a:t>
+              <a:t>Item · Product and Architecture</a:t>
             </a:r>
           </a:p>
         </p:txBody>
@@ -6221,7 +6221,7 @@
                   <a:srgbClr val="1F2D3A"/>
                 </a:solidFill>
               </a:rPr>
-              <a:t>Ne yapıyor, hangi bileşenler?</a:t>
+              <a:t>What does it do, which components?</a:t>
             </a:r>
           </a:p>
           <a:p>
@@ -6244,7 +6244,7 @@
                   <a:srgbClr val="1F2D3A"/>
                 </a:solidFill>
               </a:rPr>
-              <a:t>Tek şema + en kritik üç varlık.</a:t>
+              <a:t>One diagram + the three most critical assets.</a:t>
             </a:r>
           </a:p>
           <a:p>
@@ -6267,7 +6267,7 @@
                   <a:srgbClr val="1F2D3A"/>
                 </a:solidFill>
               </a:rPr>
-              <a:t>Kanıt:</a:t>
+              <a:t>Evidence:</a:t>
             </a:r>
             <a:r>
               <a:rPr sz="2000" b="0">
@@ -6275,7 +6275,7 @@
                   <a:srgbClr val="1F2D3A"/>
                 </a:solidFill>
               </a:rPr>
-              <a:t> S2–S4 belgesi.</a:t>
+              <a:t> S2–S4 documentation.</a:t>
             </a:r>
           </a:p>
         </p:txBody>
@@ -6350,7 +6350,7 @@
                   <a:srgbClr val="5B6770"/>
                 </a:solidFill>
               </a:rPr>
-              <a:t>CEN429 Güvenli Programlama · Hafta 7</a:t>
+              <a:t>CEN429 Secure Programming · Week 7</a:t>
             </a:r>
           </a:p>
         </p:txBody>
@@ -6383,7 +6383,7 @@
                   <a:srgbClr val="5B6770"/>
                 </a:solidFill>
               </a:rPr>
-              <a:t>RTEÜ Bilgisayar Mühendisliği · 2026-2027 Güz</a:t>
+              <a:t>RTEU Computer Engineering · 2026-2027 Fall</a:t>
             </a:r>
           </a:p>
         </p:txBody>
@@ -6450,7 +6450,7 @@
                   <a:srgbClr val="006D77"/>
                 </a:solidFill>
               </a:rPr>
-              <a:t>Madde · tehdit modeli</a:t>
+              <a:t>Item · Threat Model</a:t>
             </a:r>
           </a:p>
         </p:txBody>
@@ -6496,7 +6496,7 @@
                   <a:srgbClr val="1F2D3A"/>
                 </a:solidFill>
               </a:rPr>
-              <a:t>STRIDE / saldırı ağacı.</a:t>
+              <a:t>STRIDE / attack tree.</a:t>
             </a:r>
           </a:p>
           <a:p>
@@ -6519,7 +6519,7 @@
                   <a:srgbClr val="1F2D3A"/>
                 </a:solidFill>
               </a:rPr>
-              <a:t>Her tehdide bir önlem.</a:t>
+              <a:t>A control for every threat.</a:t>
             </a:r>
           </a:p>
           <a:p>
@@ -6542,7 +6542,7 @@
                   <a:srgbClr val="1F2D3A"/>
                 </a:solidFill>
               </a:rPr>
-              <a:t>Kanıt:</a:t>
+              <a:t>Evidence:</a:t>
             </a:r>
             <a:r>
               <a:rPr sz="2000" b="0">
@@ -6550,7 +6550,7 @@
                   <a:srgbClr val="1F2D3A"/>
                 </a:solidFill>
               </a:rPr>
-              <a:t> S4 tehdit tablosu.</a:t>
+              <a:t> S4 threat table.</a:t>
             </a:r>
           </a:p>
         </p:txBody>
@@ -6625,7 +6625,7 @@
                   <a:srgbClr val="5B6770"/>
                 </a:solidFill>
               </a:rPr>
-              <a:t>CEN429 Güvenli Programlama · Hafta 7</a:t>
+              <a:t>CEN429 Secure Programming · Week 7</a:t>
             </a:r>
           </a:p>
         </p:txBody>
@@ -6658,7 +6658,7 @@
                   <a:srgbClr val="5B6770"/>
                 </a:solidFill>
               </a:rPr>
-              <a:t>RTEÜ Bilgisayar Mühendisliği · 2026-2027 Güz</a:t>
+              <a:t>RTEU Computer Engineering · 2026-2027 Fall</a:t>
             </a:r>
           </a:p>
         </p:txBody>
@@ -6725,7 +6725,7 @@
                   <a:srgbClr val="006D77"/>
                 </a:solidFill>
               </a:rPr>
-              <a:t>Madde · varlık yönetimi</a:t>
+              <a:t>Item · Asset Management</a:t>
             </a:r>
           </a:p>
         </p:txBody>
@@ -6771,7 +6771,7 @@
                   <a:srgbClr val="1F2D3A"/>
                 </a:solidFill>
               </a:rPr>
-              <a:t>Varlık listesi + C/I/I+.</a:t>
+              <a:t>Asset list + C/I/I+.</a:t>
             </a:r>
           </a:p>
           <a:p>
@@ -6794,7 +6794,7 @@
                   <a:srgbClr val="1F2D3A"/>
                 </a:solidFill>
               </a:rPr>
-              <a:t>Yaşam döngüsü.</a:t>
+              <a:t>Lifecycle.</a:t>
             </a:r>
           </a:p>
           <a:p>
@@ -6817,7 +6817,7 @@
                   <a:srgbClr val="1F2D3A"/>
                 </a:solidFill>
               </a:rPr>
-              <a:t>Kanıt:</a:t>
+              <a:t>Evidence:</a:t>
             </a:r>
             <a:r>
               <a:rPr sz="2000" b="0">
@@ -6900,7 +6900,7 @@
                   <a:srgbClr val="5B6770"/>
                 </a:solidFill>
               </a:rPr>
-              <a:t>CEN429 Güvenli Programlama · Hafta 7</a:t>
+              <a:t>CEN429 Secure Programming · Week 7</a:t>
             </a:r>
           </a:p>
         </p:txBody>
@@ -6933,7 +6933,7 @@
                   <a:srgbClr val="5B6770"/>
                 </a:solidFill>
               </a:rPr>
-              <a:t>RTEÜ Bilgisayar Mühendisliği · 2026-2027 Güz</a:t>
+              <a:t>RTEU Computer Engineering · 2026-2027 Fall</a:t>
             </a:r>
           </a:p>
         </p:txBody>
@@ -7000,7 +7000,7 @@
                   <a:srgbClr val="006D77"/>
                 </a:solidFill>
               </a:rPr>
-              <a:t>Bu hafta: ara proje gösterimleri (RAP1)</a:t>
+              <a:t>This Week: Midterm Project Demonstrations (RAP1)</a:t>
             </a:r>
           </a:p>
         </p:txBody>
@@ -7014,7 +7014,7 @@
         <p:spPr>
           <a:xfrm>
             <a:off x="640080" y="1325880"/>
-            <a:ext cx="10911535" cy="1595120"/>
+            <a:ext cx="10911535" cy="1925320"/>
           </a:xfrm>
           <a:prstGeom prst="rect">
             <a:avLst/>
@@ -7046,7 +7046,7 @@
                   <a:srgbClr val="1F2D3A"/>
                 </a:solidFill>
               </a:rPr>
-              <a:t>Ders anlatılmaz; her takım </a:t>
+              <a:t>No lecture; each team </a:t>
             </a:r>
             <a:r>
               <a:rPr sz="2000" b="1">
@@ -7054,7 +7054,7 @@
                   <a:srgbClr val="1F2D3A"/>
                 </a:solidFill>
               </a:rPr>
-              <a:t>ara raporunu teslim eder</a:t>
+              <a:t>submits its interim report</a:t>
             </a:r>
             <a:r>
               <a:rPr sz="2000" b="0">
@@ -7062,7 +7062,7 @@
                   <a:srgbClr val="1F2D3A"/>
                 </a:solidFill>
               </a:rPr>
-              <a:t> ve </a:t>
+              <a:t> and </a:t>
             </a:r>
             <a:r>
               <a:rPr sz="2000" b="1">
@@ -7070,7 +7070,7 @@
                   <a:srgbClr val="1F2D3A"/>
                 </a:solidFill>
               </a:rPr>
-              <a:t>uygulamasını gösterir</a:t>
+              <a:t>demonstrates its application</a:t>
             </a:r>
           </a:p>
           <a:p>
@@ -7093,7 +7093,7 @@
                   <a:srgbClr val="1F2D3A"/>
                 </a:solidFill>
               </a:rPr>
-              <a:t>RAP1 = vizenin </a:t>
+              <a:t>RAP1 = </a:t>
             </a:r>
             <a:r>
               <a:rPr sz="2000" b="1">
@@ -7101,7 +7101,7 @@
                   <a:srgbClr val="1F2D3A"/>
                 </a:solidFill>
               </a:rPr>
-              <a:t>%60</a:t>
+              <a:t>60%</a:t>
             </a:r>
             <a:r>
               <a:rPr sz="2000" b="0">
@@ -7109,7 +7109,7 @@
                   <a:srgbClr val="1F2D3A"/>
                 </a:solidFill>
               </a:rPr>
-              <a:t>'ı · Quiz-1 = </a:t>
+              <a:t> of the midterm · Quiz-1 = </a:t>
             </a:r>
             <a:r>
               <a:rPr sz="2000" b="1">
@@ -7117,7 +7117,7 @@
                   <a:srgbClr val="1F2D3A"/>
                 </a:solidFill>
               </a:rPr>
-              <a:t>%40</a:t>
+              <a:t>40%</a:t>
             </a:r>
             <a:r>
               <a:rPr sz="2000" b="0">
@@ -7134,7 +7134,7 @@
                 </a:solidFill>
                 <a:latin typeface="Consolas"/>
               </a:rPr>
-              <a:t>Not_Vize = 0,6·RAP1 + 0,4·QUIZ1</a:t>
+              <a:t>Grade_Midterm = 0.6·RAP1 + 0.4·QUIZ1</a:t>
             </a:r>
           </a:p>
           <a:p>
@@ -7157,7 +7157,7 @@
                   <a:srgbClr val="1F2D3A"/>
                 </a:solidFill>
               </a:rPr>
-              <a:t>Ayrıntılı rubrik: proje rehberi · sıra, süre, teslim saati: ders sınıfı</a:t>
+              <a:t>Detailed rubric: project guide · order, timing, submission time: in class</a:t>
             </a:r>
           </a:p>
           <a:p>
@@ -7180,7 +7180,7 @@
                   <a:srgbClr val="1F2D3A"/>
                 </a:solidFill>
               </a:rPr>
-              <a:t>⚠️ Geç teslim kabul edilmez</a:t>
+              <a:t>⚠️ Late submissions are not accepted</a:t>
             </a:r>
           </a:p>
         </p:txBody>
@@ -7255,7 +7255,7 @@
                   <a:srgbClr val="5B6770"/>
                 </a:solidFill>
               </a:rPr>
-              <a:t>CEN429 Güvenli Programlama · Hafta 7</a:t>
+              <a:t>CEN429 Secure Programming · Week 7</a:t>
             </a:r>
           </a:p>
         </p:txBody>
@@ -7288,7 +7288,7 @@
                   <a:srgbClr val="5B6770"/>
                 </a:solidFill>
               </a:rPr>
-              <a:t>RTEÜ Bilgisayar Mühendisliği · 2026-2027 Güz</a:t>
+              <a:t>RTEU Computer Engineering · 2026-2027 Fall</a:t>
             </a:r>
           </a:p>
         </p:txBody>
@@ -7355,7 +7355,7 @@
                   <a:srgbClr val="006D77"/>
                 </a:solidFill>
               </a:rPr>
-              <a:t>Madde · temel korumalar</a:t>
+              <a:t>Item · Basic Protections</a:t>
             </a:r>
           </a:p>
         </p:txBody>
@@ -7401,7 +7401,7 @@
                   <a:srgbClr val="1F2D3A"/>
                 </a:solidFill>
               </a:rPr>
-              <a:t>Kripto (S8, kısmi), güvenli kod (S9, kısmi).</a:t>
+              <a:t>Cryptography (S8, partial), secure code (S9, partial).</a:t>
             </a:r>
           </a:p>
           <a:p>
@@ -7424,7 +7424,7 @@
                   <a:srgbClr val="1F2D3A"/>
                 </a:solidFill>
               </a:rPr>
-              <a:t>Kanıt:</a:t>
+              <a:t>Evidence:</a:t>
             </a:r>
             <a:r>
               <a:rPr sz="2000" b="0">
@@ -7432,7 +7432,7 @@
                   <a:srgbClr val="1F2D3A"/>
                 </a:solidFill>
               </a:rPr>
-              <a:t> kod + test.</a:t>
+              <a:t> code + tests.</a:t>
             </a:r>
           </a:p>
         </p:txBody>
@@ -7507,7 +7507,7 @@
                   <a:srgbClr val="5B6770"/>
                 </a:solidFill>
               </a:rPr>
-              <a:t>CEN429 Güvenli Programlama · Hafta 7</a:t>
+              <a:t>CEN429 Secure Programming · Week 7</a:t>
             </a:r>
           </a:p>
         </p:txBody>
@@ -7540,7 +7540,7 @@
                   <a:srgbClr val="5B6770"/>
                 </a:solidFill>
               </a:rPr>
-              <a:t>RTEÜ Bilgisayar Mühendisliği · 2026-2027 Güz</a:t>
+              <a:t>RTEU Computer Engineering · 2026-2027 Fall</a:t>
             </a:r>
           </a:p>
         </p:txBody>
@@ -7607,7 +7607,7 @@
                   <a:srgbClr val="006D77"/>
                 </a:solidFill>
               </a:rPr>
-              <a:t>Madde · belge ve sunum</a:t>
+              <a:t>Item · Documentation and Presentation</a:t>
             </a:r>
           </a:p>
         </p:txBody>
@@ -7653,7 +7653,7 @@
                   <a:srgbClr val="1F2D3A"/>
                 </a:solidFill>
               </a:rPr>
-              <a:t>Tutarlılık, sürüm kimliği.</a:t>
+              <a:t>Consistency, version identity.</a:t>
             </a:r>
           </a:p>
           <a:p>
@@ -7676,7 +7676,7 @@
                   <a:srgbClr val="1F2D3A"/>
                 </a:solidFill>
               </a:rPr>
-              <a:t>Anlaşılır anlatım.</a:t>
+              <a:t>Clear delivery.</a:t>
             </a:r>
           </a:p>
           <a:p>
@@ -7699,7 +7699,7 @@
                   <a:srgbClr val="1F2D3A"/>
                 </a:solidFill>
               </a:rPr>
-              <a:t>Kanıt:</a:t>
+              <a:t>Evidence:</a:t>
             </a:r>
             <a:r>
               <a:rPr sz="2000" b="0">
@@ -7707,7 +7707,7 @@
                   <a:srgbClr val="1F2D3A"/>
                 </a:solidFill>
               </a:rPr>
-              <a:t> kılavuzun tamamı.</a:t>
+              <a:t> the entire guide.</a:t>
             </a:r>
           </a:p>
         </p:txBody>
@@ -7766,7 +7766,7 @@
                   <a:srgbClr val="D8F0F2"/>
                 </a:solidFill>
               </a:rPr>
-              <a:t>CEN429 Güvenli Programlama · Hafta 7</a:t>
+              <a:t>CEN429 Secure Programming · Week 7</a:t>
             </a:r>
           </a:p>
         </p:txBody>
@@ -7799,7 +7799,7 @@
                   <a:srgbClr val="D8F0F2"/>
                 </a:solidFill>
               </a:rPr>
-              <a:t>RTEÜ Bilgisayar Mühendisliği · 2026-2027 Güz</a:t>
+              <a:t>RTEU Computer Engineering · 2026-2027 Fall</a:t>
             </a:r>
           </a:p>
         </p:txBody>
@@ -7867,7 +7867,7 @@
                   <a:srgbClr val="FFFFFF"/>
                 </a:solidFill>
               </a:rPr>
-              <a:t>Ek · Gösterim akışı</a:t>
+              <a:t>Appendix · Demonstration Flow</a:t>
             </a:r>
           </a:p>
         </p:txBody>
@@ -7942,7 +7942,7 @@
                   <a:srgbClr val="5B6770"/>
                 </a:solidFill>
               </a:rPr>
-              <a:t>CEN429 Güvenli Programlama · Hafta 7</a:t>
+              <a:t>CEN429 Secure Programming · Week 7</a:t>
             </a:r>
           </a:p>
         </p:txBody>
@@ -7975,7 +7975,7 @@
                   <a:srgbClr val="5B6770"/>
                 </a:solidFill>
               </a:rPr>
-              <a:t>RTEÜ Bilgisayar Mühendisliği · 2026-2027 Güz</a:t>
+              <a:t>RTEU Computer Engineering · 2026-2027 Fall</a:t>
             </a:r>
           </a:p>
         </p:txBody>
@@ -8042,7 +8042,7 @@
                   <a:srgbClr val="006D77"/>
                 </a:solidFill>
               </a:rPr>
-              <a:t>Akış · 1. özet</a:t>
+              <a:t>Flow · 1. Summary</a:t>
             </a:r>
           </a:p>
         </p:txBody>
@@ -8088,7 +8088,7 @@
                   <a:srgbClr val="1F2D3A"/>
                 </a:solidFill>
               </a:rPr>
-              <a:t>Ürün, mimari, en kritik üç varlık.</a:t>
+              <a:t>Product, architecture, the three most critical assets.</a:t>
             </a:r>
           </a:p>
           <a:p>
@@ -8111,7 +8111,7 @@
                   <a:srgbClr val="1F2D3A"/>
                 </a:solidFill>
               </a:rPr>
-              <a:t>Tek şema, iki dakika.</a:t>
+              <a:t>One diagram, two minutes.</a:t>
             </a:r>
           </a:p>
         </p:txBody>
@@ -8186,7 +8186,7 @@
                   <a:srgbClr val="5B6770"/>
                 </a:solidFill>
               </a:rPr>
-              <a:t>CEN429 Güvenli Programlama · Hafta 7</a:t>
+              <a:t>CEN429 Secure Programming · Week 7</a:t>
             </a:r>
           </a:p>
         </p:txBody>
@@ -8219,7 +8219,7 @@
                   <a:srgbClr val="5B6770"/>
                 </a:solidFill>
               </a:rPr>
-              <a:t>RTEÜ Bilgisayar Mühendisliği · 2026-2027 Güz</a:t>
+              <a:t>RTEU Computer Engineering · 2026-2027 Fall</a:t>
             </a:r>
           </a:p>
         </p:txBody>
@@ -8286,7 +8286,7 @@
                   <a:srgbClr val="006D77"/>
                 </a:solidFill>
               </a:rPr>
-              <a:t>Akış · 2. tehdit modeli</a:t>
+              <a:t>Flow · 2. Threat Model</a:t>
             </a:r>
           </a:p>
         </p:txBody>
@@ -8332,7 +8332,7 @@
                   <a:srgbClr val="1F2D3A"/>
                 </a:solidFill>
               </a:rPr>
-              <a:t>STRIDE ve saldırı ağacından bir örnek.</a:t>
+              <a:t>One example from STRIDE and the attack tree.</a:t>
             </a:r>
           </a:p>
           <a:p>
@@ -8355,7 +8355,7 @@
                   <a:srgbClr val="1F2D3A"/>
                 </a:solidFill>
               </a:rPr>
-              <a:t>"Bu tehdide şu önlem."</a:t>
+              <a:t>"This threat, that control."</a:t>
             </a:r>
           </a:p>
         </p:txBody>
@@ -8430,7 +8430,7 @@
                   <a:srgbClr val="5B6770"/>
                 </a:solidFill>
               </a:rPr>
-              <a:t>CEN429 Güvenli Programlama · Hafta 7</a:t>
+              <a:t>CEN429 Secure Programming · Week 7</a:t>
             </a:r>
           </a:p>
         </p:txBody>
@@ -8463,7 +8463,7 @@
                   <a:srgbClr val="5B6770"/>
                 </a:solidFill>
               </a:rPr>
-              <a:t>RTEÜ Bilgisayar Mühendisliği · 2026-2027 Güz</a:t>
+              <a:t>RTEU Computer Engineering · 2026-2027 Fall</a:t>
             </a:r>
           </a:p>
         </p:txBody>
@@ -8530,7 +8530,7 @@
                   <a:srgbClr val="006D77"/>
                 </a:solidFill>
               </a:rPr>
-              <a:t>Akış · 3. canlı gösterim</a:t>
+              <a:t>Flow · 3. Live Demonstration</a:t>
             </a:r>
           </a:p>
         </p:txBody>
@@ -8576,7 +8576,7 @@
                   <a:srgbClr val="1F2D3A"/>
                 </a:solidFill>
               </a:rPr>
-              <a:t>Bir korumayı </a:t>
+              <a:t>Show a control </a:t>
             </a:r>
             <a:r>
               <a:rPr sz="2000" b="1">
@@ -8584,7 +8584,7 @@
                   <a:srgbClr val="1F2D3A"/>
                 </a:solidFill>
               </a:rPr>
-              <a:t>çalışırken</a:t>
+              <a:t>working live</a:t>
             </a:r>
             <a:r>
               <a:rPr sz="2000" b="0">
@@ -8592,7 +8592,7 @@
                   <a:srgbClr val="1F2D3A"/>
                 </a:solidFill>
               </a:rPr>
-              <a:t> göster.</a:t>
+              <a:t>.</a:t>
             </a:r>
           </a:p>
           <a:p>
@@ -8615,7 +8615,7 @@
                   <a:srgbClr val="1F2D3A"/>
                 </a:solidFill>
               </a:rPr>
-              <a:t>Ör. şifreli veri, doğrulanan imza.</a:t>
+              <a:t>E.g., encrypted data, a verified signature.</a:t>
             </a:r>
           </a:p>
         </p:txBody>
@@ -8690,7 +8690,7 @@
                   <a:srgbClr val="5B6770"/>
                 </a:solidFill>
               </a:rPr>
-              <a:t>CEN429 Güvenli Programlama · Hafta 7</a:t>
+              <a:t>CEN429 Secure Programming · Week 7</a:t>
             </a:r>
           </a:p>
         </p:txBody>
@@ -8723,7 +8723,7 @@
                   <a:srgbClr val="5B6770"/>
                 </a:solidFill>
               </a:rPr>
-              <a:t>RTEÜ Bilgisayar Mühendisliği · 2026-2027 Güz</a:t>
+              <a:t>RTEU Computer Engineering · 2026-2027 Fall</a:t>
             </a:r>
           </a:p>
         </p:txBody>
@@ -8790,7 +8790,7 @@
                   <a:srgbClr val="006D77"/>
                 </a:solidFill>
               </a:rPr>
-              <a:t>Akış · 4. kanıt</a:t>
+              <a:t>Flow · 4. Evidence</a:t>
             </a:r>
           </a:p>
         </p:txBody>
@@ -8836,7 +8836,7 @@
                   <a:srgbClr val="1F2D3A"/>
                 </a:solidFill>
               </a:rPr>
-              <a:t>Testler, koruma tablosu.</a:t>
+              <a:t>Tests, protection table.</a:t>
             </a:r>
           </a:p>
           <a:p>
@@ -8859,7 +8859,7 @@
                   <a:srgbClr val="1F2D3A"/>
                 </a:solidFill>
               </a:rPr>
-              <a:t>"Şu komutla şu çıktı."</a:t>
+              <a:t>"This command, this output."</a:t>
             </a:r>
           </a:p>
         </p:txBody>
@@ -8934,7 +8934,7 @@
                   <a:srgbClr val="5B6770"/>
                 </a:solidFill>
               </a:rPr>
-              <a:t>CEN429 Güvenli Programlama · Hafta 7</a:t>
+              <a:t>CEN429 Secure Programming · Week 7</a:t>
             </a:r>
           </a:p>
         </p:txBody>
@@ -8967,7 +8967,7 @@
                   <a:srgbClr val="5B6770"/>
                 </a:solidFill>
               </a:rPr>
-              <a:t>RTEÜ Bilgisayar Mühendisliği · 2026-2027 Güz</a:t>
+              <a:t>RTEU Computer Engineering · 2026-2027 Fall</a:t>
             </a:r>
           </a:p>
         </p:txBody>
@@ -9034,7 +9034,7 @@
                   <a:srgbClr val="006D77"/>
                 </a:solidFill>
               </a:rPr>
-              <a:t>Akış · 5. kalan risk</a:t>
+              <a:t>Flow · 5. Remaining Risk</a:t>
             </a:r>
           </a:p>
         </p:txBody>
@@ -9080,7 +9080,7 @@
                   <a:srgbClr val="1F2D3A"/>
                 </a:solidFill>
               </a:rPr>
-              <a:t>Neyi bilerek kapsam dışı bıraktınız?</a:t>
+              <a:t>What did you deliberately scope out?</a:t>
             </a:r>
           </a:p>
           <a:p>
@@ -9103,7 +9103,7 @@
                   <a:srgbClr val="1F2D3A"/>
                 </a:solidFill>
               </a:rPr>
-              <a:t>Dürüst analiz puan getirir.</a:t>
+              <a:t>Honest analysis earns points.</a:t>
             </a:r>
           </a:p>
         </p:txBody>
@@ -9162,7 +9162,7 @@
                   <a:srgbClr val="D8F0F2"/>
                 </a:solidFill>
               </a:rPr>
-              <a:t>CEN429 Güvenli Programlama · Hafta 7</a:t>
+              <a:t>CEN429 Secure Programming · Week 7</a:t>
             </a:r>
           </a:p>
         </p:txBody>
@@ -9195,7 +9195,7 @@
                   <a:srgbClr val="D8F0F2"/>
                 </a:solidFill>
               </a:rPr>
-              <a:t>RTEÜ Bilgisayar Mühendisliği · 2026-2027 Güz</a:t>
+              <a:t>RTEU Computer Engineering · 2026-2027 Fall</a:t>
             </a:r>
           </a:p>
         </p:txBody>
@@ -9263,7 +9263,7 @@
                   <a:srgbClr val="FFFFFF"/>
                 </a:solidFill>
               </a:rPr>
-              <a:t>Ek · Hazırlık kontrol listesi</a:t>
+              <a:t>Appendix · Preparation Checklist</a:t>
             </a:r>
           </a:p>
         </p:txBody>
@@ -9338,7 +9338,7 @@
                   <a:srgbClr val="5B6770"/>
                 </a:solidFill>
               </a:rPr>
-              <a:t>CEN429 Güvenli Programlama · Hafta 7</a:t>
+              <a:t>CEN429 Secure Programming · Week 7</a:t>
             </a:r>
           </a:p>
         </p:txBody>
@@ -9371,7 +9371,7 @@
                   <a:srgbClr val="5B6770"/>
                 </a:solidFill>
               </a:rPr>
-              <a:t>RTEÜ Bilgisayar Mühendisliği · 2026-2027 Güz</a:t>
+              <a:t>RTEU Computer Engineering · 2026-2027 Fall</a:t>
             </a:r>
           </a:p>
         </p:txBody>
@@ -9438,7 +9438,7 @@
                   <a:srgbClr val="006D77"/>
                 </a:solidFill>
               </a:rPr>
-              <a:t>Kontrol · belge</a:t>
+              <a:t>Checklist · Documentation</a:t>
             </a:r>
           </a:p>
         </p:txBody>
@@ -9605,7 +9605,7 @@
                   <a:srgbClr val="5B6770"/>
                 </a:solidFill>
               </a:rPr>
-              <a:t>CEN429 Güvenli Programlama · Hafta 7</a:t>
+              <a:t>CEN429 Secure Programming · Week 7</a:t>
             </a:r>
           </a:p>
         </p:txBody>
@@ -9638,7 +9638,7 @@
                   <a:srgbClr val="5B6770"/>
                 </a:solidFill>
               </a:rPr>
-              <a:t>RTEÜ Bilgisayar Mühendisliği · 2026-2027 Güz</a:t>
+              <a:t>RTEU Computer Engineering · 2026-2027 Fall</a:t>
             </a:r>
           </a:p>
         </p:txBody>
@@ -9705,7 +9705,7 @@
                   <a:srgbClr val="006D77"/>
                 </a:solidFill>
               </a:rPr>
-              <a:t>Vize rubriği: beş kriter</a:t>
+              <a:t>Midterm Rubric: Five Criteria</a:t>
             </a:r>
           </a:p>
         </p:txBody>
@@ -9729,9 +9729,9 @@
                 <a:tableStyleId>{5C22544A-7EE6-4342-B048-85BDC9FD1C3A}</a:tableStyleId>
               </a:tblPr>
               <a:tblGrid>
-                <a:gridCol w="3754506"/>
-                <a:gridCol w="703970"/>
-                <a:gridCol w="6453058"/>
+                <a:gridCol w="3471852"/>
+                <a:gridCol w="743968"/>
+                <a:gridCol w="6695714"/>
               </a:tblGrid>
               <a:tr h="382219">
                 <a:tc>
@@ -9745,7 +9745,7 @@
                             <a:srgbClr val="FFFFFF"/>
                           </a:solidFill>
                         </a:rPr>
-                        <a:t>Kriter</a:t>
+                        <a:t>Criterion</a:t>
                       </a:r>
                     </a:p>
                   </a:txBody>
@@ -9766,7 +9766,7 @@
                             <a:srgbClr val="FFFFFF"/>
                           </a:solidFill>
                         </a:rPr>
-                        <a:t>ÖÇ</a:t>
+                        <a:t>LO</a:t>
                       </a:r>
                     </a:p>
                   </a:txBody>
@@ -9787,7 +9787,7 @@
                             <a:srgbClr val="FFFFFF"/>
                           </a:solidFill>
                         </a:rPr>
-                        <a:t>Kılavuzda</a:t>
+                        <a:t>Guide</a:t>
                       </a:r>
                     </a:p>
                   </a:txBody>
@@ -9810,7 +9810,7 @@
                             <a:srgbClr val="1F2D3A"/>
                           </a:solidFill>
                         </a:rPr>
-                        <a:t>Güvenlik analizi</a:t>
+                        <a:t>Security analysis</a:t>
                       </a:r>
                     </a:p>
                   </a:txBody>
@@ -9852,7 +9852,7 @@
                             <a:srgbClr val="1F2D3A"/>
                           </a:solidFill>
                         </a:rPr>
-                        <a:t>S2 · S3 arayüz tablosu · S4 tehdit/saldırgan modeli</a:t>
+                        <a:t>S2 · S3 interface table · S4 threat/attacker model</a:t>
                       </a:r>
                     </a:p>
                   </a:txBody>
@@ -9875,7 +9875,7 @@
                             <a:srgbClr val="1F2D3A"/>
                           </a:solidFill>
                         </a:rPr>
-                        <a:t>Veri güvenliği</a:t>
+                        <a:t>Data security</a:t>
                       </a:r>
                     </a:p>
                   </a:txBody>
@@ -9917,7 +9917,7 @@
                             <a:srgbClr val="1F2D3A"/>
                           </a:solidFill>
                         </a:rPr>
-                        <a:t>S5 varlık listesi · S7 kabuk matrisi</a:t>
+                        <a:t>S5 asset list · S7 shell matrix</a:t>
                       </a:r>
                     </a:p>
                   </a:txBody>
@@ -9940,7 +9940,7 @@
                             <a:srgbClr val="1F2D3A"/>
                           </a:solidFill>
                         </a:rPr>
-                        <a:t>C/C++ sağlamlaştırma ve RASP</a:t>
+                        <a:t>C/C++ hardening and RASP</a:t>
                       </a:r>
                     </a:p>
                   </a:txBody>
@@ -9982,7 +9982,7 @@
                             <a:srgbClr val="1F2D3A"/>
                           </a:solidFill>
                         </a:rPr>
-                        <a:t>S9 (temel) · S10</a:t>
+                        <a:t>S9 (basic) · S10</a:t>
                       </a:r>
                     </a:p>
                   </a:txBody>
@@ -10005,7 +10005,7 @@
                             <a:srgbClr val="1F2D3A"/>
                           </a:solidFill>
                         </a:rPr>
-                        <a:t>Proje yönetimi</a:t>
+                        <a:t>Project management</a:t>
                       </a:r>
                     </a:p>
                   </a:txBody>
@@ -10047,7 +10047,7 @@
                             <a:srgbClr val="1F2D3A"/>
                           </a:solidFill>
                         </a:rPr>
-                        <a:t>S13 süreç, SBOM · GitHub deposu ve plan</a:t>
+                        <a:t>S13 process, SBOM · GitHub repo and plan</a:t>
                       </a:r>
                     </a:p>
                   </a:txBody>
@@ -10070,7 +10070,7 @@
                             <a:srgbClr val="1F2D3A"/>
                           </a:solidFill>
                         </a:rPr>
-                        <a:t>Ara rapor</a:t>
+                        <a:t>Interim report</a:t>
                       </a:r>
                     </a:p>
                   </a:txBody>
@@ -10112,7 +10112,7 @@
                             <a:srgbClr val="1F2D3A"/>
                           </a:solidFill>
                         </a:rPr>
-                        <a:t>Vize bölümlerinin tamamı</a:t>
+                        <a:t>All midterm sections</a:t>
                       </a:r>
                     </a:p>
                   </a:txBody>
@@ -10197,7 +10197,7 @@
                   <a:srgbClr val="5B6770"/>
                 </a:solidFill>
               </a:rPr>
-              <a:t>CEN429 Güvenli Programlama · Hafta 7</a:t>
+              <a:t>CEN429 Secure Programming · Week 7</a:t>
             </a:r>
           </a:p>
         </p:txBody>
@@ -10230,7 +10230,7 @@
                   <a:srgbClr val="5B6770"/>
                 </a:solidFill>
               </a:rPr>
-              <a:t>RTEÜ Bilgisayar Mühendisliği · 2026-2027 Güz</a:t>
+              <a:t>RTEU Computer Engineering · 2026-2027 Fall</a:t>
             </a:r>
           </a:p>
         </p:txBody>
@@ -10297,7 +10297,7 @@
                   <a:srgbClr val="006D77"/>
                 </a:solidFill>
               </a:rPr>
-              <a:t>Kontrol · gösterim</a:t>
+              <a:t>Checklist · Demonstration</a:t>
             </a:r>
           </a:p>
         </p:txBody>
@@ -10464,7 +10464,7 @@
                   <a:srgbClr val="5B6770"/>
                 </a:solidFill>
               </a:rPr>
-              <a:t>CEN429 Güvenli Programlama · Hafta 7</a:t>
+              <a:t>CEN429 Secure Programming · Week 7</a:t>
             </a:r>
           </a:p>
         </p:txBody>
@@ -10497,7 +10497,7 @@
                   <a:srgbClr val="5B6770"/>
                 </a:solidFill>
               </a:rPr>
-              <a:t>RTEÜ Bilgisayar Mühendisliği · 2026-2027 Güz</a:t>
+              <a:t>RTEU Computer Engineering · 2026-2027 Fall</a:t>
             </a:r>
           </a:p>
         </p:txBody>
@@ -10564,7 +10564,7 @@
                   <a:srgbClr val="006D77"/>
                 </a:solidFill>
               </a:rPr>
-              <a:t>Kontrol · güvenlik</a:t>
+              <a:t>Checklist · Security</a:t>
             </a:r>
           </a:p>
         </p:txBody>
@@ -10715,7 +10715,7 @@
                   <a:srgbClr val="D8F0F2"/>
                 </a:solidFill>
               </a:rPr>
-              <a:t>CEN429 Güvenli Programlama · Hafta 7</a:t>
+              <a:t>CEN429 Secure Programming · Week 7</a:t>
             </a:r>
           </a:p>
         </p:txBody>
@@ -10748,7 +10748,7 @@
                   <a:srgbClr val="D8F0F2"/>
                 </a:solidFill>
               </a:rPr>
-              <a:t>RTEÜ Bilgisayar Mühendisliği · 2026-2027 Güz</a:t>
+              <a:t>RTEU Computer Engineering · 2026-2027 Fall</a:t>
             </a:r>
           </a:p>
         </p:txBody>
@@ -10816,7 +10816,7 @@
                   <a:srgbClr val="FFFFFF"/>
                 </a:solidFill>
               </a:rPr>
-              <a:t>Ek · Örnek sorular</a:t>
+              <a:t>Appendix · Sample Questions</a:t>
             </a:r>
           </a:p>
         </p:txBody>
@@ -10891,7 +10891,7 @@
                   <a:srgbClr val="5B6770"/>
                 </a:solidFill>
               </a:rPr>
-              <a:t>CEN429 Güvenli Programlama · Hafta 7</a:t>
+              <a:t>CEN429 Secure Programming · Week 7</a:t>
             </a:r>
           </a:p>
         </p:txBody>
@@ -10924,7 +10924,7 @@
                   <a:srgbClr val="5B6770"/>
                 </a:solidFill>
               </a:rPr>
-              <a:t>RTEÜ Bilgisayar Mühendisliği · 2026-2027 Güz</a:t>
+              <a:t>RTEU Computer Engineering · 2026-2027 Fall</a:t>
             </a:r>
           </a:p>
         </p:txBody>
@@ -10991,7 +10991,7 @@
                   <a:srgbClr val="006D77"/>
                 </a:solidFill>
               </a:rPr>
-              <a:t>Soru 1</a:t>
+              <a:t>Question 1</a:t>
             </a:r>
           </a:p>
         </p:txBody>
@@ -11025,7 +11025,7 @@
                   <a:srgbClr val="1F2D3A"/>
                 </a:solidFill>
               </a:rPr>
-              <a:t>En kritik üç varlığınız ve C/I/I+ etiketleri?</a:t>
+              <a:t>Your three most critical assets and their C/I/I+ labels?</a:t>
             </a:r>
           </a:p>
         </p:txBody>
@@ -11059,7 +11059,7 @@
                   <a:srgbClr val="1F2D3A"/>
                 </a:solidFill>
               </a:rPr>
-              <a:t>Cevabı hazır tutun; her varlığın yaşam döngüsünü bilin.</a:t>
+              <a:t>Keep your answer ready; know the lifecycle of every asset.</a:t>
             </a:r>
           </a:p>
         </p:txBody>
@@ -11134,7 +11134,7 @@
                   <a:srgbClr val="5B6770"/>
                 </a:solidFill>
               </a:rPr>
-              <a:t>CEN429 Güvenli Programlama · Hafta 7</a:t>
+              <a:t>CEN429 Secure Programming · Week 7</a:t>
             </a:r>
           </a:p>
         </p:txBody>
@@ -11167,7 +11167,7 @@
                   <a:srgbClr val="5B6770"/>
                 </a:solidFill>
               </a:rPr>
-              <a:t>RTEÜ Bilgisayar Mühendisliği · 2026-2027 Güz</a:t>
+              <a:t>RTEU Computer Engineering · 2026-2027 Fall</a:t>
             </a:r>
           </a:p>
         </p:txBody>
@@ -11234,7 +11234,7 @@
                   <a:srgbClr val="006D77"/>
                 </a:solidFill>
               </a:rPr>
-              <a:t>Soru 2</a:t>
+              <a:t>Question 2</a:t>
             </a:r>
           </a:p>
         </p:txBody>
@@ -11268,7 +11268,7 @@
                   <a:srgbClr val="1F2D3A"/>
                 </a:solidFill>
               </a:rPr>
-              <a:t>Bu tehdide karşı hangi önlem, nasıl doğrulandı?</a:t>
+              <a:t>Which control against this threat, and how was it verified?</a:t>
             </a:r>
           </a:p>
         </p:txBody>
@@ -11302,7 +11302,7 @@
                   <a:srgbClr val="1F2D3A"/>
                 </a:solidFill>
               </a:rPr>
-              <a:t>Tehdit → önlem → kanıt zincirini gösterin.</a:t>
+              <a:t>Show the threat → control → evidence chain.</a:t>
             </a:r>
           </a:p>
         </p:txBody>
@@ -11377,7 +11377,7 @@
                   <a:srgbClr val="5B6770"/>
                 </a:solidFill>
               </a:rPr>
-              <a:t>CEN429 Güvenli Programlama · Hafta 7</a:t>
+              <a:t>CEN429 Secure Programming · Week 7</a:t>
             </a:r>
           </a:p>
         </p:txBody>
@@ -11410,7 +11410,7 @@
                   <a:srgbClr val="5B6770"/>
                 </a:solidFill>
               </a:rPr>
-              <a:t>RTEÜ Bilgisayar Mühendisliği · 2026-2027 Güz</a:t>
+              <a:t>RTEU Computer Engineering · 2026-2027 Fall</a:t>
             </a:r>
           </a:p>
         </p:txBody>
@@ -11477,7 +11477,7 @@
                   <a:srgbClr val="006D77"/>
                 </a:solidFill>
               </a:rPr>
-              <a:t>Soru 3</a:t>
+              <a:t>Question 3</a:t>
             </a:r>
           </a:p>
         </p:txBody>
@@ -11511,7 +11511,7 @@
                   <a:srgbClr val="1F2D3A"/>
                 </a:solidFill>
               </a:rPr>
-              <a:t>Bu anahtar nereden geliyor, nerede duruyor, ne zaman siliniyor?</a:t>
+              <a:t>Where does this key come from, where does it live, when is it deleted?</a:t>
             </a:r>
           </a:p>
         </p:txBody>
@@ -11545,7 +11545,7 @@
                   <a:srgbClr val="1F2D3A"/>
                 </a:solidFill>
               </a:rPr>
-              <a:t>Anahtar yaşam döngüsünü açıklayın.</a:t>
+              <a:t>Explain the key's lifecycle.</a:t>
             </a:r>
           </a:p>
         </p:txBody>
@@ -11620,7 +11620,7 @@
                   <a:srgbClr val="5B6770"/>
                 </a:solidFill>
               </a:rPr>
-              <a:t>CEN429 Güvenli Programlama · Hafta 7</a:t>
+              <a:t>CEN429 Secure Programming · Week 7</a:t>
             </a:r>
           </a:p>
         </p:txBody>
@@ -11653,7 +11653,7 @@
                   <a:srgbClr val="5B6770"/>
                 </a:solidFill>
               </a:rPr>
-              <a:t>RTEÜ Bilgisayar Mühendisliği · 2026-2027 Güz</a:t>
+              <a:t>RTEU Computer Engineering · 2026-2027 Fall</a:t>
             </a:r>
           </a:p>
         </p:txBody>
@@ -11720,7 +11720,7 @@
                   <a:srgbClr val="006D77"/>
                 </a:solidFill>
               </a:rPr>
-              <a:t>Soru 4</a:t>
+              <a:t>Question 4</a:t>
             </a:r>
           </a:p>
         </p:txBody>
@@ -11754,7 +11754,7 @@
                   <a:srgbClr val="1F2D3A"/>
                 </a:solidFill>
               </a:rPr>
-              <a:t>Kalan riskiniz ne? Neden kabul edilebilir?</a:t>
+              <a:t>What is your remaining risk? Why is it acceptable?</a:t>
             </a:r>
           </a:p>
         </p:txBody>
@@ -11788,7 +11788,7 @@
                   <a:srgbClr val="1F2D3A"/>
                 </a:solidFill>
               </a:rPr>
-              <a:t>Dürüst ve gerekçeli yanıtlayın.</a:t>
+              <a:t>Answer honestly and with justification.</a:t>
             </a:r>
           </a:p>
         </p:txBody>
@@ -11847,7 +11847,7 @@
                   <a:srgbClr val="D8F0F2"/>
                 </a:solidFill>
               </a:rPr>
-              <a:t>CEN429 Güvenli Programlama · Hafta 7</a:t>
+              <a:t>CEN429 Secure Programming · Week 7</a:t>
             </a:r>
           </a:p>
         </p:txBody>
@@ -11880,7 +11880,7 @@
                   <a:srgbClr val="D8F0F2"/>
                 </a:solidFill>
               </a:rPr>
-              <a:t>RTEÜ Bilgisayar Mühendisliği · 2026-2027 Güz</a:t>
+              <a:t>RTEU Computer Engineering · 2026-2027 Fall</a:t>
             </a:r>
           </a:p>
         </p:txBody>
@@ -11948,7 +11948,7 @@
                   <a:srgbClr val="FFFFFF"/>
                 </a:solidFill>
               </a:rPr>
-              <a:t>Ek · Sık yapılan hatalar</a:t>
+              <a:t>Appendix · Common Mistakes</a:t>
             </a:r>
           </a:p>
         </p:txBody>
@@ -12023,7 +12023,7 @@
                   <a:srgbClr val="5B6770"/>
                 </a:solidFill>
               </a:rPr>
-              <a:t>CEN429 Güvenli Programlama · Hafta 7</a:t>
+              <a:t>CEN429 Secure Programming · Week 7</a:t>
             </a:r>
           </a:p>
         </p:txBody>
@@ -12056,7 +12056,7 @@
                   <a:srgbClr val="5B6770"/>
                 </a:solidFill>
               </a:rPr>
-              <a:t>RTEÜ Bilgisayar Mühendisliği · 2026-2027 Güz</a:t>
+              <a:t>RTEU Computer Engineering · 2026-2027 Fall</a:t>
             </a:r>
           </a:p>
         </p:txBody>
@@ -12123,7 +12123,7 @@
                   <a:srgbClr val="006D77"/>
                 </a:solidFill>
               </a:rPr>
-              <a:t>Hata listesi</a:t>
+              <a:t>Mistake List</a:t>
             </a:r>
           </a:p>
         </p:txBody>
@@ -12169,7 +12169,7 @@
                   <a:srgbClr val="1F2D3A"/>
                 </a:solidFill>
               </a:rPr>
-              <a:t>Kılavuz ile kod sürümü farklı.</a:t>
+              <a:t>Guide and code version differ.</a:t>
             </a:r>
           </a:p>
           <a:p>
@@ -12192,7 +12192,7 @@
                   <a:srgbClr val="1F2D3A"/>
                 </a:solidFill>
               </a:rPr>
-              <a:t>Kanıtsız "yapıldı".</a:t>
+              <a:t>"Done" without evidence.</a:t>
             </a:r>
           </a:p>
           <a:p>
@@ -12215,7 +12215,7 @@
                   <a:srgbClr val="1F2D3A"/>
                 </a:solidFill>
               </a:rPr>
-              <a:t>Canlı demo çökmesi (yedek yok).</a:t>
+              <a:t>Live demo crashes (no backup).</a:t>
             </a:r>
           </a:p>
           <a:p>
@@ -12238,7 +12238,7 @@
                   <a:srgbClr val="1F2D3A"/>
                 </a:solidFill>
               </a:rPr>
-              <a:t>Kalan risk bölümü boş.</a:t>
+              <a:t>Remaining-risk section is empty.</a:t>
             </a:r>
           </a:p>
           <a:p>
@@ -12261,7 +12261,7 @@
                   <a:srgbClr val="1F2D3A"/>
                 </a:solidFill>
               </a:rPr>
-              <a:t>Depoda gerçek veri.</a:t>
+              <a:t>Real data in the repo.</a:t>
             </a:r>
           </a:p>
         </p:txBody>
@@ -12336,7 +12336,7 @@
                   <a:srgbClr val="5B6770"/>
                 </a:solidFill>
               </a:rPr>
-              <a:t>CEN429 Güvenli Programlama · Hafta 7</a:t>
+              <a:t>CEN429 Secure Programming · Week 7</a:t>
             </a:r>
           </a:p>
         </p:txBody>
@@ -12369,7 +12369,7 @@
                   <a:srgbClr val="5B6770"/>
                 </a:solidFill>
               </a:rPr>
-              <a:t>RTEÜ Bilgisayar Mühendisliği · 2026-2027 Güz</a:t>
+              <a:t>RTEU Computer Engineering · 2026-2027 Fall</a:t>
             </a:r>
           </a:p>
         </p:txBody>
@@ -12436,7 +12436,7 @@
                   <a:srgbClr val="006D77"/>
                 </a:solidFill>
               </a:rPr>
-              <a:t>Son söz (RAP1)</a:t>
+              <a:t>Final Word (RAP1)</a:t>
             </a:r>
           </a:p>
         </p:txBody>
@@ -12489,7 +12489,7 @@
                   <a:srgbClr val="1F2D3A"/>
                 </a:solidFill>
               </a:rPr>
-              <a:t>Gösterim bir </a:t>
+              <a:t>A demonstration is a presentation of </a:t>
             </a:r>
             <a:r>
               <a:rPr sz="2000" b="1">
@@ -12497,7 +12497,7 @@
                   <a:srgbClr val="1F2D3A"/>
                 </a:solidFill>
               </a:rPr>
-              <a:t>kanıt</a:t>
+              <a:t>evidence</a:t>
             </a:r>
             <a:r>
               <a:rPr sz="2000" b="0">
@@ -12505,7 +12505,7 @@
                   <a:srgbClr val="1F2D3A"/>
                 </a:solidFill>
               </a:rPr>
-              <a:t> sunumudur: her iddianın arkasında bir belge, test ya da canlı çıktı olsun.</a:t>
+              <a:t>: every claim should be backed by a document, a test, or live output.</a:t>
             </a:r>
           </a:p>
         </p:txBody>
@@ -12539,7 +12539,7 @@
                   <a:srgbClr val="1F2D3A"/>
                 </a:solidFill>
               </a:rPr>
-              <a:t>Vize geri bildirimleri finalde </a:t>
+              <a:t>Midterm feedback becomes a </a:t>
             </a:r>
             <a:r>
               <a:rPr sz="2000" b="1">
@@ -12547,7 +12547,7 @@
                   <a:srgbClr val="1F2D3A"/>
                 </a:solidFill>
               </a:rPr>
-              <a:t>bulgu–aksiyon</a:t>
+              <a:t>finding–action</a:t>
             </a:r>
             <a:r>
               <a:rPr sz="2000" b="0">
@@ -12555,7 +12555,7 @@
                   <a:srgbClr val="1F2D3A"/>
                 </a:solidFill>
               </a:rPr>
-              <a:t> listesine dönüşecek.</a:t>
+              <a:t> list at the final.</a:t>
             </a:r>
           </a:p>
         </p:txBody>
@@ -12630,7 +12630,7 @@
                   <a:srgbClr val="5B6770"/>
                 </a:solidFill>
               </a:rPr>
-              <a:t>CEN429 Güvenli Programlama · Hafta 7</a:t>
+              <a:t>CEN429 Secure Programming · Week 7</a:t>
             </a:r>
           </a:p>
         </p:txBody>
@@ -12663,7 +12663,7 @@
                   <a:srgbClr val="5B6770"/>
                 </a:solidFill>
               </a:rPr>
-              <a:t>RTEÜ Bilgisayar Mühendisliği · 2026-2027 Güz</a:t>
+              <a:t>RTEU Computer Engineering · 2026-2027 Fall</a:t>
             </a:r>
           </a:p>
         </p:txBody>
@@ -12730,7 +12730,7 @@
                   <a:srgbClr val="006D77"/>
                 </a:solidFill>
               </a:rPr>
-              <a:t>Rubriğin okunuşu — şema</a:t>
+              <a:t>How the Rubric Is Read — Diagram</a:t>
             </a:r>
           </a:p>
         </p:txBody>
@@ -12829,7 +12829,7 @@
                   <a:srgbClr val="5B6770"/>
                 </a:solidFill>
               </a:rPr>
-              <a:t>CEN429 Güvenli Programlama · Hafta 7</a:t>
+              <a:t>CEN429 Secure Programming · Week 7</a:t>
             </a:r>
           </a:p>
         </p:txBody>
@@ -12862,7 +12862,7 @@
                   <a:srgbClr val="5B6770"/>
                 </a:solidFill>
               </a:rPr>
-              <a:t>RTEÜ Bilgisayar Mühendisliği · 2026-2027 Güz</a:t>
+              <a:t>RTEU Computer Engineering · 2026-2027 Fall</a:t>
             </a:r>
           </a:p>
         </p:txBody>
@@ -12929,7 +12929,7 @@
                   <a:srgbClr val="006D77"/>
                 </a:solidFill>
               </a:rPr>
-              <a:t>Ara raporda hangi bölümler?</a:t>
+              <a:t>Which Sections in the Interim Report?</a:t>
             </a:r>
           </a:p>
         </p:txBody>
@@ -12953,8 +12953,8 @@
                 <a:tableStyleId>{5C22544A-7EE6-4342-B048-85BDC9FD1C3A}</a:tableStyleId>
               </a:tblPr>
               <a:tblGrid>
-                <a:gridCol w="5845465"/>
-                <a:gridCol w="5066069"/>
+                <a:gridCol w="5832027"/>
+                <a:gridCol w="5079507"/>
               </a:tblGrid>
               <a:tr h="357987">
                 <a:tc>
@@ -12968,7 +12968,7 @@
                             <a:srgbClr val="FFFFFF"/>
                           </a:solidFill>
                         </a:rPr>
-                        <a:t>Tam</a:t>
+                        <a:t>Complete</a:t>
                       </a:r>
                     </a:p>
                   </a:txBody>
@@ -12989,7 +12989,7 @@
                             <a:srgbClr val="FFFFFF"/>
                           </a:solidFill>
                         </a:rPr>
-                        <a:t>Taslak / kısa / plan</a:t>
+                        <a:t>Draft / brief / plan</a:t>
                       </a:r>
                     </a:p>
                   </a:txBody>
@@ -13012,7 +13012,7 @@
                             <a:srgbClr val="1F2D3A"/>
                           </a:solidFill>
                         </a:rPr>
-                        <a:t>S0 kapak · S2 genel bakış · S3 mimari · S4 tehdit modeli</a:t>
+                        <a:t>S0 cover · S2 overview · S3 architecture · S4 threat model</a:t>
                       </a:r>
                     </a:p>
                   </a:txBody>
@@ -13033,7 +13033,7 @@
                             <a:srgbClr val="1F2D3A"/>
                           </a:solidFill>
                         </a:rPr>
-                        <a:t>S1 kapsam (taslak) · S5 varlıklar (taslak)</a:t>
+                        <a:t>S1 scope (draft) · S5 assets (draft)</a:t>
                       </a:r>
                     </a:p>
                   </a:txBody>
@@ -13056,7 +13056,7 @@
                             <a:srgbClr val="1F2D3A"/>
                           </a:solidFill>
                         </a:rPr>
-                        <a:t>S7 veri güvenliği · S10 RASP · S13 süreç</a:t>
+                        <a:t>S7 data security · S10 RASP · S13 process</a:t>
                       </a:r>
                     </a:p>
                   </a:txBody>
@@ -13077,7 +13077,7 @@
                             <a:srgbClr val="1F2D3A"/>
                           </a:solidFill>
                         </a:rPr>
-                        <a:t>S9 sağlamlaştırma (temel) · S12 raporlama (kısa)</a:t>
+                        <a:t>S9 hardening (basic) · S12 reporting (brief)</a:t>
                       </a:r>
                     </a:p>
                   </a:txBody>
@@ -13112,7 +13112,7 @@
                             <a:srgbClr val="1F2D3A"/>
                           </a:solidFill>
                         </a:rPr>
-                        <a:t>S16 test (plan) · S17 uyum matrisi (taslak)</a:t>
+                        <a:t>S16 testing (plan) · S17 compliance matrix (draft)</a:t>
                       </a:r>
                     </a:p>
                   </a:txBody>
@@ -13156,7 +13156,7 @@
                   <a:srgbClr val="1F2D3A"/>
                 </a:solidFill>
               </a:rPr>
-              <a:t>Finale kalanlar: S6 · S8 · S11 · S14 · S15</a:t>
+              <a:t>Left for the final: S6 · S8 · S11 · S14 · S15</a:t>
             </a:r>
           </a:p>
         </p:txBody>
@@ -13231,7 +13231,7 @@
                   <a:srgbClr val="5B6770"/>
                 </a:solidFill>
               </a:rPr>
-              <a:t>CEN429 Güvenli Programlama · Hafta 7</a:t>
+              <a:t>CEN429 Secure Programming · Week 7</a:t>
             </a:r>
           </a:p>
         </p:txBody>
@@ -13264,7 +13264,7 @@
                   <a:srgbClr val="5B6770"/>
                 </a:solidFill>
               </a:rPr>
-              <a:t>RTEÜ Bilgisayar Mühendisliği · 2026-2027 Güz</a:t>
+              <a:t>RTEU Computer Engineering · 2026-2027 Fall</a:t>
             </a:r>
           </a:p>
         </p:txBody>
@@ -13331,7 +13331,7 @@
                   <a:srgbClr val="006D77"/>
                 </a:solidFill>
               </a:rPr>
-              <a:t>RAP1 teslimi — şema</a:t>
+              <a:t>RAP1 Submission — Diagram</a:t>
             </a:r>
           </a:p>
         </p:txBody>
@@ -13430,7 +13430,7 @@
                   <a:srgbClr val="5B6770"/>
                 </a:solidFill>
               </a:rPr>
-              <a:t>CEN429 Güvenli Programlama · Hafta 7</a:t>
+              <a:t>CEN429 Secure Programming · Week 7</a:t>
             </a:r>
           </a:p>
         </p:txBody>
@@ -13463,7 +13463,7 @@
                   <a:srgbClr val="5B6770"/>
                 </a:solidFill>
               </a:rPr>
-              <a:t>RTEÜ Bilgisayar Mühendisliği · 2026-2027 Güz</a:t>
+              <a:t>RTEU Computer Engineering · 2026-2027 Fall</a:t>
             </a:r>
           </a:p>
         </p:txBody>
@@ -13530,7 +13530,7 @@
                   <a:srgbClr val="006D77"/>
                 </a:solidFill>
               </a:rPr>
-              <a:t>Hazırlık kontrol listesi</a:t>
+              <a:t>Preparation Checklist</a:t>
             </a:r>
           </a:p>
         </p:txBody>
@@ -13554,8 +13554,8 @@
                 <a:tableStyleId>{5C22544A-7EE6-4342-B048-85BDC9FD1C3A}</a:tableStyleId>
               </a:tblPr>
               <a:tblGrid>
-                <a:gridCol w="1103413"/>
-                <a:gridCol w="9808121"/>
+                <a:gridCol w="1015026"/>
+                <a:gridCol w="9896508"/>
               </a:tblGrid>
               <a:tr h="404426">
                 <a:tc>
@@ -13569,7 +13569,7 @@
                             <a:srgbClr val="FFFFFF"/>
                           </a:solidFill>
                         </a:rPr>
-                        <a:t>Hafta</a:t>
+                        <a:t>Week</a:t>
                       </a:r>
                     </a:p>
                   </a:txBody>
@@ -13590,7 +13590,7 @@
                             <a:srgbClr val="FFFFFF"/>
                           </a:solidFill>
                         </a:rPr>
-                        <a:t>Gösterebilmeniz gereken</a:t>
+                        <a:t>What you should be able to show</a:t>
                       </a:r>
                     </a:p>
                   </a:txBody>
@@ -13634,7 +13634,7 @@
                             <a:srgbClr val="1F2D3A"/>
                           </a:solidFill>
                         </a:rPr>
-                        <a:t>Depo + plan · S2 · S3 arayüz tablosu · S4 STRIDE + saldırı ağacı · S5 taslak</a:t>
+                        <a:t>Repo + plan · S2 · S3 interface table · S4 STRIDE + attack tree · S5 draft</a:t>
                       </a:r>
                     </a:p>
                   </a:txBody>
@@ -13678,7 +13678,7 @@
                             <a:srgbClr val="1F2D3A"/>
                           </a:solidFill>
                         </a:rPr>
-                        <a:t>Her tehdit → CWE + CVSS v3.1 vektörü</a:t>
+                        <a:t>Every threat → CWE + CVSS v3.1 vector</a:t>
                       </a:r>
                     </a:p>
                   </a:txBody>
@@ -13722,7 +13722,7 @@
                             <a:srgbClr val="1F2D3A"/>
                           </a:solidFill>
                         </a:rPr>
-                        <a:t>S7 algoritma/anahtar/bağlama · kabuk matrisi · CSPRNG · AEAD doğrulama</a:t>
+                        <a:t>S7 algorithm/key/binding · shell matrix · CSPRNG · AEAD verification</a:t>
                       </a:r>
                     </a:p>
                   </a:txBody>
@@ -13766,7 +13766,7 @@
                             <a:srgbClr val="1F2D3A"/>
                           </a:solidFill>
                         </a:rPr>
-                        <a:t>S9 koruma tablosu · CERT bulguları · ASan+UBSan · fuzz sonucu</a:t>
+                        <a:t>S9 protection table · CERT findings · ASan+UBSan · fuzz result</a:t>
                       </a:r>
                     </a:p>
                   </a:txBody>
@@ -13810,7 +13810,7 @@
                             <a:srgbClr val="1F2D3A"/>
                           </a:solidFill>
                         </a:rPr>
-                        <a:t>SBOM + tarama · girdi doğrulama tablosu</a:t>
+                        <a:t>SBOM + scan · input validation table</a:t>
                       </a:r>
                     </a:p>
                   </a:txBody>
@@ -13854,7 +13854,7 @@
                             <a:srgbClr val="1F2D3A"/>
                           </a:solidFill>
                         </a:rPr>
-                        <a:t>S10 RASP envanteri · tepki politikası · bir atlatma denemesi</a:t>
+                        <a:t>S10 RASP inventory · response policy · a bypass attempt</a:t>
                       </a:r>
                     </a:p>
                   </a:txBody>
@@ -13939,7 +13939,7 @@
                   <a:srgbClr val="5B6770"/>
                 </a:solidFill>
               </a:rPr>
-              <a:t>CEN429 Güvenli Programlama · Hafta 7</a:t>
+              <a:t>CEN429 Secure Programming · Week 7</a:t>
             </a:r>
           </a:p>
         </p:txBody>
@@ -13972,7 +13972,7 @@
                   <a:srgbClr val="5B6770"/>
                 </a:solidFill>
               </a:rPr>
-              <a:t>RTEÜ Bilgisayar Mühendisliği · 2026-2027 Güz</a:t>
+              <a:t>RTEU Computer Engineering · 2026-2027 Fall</a:t>
             </a:r>
           </a:p>
         </p:txBody>
@@ -14039,7 +14039,7 @@
                   <a:srgbClr val="006D77"/>
                 </a:solidFill>
               </a:rPr>
-              <a:t>Önerilen gösterim akışı</a:t>
+              <a:t>Suggested Demonstration Flow</a:t>
             </a:r>
           </a:p>
         </p:txBody>
@@ -14085,7 +14085,7 @@
                   <a:srgbClr val="1F2D3A"/>
                 </a:solidFill>
               </a:rPr>
-              <a:t>Ürün ve mimari</a:t>
+              <a:t>Product and architecture</a:t>
             </a:r>
             <a:r>
               <a:rPr sz="2000" b="0">
@@ -14093,7 +14093,7 @@
                   <a:srgbClr val="1F2D3A"/>
                 </a:solidFill>
               </a:rPr>
-              <a:t> (S2–S3): tek şema, güven sınırları</a:t>
+              <a:t> (S2–S3): one diagram, trust boundaries</a:t>
             </a:r>
           </a:p>
           <a:p>
@@ -14116,7 +14116,7 @@
                   <a:srgbClr val="1F2D3A"/>
                 </a:solidFill>
               </a:rPr>
-              <a:t>Tehditler ve varlıklar</a:t>
+              <a:t>Threats and assets</a:t>
             </a:r>
             <a:r>
               <a:rPr sz="2000" b="0">
@@ -14124,7 +14124,7 @@
                   <a:srgbClr val="1F2D3A"/>
                 </a:solidFill>
               </a:rPr>
-              <a:t> (S4–S5): en kritik üç tehdit</a:t>
+              <a:t> (S4–S5): the three most critical threats</a:t>
             </a:r>
           </a:p>
           <a:p>
@@ -14147,7 +14147,7 @@
                   <a:srgbClr val="1F2D3A"/>
                 </a:solidFill>
               </a:rPr>
-              <a:t>Canlı gösterim:</a:t>
+              <a:t>Live demonstration:</a:t>
             </a:r>
             <a:r>
               <a:rPr sz="2000" b="0">
@@ -14155,7 +14155,7 @@
                   <a:srgbClr val="1F2D3A"/>
                 </a:solidFill>
               </a:rPr>
-              <a:t> en az bir önlem </a:t>
+              <a:t> at least one control </a:t>
             </a:r>
             <a:r>
               <a:rPr sz="2000" b="1">
@@ -14163,7 +14163,7 @@
                   <a:srgbClr val="1F2D3A"/>
                 </a:solidFill>
               </a:rPr>
-              <a:t>çalışırken</a:t>
+              <a:t>working live</a:t>
             </a:r>
           </a:p>
           <a:p>
@@ -14186,7 +14186,7 @@
                   <a:srgbClr val="1F2D3A"/>
                 </a:solidFill>
               </a:rPr>
-              <a:t>Kanıt:</a:t>
+              <a:t>Evidence:</a:t>
             </a:r>
             <a:r>
               <a:rPr sz="2000" b="0">
@@ -14194,7 +14194,7 @@
                   <a:srgbClr val="1F2D3A"/>
                 </a:solidFill>
               </a:rPr>
-              <a:t> koruma tablosu, sanitizer/fuzz, SBOM — komut + çıktı</a:t>
+              <a:t> protection table, sanitizer/fuzz, SBOM — command + output</a:t>
             </a:r>
           </a:p>
           <a:p>
@@ -14217,7 +14217,7 @@
                   <a:srgbClr val="1F2D3A"/>
                 </a:solidFill>
               </a:rPr>
-              <a:t>Kalan risk ve plan:</a:t>
+              <a:t>Remaining risk and plan:</a:t>
             </a:r>
             <a:r>
               <a:rPr sz="2000" b="0">
@@ -14225,7 +14225,7 @@
                   <a:srgbClr val="1F2D3A"/>
                 </a:solidFill>
               </a:rPr>
-              <a:t> finale kadar ne yapılacak?</a:t>
+              <a:t> what remains before the final?</a:t>
             </a:r>
           </a:p>
         </p:txBody>
@@ -14259,7 +14259,7 @@
                   <a:srgbClr val="1F2D3A"/>
                 </a:solidFill>
               </a:rPr>
-              <a:t>Her önlem için: </a:t>
+              <a:t>For every control: </a:t>
             </a:r>
             <a:r>
               <a:rPr sz="2000" b="1">
@@ -14267,7 +14267,7 @@
                   <a:srgbClr val="1F2D3A"/>
                 </a:solidFill>
               </a:rPr>
-              <a:t>Neyi korur? · Nasıl yapıldı? · Nasıl kanıtlandı?</a:t>
+              <a:t>What does it protect? · How was it built? · How was it proven?</a:t>
             </a:r>
           </a:p>
         </p:txBody>
@@ -14342,7 +14342,7 @@
                   <a:srgbClr val="5B6770"/>
                 </a:solidFill>
               </a:rPr>
-              <a:t>CEN429 Güvenli Programlama · Hafta 7</a:t>
+              <a:t>CEN429 Secure Programming · Week 7</a:t>
             </a:r>
           </a:p>
         </p:txBody>
@@ -14375,7 +14375,7 @@
                   <a:srgbClr val="5B6770"/>
                 </a:solidFill>
               </a:rPr>
-              <a:t>RTEÜ Bilgisayar Mühendisliği · 2026-2027 Güz</a:t>
+              <a:t>RTEU Computer Engineering · 2026-2027 Fall</a:t>
             </a:r>
           </a:p>
         </p:txBody>
@@ -14442,7 +14442,7 @@
                   <a:srgbClr val="006D77"/>
                 </a:solidFill>
               </a:rPr>
-              <a:t>Gösterim günü akışı — şema</a:t>
+              <a:t>Demonstration Day Flow — Diagram</a:t>
             </a:r>
           </a:p>
         </p:txBody>

--- a/docs/week-7/cen429-week-7-sunum.en.pptx
+++ b/docs/week-7/cen429-week-7-sunum.en.pptx
@@ -20,30 +20,6 @@
     <p:sldId id="268" r:id="rId20"/>
     <p:sldId id="269" r:id="rId21"/>
     <p:sldId id="270" r:id="rId22"/>
-    <p:sldId id="271" r:id="rId23"/>
-    <p:sldId id="272" r:id="rId24"/>
-    <p:sldId id="273" r:id="rId25"/>
-    <p:sldId id="274" r:id="rId26"/>
-    <p:sldId id="275" r:id="rId27"/>
-    <p:sldId id="276" r:id="rId28"/>
-    <p:sldId id="277" r:id="rId29"/>
-    <p:sldId id="278" r:id="rId30"/>
-    <p:sldId id="279" r:id="rId31"/>
-    <p:sldId id="280" r:id="rId32"/>
-    <p:sldId id="281" r:id="rId33"/>
-    <p:sldId id="282" r:id="rId34"/>
-    <p:sldId id="283" r:id="rId35"/>
-    <p:sldId id="284" r:id="rId36"/>
-    <p:sldId id="285" r:id="rId37"/>
-    <p:sldId id="286" r:id="rId38"/>
-    <p:sldId id="287" r:id="rId39"/>
-    <p:sldId id="288" r:id="rId40"/>
-    <p:sldId id="289" r:id="rId41"/>
-    <p:sldId id="290" r:id="rId42"/>
-    <p:sldId id="291" r:id="rId43"/>
-    <p:sldId id="292" r:id="rId44"/>
-    <p:sldId id="293" r:id="rId45"/>
-    <p:sldId id="294" r:id="rId46"/>
   </p:sldIdLst>
   <p:sldSz cx="12191695" cy="6858000" type="screen4x3"/>
   <p:notesSz cx="6858000" cy="9144000"/>
@@ -541,76 +517,6 @@
           <a:p>
             <a:r>
               <a:t>Speaker note: This week is not a lecture but a demonstration week: each team shows the midterm sections of its security guide and its working application.</a:t>
-            </a:r>
-          </a:p>
-        </p:txBody>
-      </p:sp>
-      <p:sp>
-        <p:nvSpPr>
-          <p:cNvPr id="4" name="Slide Number Placeholder 3"/>
-          <p:cNvSpPr>
-            <a:spLocks noGrp="1"/>
-          </p:cNvSpPr>
-          <p:nvPr>
-            <p:ph type="sldNum" idx="5" sz="quarter"/>
-          </p:nvPr>
-        </p:nvSpPr>
-        <p:spPr/>
-      </p:sp>
-    </p:spTree>
-  </p:cSld>
-  <p:clrMapOvr>
-    <a:masterClrMapping/>
-  </p:clrMapOvr>
-</p:notes>
-</file>
-
-<file path=ppt/notesSlides/notesSlide2.xml><?xml version="1.0" encoding="utf-8"?>
-<p:notes xmlns:a="http://schemas.openxmlformats.org/drawingml/2006/main" xmlns:p="http://schemas.openxmlformats.org/presentationml/2006/main" xmlns:r="http://schemas.openxmlformats.org/officeDocument/2006/relationships">
-  <p:cSld>
-    <p:spTree>
-      <p:nvGrpSpPr>
-        <p:cNvPr id="1" name=""/>
-        <p:cNvGrpSpPr/>
-        <p:nvPr/>
-      </p:nvGrpSpPr>
-      <p:grpSpPr>
-        <a:xfrm>
-          <a:off x="0" y="0"/>
-          <a:ext cx="0" cy="0"/>
-          <a:chOff x="0" y="0"/>
-          <a:chExt cx="0" cy="0"/>
-        </a:xfrm>
-      </p:grpSpPr>
-      <p:sp>
-        <p:nvSpPr>
-          <p:cNvPr id="2" name="Slide Image Placeholder 1"/>
-          <p:cNvSpPr>
-            <a:spLocks noGrp="1"/>
-          </p:cNvSpPr>
-          <p:nvPr>
-            <p:ph type="sldImg" idx="2"/>
-          </p:nvPr>
-        </p:nvSpPr>
-        <p:spPr/>
-      </p:sp>
-      <p:sp>
-        <p:nvSpPr>
-          <p:cNvPr id="3" name="Notes Placeholder 2"/>
-          <p:cNvSpPr>
-            <a:spLocks noGrp="1"/>
-          </p:cNvSpPr>
-          <p:nvPr>
-            <p:ph type="body" idx="3" sz="quarter"/>
-          </p:nvPr>
-        </p:nvSpPr>
-        <p:spPr/>
-        <p:txBody>
-          <a:bodyPr/>
-          <a:lstStyle/>
-          <a:p>
-            <a:r>
-              <a:t>Speaker note: For the midterm demonstration (RAP1), we explain what evidence each rubric item expects.</a:t>
             </a:r>
           </a:p>
         </p:txBody>
@@ -3973,7 +3879,7 @@
           <a:lstStyle/>
           <a:p>
             <a:r>
-              <a:rPr sz="3000" b="1">
+              <a:rPr sz="2600" b="1">
                 <a:solidFill>
                   <a:srgbClr val="006D77"/>
                 </a:solidFill>
@@ -3992,7 +3898,7 @@
         <p:spPr>
           <a:xfrm>
             <a:off x="640080" y="1325880"/>
-            <a:ext cx="10911535" cy="2346960"/>
+            <a:ext cx="10911535" cy="4069080"/>
           </a:xfrm>
           <a:prstGeom prst="rect">
             <a:avLst/>
@@ -4011,7 +3917,7 @@
               </a:spcAft>
             </a:pPr>
             <a:r>
-              <a:rPr sz="2000" b="1">
+              <a:rPr sz="1800" b="1">
                 <a:solidFill>
                   <a:srgbClr val="006D77"/>
                 </a:solidFill>
@@ -4019,7 +3925,7 @@
               <a:t>• </a:t>
             </a:r>
             <a:r>
-              <a:rPr sz="2000" b="0">
+              <a:rPr sz="1800" b="0">
                 <a:solidFill>
                   <a:srgbClr val="1F2D3A"/>
                 </a:solidFill>
@@ -4034,7 +3940,7 @@
               </a:spcAft>
             </a:pPr>
             <a:r>
-              <a:rPr sz="2000" b="1">
+              <a:rPr sz="1800" b="1">
                 <a:solidFill>
                   <a:srgbClr val="006D77"/>
                 </a:solidFill>
@@ -4042,7 +3948,7 @@
               <a:t>• </a:t>
             </a:r>
             <a:r>
-              <a:rPr sz="2000" b="0">
+              <a:rPr sz="1800" b="0">
                 <a:solidFill>
                   <a:srgbClr val="1F2D3A"/>
                 </a:solidFill>
@@ -4057,7 +3963,7 @@
               </a:spcAft>
             </a:pPr>
             <a:r>
-              <a:rPr sz="2000" b="1">
+              <a:rPr sz="1800" b="1">
                 <a:solidFill>
                   <a:srgbClr val="006D77"/>
                 </a:solidFill>
@@ -4065,12 +3971,12 @@
               <a:t>• </a:t>
             </a:r>
             <a:r>
-              <a:rPr sz="2000" b="0">
+              <a:rPr sz="1800" b="0">
                 <a:solidFill>
                   <a:srgbClr val="1F2D3A"/>
                 </a:solidFill>
               </a:rPr>
-              <a:t>Where does the key come from, where does it live? Can the nonce repeat?</a:t>
+              <a:t>Where does the key come from, where does it live, when is it deleted? Can the nonce repeat?</a:t>
             </a:r>
           </a:p>
           <a:p>
@@ -4080,7 +3986,7 @@
               </a:spcAft>
             </a:pPr>
             <a:r>
-              <a:rPr sz="2000" b="1">
+              <a:rPr sz="1800" b="1">
                 <a:solidFill>
                   <a:srgbClr val="006D77"/>
                 </a:solidFill>
@@ -4088,7 +3994,7 @@
               <a:t>• </a:t>
             </a:r>
             <a:r>
-              <a:rPr sz="2000" b="0">
+              <a:rPr sz="1800" b="0">
                 <a:solidFill>
                   <a:srgbClr val="1F2D3A"/>
                 </a:solidFill>
@@ -4103,7 +4009,7 @@
               </a:spcAft>
             </a:pPr>
             <a:r>
-              <a:rPr sz="2000" b="1">
+              <a:rPr sz="1800" b="1">
                 <a:solidFill>
                   <a:srgbClr val="006D77"/>
                 </a:solidFill>
@@ -4111,7 +4017,7 @@
               <a:t>• </a:t>
             </a:r>
             <a:r>
-              <a:rPr sz="2000" b="0">
+              <a:rPr sz="1800" b="0">
                 <a:solidFill>
                   <a:srgbClr val="1F2D3A"/>
                 </a:solidFill>
@@ -4126,7 +4032,7 @@
               </a:spcAft>
             </a:pPr>
             <a:r>
-              <a:rPr sz="2000" b="1">
+              <a:rPr sz="1800" b="1">
                 <a:solidFill>
                   <a:srgbClr val="006D77"/>
                 </a:solidFill>
@@ -4134,12 +4040,81 @@
               <a:t>• </a:t>
             </a:r>
             <a:r>
-              <a:rPr sz="2000" b="0">
+              <a:rPr sz="1800" b="0">
                 <a:solidFill>
                   <a:srgbClr val="1F2D3A"/>
                 </a:solidFill>
               </a:rPr>
               <a:t>Does the SBOM contain a vulnerable component? Are you affected?</a:t>
+            </a:r>
+          </a:p>
+          <a:p>
+            <a:pPr>
+              <a:spcAft>
+                <a:spcPts val="300"/>
+              </a:spcAft>
+            </a:pPr>
+            <a:r>
+              <a:rPr sz="1800" b="1">
+                <a:solidFill>
+                  <a:srgbClr val="006D77"/>
+                </a:solidFill>
+              </a:rPr>
+              <a:t>• </a:t>
+            </a:r>
+            <a:r>
+              <a:rPr sz="1800" b="0">
+                <a:solidFill>
+                  <a:srgbClr val="1F2D3A"/>
+                </a:solidFill>
+              </a:rPr>
+              <a:t>What are your three most critical assets, their C/I/I+ labels, and their lifecycle?</a:t>
+            </a:r>
+          </a:p>
+          <a:p>
+            <a:pPr>
+              <a:spcAft>
+                <a:spcPts val="300"/>
+              </a:spcAft>
+            </a:pPr>
+            <a:r>
+              <a:rPr sz="1800" b="1">
+                <a:solidFill>
+                  <a:srgbClr val="006D77"/>
+                </a:solidFill>
+              </a:rPr>
+              <a:t>• </a:t>
+            </a:r>
+            <a:r>
+              <a:rPr sz="1800" b="0">
+                <a:solidFill>
+                  <a:srgbClr val="1F2D3A"/>
+                </a:solidFill>
+              </a:rPr>
+              <a:t>Which control addresses a given threat, and how was it verified? (threat → control → evidence)</a:t>
+            </a:r>
+          </a:p>
+          <a:p>
+            <a:pPr>
+              <a:spcAft>
+                <a:spcPts val="300"/>
+              </a:spcAft>
+            </a:pPr>
+            <a:r>
+              <a:rPr sz="1800" b="1">
+                <a:solidFill>
+                  <a:srgbClr val="006D77"/>
+                </a:solidFill>
+              </a:rPr>
+              <a:t>• </a:t>
+            </a:r>
+            <a:r>
+              <a:rPr sz="1800" b="0">
+                <a:solidFill>
+                  <a:srgbClr val="1F2D3A"/>
+                </a:solidFill>
+              </a:rPr>
+              <a:t>What is your remaining risk, and why is it acceptable? (answer honestly and with justification)</a:t>
             </a:r>
           </a:p>
         </p:txBody>
@@ -4329,7 +4304,7 @@
         </p:nvGraphicFramePr>
         <p:xfrm>
           <a:off x="640080" y="1325880"/>
-          <a:ext cx="10911534" cy="2403043"/>
+          <a:ext cx="10911534" cy="2940710"/>
         </p:xfrm>
         <a:graphic>
           <a:graphicData uri="http://schemas.openxmlformats.org/drawingml/2006/table">
@@ -4338,10 +4313,10 @@
                 <a:tableStyleId>{5C22544A-7EE6-4342-B048-85BDC9FD1C3A}</a:tableStyleId>
               </a:tblPr>
               <a:tblGrid>
-                <a:gridCol w="4792917"/>
-                <a:gridCol w="6118617"/>
+                <a:gridCol w="5951746"/>
+                <a:gridCol w="4959788"/>
               </a:tblGrid>
-              <a:tr h="343291">
+              <a:tr h="367588">
                 <a:tc>
                   <a:txBody>
                     <a:bodyPr wrap="square"/>
@@ -4385,7 +4360,7 @@
                   </a:tcPr>
                 </a:tc>
               </a:tr>
-              <a:tr h="343291">
+              <a:tr h="367588">
                 <a:tc>
                   <a:txBody>
                     <a:bodyPr wrap="square"/>
@@ -4429,7 +4404,7 @@
                   </a:tcPr>
                 </a:tc>
               </a:tr>
-              <a:tr h="343291">
+              <a:tr h="367588">
                 <a:tc>
                   <a:txBody>
                     <a:bodyPr wrap="square"/>
@@ -4473,7 +4448,7 @@
                   </a:tcPr>
                 </a:tc>
               </a:tr>
-              <a:tr h="343291">
+              <a:tr h="367588">
                 <a:tc>
                   <a:txBody>
                     <a:bodyPr wrap="square"/>
@@ -4517,7 +4492,7 @@
                   </a:tcPr>
                 </a:tc>
               </a:tr>
-              <a:tr h="343291">
+              <a:tr h="367588">
                 <a:tc>
                   <a:txBody>
                     <a:bodyPr wrap="square"/>
@@ -4561,7 +4536,7 @@
                   </a:tcPr>
                 </a:tc>
               </a:tr>
-              <a:tr h="343291">
+              <a:tr h="367588">
                 <a:tc>
                   <a:txBody>
                     <a:bodyPr wrap="square"/>
@@ -4605,7 +4580,7 @@
                   </a:tcPr>
                 </a:tc>
               </a:tr>
-              <a:tr h="343297">
+              <a:tr h="367588">
                 <a:tc>
                   <a:txBody>
                     <a:bodyPr wrap="square"/>
@@ -4657,6 +4632,50 @@
                   </a:tcPr>
                 </a:tc>
               </a:tr>
+              <a:tr h="367594">
+                <a:tc>
+                  <a:txBody>
+                    <a:bodyPr wrap="square"/>
+                    <a:lstStyle/>
+                    <a:p>
+                      <a:r>
+                        <a:rPr sz="1296" b="0">
+                          <a:solidFill>
+                            <a:srgbClr val="1F2D3A"/>
+                          </a:solidFill>
+                        </a:rPr>
+                        <a:t>Live demo crashes with no backup / remaining-risk section left empty</a:t>
+                      </a:r>
+                    </a:p>
+                  </a:txBody>
+                  <a:tcPr marL="54864" marR="54864" marT="27432" marB="27432" anchor="ctr">
+                    <a:solidFill>
+                      <a:srgbClr val="FFFFFF"/>
+                    </a:solidFill>
+                  </a:tcPr>
+                </a:tc>
+                <a:tc>
+                  <a:txBody>
+                    <a:bodyPr wrap="square"/>
+                    <a:lstStyle/>
+                    <a:p>
+                      <a:r>
+                        <a:rPr sz="1296" b="0">
+                          <a:solidFill>
+                            <a:srgbClr val="1F2D3A"/>
+                          </a:solidFill>
+                        </a:rPr>
+                        <a:t>Looks like a lack of preparation and honest analysis</a:t>
+                      </a:r>
+                    </a:p>
+                  </a:txBody>
+                  <a:tcPr marL="54864" marR="54864" marT="27432" marB="27432" anchor="ctr">
+                    <a:solidFill>
+                      <a:srgbClr val="FFFFFF"/>
+                    </a:solidFill>
+                  </a:tcPr>
+                </a:tc>
+              </a:tr>
             </a:tbl>
           </a:graphicData>
         </a:graphic>
@@ -4852,8 +4871,8 @@
         </p:blipFill>
         <p:spPr>
           <a:xfrm>
-            <a:off x="2046645" y="1325880"/>
-            <a:ext cx="8098404" cy="3473778"/>
+            <a:off x="640080" y="1325880"/>
+            <a:ext cx="10911535" cy="3481384"/>
           </a:xfrm>
           <a:prstGeom prst="rect">
             <a:avLst/>
@@ -5030,7 +5049,7 @@
                   <a:srgbClr val="006D77"/>
                 </a:solidFill>
               </a:rPr>
-              <a:t>Academic Integrity and After</a:t>
+              <a:t>Academic Integrity</a:t>
             </a:r>
           </a:p>
         </p:txBody>
@@ -5044,7 +5063,7 @@
         <p:spPr>
           <a:xfrm>
             <a:off x="640080" y="1325880"/>
-            <a:ext cx="10911535" cy="1549400"/>
+            <a:ext cx="10911535" cy="1879600"/>
           </a:xfrm>
           <a:prstGeom prst="rect">
             <a:avLst/>
@@ -5130,99 +5149,7 @@
                   <a:srgbClr val="1F2D3A"/>
                 </a:solidFill>
               </a:rPr>
-              <a:t>Any team member may be asked a question</a:t>
-            </a:r>
-          </a:p>
-        </p:txBody>
-      </p:sp>
-      <p:sp>
-        <p:nvSpPr>
-          <p:cNvPr id="8" name="TextBox 7"/>
-          <p:cNvSpPr txBox="1"/>
-          <p:nvPr/>
-        </p:nvSpPr>
-        <p:spPr>
-          <a:xfrm>
-            <a:off x="640080" y="2985008"/>
-            <a:ext cx="10911535" cy="770128"/>
-          </a:xfrm>
-          <a:prstGeom prst="rect">
-            <a:avLst/>
-          </a:prstGeom>
-          <a:noFill/>
-        </p:spPr>
-        <p:txBody>
-          <a:bodyPr wrap="square" lIns="45720" rIns="45720">
-            <a:spAutoFit/>
-          </a:bodyPr>
-          <a:lstStyle/>
-          <a:p>
-            <a:pPr algn="l"/>
-            <a:r>
-              <a:rPr sz="2000" b="1">
-                <a:solidFill>
-                  <a:srgbClr val="1F2D3A"/>
-                </a:solidFill>
-              </a:rPr>
-              <a:t>After the demonstration:</a:t>
-            </a:r>
-            <a:r>
-              <a:rPr sz="2000" b="0">
-                <a:solidFill>
-                  <a:srgbClr val="1F2D3A"/>
-                </a:solidFill>
-              </a:rPr>
-              <a:t> write the feedback as a </a:t>
-            </a:r>
-            <a:r>
-              <a:rPr sz="2000" b="1">
-                <a:solidFill>
-                  <a:srgbClr val="1F2D3A"/>
-                </a:solidFill>
-              </a:rPr>
-              <a:t>finding list</a:t>
-            </a:r>
-            <a:r>
-              <a:rPr sz="2000" b="0">
-                <a:solidFill>
-                  <a:srgbClr val="1F2D3A"/>
-                </a:solidFill>
-              </a:rPr>
-              <a:t> (finding · severity · fix · date) → a small model of Week 12</a:t>
-            </a:r>
-          </a:p>
-        </p:txBody>
-      </p:sp>
-      <p:sp>
-        <p:nvSpPr>
-          <p:cNvPr id="9" name="TextBox 8"/>
-          <p:cNvSpPr txBox="1"/>
-          <p:nvPr/>
-        </p:nvSpPr>
-        <p:spPr>
-          <a:xfrm>
-            <a:off x="640080" y="3864864"/>
-            <a:ext cx="10911535" cy="439928"/>
-          </a:xfrm>
-          <a:prstGeom prst="rect">
-            <a:avLst/>
-          </a:prstGeom>
-          <a:noFill/>
-        </p:spPr>
-        <p:txBody>
-          <a:bodyPr wrap="square" lIns="45720" rIns="45720">
-            <a:spAutoFit/>
-          </a:bodyPr>
-          <a:lstStyle/>
-          <a:p>
-            <a:pPr algn="l"/>
-            <a:r>
-              <a:rPr sz="2000" b="0">
-                <a:solidFill>
-                  <a:srgbClr val="1F2D3A"/>
-                </a:solidFill>
-              </a:rPr>
-              <a:t>Final sections: S6 · S8 · S11 · S14 · S15 · S16 results · S17</a:t>
+              <a:t>Any team member should be able to present their own section; anyone may be asked a question</a:t>
             </a:r>
           </a:p>
         </p:txBody>
@@ -5397,7 +5324,7 @@
                   <a:srgbClr val="006D77"/>
                 </a:solidFill>
               </a:rPr>
-              <a:t>Next Week</a:t>
+              <a:t>After the Demonstration</a:t>
             </a:r>
           </a:p>
         </p:txBody>
@@ -5411,41 +5338,7 @@
         <p:spPr>
           <a:xfrm>
             <a:off x="640080" y="1325880"/>
-            <a:ext cx="10911535" cy="439928"/>
-          </a:xfrm>
-          <a:prstGeom prst="rect">
-            <a:avLst/>
-          </a:prstGeom>
-          <a:noFill/>
-        </p:spPr>
-        <p:txBody>
-          <a:bodyPr wrap="square" lIns="45720" rIns="45720">
-            <a:spAutoFit/>
-          </a:bodyPr>
-          <a:lstStyle/>
-          <a:p>
-            <a:pPr algn="l"/>
-            <a:r>
-              <a:rPr sz="2000" b="1">
-                <a:solidFill>
-                  <a:srgbClr val="1F2D3A"/>
-                </a:solidFill>
-              </a:rPr>
-              <a:t>Week 8 — Midterm Exam Week: Quiz-1</a:t>
-            </a:r>
-          </a:p>
-        </p:txBody>
-      </p:sp>
-      <p:sp>
-        <p:nvSpPr>
-          <p:cNvPr id="8" name="TextBox 7"/>
-          <p:cNvSpPr txBox="1"/>
-          <p:nvPr/>
-        </p:nvSpPr>
-        <p:spPr>
-          <a:xfrm>
-            <a:off x="640080" y="1875536"/>
-            <a:ext cx="10911535" cy="843280"/>
+            <a:ext cx="10911535" cy="1173480"/>
           </a:xfrm>
           <a:prstGeom prst="rect">
             <a:avLst/>
@@ -5477,7 +5370,23 @@
                   <a:srgbClr val="1F2D3A"/>
                 </a:solidFill>
               </a:rPr>
-              <a:t>Scope: weeks 1–6</a:t>
+              <a:t>Write the feedback as a </a:t>
+            </a:r>
+            <a:r>
+              <a:rPr sz="2000" b="1">
+                <a:solidFill>
+                  <a:srgbClr val="1F2D3A"/>
+                </a:solidFill>
+              </a:rPr>
+              <a:t>finding list</a:t>
+            </a:r>
+            <a:r>
+              <a:rPr sz="2000" b="0">
+                <a:solidFill>
+                  <a:srgbClr val="1F2D3A"/>
+                </a:solidFill>
+              </a:rPr>
+              <a:t> (finding · severity · fix · date) → a small model of Week 12</a:t>
             </a:r>
           </a:p>
           <a:p>
@@ -5500,7 +5409,76 @@
                   <a:srgbClr val="1F2D3A"/>
                 </a:solidFill>
               </a:rPr>
-              <a:t>Study guide and sample questions: Week 8 page</a:t>
+              <a:t>Final sections: S6 · S8 · S11 · S14 · S15 · S16 results · S17</a:t>
+            </a:r>
+          </a:p>
+        </p:txBody>
+      </p:sp>
+      <p:sp>
+        <p:nvSpPr>
+          <p:cNvPr id="8" name="Rectangle 7"/>
+          <p:cNvSpPr/>
+          <p:nvPr/>
+        </p:nvSpPr>
+        <p:spPr>
+          <a:xfrm>
+            <a:off x="640080" y="2609088"/>
+            <a:ext cx="10911535" cy="934719"/>
+          </a:xfrm>
+          <a:prstGeom prst="rect">
+            <a:avLst/>
+          </a:prstGeom>
+          <a:solidFill>
+            <a:srgbClr val="EEF7F8"/>
+          </a:solidFill>
+          <a:ln>
+            <a:solidFill>
+              <a:srgbClr val="006D77"/>
+            </a:solidFill>
+          </a:ln>
+        </p:spPr>
+        <p:style>
+          <a:lnRef idx="1">
+            <a:schemeClr val="accent1"/>
+          </a:lnRef>
+          <a:fillRef idx="3">
+            <a:schemeClr val="accent1"/>
+          </a:fillRef>
+          <a:effectRef idx="2">
+            <a:schemeClr val="accent1"/>
+          </a:effectRef>
+          <a:fontRef idx="minor">
+            <a:schemeClr val="lt1"/>
+          </a:fontRef>
+        </p:style>
+        <p:txBody>
+          <a:bodyPr rtlCol="0" anchor="ctr" wrap="square" lIns="182880"/>
+          <a:lstStyle/>
+          <a:p>
+            <a:pPr algn="l"/>
+            <a:r>
+              <a:rPr sz="2000" b="0">
+                <a:solidFill>
+                  <a:srgbClr val="1F2D3A"/>
+                </a:solidFill>
+              </a:rPr>
+              <a:t>A demonstration is a presentation of </a:t>
+            </a:r>
+            <a:r>
+              <a:rPr sz="2000" b="1">
+                <a:solidFill>
+                  <a:srgbClr val="1F2D3A"/>
+                </a:solidFill>
+              </a:rPr>
+              <a:t>evidence</a:t>
+            </a:r>
+            <a:r>
+              <a:rPr sz="2000" b="0">
+                <a:solidFill>
+                  <a:srgbClr val="1F2D3A"/>
+                </a:solidFill>
+              </a:rPr>
+              <a:t>: every claim should be backed by a document, a test, or live output.</a:t>
             </a:r>
           </a:p>
         </p:txBody>
@@ -5514,166 +5492,6 @@
 </file>
 
 <file path=ppt/slides/slide15.xml><?xml version="1.0" encoding="utf-8"?>
-<p:sld xmlns:a="http://schemas.openxmlformats.org/drawingml/2006/main" xmlns:p="http://schemas.openxmlformats.org/presentationml/2006/main" xmlns:r="http://schemas.openxmlformats.org/officeDocument/2006/relationships">
-  <p:cSld>
-    <p:bg>
-      <p:bgPr>
-        <a:solidFill>
-          <a:srgbClr val="006D77"/>
-        </a:solidFill>
-        <a:effectLst/>
-      </p:bgPr>
-    </p:bg>
-    <p:spTree>
-      <p:nvGrpSpPr>
-        <p:cNvPr id="1" name=""/>
-        <p:cNvGrpSpPr/>
-        <p:nvPr/>
-      </p:nvGrpSpPr>
-      <p:grpSpPr/>
-      <p:sp>
-        <p:nvSpPr>
-          <p:cNvPr id="2" name="TextBox 1"/>
-          <p:cNvSpPr txBox="1"/>
-          <p:nvPr/>
-        </p:nvSpPr>
-        <p:spPr>
-          <a:xfrm>
-            <a:off x="1051560" y="182880"/>
-            <a:ext cx="7315200" cy="320040"/>
-          </a:xfrm>
-          <a:prstGeom prst="rect">
-            <a:avLst/>
-          </a:prstGeom>
-          <a:noFill/>
-        </p:spPr>
-        <p:txBody>
-          <a:bodyPr wrap="square" lIns="45720" rIns="45720">
-            <a:spAutoFit/>
-          </a:bodyPr>
-          <a:lstStyle/>
-          <a:p>
-            <a:r>
-              <a:rPr sz="1100" b="0">
-                <a:solidFill>
-                  <a:srgbClr val="D8F0F2"/>
-                </a:solidFill>
-              </a:rPr>
-              <a:t>CEN429 Secure Programming · Week 7</a:t>
-            </a:r>
-          </a:p>
-        </p:txBody>
-      </p:sp>
-      <p:sp>
-        <p:nvSpPr>
-          <p:cNvPr id="3" name="TextBox 2"/>
-          <p:cNvSpPr txBox="1"/>
-          <p:nvPr/>
-        </p:nvSpPr>
-        <p:spPr>
-          <a:xfrm>
-            <a:off x="640080" y="6446520"/>
-            <a:ext cx="7315200" cy="274320"/>
-          </a:xfrm>
-          <a:prstGeom prst="rect">
-            <a:avLst/>
-          </a:prstGeom>
-          <a:noFill/>
-        </p:spPr>
-        <p:txBody>
-          <a:bodyPr wrap="square" lIns="45720" rIns="45720">
-            <a:spAutoFit/>
-          </a:bodyPr>
-          <a:lstStyle/>
-          <a:p>
-            <a:r>
-              <a:rPr sz="1000" b="0">
-                <a:solidFill>
-                  <a:srgbClr val="D8F0F2"/>
-                </a:solidFill>
-              </a:rPr>
-              <a:t>RTEU Computer Engineering · 2026-2027 Fall</a:t>
-            </a:r>
-          </a:p>
-        </p:txBody>
-      </p:sp>
-      <p:sp>
-        <p:nvSpPr>
-          <p:cNvPr id="4" name="TextBox 3"/>
-          <p:cNvSpPr txBox="1"/>
-          <p:nvPr/>
-        </p:nvSpPr>
-        <p:spPr>
-          <a:xfrm>
-            <a:off x="10637215" y="6446520"/>
-            <a:ext cx="914400" cy="274320"/>
-          </a:xfrm>
-          <a:prstGeom prst="rect">
-            <a:avLst/>
-          </a:prstGeom>
-          <a:noFill/>
-        </p:spPr>
-        <p:txBody>
-          <a:bodyPr wrap="square" lIns="45720" rIns="45720">
-            <a:spAutoFit/>
-          </a:bodyPr>
-          <a:lstStyle/>
-          <a:p>
-            <a:pPr algn="r"/>
-            <a:r>
-              <a:rPr sz="1000" b="0">
-                <a:solidFill>
-                  <a:srgbClr val="D8F0F2"/>
-                </a:solidFill>
-              </a:rPr>
-              <a:t>15</a:t>
-            </a:r>
-          </a:p>
-        </p:txBody>
-      </p:sp>
-      <p:sp>
-        <p:nvSpPr>
-          <p:cNvPr id="5" name="TextBox 4"/>
-          <p:cNvSpPr txBox="1"/>
-          <p:nvPr/>
-        </p:nvSpPr>
-        <p:spPr>
-          <a:xfrm>
-            <a:off x="640080" y="2743200"/>
-            <a:ext cx="10911535" cy="1280160"/>
-          </a:xfrm>
-          <a:prstGeom prst="rect">
-            <a:avLst/>
-          </a:prstGeom>
-          <a:noFill/>
-        </p:spPr>
-        <p:txBody>
-          <a:bodyPr wrap="square" lIns="45720" rIns="45720">
-            <a:spAutoFit/>
-          </a:bodyPr>
-          <a:lstStyle/>
-          <a:p>
-            <a:pPr algn="l"/>
-            <a:r>
-              <a:rPr sz="4000" b="1">
-                <a:solidFill>
-                  <a:srgbClr val="FFFFFF"/>
-                </a:solidFill>
-              </a:rPr>
-              <a:t>Appendix · Rubric Item by Item</a:t>
-            </a:r>
-          </a:p>
-        </p:txBody>
-      </p:sp>
-    </p:spTree>
-  </p:cSld>
-  <p:clrMapOvr>
-    <a:masterClrMapping/>
-  </p:clrMapOvr>
-</p:sld>
-</file>
-
-<file path=ppt/slides/slide16.xml><?xml version="1.0" encoding="utf-8"?>
 <p:sld xmlns:a="http://schemas.openxmlformats.org/drawingml/2006/main" xmlns:p="http://schemas.openxmlformats.org/presentationml/2006/main" xmlns:r="http://schemas.openxmlformats.org/officeDocument/2006/relationships">
   <p:cSld>
     <p:spTree>
@@ -5802,7 +5620,7 @@
                   <a:srgbClr val="5B6770"/>
                 </a:solidFill>
               </a:rPr>
-              <a:t>16</a:t>
+              <a:t>15</a:t>
             </a:r>
           </a:p>
         </p:txBody>
@@ -5835,7 +5653,7 @@
                   <a:srgbClr val="006D77"/>
                 </a:solidFill>
               </a:rPr>
-              <a:t>What Does the Rubric Measure?</a:t>
+              <a:t>Next Week</a:t>
             </a:r>
           </a:p>
         </p:txBody>
@@ -5864,28 +5682,12 @@
           <a:p>
             <a:pPr algn="l"/>
             <a:r>
-              <a:rPr sz="2000" b="0">
+              <a:rPr sz="2000" b="1">
                 <a:solidFill>
                   <a:srgbClr val="1F2D3A"/>
                 </a:solidFill>
               </a:rPr>
-              <a:t>The midterm demonstration measures the </a:t>
-            </a:r>
-            <a:r>
-              <a:rPr sz="2000" b="1">
-                <a:solidFill>
-                  <a:srgbClr val="1F2D3A"/>
-                </a:solidFill>
-              </a:rPr>
-              <a:t>first half</a:t>
-            </a:r>
-            <a:r>
-              <a:rPr sz="2000" b="0">
-                <a:solidFill>
-                  <a:srgbClr val="1F2D3A"/>
-                </a:solidFill>
-              </a:rPr>
-              <a:t> of your project:</a:t>
+              <a:t>Week 8 — Midterm Exam Week: Quiz-1</a:t>
             </a:r>
           </a:p>
         </p:txBody>
@@ -5899,7 +5701,7 @@
         <p:spPr>
           <a:xfrm>
             <a:off x="640080" y="1875536"/>
-            <a:ext cx="10911535" cy="1595120"/>
+            <a:ext cx="10911535" cy="843280"/>
           </a:xfrm>
           <a:prstGeom prst="rect">
             <a:avLst/>
@@ -5931,7 +5733,7 @@
                   <a:srgbClr val="1F2D3A"/>
                 </a:solidFill>
               </a:rPr>
-              <a:t>product, architecture, threat model</a:t>
+              <a:t>Scope: weeks 1–6</a:t>
             </a:r>
           </a:p>
           <a:p>
@@ -5954,878 +5756,7 @@
                   <a:srgbClr val="1F2D3A"/>
                 </a:solidFill>
               </a:rPr>
-              <a:t>asset management</a:t>
-            </a:r>
-          </a:p>
-          <a:p>
-            <a:pPr>
-              <a:spcAft>
-                <a:spcPts val="300"/>
-              </a:spcAft>
-            </a:pPr>
-            <a:r>
-              <a:rPr sz="2000" b="1">
-                <a:solidFill>
-                  <a:srgbClr val="006D77"/>
-                </a:solidFill>
-              </a:rPr>
-              <a:t>• </a:t>
-            </a:r>
-            <a:r>
-              <a:rPr sz="2000" b="0">
-                <a:solidFill>
-                  <a:srgbClr val="1F2D3A"/>
-                </a:solidFill>
-              </a:rPr>
-              <a:t>basic protections</a:t>
-            </a:r>
-          </a:p>
-          <a:p>
-            <a:pPr>
-              <a:spcAft>
-                <a:spcPts val="300"/>
-              </a:spcAft>
-            </a:pPr>
-            <a:r>
-              <a:rPr sz="2000" b="1">
-                <a:solidFill>
-                  <a:srgbClr val="006D77"/>
-                </a:solidFill>
-              </a:rPr>
-              <a:t>• </a:t>
-            </a:r>
-            <a:r>
-              <a:rPr sz="2000" b="0">
-                <a:solidFill>
-                  <a:srgbClr val="1F2D3A"/>
-                </a:solidFill>
-              </a:rPr>
-              <a:t>documentation and presentation</a:t>
-            </a:r>
-          </a:p>
-        </p:txBody>
-      </p:sp>
-    </p:spTree>
-  </p:cSld>
-  <p:clrMapOvr>
-    <a:masterClrMapping/>
-  </p:clrMapOvr>
-</p:sld>
-</file>
-
-<file path=ppt/slides/slide17.xml><?xml version="1.0" encoding="utf-8"?>
-<p:sld xmlns:a="http://schemas.openxmlformats.org/drawingml/2006/main" xmlns:p="http://schemas.openxmlformats.org/presentationml/2006/main" xmlns:r="http://schemas.openxmlformats.org/officeDocument/2006/relationships">
-  <p:cSld>
-    <p:spTree>
-      <p:nvGrpSpPr>
-        <p:cNvPr id="1" name=""/>
-        <p:cNvGrpSpPr/>
-        <p:nvPr/>
-      </p:nvGrpSpPr>
-      <p:grpSpPr/>
-      <p:pic>
-        <p:nvPicPr>
-          <p:cNvPr id="2" name="Picture 1" descr="rteu_logo_kucuk.jpg"/>
-          <p:cNvPicPr>
-            <a:picLocks noChangeAspect="1"/>
-          </p:cNvPicPr>
-          <p:nvPr/>
-        </p:nvPicPr>
-        <p:blipFill>
-          <a:blip r:embed="rId2"/>
-          <a:stretch>
-            <a:fillRect/>
-          </a:stretch>
-        </p:blipFill>
-        <p:spPr>
-          <a:xfrm>
-            <a:off x="640080" y="164592"/>
-            <a:ext cx="242773" cy="329184"/>
-          </a:xfrm>
-          <a:prstGeom prst="rect">
-            <a:avLst/>
-          </a:prstGeom>
-        </p:spPr>
-      </p:pic>
-      <p:sp>
-        <p:nvSpPr>
-          <p:cNvPr id="3" name="TextBox 2"/>
-          <p:cNvSpPr txBox="1"/>
-          <p:nvPr/>
-        </p:nvSpPr>
-        <p:spPr>
-          <a:xfrm>
-            <a:off x="1051560" y="182880"/>
-            <a:ext cx="7315200" cy="320040"/>
-          </a:xfrm>
-          <a:prstGeom prst="rect">
-            <a:avLst/>
-          </a:prstGeom>
-          <a:noFill/>
-        </p:spPr>
-        <p:txBody>
-          <a:bodyPr wrap="square" lIns="45720" rIns="45720">
-            <a:spAutoFit/>
-          </a:bodyPr>
-          <a:lstStyle/>
-          <a:p>
-            <a:r>
-              <a:rPr sz="1100" b="0">
-                <a:solidFill>
-                  <a:srgbClr val="5B6770"/>
-                </a:solidFill>
-              </a:rPr>
-              <a:t>CEN429 Secure Programming · Week 7</a:t>
-            </a:r>
-          </a:p>
-        </p:txBody>
-      </p:sp>
-      <p:sp>
-        <p:nvSpPr>
-          <p:cNvPr id="4" name="TextBox 3"/>
-          <p:cNvSpPr txBox="1"/>
-          <p:nvPr/>
-        </p:nvSpPr>
-        <p:spPr>
-          <a:xfrm>
-            <a:off x="640080" y="6446520"/>
-            <a:ext cx="7315200" cy="274320"/>
-          </a:xfrm>
-          <a:prstGeom prst="rect">
-            <a:avLst/>
-          </a:prstGeom>
-          <a:noFill/>
-        </p:spPr>
-        <p:txBody>
-          <a:bodyPr wrap="square" lIns="45720" rIns="45720">
-            <a:spAutoFit/>
-          </a:bodyPr>
-          <a:lstStyle/>
-          <a:p>
-            <a:r>
-              <a:rPr sz="1000" b="0">
-                <a:solidFill>
-                  <a:srgbClr val="5B6770"/>
-                </a:solidFill>
-              </a:rPr>
-              <a:t>RTEU Computer Engineering · 2026-2027 Fall</a:t>
-            </a:r>
-          </a:p>
-        </p:txBody>
-      </p:sp>
-      <p:sp>
-        <p:nvSpPr>
-          <p:cNvPr id="5" name="TextBox 4"/>
-          <p:cNvSpPr txBox="1"/>
-          <p:nvPr/>
-        </p:nvSpPr>
-        <p:spPr>
-          <a:xfrm>
-            <a:off x="10637215" y="6446520"/>
-            <a:ext cx="914400" cy="274320"/>
-          </a:xfrm>
-          <a:prstGeom prst="rect">
-            <a:avLst/>
-          </a:prstGeom>
-          <a:noFill/>
-        </p:spPr>
-        <p:txBody>
-          <a:bodyPr wrap="square" lIns="45720" rIns="45720">
-            <a:spAutoFit/>
-          </a:bodyPr>
-          <a:lstStyle/>
-          <a:p>
-            <a:pPr algn="r"/>
-            <a:r>
-              <a:rPr sz="1000" b="0">
-                <a:solidFill>
-                  <a:srgbClr val="5B6770"/>
-                </a:solidFill>
-              </a:rPr>
-              <a:t>17</a:t>
-            </a:r>
-          </a:p>
-        </p:txBody>
-      </p:sp>
-      <p:sp>
-        <p:nvSpPr>
-          <p:cNvPr id="6" name="TextBox 5"/>
-          <p:cNvSpPr txBox="1"/>
-          <p:nvPr/>
-        </p:nvSpPr>
-        <p:spPr>
-          <a:xfrm>
-            <a:off x="640080" y="548640"/>
-            <a:ext cx="10911535" cy="731520"/>
-          </a:xfrm>
-          <a:prstGeom prst="rect">
-            <a:avLst/>
-          </a:prstGeom>
-          <a:noFill/>
-        </p:spPr>
-        <p:txBody>
-          <a:bodyPr wrap="square" lIns="45720" rIns="45720" anchor="ctr">
-            <a:spAutoFit/>
-          </a:bodyPr>
-          <a:lstStyle/>
-          <a:p>
-            <a:r>
-              <a:rPr sz="3000" b="1">
-                <a:solidFill>
-                  <a:srgbClr val="006D77"/>
-                </a:solidFill>
-              </a:rPr>
-              <a:t>Item · Product and Architecture</a:t>
-            </a:r>
-          </a:p>
-        </p:txBody>
-      </p:sp>
-      <p:sp>
-        <p:nvSpPr>
-          <p:cNvPr id="7" name="TextBox 6"/>
-          <p:cNvSpPr txBox="1"/>
-          <p:nvPr/>
-        </p:nvSpPr>
-        <p:spPr>
-          <a:xfrm>
-            <a:off x="640080" y="1325880"/>
-            <a:ext cx="10911535" cy="1219200"/>
-          </a:xfrm>
-          <a:prstGeom prst="rect">
-            <a:avLst/>
-          </a:prstGeom>
-          <a:noFill/>
-        </p:spPr>
-        <p:txBody>
-          <a:bodyPr wrap="square" lIns="45720" rIns="45720">
-            <a:spAutoFit/>
-          </a:bodyPr>
-          <a:lstStyle/>
-          <a:p>
-            <a:pPr>
-              <a:spcAft>
-                <a:spcPts val="300"/>
-              </a:spcAft>
-            </a:pPr>
-            <a:r>
-              <a:rPr sz="2000" b="1">
-                <a:solidFill>
-                  <a:srgbClr val="006D77"/>
-                </a:solidFill>
-              </a:rPr>
-              <a:t>• </a:t>
-            </a:r>
-            <a:r>
-              <a:rPr sz="2000" b="0">
-                <a:solidFill>
-                  <a:srgbClr val="1F2D3A"/>
-                </a:solidFill>
-              </a:rPr>
-              <a:t>What does it do, which components?</a:t>
-            </a:r>
-          </a:p>
-          <a:p>
-            <a:pPr>
-              <a:spcAft>
-                <a:spcPts val="300"/>
-              </a:spcAft>
-            </a:pPr>
-            <a:r>
-              <a:rPr sz="2000" b="1">
-                <a:solidFill>
-                  <a:srgbClr val="006D77"/>
-                </a:solidFill>
-              </a:rPr>
-              <a:t>• </a:t>
-            </a:r>
-            <a:r>
-              <a:rPr sz="2000" b="0">
-                <a:solidFill>
-                  <a:srgbClr val="1F2D3A"/>
-                </a:solidFill>
-              </a:rPr>
-              <a:t>One diagram + the three most critical assets.</a:t>
-            </a:r>
-          </a:p>
-          <a:p>
-            <a:pPr>
-              <a:spcAft>
-                <a:spcPts val="300"/>
-              </a:spcAft>
-            </a:pPr>
-            <a:r>
-              <a:rPr sz="2000" b="1">
-                <a:solidFill>
-                  <a:srgbClr val="006D77"/>
-                </a:solidFill>
-              </a:rPr>
-              <a:t>• </a:t>
-            </a:r>
-            <a:r>
-              <a:rPr sz="2000" b="1">
-                <a:solidFill>
-                  <a:srgbClr val="1F2D3A"/>
-                </a:solidFill>
-              </a:rPr>
-              <a:t>Evidence:</a:t>
-            </a:r>
-            <a:r>
-              <a:rPr sz="2000" b="0">
-                <a:solidFill>
-                  <a:srgbClr val="1F2D3A"/>
-                </a:solidFill>
-              </a:rPr>
-              <a:t> S2–S4 documentation.</a:t>
-            </a:r>
-          </a:p>
-        </p:txBody>
-      </p:sp>
-    </p:spTree>
-  </p:cSld>
-  <p:clrMapOvr>
-    <a:masterClrMapping/>
-  </p:clrMapOvr>
-</p:sld>
-</file>
-
-<file path=ppt/slides/slide18.xml><?xml version="1.0" encoding="utf-8"?>
-<p:sld xmlns:a="http://schemas.openxmlformats.org/drawingml/2006/main" xmlns:p="http://schemas.openxmlformats.org/presentationml/2006/main" xmlns:r="http://schemas.openxmlformats.org/officeDocument/2006/relationships">
-  <p:cSld>
-    <p:spTree>
-      <p:nvGrpSpPr>
-        <p:cNvPr id="1" name=""/>
-        <p:cNvGrpSpPr/>
-        <p:nvPr/>
-      </p:nvGrpSpPr>
-      <p:grpSpPr/>
-      <p:pic>
-        <p:nvPicPr>
-          <p:cNvPr id="2" name="Picture 1" descr="rteu_logo_kucuk.jpg"/>
-          <p:cNvPicPr>
-            <a:picLocks noChangeAspect="1"/>
-          </p:cNvPicPr>
-          <p:nvPr/>
-        </p:nvPicPr>
-        <p:blipFill>
-          <a:blip r:embed="rId2"/>
-          <a:stretch>
-            <a:fillRect/>
-          </a:stretch>
-        </p:blipFill>
-        <p:spPr>
-          <a:xfrm>
-            <a:off x="640080" y="164592"/>
-            <a:ext cx="242773" cy="329184"/>
-          </a:xfrm>
-          <a:prstGeom prst="rect">
-            <a:avLst/>
-          </a:prstGeom>
-        </p:spPr>
-      </p:pic>
-      <p:sp>
-        <p:nvSpPr>
-          <p:cNvPr id="3" name="TextBox 2"/>
-          <p:cNvSpPr txBox="1"/>
-          <p:nvPr/>
-        </p:nvSpPr>
-        <p:spPr>
-          <a:xfrm>
-            <a:off x="1051560" y="182880"/>
-            <a:ext cx="7315200" cy="320040"/>
-          </a:xfrm>
-          <a:prstGeom prst="rect">
-            <a:avLst/>
-          </a:prstGeom>
-          <a:noFill/>
-        </p:spPr>
-        <p:txBody>
-          <a:bodyPr wrap="square" lIns="45720" rIns="45720">
-            <a:spAutoFit/>
-          </a:bodyPr>
-          <a:lstStyle/>
-          <a:p>
-            <a:r>
-              <a:rPr sz="1100" b="0">
-                <a:solidFill>
-                  <a:srgbClr val="5B6770"/>
-                </a:solidFill>
-              </a:rPr>
-              <a:t>CEN429 Secure Programming · Week 7</a:t>
-            </a:r>
-          </a:p>
-        </p:txBody>
-      </p:sp>
-      <p:sp>
-        <p:nvSpPr>
-          <p:cNvPr id="4" name="TextBox 3"/>
-          <p:cNvSpPr txBox="1"/>
-          <p:nvPr/>
-        </p:nvSpPr>
-        <p:spPr>
-          <a:xfrm>
-            <a:off x="640080" y="6446520"/>
-            <a:ext cx="7315200" cy="274320"/>
-          </a:xfrm>
-          <a:prstGeom prst="rect">
-            <a:avLst/>
-          </a:prstGeom>
-          <a:noFill/>
-        </p:spPr>
-        <p:txBody>
-          <a:bodyPr wrap="square" lIns="45720" rIns="45720">
-            <a:spAutoFit/>
-          </a:bodyPr>
-          <a:lstStyle/>
-          <a:p>
-            <a:r>
-              <a:rPr sz="1000" b="0">
-                <a:solidFill>
-                  <a:srgbClr val="5B6770"/>
-                </a:solidFill>
-              </a:rPr>
-              <a:t>RTEU Computer Engineering · 2026-2027 Fall</a:t>
-            </a:r>
-          </a:p>
-        </p:txBody>
-      </p:sp>
-      <p:sp>
-        <p:nvSpPr>
-          <p:cNvPr id="5" name="TextBox 4"/>
-          <p:cNvSpPr txBox="1"/>
-          <p:nvPr/>
-        </p:nvSpPr>
-        <p:spPr>
-          <a:xfrm>
-            <a:off x="10637215" y="6446520"/>
-            <a:ext cx="914400" cy="274320"/>
-          </a:xfrm>
-          <a:prstGeom prst="rect">
-            <a:avLst/>
-          </a:prstGeom>
-          <a:noFill/>
-        </p:spPr>
-        <p:txBody>
-          <a:bodyPr wrap="square" lIns="45720" rIns="45720">
-            <a:spAutoFit/>
-          </a:bodyPr>
-          <a:lstStyle/>
-          <a:p>
-            <a:pPr algn="r"/>
-            <a:r>
-              <a:rPr sz="1000" b="0">
-                <a:solidFill>
-                  <a:srgbClr val="5B6770"/>
-                </a:solidFill>
-              </a:rPr>
-              <a:t>18</a:t>
-            </a:r>
-          </a:p>
-        </p:txBody>
-      </p:sp>
-      <p:sp>
-        <p:nvSpPr>
-          <p:cNvPr id="6" name="TextBox 5"/>
-          <p:cNvSpPr txBox="1"/>
-          <p:nvPr/>
-        </p:nvSpPr>
-        <p:spPr>
-          <a:xfrm>
-            <a:off x="640080" y="548640"/>
-            <a:ext cx="10911535" cy="731520"/>
-          </a:xfrm>
-          <a:prstGeom prst="rect">
-            <a:avLst/>
-          </a:prstGeom>
-          <a:noFill/>
-        </p:spPr>
-        <p:txBody>
-          <a:bodyPr wrap="square" lIns="45720" rIns="45720" anchor="ctr">
-            <a:spAutoFit/>
-          </a:bodyPr>
-          <a:lstStyle/>
-          <a:p>
-            <a:r>
-              <a:rPr sz="3000" b="1">
-                <a:solidFill>
-                  <a:srgbClr val="006D77"/>
-                </a:solidFill>
-              </a:rPr>
-              <a:t>Item · Threat Model</a:t>
-            </a:r>
-          </a:p>
-        </p:txBody>
-      </p:sp>
-      <p:sp>
-        <p:nvSpPr>
-          <p:cNvPr id="7" name="TextBox 6"/>
-          <p:cNvSpPr txBox="1"/>
-          <p:nvPr/>
-        </p:nvSpPr>
-        <p:spPr>
-          <a:xfrm>
-            <a:off x="640080" y="1325880"/>
-            <a:ext cx="10911535" cy="1219200"/>
-          </a:xfrm>
-          <a:prstGeom prst="rect">
-            <a:avLst/>
-          </a:prstGeom>
-          <a:noFill/>
-        </p:spPr>
-        <p:txBody>
-          <a:bodyPr wrap="square" lIns="45720" rIns="45720">
-            <a:spAutoFit/>
-          </a:bodyPr>
-          <a:lstStyle/>
-          <a:p>
-            <a:pPr>
-              <a:spcAft>
-                <a:spcPts val="300"/>
-              </a:spcAft>
-            </a:pPr>
-            <a:r>
-              <a:rPr sz="2000" b="1">
-                <a:solidFill>
-                  <a:srgbClr val="006D77"/>
-                </a:solidFill>
-              </a:rPr>
-              <a:t>• </a:t>
-            </a:r>
-            <a:r>
-              <a:rPr sz="2000" b="0">
-                <a:solidFill>
-                  <a:srgbClr val="1F2D3A"/>
-                </a:solidFill>
-              </a:rPr>
-              <a:t>STRIDE / attack tree.</a:t>
-            </a:r>
-          </a:p>
-          <a:p>
-            <a:pPr>
-              <a:spcAft>
-                <a:spcPts val="300"/>
-              </a:spcAft>
-            </a:pPr>
-            <a:r>
-              <a:rPr sz="2000" b="1">
-                <a:solidFill>
-                  <a:srgbClr val="006D77"/>
-                </a:solidFill>
-              </a:rPr>
-              <a:t>• </a:t>
-            </a:r>
-            <a:r>
-              <a:rPr sz="2000" b="0">
-                <a:solidFill>
-                  <a:srgbClr val="1F2D3A"/>
-                </a:solidFill>
-              </a:rPr>
-              <a:t>A control for every threat.</a:t>
-            </a:r>
-          </a:p>
-          <a:p>
-            <a:pPr>
-              <a:spcAft>
-                <a:spcPts val="300"/>
-              </a:spcAft>
-            </a:pPr>
-            <a:r>
-              <a:rPr sz="2000" b="1">
-                <a:solidFill>
-                  <a:srgbClr val="006D77"/>
-                </a:solidFill>
-              </a:rPr>
-              <a:t>• </a:t>
-            </a:r>
-            <a:r>
-              <a:rPr sz="2000" b="1">
-                <a:solidFill>
-                  <a:srgbClr val="1F2D3A"/>
-                </a:solidFill>
-              </a:rPr>
-              <a:t>Evidence:</a:t>
-            </a:r>
-            <a:r>
-              <a:rPr sz="2000" b="0">
-                <a:solidFill>
-                  <a:srgbClr val="1F2D3A"/>
-                </a:solidFill>
-              </a:rPr>
-              <a:t> S4 threat table.</a:t>
-            </a:r>
-          </a:p>
-        </p:txBody>
-      </p:sp>
-    </p:spTree>
-  </p:cSld>
-  <p:clrMapOvr>
-    <a:masterClrMapping/>
-  </p:clrMapOvr>
-</p:sld>
-</file>
-
-<file path=ppt/slides/slide19.xml><?xml version="1.0" encoding="utf-8"?>
-<p:sld xmlns:a="http://schemas.openxmlformats.org/drawingml/2006/main" xmlns:p="http://schemas.openxmlformats.org/presentationml/2006/main" xmlns:r="http://schemas.openxmlformats.org/officeDocument/2006/relationships">
-  <p:cSld>
-    <p:spTree>
-      <p:nvGrpSpPr>
-        <p:cNvPr id="1" name=""/>
-        <p:cNvGrpSpPr/>
-        <p:nvPr/>
-      </p:nvGrpSpPr>
-      <p:grpSpPr/>
-      <p:pic>
-        <p:nvPicPr>
-          <p:cNvPr id="2" name="Picture 1" descr="rteu_logo_kucuk.jpg"/>
-          <p:cNvPicPr>
-            <a:picLocks noChangeAspect="1"/>
-          </p:cNvPicPr>
-          <p:nvPr/>
-        </p:nvPicPr>
-        <p:blipFill>
-          <a:blip r:embed="rId2"/>
-          <a:stretch>
-            <a:fillRect/>
-          </a:stretch>
-        </p:blipFill>
-        <p:spPr>
-          <a:xfrm>
-            <a:off x="640080" y="164592"/>
-            <a:ext cx="242773" cy="329184"/>
-          </a:xfrm>
-          <a:prstGeom prst="rect">
-            <a:avLst/>
-          </a:prstGeom>
-        </p:spPr>
-      </p:pic>
-      <p:sp>
-        <p:nvSpPr>
-          <p:cNvPr id="3" name="TextBox 2"/>
-          <p:cNvSpPr txBox="1"/>
-          <p:nvPr/>
-        </p:nvSpPr>
-        <p:spPr>
-          <a:xfrm>
-            <a:off x="1051560" y="182880"/>
-            <a:ext cx="7315200" cy="320040"/>
-          </a:xfrm>
-          <a:prstGeom prst="rect">
-            <a:avLst/>
-          </a:prstGeom>
-          <a:noFill/>
-        </p:spPr>
-        <p:txBody>
-          <a:bodyPr wrap="square" lIns="45720" rIns="45720">
-            <a:spAutoFit/>
-          </a:bodyPr>
-          <a:lstStyle/>
-          <a:p>
-            <a:r>
-              <a:rPr sz="1100" b="0">
-                <a:solidFill>
-                  <a:srgbClr val="5B6770"/>
-                </a:solidFill>
-              </a:rPr>
-              <a:t>CEN429 Secure Programming · Week 7</a:t>
-            </a:r>
-          </a:p>
-        </p:txBody>
-      </p:sp>
-      <p:sp>
-        <p:nvSpPr>
-          <p:cNvPr id="4" name="TextBox 3"/>
-          <p:cNvSpPr txBox="1"/>
-          <p:nvPr/>
-        </p:nvSpPr>
-        <p:spPr>
-          <a:xfrm>
-            <a:off x="640080" y="6446520"/>
-            <a:ext cx="7315200" cy="274320"/>
-          </a:xfrm>
-          <a:prstGeom prst="rect">
-            <a:avLst/>
-          </a:prstGeom>
-          <a:noFill/>
-        </p:spPr>
-        <p:txBody>
-          <a:bodyPr wrap="square" lIns="45720" rIns="45720">
-            <a:spAutoFit/>
-          </a:bodyPr>
-          <a:lstStyle/>
-          <a:p>
-            <a:r>
-              <a:rPr sz="1000" b="0">
-                <a:solidFill>
-                  <a:srgbClr val="5B6770"/>
-                </a:solidFill>
-              </a:rPr>
-              <a:t>RTEU Computer Engineering · 2026-2027 Fall</a:t>
-            </a:r>
-          </a:p>
-        </p:txBody>
-      </p:sp>
-      <p:sp>
-        <p:nvSpPr>
-          <p:cNvPr id="5" name="TextBox 4"/>
-          <p:cNvSpPr txBox="1"/>
-          <p:nvPr/>
-        </p:nvSpPr>
-        <p:spPr>
-          <a:xfrm>
-            <a:off x="10637215" y="6446520"/>
-            <a:ext cx="914400" cy="274320"/>
-          </a:xfrm>
-          <a:prstGeom prst="rect">
-            <a:avLst/>
-          </a:prstGeom>
-          <a:noFill/>
-        </p:spPr>
-        <p:txBody>
-          <a:bodyPr wrap="square" lIns="45720" rIns="45720">
-            <a:spAutoFit/>
-          </a:bodyPr>
-          <a:lstStyle/>
-          <a:p>
-            <a:pPr algn="r"/>
-            <a:r>
-              <a:rPr sz="1000" b="0">
-                <a:solidFill>
-                  <a:srgbClr val="5B6770"/>
-                </a:solidFill>
-              </a:rPr>
-              <a:t>19</a:t>
-            </a:r>
-          </a:p>
-        </p:txBody>
-      </p:sp>
-      <p:sp>
-        <p:nvSpPr>
-          <p:cNvPr id="6" name="TextBox 5"/>
-          <p:cNvSpPr txBox="1"/>
-          <p:nvPr/>
-        </p:nvSpPr>
-        <p:spPr>
-          <a:xfrm>
-            <a:off x="640080" y="548640"/>
-            <a:ext cx="10911535" cy="731520"/>
-          </a:xfrm>
-          <a:prstGeom prst="rect">
-            <a:avLst/>
-          </a:prstGeom>
-          <a:noFill/>
-        </p:spPr>
-        <p:txBody>
-          <a:bodyPr wrap="square" lIns="45720" rIns="45720" anchor="ctr">
-            <a:spAutoFit/>
-          </a:bodyPr>
-          <a:lstStyle/>
-          <a:p>
-            <a:r>
-              <a:rPr sz="3000" b="1">
-                <a:solidFill>
-                  <a:srgbClr val="006D77"/>
-                </a:solidFill>
-              </a:rPr>
-              <a:t>Item · Asset Management</a:t>
-            </a:r>
-          </a:p>
-        </p:txBody>
-      </p:sp>
-      <p:sp>
-        <p:nvSpPr>
-          <p:cNvPr id="7" name="TextBox 6"/>
-          <p:cNvSpPr txBox="1"/>
-          <p:nvPr/>
-        </p:nvSpPr>
-        <p:spPr>
-          <a:xfrm>
-            <a:off x="640080" y="1325880"/>
-            <a:ext cx="10911535" cy="1219200"/>
-          </a:xfrm>
-          <a:prstGeom prst="rect">
-            <a:avLst/>
-          </a:prstGeom>
-          <a:noFill/>
-        </p:spPr>
-        <p:txBody>
-          <a:bodyPr wrap="square" lIns="45720" rIns="45720">
-            <a:spAutoFit/>
-          </a:bodyPr>
-          <a:lstStyle/>
-          <a:p>
-            <a:pPr>
-              <a:spcAft>
-                <a:spcPts val="300"/>
-              </a:spcAft>
-            </a:pPr>
-            <a:r>
-              <a:rPr sz="2000" b="1">
-                <a:solidFill>
-                  <a:srgbClr val="006D77"/>
-                </a:solidFill>
-              </a:rPr>
-              <a:t>• </a:t>
-            </a:r>
-            <a:r>
-              <a:rPr sz="2000" b="0">
-                <a:solidFill>
-                  <a:srgbClr val="1F2D3A"/>
-                </a:solidFill>
-              </a:rPr>
-              <a:t>Asset list + C/I/I+.</a:t>
-            </a:r>
-          </a:p>
-          <a:p>
-            <a:pPr>
-              <a:spcAft>
-                <a:spcPts val="300"/>
-              </a:spcAft>
-            </a:pPr>
-            <a:r>
-              <a:rPr sz="2000" b="1">
-                <a:solidFill>
-                  <a:srgbClr val="006D77"/>
-                </a:solidFill>
-              </a:rPr>
-              <a:t>• </a:t>
-            </a:r>
-            <a:r>
-              <a:rPr sz="2000" b="0">
-                <a:solidFill>
-                  <a:srgbClr val="1F2D3A"/>
-                </a:solidFill>
-              </a:rPr>
-              <a:t>Lifecycle.</a:t>
-            </a:r>
-          </a:p>
-          <a:p>
-            <a:pPr>
-              <a:spcAft>
-                <a:spcPts val="300"/>
-              </a:spcAft>
-            </a:pPr>
-            <a:r>
-              <a:rPr sz="2000" b="1">
-                <a:solidFill>
-                  <a:srgbClr val="006D77"/>
-                </a:solidFill>
-              </a:rPr>
-              <a:t>• </a:t>
-            </a:r>
-            <a:r>
-              <a:rPr sz="2000" b="1">
-                <a:solidFill>
-                  <a:srgbClr val="1F2D3A"/>
-                </a:solidFill>
-              </a:rPr>
-              <a:t>Evidence:</a:t>
-            </a:r>
-            <a:r>
-              <a:rPr sz="2000" b="0">
-                <a:solidFill>
-                  <a:srgbClr val="1F2D3A"/>
-                </a:solidFill>
-              </a:rPr>
-              <a:t> S5.</a:t>
+              <a:t>Study guide and sample questions: Week 8 page</a:t>
             </a:r>
           </a:p>
         </p:txBody>
@@ -7181,2356 +6112,6 @@
                 </a:solidFill>
               </a:rPr>
               <a:t>⚠️ Late submissions are not accepted</a:t>
-            </a:r>
-          </a:p>
-        </p:txBody>
-      </p:sp>
-    </p:spTree>
-  </p:cSld>
-  <p:clrMapOvr>
-    <a:masterClrMapping/>
-  </p:clrMapOvr>
-</p:sld>
-</file>
-
-<file path=ppt/slides/slide20.xml><?xml version="1.0" encoding="utf-8"?>
-<p:sld xmlns:a="http://schemas.openxmlformats.org/drawingml/2006/main" xmlns:p="http://schemas.openxmlformats.org/presentationml/2006/main" xmlns:r="http://schemas.openxmlformats.org/officeDocument/2006/relationships">
-  <p:cSld>
-    <p:spTree>
-      <p:nvGrpSpPr>
-        <p:cNvPr id="1" name=""/>
-        <p:cNvGrpSpPr/>
-        <p:nvPr/>
-      </p:nvGrpSpPr>
-      <p:grpSpPr/>
-      <p:pic>
-        <p:nvPicPr>
-          <p:cNvPr id="2" name="Picture 1" descr="rteu_logo_kucuk.jpg"/>
-          <p:cNvPicPr>
-            <a:picLocks noChangeAspect="1"/>
-          </p:cNvPicPr>
-          <p:nvPr/>
-        </p:nvPicPr>
-        <p:blipFill>
-          <a:blip r:embed="rId2"/>
-          <a:stretch>
-            <a:fillRect/>
-          </a:stretch>
-        </p:blipFill>
-        <p:spPr>
-          <a:xfrm>
-            <a:off x="640080" y="164592"/>
-            <a:ext cx="242773" cy="329184"/>
-          </a:xfrm>
-          <a:prstGeom prst="rect">
-            <a:avLst/>
-          </a:prstGeom>
-        </p:spPr>
-      </p:pic>
-      <p:sp>
-        <p:nvSpPr>
-          <p:cNvPr id="3" name="TextBox 2"/>
-          <p:cNvSpPr txBox="1"/>
-          <p:nvPr/>
-        </p:nvSpPr>
-        <p:spPr>
-          <a:xfrm>
-            <a:off x="1051560" y="182880"/>
-            <a:ext cx="7315200" cy="320040"/>
-          </a:xfrm>
-          <a:prstGeom prst="rect">
-            <a:avLst/>
-          </a:prstGeom>
-          <a:noFill/>
-        </p:spPr>
-        <p:txBody>
-          <a:bodyPr wrap="square" lIns="45720" rIns="45720">
-            <a:spAutoFit/>
-          </a:bodyPr>
-          <a:lstStyle/>
-          <a:p>
-            <a:r>
-              <a:rPr sz="1100" b="0">
-                <a:solidFill>
-                  <a:srgbClr val="5B6770"/>
-                </a:solidFill>
-              </a:rPr>
-              <a:t>CEN429 Secure Programming · Week 7</a:t>
-            </a:r>
-          </a:p>
-        </p:txBody>
-      </p:sp>
-      <p:sp>
-        <p:nvSpPr>
-          <p:cNvPr id="4" name="TextBox 3"/>
-          <p:cNvSpPr txBox="1"/>
-          <p:nvPr/>
-        </p:nvSpPr>
-        <p:spPr>
-          <a:xfrm>
-            <a:off x="640080" y="6446520"/>
-            <a:ext cx="7315200" cy="274320"/>
-          </a:xfrm>
-          <a:prstGeom prst="rect">
-            <a:avLst/>
-          </a:prstGeom>
-          <a:noFill/>
-        </p:spPr>
-        <p:txBody>
-          <a:bodyPr wrap="square" lIns="45720" rIns="45720">
-            <a:spAutoFit/>
-          </a:bodyPr>
-          <a:lstStyle/>
-          <a:p>
-            <a:r>
-              <a:rPr sz="1000" b="0">
-                <a:solidFill>
-                  <a:srgbClr val="5B6770"/>
-                </a:solidFill>
-              </a:rPr>
-              <a:t>RTEU Computer Engineering · 2026-2027 Fall</a:t>
-            </a:r>
-          </a:p>
-        </p:txBody>
-      </p:sp>
-      <p:sp>
-        <p:nvSpPr>
-          <p:cNvPr id="5" name="TextBox 4"/>
-          <p:cNvSpPr txBox="1"/>
-          <p:nvPr/>
-        </p:nvSpPr>
-        <p:spPr>
-          <a:xfrm>
-            <a:off x="10637215" y="6446520"/>
-            <a:ext cx="914400" cy="274320"/>
-          </a:xfrm>
-          <a:prstGeom prst="rect">
-            <a:avLst/>
-          </a:prstGeom>
-          <a:noFill/>
-        </p:spPr>
-        <p:txBody>
-          <a:bodyPr wrap="square" lIns="45720" rIns="45720">
-            <a:spAutoFit/>
-          </a:bodyPr>
-          <a:lstStyle/>
-          <a:p>
-            <a:pPr algn="r"/>
-            <a:r>
-              <a:rPr sz="1000" b="0">
-                <a:solidFill>
-                  <a:srgbClr val="5B6770"/>
-                </a:solidFill>
-              </a:rPr>
-              <a:t>20</a:t>
-            </a:r>
-          </a:p>
-        </p:txBody>
-      </p:sp>
-      <p:sp>
-        <p:nvSpPr>
-          <p:cNvPr id="6" name="TextBox 5"/>
-          <p:cNvSpPr txBox="1"/>
-          <p:nvPr/>
-        </p:nvSpPr>
-        <p:spPr>
-          <a:xfrm>
-            <a:off x="640080" y="548640"/>
-            <a:ext cx="10911535" cy="731520"/>
-          </a:xfrm>
-          <a:prstGeom prst="rect">
-            <a:avLst/>
-          </a:prstGeom>
-          <a:noFill/>
-        </p:spPr>
-        <p:txBody>
-          <a:bodyPr wrap="square" lIns="45720" rIns="45720" anchor="ctr">
-            <a:spAutoFit/>
-          </a:bodyPr>
-          <a:lstStyle/>
-          <a:p>
-            <a:r>
-              <a:rPr sz="3000" b="1">
-                <a:solidFill>
-                  <a:srgbClr val="006D77"/>
-                </a:solidFill>
-              </a:rPr>
-              <a:t>Item · Basic Protections</a:t>
-            </a:r>
-          </a:p>
-        </p:txBody>
-      </p:sp>
-      <p:sp>
-        <p:nvSpPr>
-          <p:cNvPr id="7" name="TextBox 6"/>
-          <p:cNvSpPr txBox="1"/>
-          <p:nvPr/>
-        </p:nvSpPr>
-        <p:spPr>
-          <a:xfrm>
-            <a:off x="640080" y="1325880"/>
-            <a:ext cx="10911535" cy="843280"/>
-          </a:xfrm>
-          <a:prstGeom prst="rect">
-            <a:avLst/>
-          </a:prstGeom>
-          <a:noFill/>
-        </p:spPr>
-        <p:txBody>
-          <a:bodyPr wrap="square" lIns="45720" rIns="45720">
-            <a:spAutoFit/>
-          </a:bodyPr>
-          <a:lstStyle/>
-          <a:p>
-            <a:pPr>
-              <a:spcAft>
-                <a:spcPts val="300"/>
-              </a:spcAft>
-            </a:pPr>
-            <a:r>
-              <a:rPr sz="2000" b="1">
-                <a:solidFill>
-                  <a:srgbClr val="006D77"/>
-                </a:solidFill>
-              </a:rPr>
-              <a:t>• </a:t>
-            </a:r>
-            <a:r>
-              <a:rPr sz="2000" b="0">
-                <a:solidFill>
-                  <a:srgbClr val="1F2D3A"/>
-                </a:solidFill>
-              </a:rPr>
-              <a:t>Cryptography (S8, partial), secure code (S9, partial).</a:t>
-            </a:r>
-          </a:p>
-          <a:p>
-            <a:pPr>
-              <a:spcAft>
-                <a:spcPts val="300"/>
-              </a:spcAft>
-            </a:pPr>
-            <a:r>
-              <a:rPr sz="2000" b="1">
-                <a:solidFill>
-                  <a:srgbClr val="006D77"/>
-                </a:solidFill>
-              </a:rPr>
-              <a:t>• </a:t>
-            </a:r>
-            <a:r>
-              <a:rPr sz="2000" b="1">
-                <a:solidFill>
-                  <a:srgbClr val="1F2D3A"/>
-                </a:solidFill>
-              </a:rPr>
-              <a:t>Evidence:</a:t>
-            </a:r>
-            <a:r>
-              <a:rPr sz="2000" b="0">
-                <a:solidFill>
-                  <a:srgbClr val="1F2D3A"/>
-                </a:solidFill>
-              </a:rPr>
-              <a:t> code + tests.</a:t>
-            </a:r>
-          </a:p>
-        </p:txBody>
-      </p:sp>
-    </p:spTree>
-  </p:cSld>
-  <p:clrMapOvr>
-    <a:masterClrMapping/>
-  </p:clrMapOvr>
-</p:sld>
-</file>
-
-<file path=ppt/slides/slide21.xml><?xml version="1.0" encoding="utf-8"?>
-<p:sld xmlns:a="http://schemas.openxmlformats.org/drawingml/2006/main" xmlns:p="http://schemas.openxmlformats.org/presentationml/2006/main" xmlns:r="http://schemas.openxmlformats.org/officeDocument/2006/relationships">
-  <p:cSld>
-    <p:spTree>
-      <p:nvGrpSpPr>
-        <p:cNvPr id="1" name=""/>
-        <p:cNvGrpSpPr/>
-        <p:nvPr/>
-      </p:nvGrpSpPr>
-      <p:grpSpPr/>
-      <p:pic>
-        <p:nvPicPr>
-          <p:cNvPr id="2" name="Picture 1" descr="rteu_logo_kucuk.jpg"/>
-          <p:cNvPicPr>
-            <a:picLocks noChangeAspect="1"/>
-          </p:cNvPicPr>
-          <p:nvPr/>
-        </p:nvPicPr>
-        <p:blipFill>
-          <a:blip r:embed="rId2"/>
-          <a:stretch>
-            <a:fillRect/>
-          </a:stretch>
-        </p:blipFill>
-        <p:spPr>
-          <a:xfrm>
-            <a:off x="640080" y="164592"/>
-            <a:ext cx="242773" cy="329184"/>
-          </a:xfrm>
-          <a:prstGeom prst="rect">
-            <a:avLst/>
-          </a:prstGeom>
-        </p:spPr>
-      </p:pic>
-      <p:sp>
-        <p:nvSpPr>
-          <p:cNvPr id="3" name="TextBox 2"/>
-          <p:cNvSpPr txBox="1"/>
-          <p:nvPr/>
-        </p:nvSpPr>
-        <p:spPr>
-          <a:xfrm>
-            <a:off x="1051560" y="182880"/>
-            <a:ext cx="7315200" cy="320040"/>
-          </a:xfrm>
-          <a:prstGeom prst="rect">
-            <a:avLst/>
-          </a:prstGeom>
-          <a:noFill/>
-        </p:spPr>
-        <p:txBody>
-          <a:bodyPr wrap="square" lIns="45720" rIns="45720">
-            <a:spAutoFit/>
-          </a:bodyPr>
-          <a:lstStyle/>
-          <a:p>
-            <a:r>
-              <a:rPr sz="1100" b="0">
-                <a:solidFill>
-                  <a:srgbClr val="5B6770"/>
-                </a:solidFill>
-              </a:rPr>
-              <a:t>CEN429 Secure Programming · Week 7</a:t>
-            </a:r>
-          </a:p>
-        </p:txBody>
-      </p:sp>
-      <p:sp>
-        <p:nvSpPr>
-          <p:cNvPr id="4" name="TextBox 3"/>
-          <p:cNvSpPr txBox="1"/>
-          <p:nvPr/>
-        </p:nvSpPr>
-        <p:spPr>
-          <a:xfrm>
-            <a:off x="640080" y="6446520"/>
-            <a:ext cx="7315200" cy="274320"/>
-          </a:xfrm>
-          <a:prstGeom prst="rect">
-            <a:avLst/>
-          </a:prstGeom>
-          <a:noFill/>
-        </p:spPr>
-        <p:txBody>
-          <a:bodyPr wrap="square" lIns="45720" rIns="45720">
-            <a:spAutoFit/>
-          </a:bodyPr>
-          <a:lstStyle/>
-          <a:p>
-            <a:r>
-              <a:rPr sz="1000" b="0">
-                <a:solidFill>
-                  <a:srgbClr val="5B6770"/>
-                </a:solidFill>
-              </a:rPr>
-              <a:t>RTEU Computer Engineering · 2026-2027 Fall</a:t>
-            </a:r>
-          </a:p>
-        </p:txBody>
-      </p:sp>
-      <p:sp>
-        <p:nvSpPr>
-          <p:cNvPr id="5" name="TextBox 4"/>
-          <p:cNvSpPr txBox="1"/>
-          <p:nvPr/>
-        </p:nvSpPr>
-        <p:spPr>
-          <a:xfrm>
-            <a:off x="10637215" y="6446520"/>
-            <a:ext cx="914400" cy="274320"/>
-          </a:xfrm>
-          <a:prstGeom prst="rect">
-            <a:avLst/>
-          </a:prstGeom>
-          <a:noFill/>
-        </p:spPr>
-        <p:txBody>
-          <a:bodyPr wrap="square" lIns="45720" rIns="45720">
-            <a:spAutoFit/>
-          </a:bodyPr>
-          <a:lstStyle/>
-          <a:p>
-            <a:pPr algn="r"/>
-            <a:r>
-              <a:rPr sz="1000" b="0">
-                <a:solidFill>
-                  <a:srgbClr val="5B6770"/>
-                </a:solidFill>
-              </a:rPr>
-              <a:t>21</a:t>
-            </a:r>
-          </a:p>
-        </p:txBody>
-      </p:sp>
-      <p:sp>
-        <p:nvSpPr>
-          <p:cNvPr id="6" name="TextBox 5"/>
-          <p:cNvSpPr txBox="1"/>
-          <p:nvPr/>
-        </p:nvSpPr>
-        <p:spPr>
-          <a:xfrm>
-            <a:off x="640080" y="548640"/>
-            <a:ext cx="10911535" cy="731520"/>
-          </a:xfrm>
-          <a:prstGeom prst="rect">
-            <a:avLst/>
-          </a:prstGeom>
-          <a:noFill/>
-        </p:spPr>
-        <p:txBody>
-          <a:bodyPr wrap="square" lIns="45720" rIns="45720" anchor="ctr">
-            <a:spAutoFit/>
-          </a:bodyPr>
-          <a:lstStyle/>
-          <a:p>
-            <a:r>
-              <a:rPr sz="3000" b="1">
-                <a:solidFill>
-                  <a:srgbClr val="006D77"/>
-                </a:solidFill>
-              </a:rPr>
-              <a:t>Item · Documentation and Presentation</a:t>
-            </a:r>
-          </a:p>
-        </p:txBody>
-      </p:sp>
-      <p:sp>
-        <p:nvSpPr>
-          <p:cNvPr id="7" name="TextBox 6"/>
-          <p:cNvSpPr txBox="1"/>
-          <p:nvPr/>
-        </p:nvSpPr>
-        <p:spPr>
-          <a:xfrm>
-            <a:off x="640080" y="1325880"/>
-            <a:ext cx="10911535" cy="1219200"/>
-          </a:xfrm>
-          <a:prstGeom prst="rect">
-            <a:avLst/>
-          </a:prstGeom>
-          <a:noFill/>
-        </p:spPr>
-        <p:txBody>
-          <a:bodyPr wrap="square" lIns="45720" rIns="45720">
-            <a:spAutoFit/>
-          </a:bodyPr>
-          <a:lstStyle/>
-          <a:p>
-            <a:pPr>
-              <a:spcAft>
-                <a:spcPts val="300"/>
-              </a:spcAft>
-            </a:pPr>
-            <a:r>
-              <a:rPr sz="2000" b="1">
-                <a:solidFill>
-                  <a:srgbClr val="006D77"/>
-                </a:solidFill>
-              </a:rPr>
-              <a:t>• </a:t>
-            </a:r>
-            <a:r>
-              <a:rPr sz="2000" b="0">
-                <a:solidFill>
-                  <a:srgbClr val="1F2D3A"/>
-                </a:solidFill>
-              </a:rPr>
-              <a:t>Consistency, version identity.</a:t>
-            </a:r>
-          </a:p>
-          <a:p>
-            <a:pPr>
-              <a:spcAft>
-                <a:spcPts val="300"/>
-              </a:spcAft>
-            </a:pPr>
-            <a:r>
-              <a:rPr sz="2000" b="1">
-                <a:solidFill>
-                  <a:srgbClr val="006D77"/>
-                </a:solidFill>
-              </a:rPr>
-              <a:t>• </a:t>
-            </a:r>
-            <a:r>
-              <a:rPr sz="2000" b="0">
-                <a:solidFill>
-                  <a:srgbClr val="1F2D3A"/>
-                </a:solidFill>
-              </a:rPr>
-              <a:t>Clear delivery.</a:t>
-            </a:r>
-          </a:p>
-          <a:p>
-            <a:pPr>
-              <a:spcAft>
-                <a:spcPts val="300"/>
-              </a:spcAft>
-            </a:pPr>
-            <a:r>
-              <a:rPr sz="2000" b="1">
-                <a:solidFill>
-                  <a:srgbClr val="006D77"/>
-                </a:solidFill>
-              </a:rPr>
-              <a:t>• </a:t>
-            </a:r>
-            <a:r>
-              <a:rPr sz="2000" b="1">
-                <a:solidFill>
-                  <a:srgbClr val="1F2D3A"/>
-                </a:solidFill>
-              </a:rPr>
-              <a:t>Evidence:</a:t>
-            </a:r>
-            <a:r>
-              <a:rPr sz="2000" b="0">
-                <a:solidFill>
-                  <a:srgbClr val="1F2D3A"/>
-                </a:solidFill>
-              </a:rPr>
-              <a:t> the entire guide.</a:t>
-            </a:r>
-          </a:p>
-        </p:txBody>
-      </p:sp>
-    </p:spTree>
-  </p:cSld>
-  <p:clrMapOvr>
-    <a:masterClrMapping/>
-  </p:clrMapOvr>
-</p:sld>
-</file>
-
-<file path=ppt/slides/slide22.xml><?xml version="1.0" encoding="utf-8"?>
-<p:sld xmlns:a="http://schemas.openxmlformats.org/drawingml/2006/main" xmlns:p="http://schemas.openxmlformats.org/presentationml/2006/main" xmlns:r="http://schemas.openxmlformats.org/officeDocument/2006/relationships">
-  <p:cSld>
-    <p:bg>
-      <p:bgPr>
-        <a:solidFill>
-          <a:srgbClr val="006D77"/>
-        </a:solidFill>
-        <a:effectLst/>
-      </p:bgPr>
-    </p:bg>
-    <p:spTree>
-      <p:nvGrpSpPr>
-        <p:cNvPr id="1" name=""/>
-        <p:cNvGrpSpPr/>
-        <p:nvPr/>
-      </p:nvGrpSpPr>
-      <p:grpSpPr/>
-      <p:sp>
-        <p:nvSpPr>
-          <p:cNvPr id="2" name="TextBox 1"/>
-          <p:cNvSpPr txBox="1"/>
-          <p:nvPr/>
-        </p:nvSpPr>
-        <p:spPr>
-          <a:xfrm>
-            <a:off x="1051560" y="182880"/>
-            <a:ext cx="7315200" cy="320040"/>
-          </a:xfrm>
-          <a:prstGeom prst="rect">
-            <a:avLst/>
-          </a:prstGeom>
-          <a:noFill/>
-        </p:spPr>
-        <p:txBody>
-          <a:bodyPr wrap="square" lIns="45720" rIns="45720">
-            <a:spAutoFit/>
-          </a:bodyPr>
-          <a:lstStyle/>
-          <a:p>
-            <a:r>
-              <a:rPr sz="1100" b="0">
-                <a:solidFill>
-                  <a:srgbClr val="D8F0F2"/>
-                </a:solidFill>
-              </a:rPr>
-              <a:t>CEN429 Secure Programming · Week 7</a:t>
-            </a:r>
-          </a:p>
-        </p:txBody>
-      </p:sp>
-      <p:sp>
-        <p:nvSpPr>
-          <p:cNvPr id="3" name="TextBox 2"/>
-          <p:cNvSpPr txBox="1"/>
-          <p:nvPr/>
-        </p:nvSpPr>
-        <p:spPr>
-          <a:xfrm>
-            <a:off x="640080" y="6446520"/>
-            <a:ext cx="7315200" cy="274320"/>
-          </a:xfrm>
-          <a:prstGeom prst="rect">
-            <a:avLst/>
-          </a:prstGeom>
-          <a:noFill/>
-        </p:spPr>
-        <p:txBody>
-          <a:bodyPr wrap="square" lIns="45720" rIns="45720">
-            <a:spAutoFit/>
-          </a:bodyPr>
-          <a:lstStyle/>
-          <a:p>
-            <a:r>
-              <a:rPr sz="1000" b="0">
-                <a:solidFill>
-                  <a:srgbClr val="D8F0F2"/>
-                </a:solidFill>
-              </a:rPr>
-              <a:t>RTEU Computer Engineering · 2026-2027 Fall</a:t>
-            </a:r>
-          </a:p>
-        </p:txBody>
-      </p:sp>
-      <p:sp>
-        <p:nvSpPr>
-          <p:cNvPr id="4" name="TextBox 3"/>
-          <p:cNvSpPr txBox="1"/>
-          <p:nvPr/>
-        </p:nvSpPr>
-        <p:spPr>
-          <a:xfrm>
-            <a:off x="10637215" y="6446520"/>
-            <a:ext cx="914400" cy="274320"/>
-          </a:xfrm>
-          <a:prstGeom prst="rect">
-            <a:avLst/>
-          </a:prstGeom>
-          <a:noFill/>
-        </p:spPr>
-        <p:txBody>
-          <a:bodyPr wrap="square" lIns="45720" rIns="45720">
-            <a:spAutoFit/>
-          </a:bodyPr>
-          <a:lstStyle/>
-          <a:p>
-            <a:pPr algn="r"/>
-            <a:r>
-              <a:rPr sz="1000" b="0">
-                <a:solidFill>
-                  <a:srgbClr val="D8F0F2"/>
-                </a:solidFill>
-              </a:rPr>
-              <a:t>22</a:t>
-            </a:r>
-          </a:p>
-        </p:txBody>
-      </p:sp>
-      <p:sp>
-        <p:nvSpPr>
-          <p:cNvPr id="5" name="TextBox 4"/>
-          <p:cNvSpPr txBox="1"/>
-          <p:nvPr/>
-        </p:nvSpPr>
-        <p:spPr>
-          <a:xfrm>
-            <a:off x="640080" y="2743200"/>
-            <a:ext cx="10911535" cy="1280160"/>
-          </a:xfrm>
-          <a:prstGeom prst="rect">
-            <a:avLst/>
-          </a:prstGeom>
-          <a:noFill/>
-        </p:spPr>
-        <p:txBody>
-          <a:bodyPr wrap="square" lIns="45720" rIns="45720">
-            <a:spAutoFit/>
-          </a:bodyPr>
-          <a:lstStyle/>
-          <a:p>
-            <a:pPr algn="l"/>
-            <a:r>
-              <a:rPr sz="4000" b="1">
-                <a:solidFill>
-                  <a:srgbClr val="FFFFFF"/>
-                </a:solidFill>
-              </a:rPr>
-              <a:t>Appendix · Demonstration Flow</a:t>
-            </a:r>
-          </a:p>
-        </p:txBody>
-      </p:sp>
-    </p:spTree>
-  </p:cSld>
-  <p:clrMapOvr>
-    <a:masterClrMapping/>
-  </p:clrMapOvr>
-</p:sld>
-</file>
-
-<file path=ppt/slides/slide23.xml><?xml version="1.0" encoding="utf-8"?>
-<p:sld xmlns:a="http://schemas.openxmlformats.org/drawingml/2006/main" xmlns:p="http://schemas.openxmlformats.org/presentationml/2006/main" xmlns:r="http://schemas.openxmlformats.org/officeDocument/2006/relationships">
-  <p:cSld>
-    <p:spTree>
-      <p:nvGrpSpPr>
-        <p:cNvPr id="1" name=""/>
-        <p:cNvGrpSpPr/>
-        <p:nvPr/>
-      </p:nvGrpSpPr>
-      <p:grpSpPr/>
-      <p:pic>
-        <p:nvPicPr>
-          <p:cNvPr id="2" name="Picture 1" descr="rteu_logo_kucuk.jpg"/>
-          <p:cNvPicPr>
-            <a:picLocks noChangeAspect="1"/>
-          </p:cNvPicPr>
-          <p:nvPr/>
-        </p:nvPicPr>
-        <p:blipFill>
-          <a:blip r:embed="rId2"/>
-          <a:stretch>
-            <a:fillRect/>
-          </a:stretch>
-        </p:blipFill>
-        <p:spPr>
-          <a:xfrm>
-            <a:off x="640080" y="164592"/>
-            <a:ext cx="242773" cy="329184"/>
-          </a:xfrm>
-          <a:prstGeom prst="rect">
-            <a:avLst/>
-          </a:prstGeom>
-        </p:spPr>
-      </p:pic>
-      <p:sp>
-        <p:nvSpPr>
-          <p:cNvPr id="3" name="TextBox 2"/>
-          <p:cNvSpPr txBox="1"/>
-          <p:nvPr/>
-        </p:nvSpPr>
-        <p:spPr>
-          <a:xfrm>
-            <a:off x="1051560" y="182880"/>
-            <a:ext cx="7315200" cy="320040"/>
-          </a:xfrm>
-          <a:prstGeom prst="rect">
-            <a:avLst/>
-          </a:prstGeom>
-          <a:noFill/>
-        </p:spPr>
-        <p:txBody>
-          <a:bodyPr wrap="square" lIns="45720" rIns="45720">
-            <a:spAutoFit/>
-          </a:bodyPr>
-          <a:lstStyle/>
-          <a:p>
-            <a:r>
-              <a:rPr sz="1100" b="0">
-                <a:solidFill>
-                  <a:srgbClr val="5B6770"/>
-                </a:solidFill>
-              </a:rPr>
-              <a:t>CEN429 Secure Programming · Week 7</a:t>
-            </a:r>
-          </a:p>
-        </p:txBody>
-      </p:sp>
-      <p:sp>
-        <p:nvSpPr>
-          <p:cNvPr id="4" name="TextBox 3"/>
-          <p:cNvSpPr txBox="1"/>
-          <p:nvPr/>
-        </p:nvSpPr>
-        <p:spPr>
-          <a:xfrm>
-            <a:off x="640080" y="6446520"/>
-            <a:ext cx="7315200" cy="274320"/>
-          </a:xfrm>
-          <a:prstGeom prst="rect">
-            <a:avLst/>
-          </a:prstGeom>
-          <a:noFill/>
-        </p:spPr>
-        <p:txBody>
-          <a:bodyPr wrap="square" lIns="45720" rIns="45720">
-            <a:spAutoFit/>
-          </a:bodyPr>
-          <a:lstStyle/>
-          <a:p>
-            <a:r>
-              <a:rPr sz="1000" b="0">
-                <a:solidFill>
-                  <a:srgbClr val="5B6770"/>
-                </a:solidFill>
-              </a:rPr>
-              <a:t>RTEU Computer Engineering · 2026-2027 Fall</a:t>
-            </a:r>
-          </a:p>
-        </p:txBody>
-      </p:sp>
-      <p:sp>
-        <p:nvSpPr>
-          <p:cNvPr id="5" name="TextBox 4"/>
-          <p:cNvSpPr txBox="1"/>
-          <p:nvPr/>
-        </p:nvSpPr>
-        <p:spPr>
-          <a:xfrm>
-            <a:off x="10637215" y="6446520"/>
-            <a:ext cx="914400" cy="274320"/>
-          </a:xfrm>
-          <a:prstGeom prst="rect">
-            <a:avLst/>
-          </a:prstGeom>
-          <a:noFill/>
-        </p:spPr>
-        <p:txBody>
-          <a:bodyPr wrap="square" lIns="45720" rIns="45720">
-            <a:spAutoFit/>
-          </a:bodyPr>
-          <a:lstStyle/>
-          <a:p>
-            <a:pPr algn="r"/>
-            <a:r>
-              <a:rPr sz="1000" b="0">
-                <a:solidFill>
-                  <a:srgbClr val="5B6770"/>
-                </a:solidFill>
-              </a:rPr>
-              <a:t>23</a:t>
-            </a:r>
-          </a:p>
-        </p:txBody>
-      </p:sp>
-      <p:sp>
-        <p:nvSpPr>
-          <p:cNvPr id="6" name="TextBox 5"/>
-          <p:cNvSpPr txBox="1"/>
-          <p:nvPr/>
-        </p:nvSpPr>
-        <p:spPr>
-          <a:xfrm>
-            <a:off x="640080" y="548640"/>
-            <a:ext cx="10911535" cy="731520"/>
-          </a:xfrm>
-          <a:prstGeom prst="rect">
-            <a:avLst/>
-          </a:prstGeom>
-          <a:noFill/>
-        </p:spPr>
-        <p:txBody>
-          <a:bodyPr wrap="square" lIns="45720" rIns="45720" anchor="ctr">
-            <a:spAutoFit/>
-          </a:bodyPr>
-          <a:lstStyle/>
-          <a:p>
-            <a:r>
-              <a:rPr sz="3000" b="1">
-                <a:solidFill>
-                  <a:srgbClr val="006D77"/>
-                </a:solidFill>
-              </a:rPr>
-              <a:t>Flow · 1. Summary</a:t>
-            </a:r>
-          </a:p>
-        </p:txBody>
-      </p:sp>
-      <p:sp>
-        <p:nvSpPr>
-          <p:cNvPr id="7" name="TextBox 6"/>
-          <p:cNvSpPr txBox="1"/>
-          <p:nvPr/>
-        </p:nvSpPr>
-        <p:spPr>
-          <a:xfrm>
-            <a:off x="640080" y="1325880"/>
-            <a:ext cx="10911535" cy="843280"/>
-          </a:xfrm>
-          <a:prstGeom prst="rect">
-            <a:avLst/>
-          </a:prstGeom>
-          <a:noFill/>
-        </p:spPr>
-        <p:txBody>
-          <a:bodyPr wrap="square" lIns="45720" rIns="45720">
-            <a:spAutoFit/>
-          </a:bodyPr>
-          <a:lstStyle/>
-          <a:p>
-            <a:pPr>
-              <a:spcAft>
-                <a:spcPts val="300"/>
-              </a:spcAft>
-            </a:pPr>
-            <a:r>
-              <a:rPr sz="2000" b="1">
-                <a:solidFill>
-                  <a:srgbClr val="006D77"/>
-                </a:solidFill>
-              </a:rPr>
-              <a:t>• </a:t>
-            </a:r>
-            <a:r>
-              <a:rPr sz="2000" b="0">
-                <a:solidFill>
-                  <a:srgbClr val="1F2D3A"/>
-                </a:solidFill>
-              </a:rPr>
-              <a:t>Product, architecture, the three most critical assets.</a:t>
-            </a:r>
-          </a:p>
-          <a:p>
-            <a:pPr>
-              <a:spcAft>
-                <a:spcPts val="300"/>
-              </a:spcAft>
-            </a:pPr>
-            <a:r>
-              <a:rPr sz="2000" b="1">
-                <a:solidFill>
-                  <a:srgbClr val="006D77"/>
-                </a:solidFill>
-              </a:rPr>
-              <a:t>• </a:t>
-            </a:r>
-            <a:r>
-              <a:rPr sz="2000" b="0">
-                <a:solidFill>
-                  <a:srgbClr val="1F2D3A"/>
-                </a:solidFill>
-              </a:rPr>
-              <a:t>One diagram, two minutes.</a:t>
-            </a:r>
-          </a:p>
-        </p:txBody>
-      </p:sp>
-    </p:spTree>
-  </p:cSld>
-  <p:clrMapOvr>
-    <a:masterClrMapping/>
-  </p:clrMapOvr>
-</p:sld>
-</file>
-
-<file path=ppt/slides/slide24.xml><?xml version="1.0" encoding="utf-8"?>
-<p:sld xmlns:a="http://schemas.openxmlformats.org/drawingml/2006/main" xmlns:p="http://schemas.openxmlformats.org/presentationml/2006/main" xmlns:r="http://schemas.openxmlformats.org/officeDocument/2006/relationships">
-  <p:cSld>
-    <p:spTree>
-      <p:nvGrpSpPr>
-        <p:cNvPr id="1" name=""/>
-        <p:cNvGrpSpPr/>
-        <p:nvPr/>
-      </p:nvGrpSpPr>
-      <p:grpSpPr/>
-      <p:pic>
-        <p:nvPicPr>
-          <p:cNvPr id="2" name="Picture 1" descr="rteu_logo_kucuk.jpg"/>
-          <p:cNvPicPr>
-            <a:picLocks noChangeAspect="1"/>
-          </p:cNvPicPr>
-          <p:nvPr/>
-        </p:nvPicPr>
-        <p:blipFill>
-          <a:blip r:embed="rId2"/>
-          <a:stretch>
-            <a:fillRect/>
-          </a:stretch>
-        </p:blipFill>
-        <p:spPr>
-          <a:xfrm>
-            <a:off x="640080" y="164592"/>
-            <a:ext cx="242773" cy="329184"/>
-          </a:xfrm>
-          <a:prstGeom prst="rect">
-            <a:avLst/>
-          </a:prstGeom>
-        </p:spPr>
-      </p:pic>
-      <p:sp>
-        <p:nvSpPr>
-          <p:cNvPr id="3" name="TextBox 2"/>
-          <p:cNvSpPr txBox="1"/>
-          <p:nvPr/>
-        </p:nvSpPr>
-        <p:spPr>
-          <a:xfrm>
-            <a:off x="1051560" y="182880"/>
-            <a:ext cx="7315200" cy="320040"/>
-          </a:xfrm>
-          <a:prstGeom prst="rect">
-            <a:avLst/>
-          </a:prstGeom>
-          <a:noFill/>
-        </p:spPr>
-        <p:txBody>
-          <a:bodyPr wrap="square" lIns="45720" rIns="45720">
-            <a:spAutoFit/>
-          </a:bodyPr>
-          <a:lstStyle/>
-          <a:p>
-            <a:r>
-              <a:rPr sz="1100" b="0">
-                <a:solidFill>
-                  <a:srgbClr val="5B6770"/>
-                </a:solidFill>
-              </a:rPr>
-              <a:t>CEN429 Secure Programming · Week 7</a:t>
-            </a:r>
-          </a:p>
-        </p:txBody>
-      </p:sp>
-      <p:sp>
-        <p:nvSpPr>
-          <p:cNvPr id="4" name="TextBox 3"/>
-          <p:cNvSpPr txBox="1"/>
-          <p:nvPr/>
-        </p:nvSpPr>
-        <p:spPr>
-          <a:xfrm>
-            <a:off x="640080" y="6446520"/>
-            <a:ext cx="7315200" cy="274320"/>
-          </a:xfrm>
-          <a:prstGeom prst="rect">
-            <a:avLst/>
-          </a:prstGeom>
-          <a:noFill/>
-        </p:spPr>
-        <p:txBody>
-          <a:bodyPr wrap="square" lIns="45720" rIns="45720">
-            <a:spAutoFit/>
-          </a:bodyPr>
-          <a:lstStyle/>
-          <a:p>
-            <a:r>
-              <a:rPr sz="1000" b="0">
-                <a:solidFill>
-                  <a:srgbClr val="5B6770"/>
-                </a:solidFill>
-              </a:rPr>
-              <a:t>RTEU Computer Engineering · 2026-2027 Fall</a:t>
-            </a:r>
-          </a:p>
-        </p:txBody>
-      </p:sp>
-      <p:sp>
-        <p:nvSpPr>
-          <p:cNvPr id="5" name="TextBox 4"/>
-          <p:cNvSpPr txBox="1"/>
-          <p:nvPr/>
-        </p:nvSpPr>
-        <p:spPr>
-          <a:xfrm>
-            <a:off x="10637215" y="6446520"/>
-            <a:ext cx="914400" cy="274320"/>
-          </a:xfrm>
-          <a:prstGeom prst="rect">
-            <a:avLst/>
-          </a:prstGeom>
-          <a:noFill/>
-        </p:spPr>
-        <p:txBody>
-          <a:bodyPr wrap="square" lIns="45720" rIns="45720">
-            <a:spAutoFit/>
-          </a:bodyPr>
-          <a:lstStyle/>
-          <a:p>
-            <a:pPr algn="r"/>
-            <a:r>
-              <a:rPr sz="1000" b="0">
-                <a:solidFill>
-                  <a:srgbClr val="5B6770"/>
-                </a:solidFill>
-              </a:rPr>
-              <a:t>24</a:t>
-            </a:r>
-          </a:p>
-        </p:txBody>
-      </p:sp>
-      <p:sp>
-        <p:nvSpPr>
-          <p:cNvPr id="6" name="TextBox 5"/>
-          <p:cNvSpPr txBox="1"/>
-          <p:nvPr/>
-        </p:nvSpPr>
-        <p:spPr>
-          <a:xfrm>
-            <a:off x="640080" y="548640"/>
-            <a:ext cx="10911535" cy="731520"/>
-          </a:xfrm>
-          <a:prstGeom prst="rect">
-            <a:avLst/>
-          </a:prstGeom>
-          <a:noFill/>
-        </p:spPr>
-        <p:txBody>
-          <a:bodyPr wrap="square" lIns="45720" rIns="45720" anchor="ctr">
-            <a:spAutoFit/>
-          </a:bodyPr>
-          <a:lstStyle/>
-          <a:p>
-            <a:r>
-              <a:rPr sz="3000" b="1">
-                <a:solidFill>
-                  <a:srgbClr val="006D77"/>
-                </a:solidFill>
-              </a:rPr>
-              <a:t>Flow · 2. Threat Model</a:t>
-            </a:r>
-          </a:p>
-        </p:txBody>
-      </p:sp>
-      <p:sp>
-        <p:nvSpPr>
-          <p:cNvPr id="7" name="TextBox 6"/>
-          <p:cNvSpPr txBox="1"/>
-          <p:nvPr/>
-        </p:nvSpPr>
-        <p:spPr>
-          <a:xfrm>
-            <a:off x="640080" y="1325880"/>
-            <a:ext cx="10911535" cy="843280"/>
-          </a:xfrm>
-          <a:prstGeom prst="rect">
-            <a:avLst/>
-          </a:prstGeom>
-          <a:noFill/>
-        </p:spPr>
-        <p:txBody>
-          <a:bodyPr wrap="square" lIns="45720" rIns="45720">
-            <a:spAutoFit/>
-          </a:bodyPr>
-          <a:lstStyle/>
-          <a:p>
-            <a:pPr>
-              <a:spcAft>
-                <a:spcPts val="300"/>
-              </a:spcAft>
-            </a:pPr>
-            <a:r>
-              <a:rPr sz="2000" b="1">
-                <a:solidFill>
-                  <a:srgbClr val="006D77"/>
-                </a:solidFill>
-              </a:rPr>
-              <a:t>• </a:t>
-            </a:r>
-            <a:r>
-              <a:rPr sz="2000" b="0">
-                <a:solidFill>
-                  <a:srgbClr val="1F2D3A"/>
-                </a:solidFill>
-              </a:rPr>
-              <a:t>One example from STRIDE and the attack tree.</a:t>
-            </a:r>
-          </a:p>
-          <a:p>
-            <a:pPr>
-              <a:spcAft>
-                <a:spcPts val="300"/>
-              </a:spcAft>
-            </a:pPr>
-            <a:r>
-              <a:rPr sz="2000" b="1">
-                <a:solidFill>
-                  <a:srgbClr val="006D77"/>
-                </a:solidFill>
-              </a:rPr>
-              <a:t>• </a:t>
-            </a:r>
-            <a:r>
-              <a:rPr sz="2000" b="0">
-                <a:solidFill>
-                  <a:srgbClr val="1F2D3A"/>
-                </a:solidFill>
-              </a:rPr>
-              <a:t>"This threat, that control."</a:t>
-            </a:r>
-          </a:p>
-        </p:txBody>
-      </p:sp>
-    </p:spTree>
-  </p:cSld>
-  <p:clrMapOvr>
-    <a:masterClrMapping/>
-  </p:clrMapOvr>
-</p:sld>
-</file>
-
-<file path=ppt/slides/slide25.xml><?xml version="1.0" encoding="utf-8"?>
-<p:sld xmlns:a="http://schemas.openxmlformats.org/drawingml/2006/main" xmlns:p="http://schemas.openxmlformats.org/presentationml/2006/main" xmlns:r="http://schemas.openxmlformats.org/officeDocument/2006/relationships">
-  <p:cSld>
-    <p:spTree>
-      <p:nvGrpSpPr>
-        <p:cNvPr id="1" name=""/>
-        <p:cNvGrpSpPr/>
-        <p:nvPr/>
-      </p:nvGrpSpPr>
-      <p:grpSpPr/>
-      <p:pic>
-        <p:nvPicPr>
-          <p:cNvPr id="2" name="Picture 1" descr="rteu_logo_kucuk.jpg"/>
-          <p:cNvPicPr>
-            <a:picLocks noChangeAspect="1"/>
-          </p:cNvPicPr>
-          <p:nvPr/>
-        </p:nvPicPr>
-        <p:blipFill>
-          <a:blip r:embed="rId2"/>
-          <a:stretch>
-            <a:fillRect/>
-          </a:stretch>
-        </p:blipFill>
-        <p:spPr>
-          <a:xfrm>
-            <a:off x="640080" y="164592"/>
-            <a:ext cx="242773" cy="329184"/>
-          </a:xfrm>
-          <a:prstGeom prst="rect">
-            <a:avLst/>
-          </a:prstGeom>
-        </p:spPr>
-      </p:pic>
-      <p:sp>
-        <p:nvSpPr>
-          <p:cNvPr id="3" name="TextBox 2"/>
-          <p:cNvSpPr txBox="1"/>
-          <p:nvPr/>
-        </p:nvSpPr>
-        <p:spPr>
-          <a:xfrm>
-            <a:off x="1051560" y="182880"/>
-            <a:ext cx="7315200" cy="320040"/>
-          </a:xfrm>
-          <a:prstGeom prst="rect">
-            <a:avLst/>
-          </a:prstGeom>
-          <a:noFill/>
-        </p:spPr>
-        <p:txBody>
-          <a:bodyPr wrap="square" lIns="45720" rIns="45720">
-            <a:spAutoFit/>
-          </a:bodyPr>
-          <a:lstStyle/>
-          <a:p>
-            <a:r>
-              <a:rPr sz="1100" b="0">
-                <a:solidFill>
-                  <a:srgbClr val="5B6770"/>
-                </a:solidFill>
-              </a:rPr>
-              <a:t>CEN429 Secure Programming · Week 7</a:t>
-            </a:r>
-          </a:p>
-        </p:txBody>
-      </p:sp>
-      <p:sp>
-        <p:nvSpPr>
-          <p:cNvPr id="4" name="TextBox 3"/>
-          <p:cNvSpPr txBox="1"/>
-          <p:nvPr/>
-        </p:nvSpPr>
-        <p:spPr>
-          <a:xfrm>
-            <a:off x="640080" y="6446520"/>
-            <a:ext cx="7315200" cy="274320"/>
-          </a:xfrm>
-          <a:prstGeom prst="rect">
-            <a:avLst/>
-          </a:prstGeom>
-          <a:noFill/>
-        </p:spPr>
-        <p:txBody>
-          <a:bodyPr wrap="square" lIns="45720" rIns="45720">
-            <a:spAutoFit/>
-          </a:bodyPr>
-          <a:lstStyle/>
-          <a:p>
-            <a:r>
-              <a:rPr sz="1000" b="0">
-                <a:solidFill>
-                  <a:srgbClr val="5B6770"/>
-                </a:solidFill>
-              </a:rPr>
-              <a:t>RTEU Computer Engineering · 2026-2027 Fall</a:t>
-            </a:r>
-          </a:p>
-        </p:txBody>
-      </p:sp>
-      <p:sp>
-        <p:nvSpPr>
-          <p:cNvPr id="5" name="TextBox 4"/>
-          <p:cNvSpPr txBox="1"/>
-          <p:nvPr/>
-        </p:nvSpPr>
-        <p:spPr>
-          <a:xfrm>
-            <a:off x="10637215" y="6446520"/>
-            <a:ext cx="914400" cy="274320"/>
-          </a:xfrm>
-          <a:prstGeom prst="rect">
-            <a:avLst/>
-          </a:prstGeom>
-          <a:noFill/>
-        </p:spPr>
-        <p:txBody>
-          <a:bodyPr wrap="square" lIns="45720" rIns="45720">
-            <a:spAutoFit/>
-          </a:bodyPr>
-          <a:lstStyle/>
-          <a:p>
-            <a:pPr algn="r"/>
-            <a:r>
-              <a:rPr sz="1000" b="0">
-                <a:solidFill>
-                  <a:srgbClr val="5B6770"/>
-                </a:solidFill>
-              </a:rPr>
-              <a:t>25</a:t>
-            </a:r>
-          </a:p>
-        </p:txBody>
-      </p:sp>
-      <p:sp>
-        <p:nvSpPr>
-          <p:cNvPr id="6" name="TextBox 5"/>
-          <p:cNvSpPr txBox="1"/>
-          <p:nvPr/>
-        </p:nvSpPr>
-        <p:spPr>
-          <a:xfrm>
-            <a:off x="640080" y="548640"/>
-            <a:ext cx="10911535" cy="731520"/>
-          </a:xfrm>
-          <a:prstGeom prst="rect">
-            <a:avLst/>
-          </a:prstGeom>
-          <a:noFill/>
-        </p:spPr>
-        <p:txBody>
-          <a:bodyPr wrap="square" lIns="45720" rIns="45720" anchor="ctr">
-            <a:spAutoFit/>
-          </a:bodyPr>
-          <a:lstStyle/>
-          <a:p>
-            <a:r>
-              <a:rPr sz="3000" b="1">
-                <a:solidFill>
-                  <a:srgbClr val="006D77"/>
-                </a:solidFill>
-              </a:rPr>
-              <a:t>Flow · 3. Live Demonstration</a:t>
-            </a:r>
-          </a:p>
-        </p:txBody>
-      </p:sp>
-      <p:sp>
-        <p:nvSpPr>
-          <p:cNvPr id="7" name="TextBox 6"/>
-          <p:cNvSpPr txBox="1"/>
-          <p:nvPr/>
-        </p:nvSpPr>
-        <p:spPr>
-          <a:xfrm>
-            <a:off x="640080" y="1325880"/>
-            <a:ext cx="10911535" cy="843280"/>
-          </a:xfrm>
-          <a:prstGeom prst="rect">
-            <a:avLst/>
-          </a:prstGeom>
-          <a:noFill/>
-        </p:spPr>
-        <p:txBody>
-          <a:bodyPr wrap="square" lIns="45720" rIns="45720">
-            <a:spAutoFit/>
-          </a:bodyPr>
-          <a:lstStyle/>
-          <a:p>
-            <a:pPr>
-              <a:spcAft>
-                <a:spcPts val="300"/>
-              </a:spcAft>
-            </a:pPr>
-            <a:r>
-              <a:rPr sz="2000" b="1">
-                <a:solidFill>
-                  <a:srgbClr val="006D77"/>
-                </a:solidFill>
-              </a:rPr>
-              <a:t>• </a:t>
-            </a:r>
-            <a:r>
-              <a:rPr sz="2000" b="0">
-                <a:solidFill>
-                  <a:srgbClr val="1F2D3A"/>
-                </a:solidFill>
-              </a:rPr>
-              <a:t>Show a control </a:t>
-            </a:r>
-            <a:r>
-              <a:rPr sz="2000" b="1">
-                <a:solidFill>
-                  <a:srgbClr val="1F2D3A"/>
-                </a:solidFill>
-              </a:rPr>
-              <a:t>working live</a:t>
-            </a:r>
-            <a:r>
-              <a:rPr sz="2000" b="0">
-                <a:solidFill>
-                  <a:srgbClr val="1F2D3A"/>
-                </a:solidFill>
-              </a:rPr>
-              <a:t>.</a:t>
-            </a:r>
-          </a:p>
-          <a:p>
-            <a:pPr>
-              <a:spcAft>
-                <a:spcPts val="300"/>
-              </a:spcAft>
-            </a:pPr>
-            <a:r>
-              <a:rPr sz="2000" b="1">
-                <a:solidFill>
-                  <a:srgbClr val="006D77"/>
-                </a:solidFill>
-              </a:rPr>
-              <a:t>• </a:t>
-            </a:r>
-            <a:r>
-              <a:rPr sz="2000" b="0">
-                <a:solidFill>
-                  <a:srgbClr val="1F2D3A"/>
-                </a:solidFill>
-              </a:rPr>
-              <a:t>E.g., encrypted data, a verified signature.</a:t>
-            </a:r>
-          </a:p>
-        </p:txBody>
-      </p:sp>
-    </p:spTree>
-  </p:cSld>
-  <p:clrMapOvr>
-    <a:masterClrMapping/>
-  </p:clrMapOvr>
-</p:sld>
-</file>
-
-<file path=ppt/slides/slide26.xml><?xml version="1.0" encoding="utf-8"?>
-<p:sld xmlns:a="http://schemas.openxmlformats.org/drawingml/2006/main" xmlns:p="http://schemas.openxmlformats.org/presentationml/2006/main" xmlns:r="http://schemas.openxmlformats.org/officeDocument/2006/relationships">
-  <p:cSld>
-    <p:spTree>
-      <p:nvGrpSpPr>
-        <p:cNvPr id="1" name=""/>
-        <p:cNvGrpSpPr/>
-        <p:nvPr/>
-      </p:nvGrpSpPr>
-      <p:grpSpPr/>
-      <p:pic>
-        <p:nvPicPr>
-          <p:cNvPr id="2" name="Picture 1" descr="rteu_logo_kucuk.jpg"/>
-          <p:cNvPicPr>
-            <a:picLocks noChangeAspect="1"/>
-          </p:cNvPicPr>
-          <p:nvPr/>
-        </p:nvPicPr>
-        <p:blipFill>
-          <a:blip r:embed="rId2"/>
-          <a:stretch>
-            <a:fillRect/>
-          </a:stretch>
-        </p:blipFill>
-        <p:spPr>
-          <a:xfrm>
-            <a:off x="640080" y="164592"/>
-            <a:ext cx="242773" cy="329184"/>
-          </a:xfrm>
-          <a:prstGeom prst="rect">
-            <a:avLst/>
-          </a:prstGeom>
-        </p:spPr>
-      </p:pic>
-      <p:sp>
-        <p:nvSpPr>
-          <p:cNvPr id="3" name="TextBox 2"/>
-          <p:cNvSpPr txBox="1"/>
-          <p:nvPr/>
-        </p:nvSpPr>
-        <p:spPr>
-          <a:xfrm>
-            <a:off x="1051560" y="182880"/>
-            <a:ext cx="7315200" cy="320040"/>
-          </a:xfrm>
-          <a:prstGeom prst="rect">
-            <a:avLst/>
-          </a:prstGeom>
-          <a:noFill/>
-        </p:spPr>
-        <p:txBody>
-          <a:bodyPr wrap="square" lIns="45720" rIns="45720">
-            <a:spAutoFit/>
-          </a:bodyPr>
-          <a:lstStyle/>
-          <a:p>
-            <a:r>
-              <a:rPr sz="1100" b="0">
-                <a:solidFill>
-                  <a:srgbClr val="5B6770"/>
-                </a:solidFill>
-              </a:rPr>
-              <a:t>CEN429 Secure Programming · Week 7</a:t>
-            </a:r>
-          </a:p>
-        </p:txBody>
-      </p:sp>
-      <p:sp>
-        <p:nvSpPr>
-          <p:cNvPr id="4" name="TextBox 3"/>
-          <p:cNvSpPr txBox="1"/>
-          <p:nvPr/>
-        </p:nvSpPr>
-        <p:spPr>
-          <a:xfrm>
-            <a:off x="640080" y="6446520"/>
-            <a:ext cx="7315200" cy="274320"/>
-          </a:xfrm>
-          <a:prstGeom prst="rect">
-            <a:avLst/>
-          </a:prstGeom>
-          <a:noFill/>
-        </p:spPr>
-        <p:txBody>
-          <a:bodyPr wrap="square" lIns="45720" rIns="45720">
-            <a:spAutoFit/>
-          </a:bodyPr>
-          <a:lstStyle/>
-          <a:p>
-            <a:r>
-              <a:rPr sz="1000" b="0">
-                <a:solidFill>
-                  <a:srgbClr val="5B6770"/>
-                </a:solidFill>
-              </a:rPr>
-              <a:t>RTEU Computer Engineering · 2026-2027 Fall</a:t>
-            </a:r>
-          </a:p>
-        </p:txBody>
-      </p:sp>
-      <p:sp>
-        <p:nvSpPr>
-          <p:cNvPr id="5" name="TextBox 4"/>
-          <p:cNvSpPr txBox="1"/>
-          <p:nvPr/>
-        </p:nvSpPr>
-        <p:spPr>
-          <a:xfrm>
-            <a:off x="10637215" y="6446520"/>
-            <a:ext cx="914400" cy="274320"/>
-          </a:xfrm>
-          <a:prstGeom prst="rect">
-            <a:avLst/>
-          </a:prstGeom>
-          <a:noFill/>
-        </p:spPr>
-        <p:txBody>
-          <a:bodyPr wrap="square" lIns="45720" rIns="45720">
-            <a:spAutoFit/>
-          </a:bodyPr>
-          <a:lstStyle/>
-          <a:p>
-            <a:pPr algn="r"/>
-            <a:r>
-              <a:rPr sz="1000" b="0">
-                <a:solidFill>
-                  <a:srgbClr val="5B6770"/>
-                </a:solidFill>
-              </a:rPr>
-              <a:t>26</a:t>
-            </a:r>
-          </a:p>
-        </p:txBody>
-      </p:sp>
-      <p:sp>
-        <p:nvSpPr>
-          <p:cNvPr id="6" name="TextBox 5"/>
-          <p:cNvSpPr txBox="1"/>
-          <p:nvPr/>
-        </p:nvSpPr>
-        <p:spPr>
-          <a:xfrm>
-            <a:off x="640080" y="548640"/>
-            <a:ext cx="10911535" cy="731520"/>
-          </a:xfrm>
-          <a:prstGeom prst="rect">
-            <a:avLst/>
-          </a:prstGeom>
-          <a:noFill/>
-        </p:spPr>
-        <p:txBody>
-          <a:bodyPr wrap="square" lIns="45720" rIns="45720" anchor="ctr">
-            <a:spAutoFit/>
-          </a:bodyPr>
-          <a:lstStyle/>
-          <a:p>
-            <a:r>
-              <a:rPr sz="3000" b="1">
-                <a:solidFill>
-                  <a:srgbClr val="006D77"/>
-                </a:solidFill>
-              </a:rPr>
-              <a:t>Flow · 4. Evidence</a:t>
-            </a:r>
-          </a:p>
-        </p:txBody>
-      </p:sp>
-      <p:sp>
-        <p:nvSpPr>
-          <p:cNvPr id="7" name="TextBox 6"/>
-          <p:cNvSpPr txBox="1"/>
-          <p:nvPr/>
-        </p:nvSpPr>
-        <p:spPr>
-          <a:xfrm>
-            <a:off x="640080" y="1325880"/>
-            <a:ext cx="10911535" cy="843280"/>
-          </a:xfrm>
-          <a:prstGeom prst="rect">
-            <a:avLst/>
-          </a:prstGeom>
-          <a:noFill/>
-        </p:spPr>
-        <p:txBody>
-          <a:bodyPr wrap="square" lIns="45720" rIns="45720">
-            <a:spAutoFit/>
-          </a:bodyPr>
-          <a:lstStyle/>
-          <a:p>
-            <a:pPr>
-              <a:spcAft>
-                <a:spcPts val="300"/>
-              </a:spcAft>
-            </a:pPr>
-            <a:r>
-              <a:rPr sz="2000" b="1">
-                <a:solidFill>
-                  <a:srgbClr val="006D77"/>
-                </a:solidFill>
-              </a:rPr>
-              <a:t>• </a:t>
-            </a:r>
-            <a:r>
-              <a:rPr sz="2000" b="0">
-                <a:solidFill>
-                  <a:srgbClr val="1F2D3A"/>
-                </a:solidFill>
-              </a:rPr>
-              <a:t>Tests, protection table.</a:t>
-            </a:r>
-          </a:p>
-          <a:p>
-            <a:pPr>
-              <a:spcAft>
-                <a:spcPts val="300"/>
-              </a:spcAft>
-            </a:pPr>
-            <a:r>
-              <a:rPr sz="2000" b="1">
-                <a:solidFill>
-                  <a:srgbClr val="006D77"/>
-                </a:solidFill>
-              </a:rPr>
-              <a:t>• </a:t>
-            </a:r>
-            <a:r>
-              <a:rPr sz="2000" b="0">
-                <a:solidFill>
-                  <a:srgbClr val="1F2D3A"/>
-                </a:solidFill>
-              </a:rPr>
-              <a:t>"This command, this output."</a:t>
-            </a:r>
-          </a:p>
-        </p:txBody>
-      </p:sp>
-    </p:spTree>
-  </p:cSld>
-  <p:clrMapOvr>
-    <a:masterClrMapping/>
-  </p:clrMapOvr>
-</p:sld>
-</file>
-
-<file path=ppt/slides/slide27.xml><?xml version="1.0" encoding="utf-8"?>
-<p:sld xmlns:a="http://schemas.openxmlformats.org/drawingml/2006/main" xmlns:p="http://schemas.openxmlformats.org/presentationml/2006/main" xmlns:r="http://schemas.openxmlformats.org/officeDocument/2006/relationships">
-  <p:cSld>
-    <p:spTree>
-      <p:nvGrpSpPr>
-        <p:cNvPr id="1" name=""/>
-        <p:cNvGrpSpPr/>
-        <p:nvPr/>
-      </p:nvGrpSpPr>
-      <p:grpSpPr/>
-      <p:pic>
-        <p:nvPicPr>
-          <p:cNvPr id="2" name="Picture 1" descr="rteu_logo_kucuk.jpg"/>
-          <p:cNvPicPr>
-            <a:picLocks noChangeAspect="1"/>
-          </p:cNvPicPr>
-          <p:nvPr/>
-        </p:nvPicPr>
-        <p:blipFill>
-          <a:blip r:embed="rId2"/>
-          <a:stretch>
-            <a:fillRect/>
-          </a:stretch>
-        </p:blipFill>
-        <p:spPr>
-          <a:xfrm>
-            <a:off x="640080" y="164592"/>
-            <a:ext cx="242773" cy="329184"/>
-          </a:xfrm>
-          <a:prstGeom prst="rect">
-            <a:avLst/>
-          </a:prstGeom>
-        </p:spPr>
-      </p:pic>
-      <p:sp>
-        <p:nvSpPr>
-          <p:cNvPr id="3" name="TextBox 2"/>
-          <p:cNvSpPr txBox="1"/>
-          <p:nvPr/>
-        </p:nvSpPr>
-        <p:spPr>
-          <a:xfrm>
-            <a:off x="1051560" y="182880"/>
-            <a:ext cx="7315200" cy="320040"/>
-          </a:xfrm>
-          <a:prstGeom prst="rect">
-            <a:avLst/>
-          </a:prstGeom>
-          <a:noFill/>
-        </p:spPr>
-        <p:txBody>
-          <a:bodyPr wrap="square" lIns="45720" rIns="45720">
-            <a:spAutoFit/>
-          </a:bodyPr>
-          <a:lstStyle/>
-          <a:p>
-            <a:r>
-              <a:rPr sz="1100" b="0">
-                <a:solidFill>
-                  <a:srgbClr val="5B6770"/>
-                </a:solidFill>
-              </a:rPr>
-              <a:t>CEN429 Secure Programming · Week 7</a:t>
-            </a:r>
-          </a:p>
-        </p:txBody>
-      </p:sp>
-      <p:sp>
-        <p:nvSpPr>
-          <p:cNvPr id="4" name="TextBox 3"/>
-          <p:cNvSpPr txBox="1"/>
-          <p:nvPr/>
-        </p:nvSpPr>
-        <p:spPr>
-          <a:xfrm>
-            <a:off x="640080" y="6446520"/>
-            <a:ext cx="7315200" cy="274320"/>
-          </a:xfrm>
-          <a:prstGeom prst="rect">
-            <a:avLst/>
-          </a:prstGeom>
-          <a:noFill/>
-        </p:spPr>
-        <p:txBody>
-          <a:bodyPr wrap="square" lIns="45720" rIns="45720">
-            <a:spAutoFit/>
-          </a:bodyPr>
-          <a:lstStyle/>
-          <a:p>
-            <a:r>
-              <a:rPr sz="1000" b="0">
-                <a:solidFill>
-                  <a:srgbClr val="5B6770"/>
-                </a:solidFill>
-              </a:rPr>
-              <a:t>RTEU Computer Engineering · 2026-2027 Fall</a:t>
-            </a:r>
-          </a:p>
-        </p:txBody>
-      </p:sp>
-      <p:sp>
-        <p:nvSpPr>
-          <p:cNvPr id="5" name="TextBox 4"/>
-          <p:cNvSpPr txBox="1"/>
-          <p:nvPr/>
-        </p:nvSpPr>
-        <p:spPr>
-          <a:xfrm>
-            <a:off x="10637215" y="6446520"/>
-            <a:ext cx="914400" cy="274320"/>
-          </a:xfrm>
-          <a:prstGeom prst="rect">
-            <a:avLst/>
-          </a:prstGeom>
-          <a:noFill/>
-        </p:spPr>
-        <p:txBody>
-          <a:bodyPr wrap="square" lIns="45720" rIns="45720">
-            <a:spAutoFit/>
-          </a:bodyPr>
-          <a:lstStyle/>
-          <a:p>
-            <a:pPr algn="r"/>
-            <a:r>
-              <a:rPr sz="1000" b="0">
-                <a:solidFill>
-                  <a:srgbClr val="5B6770"/>
-                </a:solidFill>
-              </a:rPr>
-              <a:t>27</a:t>
-            </a:r>
-          </a:p>
-        </p:txBody>
-      </p:sp>
-      <p:sp>
-        <p:nvSpPr>
-          <p:cNvPr id="6" name="TextBox 5"/>
-          <p:cNvSpPr txBox="1"/>
-          <p:nvPr/>
-        </p:nvSpPr>
-        <p:spPr>
-          <a:xfrm>
-            <a:off x="640080" y="548640"/>
-            <a:ext cx="10911535" cy="731520"/>
-          </a:xfrm>
-          <a:prstGeom prst="rect">
-            <a:avLst/>
-          </a:prstGeom>
-          <a:noFill/>
-        </p:spPr>
-        <p:txBody>
-          <a:bodyPr wrap="square" lIns="45720" rIns="45720" anchor="ctr">
-            <a:spAutoFit/>
-          </a:bodyPr>
-          <a:lstStyle/>
-          <a:p>
-            <a:r>
-              <a:rPr sz="3000" b="1">
-                <a:solidFill>
-                  <a:srgbClr val="006D77"/>
-                </a:solidFill>
-              </a:rPr>
-              <a:t>Flow · 5. Remaining Risk</a:t>
-            </a:r>
-          </a:p>
-        </p:txBody>
-      </p:sp>
-      <p:sp>
-        <p:nvSpPr>
-          <p:cNvPr id="7" name="TextBox 6"/>
-          <p:cNvSpPr txBox="1"/>
-          <p:nvPr/>
-        </p:nvSpPr>
-        <p:spPr>
-          <a:xfrm>
-            <a:off x="640080" y="1325880"/>
-            <a:ext cx="10911535" cy="843280"/>
-          </a:xfrm>
-          <a:prstGeom prst="rect">
-            <a:avLst/>
-          </a:prstGeom>
-          <a:noFill/>
-        </p:spPr>
-        <p:txBody>
-          <a:bodyPr wrap="square" lIns="45720" rIns="45720">
-            <a:spAutoFit/>
-          </a:bodyPr>
-          <a:lstStyle/>
-          <a:p>
-            <a:pPr>
-              <a:spcAft>
-                <a:spcPts val="300"/>
-              </a:spcAft>
-            </a:pPr>
-            <a:r>
-              <a:rPr sz="2000" b="1">
-                <a:solidFill>
-                  <a:srgbClr val="006D77"/>
-                </a:solidFill>
-              </a:rPr>
-              <a:t>• </a:t>
-            </a:r>
-            <a:r>
-              <a:rPr sz="2000" b="0">
-                <a:solidFill>
-                  <a:srgbClr val="1F2D3A"/>
-                </a:solidFill>
-              </a:rPr>
-              <a:t>What did you deliberately scope out?</a:t>
-            </a:r>
-          </a:p>
-          <a:p>
-            <a:pPr>
-              <a:spcAft>
-                <a:spcPts val="300"/>
-              </a:spcAft>
-            </a:pPr>
-            <a:r>
-              <a:rPr sz="2000" b="1">
-                <a:solidFill>
-                  <a:srgbClr val="006D77"/>
-                </a:solidFill>
-              </a:rPr>
-              <a:t>• </a:t>
-            </a:r>
-            <a:r>
-              <a:rPr sz="2000" b="0">
-                <a:solidFill>
-                  <a:srgbClr val="1F2D3A"/>
-                </a:solidFill>
-              </a:rPr>
-              <a:t>Honest analysis earns points.</a:t>
-            </a:r>
-          </a:p>
-        </p:txBody>
-      </p:sp>
-    </p:spTree>
-  </p:cSld>
-  <p:clrMapOvr>
-    <a:masterClrMapping/>
-  </p:clrMapOvr>
-</p:sld>
-</file>
-
-<file path=ppt/slides/slide28.xml><?xml version="1.0" encoding="utf-8"?>
-<p:sld xmlns:a="http://schemas.openxmlformats.org/drawingml/2006/main" xmlns:p="http://schemas.openxmlformats.org/presentationml/2006/main" xmlns:r="http://schemas.openxmlformats.org/officeDocument/2006/relationships">
-  <p:cSld>
-    <p:bg>
-      <p:bgPr>
-        <a:solidFill>
-          <a:srgbClr val="006D77"/>
-        </a:solidFill>
-        <a:effectLst/>
-      </p:bgPr>
-    </p:bg>
-    <p:spTree>
-      <p:nvGrpSpPr>
-        <p:cNvPr id="1" name=""/>
-        <p:cNvGrpSpPr/>
-        <p:nvPr/>
-      </p:nvGrpSpPr>
-      <p:grpSpPr/>
-      <p:sp>
-        <p:nvSpPr>
-          <p:cNvPr id="2" name="TextBox 1"/>
-          <p:cNvSpPr txBox="1"/>
-          <p:nvPr/>
-        </p:nvSpPr>
-        <p:spPr>
-          <a:xfrm>
-            <a:off x="1051560" y="182880"/>
-            <a:ext cx="7315200" cy="320040"/>
-          </a:xfrm>
-          <a:prstGeom prst="rect">
-            <a:avLst/>
-          </a:prstGeom>
-          <a:noFill/>
-        </p:spPr>
-        <p:txBody>
-          <a:bodyPr wrap="square" lIns="45720" rIns="45720">
-            <a:spAutoFit/>
-          </a:bodyPr>
-          <a:lstStyle/>
-          <a:p>
-            <a:r>
-              <a:rPr sz="1100" b="0">
-                <a:solidFill>
-                  <a:srgbClr val="D8F0F2"/>
-                </a:solidFill>
-              </a:rPr>
-              <a:t>CEN429 Secure Programming · Week 7</a:t>
-            </a:r>
-          </a:p>
-        </p:txBody>
-      </p:sp>
-      <p:sp>
-        <p:nvSpPr>
-          <p:cNvPr id="3" name="TextBox 2"/>
-          <p:cNvSpPr txBox="1"/>
-          <p:nvPr/>
-        </p:nvSpPr>
-        <p:spPr>
-          <a:xfrm>
-            <a:off x="640080" y="6446520"/>
-            <a:ext cx="7315200" cy="274320"/>
-          </a:xfrm>
-          <a:prstGeom prst="rect">
-            <a:avLst/>
-          </a:prstGeom>
-          <a:noFill/>
-        </p:spPr>
-        <p:txBody>
-          <a:bodyPr wrap="square" lIns="45720" rIns="45720">
-            <a:spAutoFit/>
-          </a:bodyPr>
-          <a:lstStyle/>
-          <a:p>
-            <a:r>
-              <a:rPr sz="1000" b="0">
-                <a:solidFill>
-                  <a:srgbClr val="D8F0F2"/>
-                </a:solidFill>
-              </a:rPr>
-              <a:t>RTEU Computer Engineering · 2026-2027 Fall</a:t>
-            </a:r>
-          </a:p>
-        </p:txBody>
-      </p:sp>
-      <p:sp>
-        <p:nvSpPr>
-          <p:cNvPr id="4" name="TextBox 3"/>
-          <p:cNvSpPr txBox="1"/>
-          <p:nvPr/>
-        </p:nvSpPr>
-        <p:spPr>
-          <a:xfrm>
-            <a:off x="10637215" y="6446520"/>
-            <a:ext cx="914400" cy="274320"/>
-          </a:xfrm>
-          <a:prstGeom prst="rect">
-            <a:avLst/>
-          </a:prstGeom>
-          <a:noFill/>
-        </p:spPr>
-        <p:txBody>
-          <a:bodyPr wrap="square" lIns="45720" rIns="45720">
-            <a:spAutoFit/>
-          </a:bodyPr>
-          <a:lstStyle/>
-          <a:p>
-            <a:pPr algn="r"/>
-            <a:r>
-              <a:rPr sz="1000" b="0">
-                <a:solidFill>
-                  <a:srgbClr val="D8F0F2"/>
-                </a:solidFill>
-              </a:rPr>
-              <a:t>28</a:t>
-            </a:r>
-          </a:p>
-        </p:txBody>
-      </p:sp>
-      <p:sp>
-        <p:nvSpPr>
-          <p:cNvPr id="5" name="TextBox 4"/>
-          <p:cNvSpPr txBox="1"/>
-          <p:nvPr/>
-        </p:nvSpPr>
-        <p:spPr>
-          <a:xfrm>
-            <a:off x="640080" y="2743200"/>
-            <a:ext cx="10911535" cy="1280160"/>
-          </a:xfrm>
-          <a:prstGeom prst="rect">
-            <a:avLst/>
-          </a:prstGeom>
-          <a:noFill/>
-        </p:spPr>
-        <p:txBody>
-          <a:bodyPr wrap="square" lIns="45720" rIns="45720">
-            <a:spAutoFit/>
-          </a:bodyPr>
-          <a:lstStyle/>
-          <a:p>
-            <a:pPr algn="l"/>
-            <a:r>
-              <a:rPr sz="4000" b="1">
-                <a:solidFill>
-                  <a:srgbClr val="FFFFFF"/>
-                </a:solidFill>
-              </a:rPr>
-              <a:t>Appendix · Preparation Checklist</a:t>
-            </a:r>
-          </a:p>
-        </p:txBody>
-      </p:sp>
-    </p:spTree>
-  </p:cSld>
-  <p:clrMapOvr>
-    <a:masterClrMapping/>
-  </p:clrMapOvr>
-</p:sld>
-</file>
-
-<file path=ppt/slides/slide29.xml><?xml version="1.0" encoding="utf-8"?>
-<p:sld xmlns:a="http://schemas.openxmlformats.org/drawingml/2006/main" xmlns:p="http://schemas.openxmlformats.org/presentationml/2006/main" xmlns:r="http://schemas.openxmlformats.org/officeDocument/2006/relationships">
-  <p:cSld>
-    <p:spTree>
-      <p:nvGrpSpPr>
-        <p:cNvPr id="1" name=""/>
-        <p:cNvGrpSpPr/>
-        <p:nvPr/>
-      </p:nvGrpSpPr>
-      <p:grpSpPr/>
-      <p:pic>
-        <p:nvPicPr>
-          <p:cNvPr id="2" name="Picture 1" descr="rteu_logo_kucuk.jpg"/>
-          <p:cNvPicPr>
-            <a:picLocks noChangeAspect="1"/>
-          </p:cNvPicPr>
-          <p:nvPr/>
-        </p:nvPicPr>
-        <p:blipFill>
-          <a:blip r:embed="rId2"/>
-          <a:stretch>
-            <a:fillRect/>
-          </a:stretch>
-        </p:blipFill>
-        <p:spPr>
-          <a:xfrm>
-            <a:off x="640080" y="164592"/>
-            <a:ext cx="242773" cy="329184"/>
-          </a:xfrm>
-          <a:prstGeom prst="rect">
-            <a:avLst/>
-          </a:prstGeom>
-        </p:spPr>
-      </p:pic>
-      <p:sp>
-        <p:nvSpPr>
-          <p:cNvPr id="3" name="TextBox 2"/>
-          <p:cNvSpPr txBox="1"/>
-          <p:nvPr/>
-        </p:nvSpPr>
-        <p:spPr>
-          <a:xfrm>
-            <a:off x="1051560" y="182880"/>
-            <a:ext cx="7315200" cy="320040"/>
-          </a:xfrm>
-          <a:prstGeom prst="rect">
-            <a:avLst/>
-          </a:prstGeom>
-          <a:noFill/>
-        </p:spPr>
-        <p:txBody>
-          <a:bodyPr wrap="square" lIns="45720" rIns="45720">
-            <a:spAutoFit/>
-          </a:bodyPr>
-          <a:lstStyle/>
-          <a:p>
-            <a:r>
-              <a:rPr sz="1100" b="0">
-                <a:solidFill>
-                  <a:srgbClr val="5B6770"/>
-                </a:solidFill>
-              </a:rPr>
-              <a:t>CEN429 Secure Programming · Week 7</a:t>
-            </a:r>
-          </a:p>
-        </p:txBody>
-      </p:sp>
-      <p:sp>
-        <p:nvSpPr>
-          <p:cNvPr id="4" name="TextBox 3"/>
-          <p:cNvSpPr txBox="1"/>
-          <p:nvPr/>
-        </p:nvSpPr>
-        <p:spPr>
-          <a:xfrm>
-            <a:off x="640080" y="6446520"/>
-            <a:ext cx="7315200" cy="274320"/>
-          </a:xfrm>
-          <a:prstGeom prst="rect">
-            <a:avLst/>
-          </a:prstGeom>
-          <a:noFill/>
-        </p:spPr>
-        <p:txBody>
-          <a:bodyPr wrap="square" lIns="45720" rIns="45720">
-            <a:spAutoFit/>
-          </a:bodyPr>
-          <a:lstStyle/>
-          <a:p>
-            <a:r>
-              <a:rPr sz="1000" b="0">
-                <a:solidFill>
-                  <a:srgbClr val="5B6770"/>
-                </a:solidFill>
-              </a:rPr>
-              <a:t>RTEU Computer Engineering · 2026-2027 Fall</a:t>
-            </a:r>
-          </a:p>
-        </p:txBody>
-      </p:sp>
-      <p:sp>
-        <p:nvSpPr>
-          <p:cNvPr id="5" name="TextBox 4"/>
-          <p:cNvSpPr txBox="1"/>
-          <p:nvPr/>
-        </p:nvSpPr>
-        <p:spPr>
-          <a:xfrm>
-            <a:off x="10637215" y="6446520"/>
-            <a:ext cx="914400" cy="274320"/>
-          </a:xfrm>
-          <a:prstGeom prst="rect">
-            <a:avLst/>
-          </a:prstGeom>
-          <a:noFill/>
-        </p:spPr>
-        <p:txBody>
-          <a:bodyPr wrap="square" lIns="45720" rIns="45720">
-            <a:spAutoFit/>
-          </a:bodyPr>
-          <a:lstStyle/>
-          <a:p>
-            <a:pPr algn="r"/>
-            <a:r>
-              <a:rPr sz="1000" b="0">
-                <a:solidFill>
-                  <a:srgbClr val="5B6770"/>
-                </a:solidFill>
-              </a:rPr>
-              <a:t>29</a:t>
-            </a:r>
-          </a:p>
-        </p:txBody>
-      </p:sp>
-      <p:sp>
-        <p:nvSpPr>
-          <p:cNvPr id="6" name="TextBox 5"/>
-          <p:cNvSpPr txBox="1"/>
-          <p:nvPr/>
-        </p:nvSpPr>
-        <p:spPr>
-          <a:xfrm>
-            <a:off x="640080" y="548640"/>
-            <a:ext cx="10911535" cy="731520"/>
-          </a:xfrm>
-          <a:prstGeom prst="rect">
-            <a:avLst/>
-          </a:prstGeom>
-          <a:noFill/>
-        </p:spPr>
-        <p:txBody>
-          <a:bodyPr wrap="square" lIns="45720" rIns="45720" anchor="ctr">
-            <a:spAutoFit/>
-          </a:bodyPr>
-          <a:lstStyle/>
-          <a:p>
-            <a:r>
-              <a:rPr sz="3000" b="1">
-                <a:solidFill>
-                  <a:srgbClr val="006D77"/>
-                </a:solidFill>
-              </a:rPr>
-              <a:t>Checklist · Documentation</a:t>
-            </a:r>
-          </a:p>
-        </p:txBody>
-      </p:sp>
-      <p:sp>
-        <p:nvSpPr>
-          <p:cNvPr id="7" name="TextBox 6"/>
-          <p:cNvSpPr txBox="1"/>
-          <p:nvPr/>
-        </p:nvSpPr>
-        <p:spPr>
-          <a:xfrm>
-            <a:off x="640080" y="1325880"/>
-            <a:ext cx="10911535" cy="1219200"/>
-          </a:xfrm>
-          <a:prstGeom prst="rect">
-            <a:avLst/>
-          </a:prstGeom>
-          <a:noFill/>
-        </p:spPr>
-        <p:txBody>
-          <a:bodyPr wrap="square" lIns="45720" rIns="45720">
-            <a:spAutoFit/>
-          </a:bodyPr>
-          <a:lstStyle/>
-          <a:p>
-            <a:pPr>
-              <a:spcAft>
-                <a:spcPts val="300"/>
-              </a:spcAft>
-            </a:pPr>
-            <a:r>
-              <a:rPr sz="2000" b="1">
-                <a:solidFill>
-                  <a:srgbClr val="006D77"/>
-                </a:solidFill>
-              </a:rPr>
-              <a:t>• </a:t>
-            </a:r>
-            <a:r>
-              <a:rPr sz="2000" b="0">
-                <a:solidFill>
-                  <a:srgbClr val="1F2D3A"/>
-                </a:solidFill>
-              </a:rPr>
-              <a:t> </a:t>
-            </a:r>
-          </a:p>
-          <a:p>
-            <a:pPr>
-              <a:spcAft>
-                <a:spcPts val="300"/>
-              </a:spcAft>
-            </a:pPr>
-            <a:r>
-              <a:rPr sz="2000" b="1">
-                <a:solidFill>
-                  <a:srgbClr val="006D77"/>
-                </a:solidFill>
-              </a:rPr>
-              <a:t>• </a:t>
-            </a:r>
-            <a:r>
-              <a:rPr sz="2000" b="0">
-                <a:solidFill>
-                  <a:srgbClr val="1F2D3A"/>
-                </a:solidFill>
-              </a:rPr>
-              <a:t> </a:t>
-            </a:r>
-          </a:p>
-          <a:p>
-            <a:pPr>
-              <a:spcAft>
-                <a:spcPts val="300"/>
-              </a:spcAft>
-            </a:pPr>
-            <a:r>
-              <a:rPr sz="2000" b="1">
-                <a:solidFill>
-                  <a:srgbClr val="006D77"/>
-                </a:solidFill>
-              </a:rPr>
-              <a:t>• </a:t>
-            </a:r>
-            <a:r>
-              <a:rPr sz="2000" b="0">
-                <a:solidFill>
-                  <a:srgbClr val="1F2D3A"/>
-                </a:solidFill>
-              </a:rPr>
-              <a:t> </a:t>
             </a:r>
           </a:p>
         </p:txBody>
@@ -10127,58 +6708,16 @@
           </a:graphicData>
         </a:graphic>
       </p:graphicFrame>
-    </p:spTree>
-  </p:cSld>
-  <p:clrMapOvr>
-    <a:masterClrMapping/>
-  </p:clrMapOvr>
-</p:sld>
-</file>
-
-<file path=ppt/slides/slide30.xml><?xml version="1.0" encoding="utf-8"?>
-<p:sld xmlns:a="http://schemas.openxmlformats.org/drawingml/2006/main" xmlns:p="http://schemas.openxmlformats.org/presentationml/2006/main" xmlns:r="http://schemas.openxmlformats.org/officeDocument/2006/relationships">
-  <p:cSld>
-    <p:spTree>
-      <p:nvGrpSpPr>
-        <p:cNvPr id="1" name=""/>
-        <p:cNvGrpSpPr/>
-        <p:nvPr/>
-      </p:nvGrpSpPr>
-      <p:grpSpPr/>
-      <p:pic>
-        <p:nvPicPr>
-          <p:cNvPr id="2" name="Picture 1" descr="rteu_logo_kucuk.jpg"/>
-          <p:cNvPicPr>
-            <a:picLocks noChangeAspect="1"/>
-          </p:cNvPicPr>
-          <p:nvPr/>
-        </p:nvPicPr>
-        <p:blipFill>
-          <a:blip r:embed="rId2"/>
-          <a:stretch>
-            <a:fillRect/>
-          </a:stretch>
-        </p:blipFill>
-        <p:spPr>
-          <a:xfrm>
-            <a:off x="640080" y="164592"/>
-            <a:ext cx="242773" cy="329184"/>
-          </a:xfrm>
-          <a:prstGeom prst="rect">
-            <a:avLst/>
-          </a:prstGeom>
-        </p:spPr>
-      </p:pic>
-      <p:sp>
-        <p:nvSpPr>
-          <p:cNvPr id="3" name="TextBox 2"/>
+      <p:sp>
+        <p:nvSpPr>
+          <p:cNvPr id="8" name="TextBox 7"/>
           <p:cNvSpPr txBox="1"/>
           <p:nvPr/>
         </p:nvSpPr>
         <p:spPr>
           <a:xfrm>
-            <a:off x="1051560" y="182880"/>
-            <a:ext cx="7315200" cy="320040"/>
+            <a:off x="640080" y="3728923"/>
+            <a:ext cx="10911535" cy="704088"/>
           </a:xfrm>
           <a:prstGeom prst="rect">
             <a:avLst/>
@@ -10191,2371 +6730,14 @@
           </a:bodyPr>
           <a:lstStyle/>
           <a:p>
-            <a:r>
-              <a:rPr sz="1100" b="0">
-                <a:solidFill>
-                  <a:srgbClr val="5B6770"/>
-                </a:solidFill>
-              </a:rPr>
-              <a:t>CEN429 Secure Programming · Week 7</a:t>
-            </a:r>
-          </a:p>
-        </p:txBody>
-      </p:sp>
-      <p:sp>
-        <p:nvSpPr>
-          <p:cNvPr id="4" name="TextBox 3"/>
-          <p:cNvSpPr txBox="1"/>
-          <p:nvPr/>
-        </p:nvSpPr>
-        <p:spPr>
-          <a:xfrm>
-            <a:off x="640080" y="6446520"/>
-            <a:ext cx="7315200" cy="274320"/>
-          </a:xfrm>
-          <a:prstGeom prst="rect">
-            <a:avLst/>
-          </a:prstGeom>
-          <a:noFill/>
-        </p:spPr>
-        <p:txBody>
-          <a:bodyPr wrap="square" lIns="45720" rIns="45720">
-            <a:spAutoFit/>
-          </a:bodyPr>
-          <a:lstStyle/>
-          <a:p>
-            <a:r>
-              <a:rPr sz="1000" b="0">
-                <a:solidFill>
-                  <a:srgbClr val="5B6770"/>
-                </a:solidFill>
-              </a:rPr>
-              <a:t>RTEU Computer Engineering · 2026-2027 Fall</a:t>
-            </a:r>
-          </a:p>
-        </p:txBody>
-      </p:sp>
-      <p:sp>
-        <p:nvSpPr>
-          <p:cNvPr id="5" name="TextBox 4"/>
-          <p:cNvSpPr txBox="1"/>
-          <p:nvPr/>
-        </p:nvSpPr>
-        <p:spPr>
-          <a:xfrm>
-            <a:off x="10637215" y="6446520"/>
-            <a:ext cx="914400" cy="274320"/>
-          </a:xfrm>
-          <a:prstGeom prst="rect">
-            <a:avLst/>
-          </a:prstGeom>
-          <a:noFill/>
-        </p:spPr>
-        <p:txBody>
-          <a:bodyPr wrap="square" lIns="45720" rIns="45720">
-            <a:spAutoFit/>
-          </a:bodyPr>
-          <a:lstStyle/>
-          <a:p>
-            <a:pPr algn="r"/>
-            <a:r>
-              <a:rPr sz="1000" b="0">
-                <a:solidFill>
-                  <a:srgbClr val="5B6770"/>
-                </a:solidFill>
-              </a:rPr>
-              <a:t>30</a:t>
-            </a:r>
-          </a:p>
-        </p:txBody>
-      </p:sp>
-      <p:sp>
-        <p:nvSpPr>
-          <p:cNvPr id="6" name="TextBox 5"/>
-          <p:cNvSpPr txBox="1"/>
-          <p:nvPr/>
-        </p:nvSpPr>
-        <p:spPr>
-          <a:xfrm>
-            <a:off x="640080" y="548640"/>
-            <a:ext cx="10911535" cy="731520"/>
-          </a:xfrm>
-          <a:prstGeom prst="rect">
-            <a:avLst/>
-          </a:prstGeom>
-          <a:noFill/>
-        </p:spPr>
-        <p:txBody>
-          <a:bodyPr wrap="square" lIns="45720" rIns="45720" anchor="ctr">
-            <a:spAutoFit/>
-          </a:bodyPr>
-          <a:lstStyle/>
-          <a:p>
-            <a:r>
-              <a:rPr sz="3000" b="1">
-                <a:solidFill>
-                  <a:srgbClr val="006D77"/>
-                </a:solidFill>
-              </a:rPr>
-              <a:t>Checklist · Demonstration</a:t>
-            </a:r>
-          </a:p>
-        </p:txBody>
-      </p:sp>
-      <p:sp>
-        <p:nvSpPr>
-          <p:cNvPr id="7" name="TextBox 6"/>
-          <p:cNvSpPr txBox="1"/>
-          <p:nvPr/>
-        </p:nvSpPr>
-        <p:spPr>
-          <a:xfrm>
-            <a:off x="640080" y="1325880"/>
-            <a:ext cx="10911535" cy="1219200"/>
-          </a:xfrm>
-          <a:prstGeom prst="rect">
-            <a:avLst/>
-          </a:prstGeom>
-          <a:noFill/>
-        </p:spPr>
-        <p:txBody>
-          <a:bodyPr wrap="square" lIns="45720" rIns="45720">
-            <a:spAutoFit/>
-          </a:bodyPr>
-          <a:lstStyle/>
-          <a:p>
-            <a:pPr>
-              <a:spcAft>
-                <a:spcPts val="300"/>
-              </a:spcAft>
-            </a:pPr>
-            <a:r>
-              <a:rPr sz="2000" b="1">
-                <a:solidFill>
-                  <a:srgbClr val="006D77"/>
-                </a:solidFill>
-              </a:rPr>
-              <a:t>• </a:t>
-            </a:r>
-            <a:r>
-              <a:rPr sz="2000" b="0">
+            <a:pPr algn="l"/>
+            <a:r>
+              <a:rPr sz="1800" b="0">
                 <a:solidFill>
                   <a:srgbClr val="1F2D3A"/>
                 </a:solidFill>
               </a:rPr>
-              <a:t> </a:t>
-            </a:r>
-          </a:p>
-          <a:p>
-            <a:pPr>
-              <a:spcAft>
-                <a:spcPts val="300"/>
-              </a:spcAft>
-            </a:pPr>
-            <a:r>
-              <a:rPr sz="2000" b="1">
-                <a:solidFill>
-                  <a:srgbClr val="006D77"/>
-                </a:solidFill>
-              </a:rPr>
-              <a:t>• </a:t>
-            </a:r>
-            <a:r>
-              <a:rPr sz="2000" b="0">
-                <a:solidFill>
-                  <a:srgbClr val="1F2D3A"/>
-                </a:solidFill>
-              </a:rPr>
-              <a:t> </a:t>
-            </a:r>
-          </a:p>
-          <a:p>
-            <a:pPr>
-              <a:spcAft>
-                <a:spcPts val="300"/>
-              </a:spcAft>
-            </a:pPr>
-            <a:r>
-              <a:rPr sz="2000" b="1">
-                <a:solidFill>
-                  <a:srgbClr val="006D77"/>
-                </a:solidFill>
-              </a:rPr>
-              <a:t>• </a:t>
-            </a:r>
-            <a:r>
-              <a:rPr sz="2000" b="0">
-                <a:solidFill>
-                  <a:srgbClr val="1F2D3A"/>
-                </a:solidFill>
-              </a:rPr>
-              <a:t> </a:t>
-            </a:r>
-          </a:p>
-        </p:txBody>
-      </p:sp>
-    </p:spTree>
-  </p:cSld>
-  <p:clrMapOvr>
-    <a:masterClrMapping/>
-  </p:clrMapOvr>
-</p:sld>
-</file>
-
-<file path=ppt/slides/slide31.xml><?xml version="1.0" encoding="utf-8"?>
-<p:sld xmlns:a="http://schemas.openxmlformats.org/drawingml/2006/main" xmlns:p="http://schemas.openxmlformats.org/presentationml/2006/main" xmlns:r="http://schemas.openxmlformats.org/officeDocument/2006/relationships">
-  <p:cSld>
-    <p:spTree>
-      <p:nvGrpSpPr>
-        <p:cNvPr id="1" name=""/>
-        <p:cNvGrpSpPr/>
-        <p:nvPr/>
-      </p:nvGrpSpPr>
-      <p:grpSpPr/>
-      <p:pic>
-        <p:nvPicPr>
-          <p:cNvPr id="2" name="Picture 1" descr="rteu_logo_kucuk.jpg"/>
-          <p:cNvPicPr>
-            <a:picLocks noChangeAspect="1"/>
-          </p:cNvPicPr>
-          <p:nvPr/>
-        </p:nvPicPr>
-        <p:blipFill>
-          <a:blip r:embed="rId2"/>
-          <a:stretch>
-            <a:fillRect/>
-          </a:stretch>
-        </p:blipFill>
-        <p:spPr>
-          <a:xfrm>
-            <a:off x="640080" y="164592"/>
-            <a:ext cx="242773" cy="329184"/>
-          </a:xfrm>
-          <a:prstGeom prst="rect">
-            <a:avLst/>
-          </a:prstGeom>
-        </p:spPr>
-      </p:pic>
-      <p:sp>
-        <p:nvSpPr>
-          <p:cNvPr id="3" name="TextBox 2"/>
-          <p:cNvSpPr txBox="1"/>
-          <p:nvPr/>
-        </p:nvSpPr>
-        <p:spPr>
-          <a:xfrm>
-            <a:off x="1051560" y="182880"/>
-            <a:ext cx="7315200" cy="320040"/>
-          </a:xfrm>
-          <a:prstGeom prst="rect">
-            <a:avLst/>
-          </a:prstGeom>
-          <a:noFill/>
-        </p:spPr>
-        <p:txBody>
-          <a:bodyPr wrap="square" lIns="45720" rIns="45720">
-            <a:spAutoFit/>
-          </a:bodyPr>
-          <a:lstStyle/>
-          <a:p>
-            <a:r>
-              <a:rPr sz="1100" b="0">
-                <a:solidFill>
-                  <a:srgbClr val="5B6770"/>
-                </a:solidFill>
-              </a:rPr>
-              <a:t>CEN429 Secure Programming · Week 7</a:t>
-            </a:r>
-          </a:p>
-        </p:txBody>
-      </p:sp>
-      <p:sp>
-        <p:nvSpPr>
-          <p:cNvPr id="4" name="TextBox 3"/>
-          <p:cNvSpPr txBox="1"/>
-          <p:nvPr/>
-        </p:nvSpPr>
-        <p:spPr>
-          <a:xfrm>
-            <a:off x="640080" y="6446520"/>
-            <a:ext cx="7315200" cy="274320"/>
-          </a:xfrm>
-          <a:prstGeom prst="rect">
-            <a:avLst/>
-          </a:prstGeom>
-          <a:noFill/>
-        </p:spPr>
-        <p:txBody>
-          <a:bodyPr wrap="square" lIns="45720" rIns="45720">
-            <a:spAutoFit/>
-          </a:bodyPr>
-          <a:lstStyle/>
-          <a:p>
-            <a:r>
-              <a:rPr sz="1000" b="0">
-                <a:solidFill>
-                  <a:srgbClr val="5B6770"/>
-                </a:solidFill>
-              </a:rPr>
-              <a:t>RTEU Computer Engineering · 2026-2027 Fall</a:t>
-            </a:r>
-          </a:p>
-        </p:txBody>
-      </p:sp>
-      <p:sp>
-        <p:nvSpPr>
-          <p:cNvPr id="5" name="TextBox 4"/>
-          <p:cNvSpPr txBox="1"/>
-          <p:nvPr/>
-        </p:nvSpPr>
-        <p:spPr>
-          <a:xfrm>
-            <a:off x="10637215" y="6446520"/>
-            <a:ext cx="914400" cy="274320"/>
-          </a:xfrm>
-          <a:prstGeom prst="rect">
-            <a:avLst/>
-          </a:prstGeom>
-          <a:noFill/>
-        </p:spPr>
-        <p:txBody>
-          <a:bodyPr wrap="square" lIns="45720" rIns="45720">
-            <a:spAutoFit/>
-          </a:bodyPr>
-          <a:lstStyle/>
-          <a:p>
-            <a:pPr algn="r"/>
-            <a:r>
-              <a:rPr sz="1000" b="0">
-                <a:solidFill>
-                  <a:srgbClr val="5B6770"/>
-                </a:solidFill>
-              </a:rPr>
-              <a:t>31</a:t>
-            </a:r>
-          </a:p>
-        </p:txBody>
-      </p:sp>
-      <p:sp>
-        <p:nvSpPr>
-          <p:cNvPr id="6" name="TextBox 5"/>
-          <p:cNvSpPr txBox="1"/>
-          <p:nvPr/>
-        </p:nvSpPr>
-        <p:spPr>
-          <a:xfrm>
-            <a:off x="640080" y="548640"/>
-            <a:ext cx="10911535" cy="731520"/>
-          </a:xfrm>
-          <a:prstGeom prst="rect">
-            <a:avLst/>
-          </a:prstGeom>
-          <a:noFill/>
-        </p:spPr>
-        <p:txBody>
-          <a:bodyPr wrap="square" lIns="45720" rIns="45720" anchor="ctr">
-            <a:spAutoFit/>
-          </a:bodyPr>
-          <a:lstStyle/>
-          <a:p>
-            <a:r>
-              <a:rPr sz="3000" b="1">
-                <a:solidFill>
-                  <a:srgbClr val="006D77"/>
-                </a:solidFill>
-              </a:rPr>
-              <a:t>Checklist · Security</a:t>
-            </a:r>
-          </a:p>
-        </p:txBody>
-      </p:sp>
-      <p:sp>
-        <p:nvSpPr>
-          <p:cNvPr id="7" name="TextBox 6"/>
-          <p:cNvSpPr txBox="1"/>
-          <p:nvPr/>
-        </p:nvSpPr>
-        <p:spPr>
-          <a:xfrm>
-            <a:off x="640080" y="1325880"/>
-            <a:ext cx="10911535" cy="1219200"/>
-          </a:xfrm>
-          <a:prstGeom prst="rect">
-            <a:avLst/>
-          </a:prstGeom>
-          <a:noFill/>
-        </p:spPr>
-        <p:txBody>
-          <a:bodyPr wrap="square" lIns="45720" rIns="45720">
-            <a:spAutoFit/>
-          </a:bodyPr>
-          <a:lstStyle/>
-          <a:p>
-            <a:pPr>
-              <a:spcAft>
-                <a:spcPts val="300"/>
-              </a:spcAft>
-            </a:pPr>
-            <a:r>
-              <a:rPr sz="2000" b="1">
-                <a:solidFill>
-                  <a:srgbClr val="006D77"/>
-                </a:solidFill>
-              </a:rPr>
-              <a:t>• </a:t>
-            </a:r>
-            <a:r>
-              <a:rPr sz="2000" b="0">
-                <a:solidFill>
-                  <a:srgbClr val="1F2D3A"/>
-                </a:solidFill>
-              </a:rPr>
-              <a:t> </a:t>
-            </a:r>
-          </a:p>
-          <a:p>
-            <a:pPr>
-              <a:spcAft>
-                <a:spcPts val="300"/>
-              </a:spcAft>
-            </a:pPr>
-            <a:r>
-              <a:rPr sz="2000" b="1">
-                <a:solidFill>
-                  <a:srgbClr val="006D77"/>
-                </a:solidFill>
-              </a:rPr>
-              <a:t>• </a:t>
-            </a:r>
-            <a:r>
-              <a:rPr sz="2000" b="0">
-                <a:solidFill>
-                  <a:srgbClr val="1F2D3A"/>
-                </a:solidFill>
-              </a:rPr>
-              <a:t> </a:t>
-            </a:r>
-          </a:p>
-          <a:p>
-            <a:pPr>
-              <a:spcAft>
-                <a:spcPts val="300"/>
-              </a:spcAft>
-            </a:pPr>
-            <a:r>
-              <a:rPr sz="2000" b="1">
-                <a:solidFill>
-                  <a:srgbClr val="006D77"/>
-                </a:solidFill>
-              </a:rPr>
-              <a:t>• </a:t>
-            </a:r>
-            <a:r>
-              <a:rPr sz="2000" b="0">
-                <a:solidFill>
-                  <a:srgbClr val="1F2D3A"/>
-                </a:solidFill>
-              </a:rPr>
-              <a:t> </a:t>
-            </a:r>
-          </a:p>
-        </p:txBody>
-      </p:sp>
-    </p:spTree>
-  </p:cSld>
-  <p:clrMapOvr>
-    <a:masterClrMapping/>
-  </p:clrMapOvr>
-</p:sld>
-</file>
-
-<file path=ppt/slides/slide32.xml><?xml version="1.0" encoding="utf-8"?>
-<p:sld xmlns:a="http://schemas.openxmlformats.org/drawingml/2006/main" xmlns:p="http://schemas.openxmlformats.org/presentationml/2006/main" xmlns:r="http://schemas.openxmlformats.org/officeDocument/2006/relationships">
-  <p:cSld>
-    <p:bg>
-      <p:bgPr>
-        <a:solidFill>
-          <a:srgbClr val="006D77"/>
-        </a:solidFill>
-        <a:effectLst/>
-      </p:bgPr>
-    </p:bg>
-    <p:spTree>
-      <p:nvGrpSpPr>
-        <p:cNvPr id="1" name=""/>
-        <p:cNvGrpSpPr/>
-        <p:nvPr/>
-      </p:nvGrpSpPr>
-      <p:grpSpPr/>
-      <p:sp>
-        <p:nvSpPr>
-          <p:cNvPr id="2" name="TextBox 1"/>
-          <p:cNvSpPr txBox="1"/>
-          <p:nvPr/>
-        </p:nvSpPr>
-        <p:spPr>
-          <a:xfrm>
-            <a:off x="1051560" y="182880"/>
-            <a:ext cx="7315200" cy="320040"/>
-          </a:xfrm>
-          <a:prstGeom prst="rect">
-            <a:avLst/>
-          </a:prstGeom>
-          <a:noFill/>
-        </p:spPr>
-        <p:txBody>
-          <a:bodyPr wrap="square" lIns="45720" rIns="45720">
-            <a:spAutoFit/>
-          </a:bodyPr>
-          <a:lstStyle/>
-          <a:p>
-            <a:r>
-              <a:rPr sz="1100" b="0">
-                <a:solidFill>
-                  <a:srgbClr val="D8F0F2"/>
-                </a:solidFill>
-              </a:rPr>
-              <a:t>CEN429 Secure Programming · Week 7</a:t>
-            </a:r>
-          </a:p>
-        </p:txBody>
-      </p:sp>
-      <p:sp>
-        <p:nvSpPr>
-          <p:cNvPr id="3" name="TextBox 2"/>
-          <p:cNvSpPr txBox="1"/>
-          <p:nvPr/>
-        </p:nvSpPr>
-        <p:spPr>
-          <a:xfrm>
-            <a:off x="640080" y="6446520"/>
-            <a:ext cx="7315200" cy="274320"/>
-          </a:xfrm>
-          <a:prstGeom prst="rect">
-            <a:avLst/>
-          </a:prstGeom>
-          <a:noFill/>
-        </p:spPr>
-        <p:txBody>
-          <a:bodyPr wrap="square" lIns="45720" rIns="45720">
-            <a:spAutoFit/>
-          </a:bodyPr>
-          <a:lstStyle/>
-          <a:p>
-            <a:r>
-              <a:rPr sz="1000" b="0">
-                <a:solidFill>
-                  <a:srgbClr val="D8F0F2"/>
-                </a:solidFill>
-              </a:rPr>
-              <a:t>RTEU Computer Engineering · 2026-2027 Fall</a:t>
-            </a:r>
-          </a:p>
-        </p:txBody>
-      </p:sp>
-      <p:sp>
-        <p:nvSpPr>
-          <p:cNvPr id="4" name="TextBox 3"/>
-          <p:cNvSpPr txBox="1"/>
-          <p:nvPr/>
-        </p:nvSpPr>
-        <p:spPr>
-          <a:xfrm>
-            <a:off x="10637215" y="6446520"/>
-            <a:ext cx="914400" cy="274320"/>
-          </a:xfrm>
-          <a:prstGeom prst="rect">
-            <a:avLst/>
-          </a:prstGeom>
-          <a:noFill/>
-        </p:spPr>
-        <p:txBody>
-          <a:bodyPr wrap="square" lIns="45720" rIns="45720">
-            <a:spAutoFit/>
-          </a:bodyPr>
-          <a:lstStyle/>
-          <a:p>
-            <a:pPr algn="r"/>
-            <a:r>
-              <a:rPr sz="1000" b="0">
-                <a:solidFill>
-                  <a:srgbClr val="D8F0F2"/>
-                </a:solidFill>
-              </a:rPr>
-              <a:t>32</a:t>
-            </a:r>
-          </a:p>
-        </p:txBody>
-      </p:sp>
-      <p:sp>
-        <p:nvSpPr>
-          <p:cNvPr id="5" name="TextBox 4"/>
-          <p:cNvSpPr txBox="1"/>
-          <p:nvPr/>
-        </p:nvSpPr>
-        <p:spPr>
-          <a:xfrm>
-            <a:off x="640080" y="2743200"/>
-            <a:ext cx="10911535" cy="1280160"/>
-          </a:xfrm>
-          <a:prstGeom prst="rect">
-            <a:avLst/>
-          </a:prstGeom>
-          <a:noFill/>
-        </p:spPr>
-        <p:txBody>
-          <a:bodyPr wrap="square" lIns="45720" rIns="45720">
-            <a:spAutoFit/>
-          </a:bodyPr>
-          <a:lstStyle/>
-          <a:p>
-            <a:pPr algn="l"/>
-            <a:r>
-              <a:rPr sz="4000" b="1">
-                <a:solidFill>
-                  <a:srgbClr val="FFFFFF"/>
-                </a:solidFill>
-              </a:rPr>
-              <a:t>Appendix · Sample Questions</a:t>
-            </a:r>
-          </a:p>
-        </p:txBody>
-      </p:sp>
-    </p:spTree>
-  </p:cSld>
-  <p:clrMapOvr>
-    <a:masterClrMapping/>
-  </p:clrMapOvr>
-</p:sld>
-</file>
-
-<file path=ppt/slides/slide33.xml><?xml version="1.0" encoding="utf-8"?>
-<p:sld xmlns:a="http://schemas.openxmlformats.org/drawingml/2006/main" xmlns:p="http://schemas.openxmlformats.org/presentationml/2006/main" xmlns:r="http://schemas.openxmlformats.org/officeDocument/2006/relationships">
-  <p:cSld>
-    <p:spTree>
-      <p:nvGrpSpPr>
-        <p:cNvPr id="1" name=""/>
-        <p:cNvGrpSpPr/>
-        <p:nvPr/>
-      </p:nvGrpSpPr>
-      <p:grpSpPr/>
-      <p:pic>
-        <p:nvPicPr>
-          <p:cNvPr id="2" name="Picture 1" descr="rteu_logo_kucuk.jpg"/>
-          <p:cNvPicPr>
-            <a:picLocks noChangeAspect="1"/>
-          </p:cNvPicPr>
-          <p:nvPr/>
-        </p:nvPicPr>
-        <p:blipFill>
-          <a:blip r:embed="rId2"/>
-          <a:stretch>
-            <a:fillRect/>
-          </a:stretch>
-        </p:blipFill>
-        <p:spPr>
-          <a:xfrm>
-            <a:off x="640080" y="164592"/>
-            <a:ext cx="242773" cy="329184"/>
-          </a:xfrm>
-          <a:prstGeom prst="rect">
-            <a:avLst/>
-          </a:prstGeom>
-        </p:spPr>
-      </p:pic>
-      <p:sp>
-        <p:nvSpPr>
-          <p:cNvPr id="3" name="TextBox 2"/>
-          <p:cNvSpPr txBox="1"/>
-          <p:nvPr/>
-        </p:nvSpPr>
-        <p:spPr>
-          <a:xfrm>
-            <a:off x="1051560" y="182880"/>
-            <a:ext cx="7315200" cy="320040"/>
-          </a:xfrm>
-          <a:prstGeom prst="rect">
-            <a:avLst/>
-          </a:prstGeom>
-          <a:noFill/>
-        </p:spPr>
-        <p:txBody>
-          <a:bodyPr wrap="square" lIns="45720" rIns="45720">
-            <a:spAutoFit/>
-          </a:bodyPr>
-          <a:lstStyle/>
-          <a:p>
-            <a:r>
-              <a:rPr sz="1100" b="0">
-                <a:solidFill>
-                  <a:srgbClr val="5B6770"/>
-                </a:solidFill>
-              </a:rPr>
-              <a:t>CEN429 Secure Programming · Week 7</a:t>
-            </a:r>
-          </a:p>
-        </p:txBody>
-      </p:sp>
-      <p:sp>
-        <p:nvSpPr>
-          <p:cNvPr id="4" name="TextBox 3"/>
-          <p:cNvSpPr txBox="1"/>
-          <p:nvPr/>
-        </p:nvSpPr>
-        <p:spPr>
-          <a:xfrm>
-            <a:off x="640080" y="6446520"/>
-            <a:ext cx="7315200" cy="274320"/>
-          </a:xfrm>
-          <a:prstGeom prst="rect">
-            <a:avLst/>
-          </a:prstGeom>
-          <a:noFill/>
-        </p:spPr>
-        <p:txBody>
-          <a:bodyPr wrap="square" lIns="45720" rIns="45720">
-            <a:spAutoFit/>
-          </a:bodyPr>
-          <a:lstStyle/>
-          <a:p>
-            <a:r>
-              <a:rPr sz="1000" b="0">
-                <a:solidFill>
-                  <a:srgbClr val="5B6770"/>
-                </a:solidFill>
-              </a:rPr>
-              <a:t>RTEU Computer Engineering · 2026-2027 Fall</a:t>
-            </a:r>
-          </a:p>
-        </p:txBody>
-      </p:sp>
-      <p:sp>
-        <p:nvSpPr>
-          <p:cNvPr id="5" name="TextBox 4"/>
-          <p:cNvSpPr txBox="1"/>
-          <p:nvPr/>
-        </p:nvSpPr>
-        <p:spPr>
-          <a:xfrm>
-            <a:off x="10637215" y="6446520"/>
-            <a:ext cx="914400" cy="274320"/>
-          </a:xfrm>
-          <a:prstGeom prst="rect">
-            <a:avLst/>
-          </a:prstGeom>
-          <a:noFill/>
-        </p:spPr>
-        <p:txBody>
-          <a:bodyPr wrap="square" lIns="45720" rIns="45720">
-            <a:spAutoFit/>
-          </a:bodyPr>
-          <a:lstStyle/>
-          <a:p>
-            <a:pPr algn="r"/>
-            <a:r>
-              <a:rPr sz="1000" b="0">
-                <a:solidFill>
-                  <a:srgbClr val="5B6770"/>
-                </a:solidFill>
-              </a:rPr>
-              <a:t>33</a:t>
-            </a:r>
-          </a:p>
-        </p:txBody>
-      </p:sp>
-      <p:sp>
-        <p:nvSpPr>
-          <p:cNvPr id="6" name="TextBox 5"/>
-          <p:cNvSpPr txBox="1"/>
-          <p:nvPr/>
-        </p:nvSpPr>
-        <p:spPr>
-          <a:xfrm>
-            <a:off x="640080" y="548640"/>
-            <a:ext cx="10911535" cy="731520"/>
-          </a:xfrm>
-          <a:prstGeom prst="rect">
-            <a:avLst/>
-          </a:prstGeom>
-          <a:noFill/>
-        </p:spPr>
-        <p:txBody>
-          <a:bodyPr wrap="square" lIns="45720" rIns="45720" anchor="ctr">
-            <a:spAutoFit/>
-          </a:bodyPr>
-          <a:lstStyle/>
-          <a:p>
-            <a:r>
-              <a:rPr sz="3000" b="1">
-                <a:solidFill>
-                  <a:srgbClr val="006D77"/>
-                </a:solidFill>
-              </a:rPr>
-              <a:t>Question 1</a:t>
-            </a:r>
-          </a:p>
-        </p:txBody>
-      </p:sp>
-      <p:sp>
-        <p:nvSpPr>
-          <p:cNvPr id="7" name="TextBox 6"/>
-          <p:cNvSpPr txBox="1"/>
-          <p:nvPr/>
-        </p:nvSpPr>
-        <p:spPr>
-          <a:xfrm>
-            <a:off x="640080" y="1325880"/>
-            <a:ext cx="10911535" cy="439928"/>
-          </a:xfrm>
-          <a:prstGeom prst="rect">
-            <a:avLst/>
-          </a:prstGeom>
-          <a:noFill/>
-        </p:spPr>
-        <p:txBody>
-          <a:bodyPr wrap="square" lIns="45720" rIns="45720">
-            <a:spAutoFit/>
-          </a:bodyPr>
-          <a:lstStyle/>
-          <a:p>
-            <a:pPr algn="l"/>
-            <a:r>
-              <a:rPr sz="2000" b="1">
-                <a:solidFill>
-                  <a:srgbClr val="1F2D3A"/>
-                </a:solidFill>
-              </a:rPr>
-              <a:t>Your three most critical assets and their C/I/I+ labels?</a:t>
-            </a:r>
-          </a:p>
-        </p:txBody>
-      </p:sp>
-      <p:sp>
-        <p:nvSpPr>
-          <p:cNvPr id="8" name="TextBox 7"/>
-          <p:cNvSpPr txBox="1"/>
-          <p:nvPr/>
-        </p:nvSpPr>
-        <p:spPr>
-          <a:xfrm>
-            <a:off x="640080" y="1875536"/>
-            <a:ext cx="10911535" cy="439928"/>
-          </a:xfrm>
-          <a:prstGeom prst="rect">
-            <a:avLst/>
-          </a:prstGeom>
-          <a:noFill/>
-        </p:spPr>
-        <p:txBody>
-          <a:bodyPr wrap="square" lIns="45720" rIns="45720">
-            <a:spAutoFit/>
-          </a:bodyPr>
-          <a:lstStyle/>
-          <a:p>
-            <a:pPr algn="l"/>
-            <a:r>
-              <a:rPr sz="2000" b="0">
-                <a:solidFill>
-                  <a:srgbClr val="1F2D3A"/>
-                </a:solidFill>
-              </a:rPr>
-              <a:t>Keep your answer ready; know the lifecycle of every asset.</a:t>
-            </a:r>
-          </a:p>
-        </p:txBody>
-      </p:sp>
-    </p:spTree>
-  </p:cSld>
-  <p:clrMapOvr>
-    <a:masterClrMapping/>
-  </p:clrMapOvr>
-</p:sld>
-</file>
-
-<file path=ppt/slides/slide34.xml><?xml version="1.0" encoding="utf-8"?>
-<p:sld xmlns:a="http://schemas.openxmlformats.org/drawingml/2006/main" xmlns:p="http://schemas.openxmlformats.org/presentationml/2006/main" xmlns:r="http://schemas.openxmlformats.org/officeDocument/2006/relationships">
-  <p:cSld>
-    <p:spTree>
-      <p:nvGrpSpPr>
-        <p:cNvPr id="1" name=""/>
-        <p:cNvGrpSpPr/>
-        <p:nvPr/>
-      </p:nvGrpSpPr>
-      <p:grpSpPr/>
-      <p:pic>
-        <p:nvPicPr>
-          <p:cNvPr id="2" name="Picture 1" descr="rteu_logo_kucuk.jpg"/>
-          <p:cNvPicPr>
-            <a:picLocks noChangeAspect="1"/>
-          </p:cNvPicPr>
-          <p:nvPr/>
-        </p:nvPicPr>
-        <p:blipFill>
-          <a:blip r:embed="rId2"/>
-          <a:stretch>
-            <a:fillRect/>
-          </a:stretch>
-        </p:blipFill>
-        <p:spPr>
-          <a:xfrm>
-            <a:off x="640080" y="164592"/>
-            <a:ext cx="242773" cy="329184"/>
-          </a:xfrm>
-          <a:prstGeom prst="rect">
-            <a:avLst/>
-          </a:prstGeom>
-        </p:spPr>
-      </p:pic>
-      <p:sp>
-        <p:nvSpPr>
-          <p:cNvPr id="3" name="TextBox 2"/>
-          <p:cNvSpPr txBox="1"/>
-          <p:nvPr/>
-        </p:nvSpPr>
-        <p:spPr>
-          <a:xfrm>
-            <a:off x="1051560" y="182880"/>
-            <a:ext cx="7315200" cy="320040"/>
-          </a:xfrm>
-          <a:prstGeom prst="rect">
-            <a:avLst/>
-          </a:prstGeom>
-          <a:noFill/>
-        </p:spPr>
-        <p:txBody>
-          <a:bodyPr wrap="square" lIns="45720" rIns="45720">
-            <a:spAutoFit/>
-          </a:bodyPr>
-          <a:lstStyle/>
-          <a:p>
-            <a:r>
-              <a:rPr sz="1100" b="0">
-                <a:solidFill>
-                  <a:srgbClr val="5B6770"/>
-                </a:solidFill>
-              </a:rPr>
-              <a:t>CEN429 Secure Programming · Week 7</a:t>
-            </a:r>
-          </a:p>
-        </p:txBody>
-      </p:sp>
-      <p:sp>
-        <p:nvSpPr>
-          <p:cNvPr id="4" name="TextBox 3"/>
-          <p:cNvSpPr txBox="1"/>
-          <p:nvPr/>
-        </p:nvSpPr>
-        <p:spPr>
-          <a:xfrm>
-            <a:off x="640080" y="6446520"/>
-            <a:ext cx="7315200" cy="274320"/>
-          </a:xfrm>
-          <a:prstGeom prst="rect">
-            <a:avLst/>
-          </a:prstGeom>
-          <a:noFill/>
-        </p:spPr>
-        <p:txBody>
-          <a:bodyPr wrap="square" lIns="45720" rIns="45720">
-            <a:spAutoFit/>
-          </a:bodyPr>
-          <a:lstStyle/>
-          <a:p>
-            <a:r>
-              <a:rPr sz="1000" b="0">
-                <a:solidFill>
-                  <a:srgbClr val="5B6770"/>
-                </a:solidFill>
-              </a:rPr>
-              <a:t>RTEU Computer Engineering · 2026-2027 Fall</a:t>
-            </a:r>
-          </a:p>
-        </p:txBody>
-      </p:sp>
-      <p:sp>
-        <p:nvSpPr>
-          <p:cNvPr id="5" name="TextBox 4"/>
-          <p:cNvSpPr txBox="1"/>
-          <p:nvPr/>
-        </p:nvSpPr>
-        <p:spPr>
-          <a:xfrm>
-            <a:off x="10637215" y="6446520"/>
-            <a:ext cx="914400" cy="274320"/>
-          </a:xfrm>
-          <a:prstGeom prst="rect">
-            <a:avLst/>
-          </a:prstGeom>
-          <a:noFill/>
-        </p:spPr>
-        <p:txBody>
-          <a:bodyPr wrap="square" lIns="45720" rIns="45720">
-            <a:spAutoFit/>
-          </a:bodyPr>
-          <a:lstStyle/>
-          <a:p>
-            <a:pPr algn="r"/>
-            <a:r>
-              <a:rPr sz="1000" b="0">
-                <a:solidFill>
-                  <a:srgbClr val="5B6770"/>
-                </a:solidFill>
-              </a:rPr>
-              <a:t>34</a:t>
-            </a:r>
-          </a:p>
-        </p:txBody>
-      </p:sp>
-      <p:sp>
-        <p:nvSpPr>
-          <p:cNvPr id="6" name="TextBox 5"/>
-          <p:cNvSpPr txBox="1"/>
-          <p:nvPr/>
-        </p:nvSpPr>
-        <p:spPr>
-          <a:xfrm>
-            <a:off x="640080" y="548640"/>
-            <a:ext cx="10911535" cy="731520"/>
-          </a:xfrm>
-          <a:prstGeom prst="rect">
-            <a:avLst/>
-          </a:prstGeom>
-          <a:noFill/>
-        </p:spPr>
-        <p:txBody>
-          <a:bodyPr wrap="square" lIns="45720" rIns="45720" anchor="ctr">
-            <a:spAutoFit/>
-          </a:bodyPr>
-          <a:lstStyle/>
-          <a:p>
-            <a:r>
-              <a:rPr sz="3000" b="1">
-                <a:solidFill>
-                  <a:srgbClr val="006D77"/>
-                </a:solidFill>
-              </a:rPr>
-              <a:t>Question 2</a:t>
-            </a:r>
-          </a:p>
-        </p:txBody>
-      </p:sp>
-      <p:sp>
-        <p:nvSpPr>
-          <p:cNvPr id="7" name="TextBox 6"/>
-          <p:cNvSpPr txBox="1"/>
-          <p:nvPr/>
-        </p:nvSpPr>
-        <p:spPr>
-          <a:xfrm>
-            <a:off x="640080" y="1325880"/>
-            <a:ext cx="10911535" cy="439928"/>
-          </a:xfrm>
-          <a:prstGeom prst="rect">
-            <a:avLst/>
-          </a:prstGeom>
-          <a:noFill/>
-        </p:spPr>
-        <p:txBody>
-          <a:bodyPr wrap="square" lIns="45720" rIns="45720">
-            <a:spAutoFit/>
-          </a:bodyPr>
-          <a:lstStyle/>
-          <a:p>
-            <a:pPr algn="l"/>
-            <a:r>
-              <a:rPr sz="2000" b="1">
-                <a:solidFill>
-                  <a:srgbClr val="1F2D3A"/>
-                </a:solidFill>
-              </a:rPr>
-              <a:t>Which control against this threat, and how was it verified?</a:t>
-            </a:r>
-          </a:p>
-        </p:txBody>
-      </p:sp>
-      <p:sp>
-        <p:nvSpPr>
-          <p:cNvPr id="8" name="TextBox 7"/>
-          <p:cNvSpPr txBox="1"/>
-          <p:nvPr/>
-        </p:nvSpPr>
-        <p:spPr>
-          <a:xfrm>
-            <a:off x="640080" y="1875536"/>
-            <a:ext cx="10911535" cy="439928"/>
-          </a:xfrm>
-          <a:prstGeom prst="rect">
-            <a:avLst/>
-          </a:prstGeom>
-          <a:noFill/>
-        </p:spPr>
-        <p:txBody>
-          <a:bodyPr wrap="square" lIns="45720" rIns="45720">
-            <a:spAutoFit/>
-          </a:bodyPr>
-          <a:lstStyle/>
-          <a:p>
-            <a:pPr algn="l"/>
-            <a:r>
-              <a:rPr sz="2000" b="0">
-                <a:solidFill>
-                  <a:srgbClr val="1F2D3A"/>
-                </a:solidFill>
-              </a:rPr>
-              <a:t>Show the threat → control → evidence chain.</a:t>
-            </a:r>
-          </a:p>
-        </p:txBody>
-      </p:sp>
-    </p:spTree>
-  </p:cSld>
-  <p:clrMapOvr>
-    <a:masterClrMapping/>
-  </p:clrMapOvr>
-</p:sld>
-</file>
-
-<file path=ppt/slides/slide35.xml><?xml version="1.0" encoding="utf-8"?>
-<p:sld xmlns:a="http://schemas.openxmlformats.org/drawingml/2006/main" xmlns:p="http://schemas.openxmlformats.org/presentationml/2006/main" xmlns:r="http://schemas.openxmlformats.org/officeDocument/2006/relationships">
-  <p:cSld>
-    <p:spTree>
-      <p:nvGrpSpPr>
-        <p:cNvPr id="1" name=""/>
-        <p:cNvGrpSpPr/>
-        <p:nvPr/>
-      </p:nvGrpSpPr>
-      <p:grpSpPr/>
-      <p:pic>
-        <p:nvPicPr>
-          <p:cNvPr id="2" name="Picture 1" descr="rteu_logo_kucuk.jpg"/>
-          <p:cNvPicPr>
-            <a:picLocks noChangeAspect="1"/>
-          </p:cNvPicPr>
-          <p:nvPr/>
-        </p:nvPicPr>
-        <p:blipFill>
-          <a:blip r:embed="rId2"/>
-          <a:stretch>
-            <a:fillRect/>
-          </a:stretch>
-        </p:blipFill>
-        <p:spPr>
-          <a:xfrm>
-            <a:off x="640080" y="164592"/>
-            <a:ext cx="242773" cy="329184"/>
-          </a:xfrm>
-          <a:prstGeom prst="rect">
-            <a:avLst/>
-          </a:prstGeom>
-        </p:spPr>
-      </p:pic>
-      <p:sp>
-        <p:nvSpPr>
-          <p:cNvPr id="3" name="TextBox 2"/>
-          <p:cNvSpPr txBox="1"/>
-          <p:nvPr/>
-        </p:nvSpPr>
-        <p:spPr>
-          <a:xfrm>
-            <a:off x="1051560" y="182880"/>
-            <a:ext cx="7315200" cy="320040"/>
-          </a:xfrm>
-          <a:prstGeom prst="rect">
-            <a:avLst/>
-          </a:prstGeom>
-          <a:noFill/>
-        </p:spPr>
-        <p:txBody>
-          <a:bodyPr wrap="square" lIns="45720" rIns="45720">
-            <a:spAutoFit/>
-          </a:bodyPr>
-          <a:lstStyle/>
-          <a:p>
-            <a:r>
-              <a:rPr sz="1100" b="0">
-                <a:solidFill>
-                  <a:srgbClr val="5B6770"/>
-                </a:solidFill>
-              </a:rPr>
-              <a:t>CEN429 Secure Programming · Week 7</a:t>
-            </a:r>
-          </a:p>
-        </p:txBody>
-      </p:sp>
-      <p:sp>
-        <p:nvSpPr>
-          <p:cNvPr id="4" name="TextBox 3"/>
-          <p:cNvSpPr txBox="1"/>
-          <p:nvPr/>
-        </p:nvSpPr>
-        <p:spPr>
-          <a:xfrm>
-            <a:off x="640080" y="6446520"/>
-            <a:ext cx="7315200" cy="274320"/>
-          </a:xfrm>
-          <a:prstGeom prst="rect">
-            <a:avLst/>
-          </a:prstGeom>
-          <a:noFill/>
-        </p:spPr>
-        <p:txBody>
-          <a:bodyPr wrap="square" lIns="45720" rIns="45720">
-            <a:spAutoFit/>
-          </a:bodyPr>
-          <a:lstStyle/>
-          <a:p>
-            <a:r>
-              <a:rPr sz="1000" b="0">
-                <a:solidFill>
-                  <a:srgbClr val="5B6770"/>
-                </a:solidFill>
-              </a:rPr>
-              <a:t>RTEU Computer Engineering · 2026-2027 Fall</a:t>
-            </a:r>
-          </a:p>
-        </p:txBody>
-      </p:sp>
-      <p:sp>
-        <p:nvSpPr>
-          <p:cNvPr id="5" name="TextBox 4"/>
-          <p:cNvSpPr txBox="1"/>
-          <p:nvPr/>
-        </p:nvSpPr>
-        <p:spPr>
-          <a:xfrm>
-            <a:off x="10637215" y="6446520"/>
-            <a:ext cx="914400" cy="274320"/>
-          </a:xfrm>
-          <a:prstGeom prst="rect">
-            <a:avLst/>
-          </a:prstGeom>
-          <a:noFill/>
-        </p:spPr>
-        <p:txBody>
-          <a:bodyPr wrap="square" lIns="45720" rIns="45720">
-            <a:spAutoFit/>
-          </a:bodyPr>
-          <a:lstStyle/>
-          <a:p>
-            <a:pPr algn="r"/>
-            <a:r>
-              <a:rPr sz="1000" b="0">
-                <a:solidFill>
-                  <a:srgbClr val="5B6770"/>
-                </a:solidFill>
-              </a:rPr>
-              <a:t>35</a:t>
-            </a:r>
-          </a:p>
-        </p:txBody>
-      </p:sp>
-      <p:sp>
-        <p:nvSpPr>
-          <p:cNvPr id="6" name="TextBox 5"/>
-          <p:cNvSpPr txBox="1"/>
-          <p:nvPr/>
-        </p:nvSpPr>
-        <p:spPr>
-          <a:xfrm>
-            <a:off x="640080" y="548640"/>
-            <a:ext cx="10911535" cy="731520"/>
-          </a:xfrm>
-          <a:prstGeom prst="rect">
-            <a:avLst/>
-          </a:prstGeom>
-          <a:noFill/>
-        </p:spPr>
-        <p:txBody>
-          <a:bodyPr wrap="square" lIns="45720" rIns="45720" anchor="ctr">
-            <a:spAutoFit/>
-          </a:bodyPr>
-          <a:lstStyle/>
-          <a:p>
-            <a:r>
-              <a:rPr sz="3000" b="1">
-                <a:solidFill>
-                  <a:srgbClr val="006D77"/>
-                </a:solidFill>
-              </a:rPr>
-              <a:t>Question 3</a:t>
-            </a:r>
-          </a:p>
-        </p:txBody>
-      </p:sp>
-      <p:sp>
-        <p:nvSpPr>
-          <p:cNvPr id="7" name="TextBox 6"/>
-          <p:cNvSpPr txBox="1"/>
-          <p:nvPr/>
-        </p:nvSpPr>
-        <p:spPr>
-          <a:xfrm>
-            <a:off x="640080" y="1325880"/>
-            <a:ext cx="10911535" cy="439928"/>
-          </a:xfrm>
-          <a:prstGeom prst="rect">
-            <a:avLst/>
-          </a:prstGeom>
-          <a:noFill/>
-        </p:spPr>
-        <p:txBody>
-          <a:bodyPr wrap="square" lIns="45720" rIns="45720">
-            <a:spAutoFit/>
-          </a:bodyPr>
-          <a:lstStyle/>
-          <a:p>
-            <a:pPr algn="l"/>
-            <a:r>
-              <a:rPr sz="2000" b="1">
-                <a:solidFill>
-                  <a:srgbClr val="1F2D3A"/>
-                </a:solidFill>
-              </a:rPr>
-              <a:t>Where does this key come from, where does it live, when is it deleted?</a:t>
-            </a:r>
-          </a:p>
-        </p:txBody>
-      </p:sp>
-      <p:sp>
-        <p:nvSpPr>
-          <p:cNvPr id="8" name="TextBox 7"/>
-          <p:cNvSpPr txBox="1"/>
-          <p:nvPr/>
-        </p:nvSpPr>
-        <p:spPr>
-          <a:xfrm>
-            <a:off x="640080" y="1875536"/>
-            <a:ext cx="10911535" cy="439928"/>
-          </a:xfrm>
-          <a:prstGeom prst="rect">
-            <a:avLst/>
-          </a:prstGeom>
-          <a:noFill/>
-        </p:spPr>
-        <p:txBody>
-          <a:bodyPr wrap="square" lIns="45720" rIns="45720">
-            <a:spAutoFit/>
-          </a:bodyPr>
-          <a:lstStyle/>
-          <a:p>
-            <a:pPr algn="l"/>
-            <a:r>
-              <a:rPr sz="2000" b="0">
-                <a:solidFill>
-                  <a:srgbClr val="1F2D3A"/>
-                </a:solidFill>
-              </a:rPr>
-              <a:t>Explain the key's lifecycle.</a:t>
-            </a:r>
-          </a:p>
-        </p:txBody>
-      </p:sp>
-    </p:spTree>
-  </p:cSld>
-  <p:clrMapOvr>
-    <a:masterClrMapping/>
-  </p:clrMapOvr>
-</p:sld>
-</file>
-
-<file path=ppt/slides/slide36.xml><?xml version="1.0" encoding="utf-8"?>
-<p:sld xmlns:a="http://schemas.openxmlformats.org/drawingml/2006/main" xmlns:p="http://schemas.openxmlformats.org/presentationml/2006/main" xmlns:r="http://schemas.openxmlformats.org/officeDocument/2006/relationships">
-  <p:cSld>
-    <p:spTree>
-      <p:nvGrpSpPr>
-        <p:cNvPr id="1" name=""/>
-        <p:cNvGrpSpPr/>
-        <p:nvPr/>
-      </p:nvGrpSpPr>
-      <p:grpSpPr/>
-      <p:pic>
-        <p:nvPicPr>
-          <p:cNvPr id="2" name="Picture 1" descr="rteu_logo_kucuk.jpg"/>
-          <p:cNvPicPr>
-            <a:picLocks noChangeAspect="1"/>
-          </p:cNvPicPr>
-          <p:nvPr/>
-        </p:nvPicPr>
-        <p:blipFill>
-          <a:blip r:embed="rId2"/>
-          <a:stretch>
-            <a:fillRect/>
-          </a:stretch>
-        </p:blipFill>
-        <p:spPr>
-          <a:xfrm>
-            <a:off x="640080" y="164592"/>
-            <a:ext cx="242773" cy="329184"/>
-          </a:xfrm>
-          <a:prstGeom prst="rect">
-            <a:avLst/>
-          </a:prstGeom>
-        </p:spPr>
-      </p:pic>
-      <p:sp>
-        <p:nvSpPr>
-          <p:cNvPr id="3" name="TextBox 2"/>
-          <p:cNvSpPr txBox="1"/>
-          <p:nvPr/>
-        </p:nvSpPr>
-        <p:spPr>
-          <a:xfrm>
-            <a:off x="1051560" y="182880"/>
-            <a:ext cx="7315200" cy="320040"/>
-          </a:xfrm>
-          <a:prstGeom prst="rect">
-            <a:avLst/>
-          </a:prstGeom>
-          <a:noFill/>
-        </p:spPr>
-        <p:txBody>
-          <a:bodyPr wrap="square" lIns="45720" rIns="45720">
-            <a:spAutoFit/>
-          </a:bodyPr>
-          <a:lstStyle/>
-          <a:p>
-            <a:r>
-              <a:rPr sz="1100" b="0">
-                <a:solidFill>
-                  <a:srgbClr val="5B6770"/>
-                </a:solidFill>
-              </a:rPr>
-              <a:t>CEN429 Secure Programming · Week 7</a:t>
-            </a:r>
-          </a:p>
-        </p:txBody>
-      </p:sp>
-      <p:sp>
-        <p:nvSpPr>
-          <p:cNvPr id="4" name="TextBox 3"/>
-          <p:cNvSpPr txBox="1"/>
-          <p:nvPr/>
-        </p:nvSpPr>
-        <p:spPr>
-          <a:xfrm>
-            <a:off x="640080" y="6446520"/>
-            <a:ext cx="7315200" cy="274320"/>
-          </a:xfrm>
-          <a:prstGeom prst="rect">
-            <a:avLst/>
-          </a:prstGeom>
-          <a:noFill/>
-        </p:spPr>
-        <p:txBody>
-          <a:bodyPr wrap="square" lIns="45720" rIns="45720">
-            <a:spAutoFit/>
-          </a:bodyPr>
-          <a:lstStyle/>
-          <a:p>
-            <a:r>
-              <a:rPr sz="1000" b="0">
-                <a:solidFill>
-                  <a:srgbClr val="5B6770"/>
-                </a:solidFill>
-              </a:rPr>
-              <a:t>RTEU Computer Engineering · 2026-2027 Fall</a:t>
-            </a:r>
-          </a:p>
-        </p:txBody>
-      </p:sp>
-      <p:sp>
-        <p:nvSpPr>
-          <p:cNvPr id="5" name="TextBox 4"/>
-          <p:cNvSpPr txBox="1"/>
-          <p:nvPr/>
-        </p:nvSpPr>
-        <p:spPr>
-          <a:xfrm>
-            <a:off x="10637215" y="6446520"/>
-            <a:ext cx="914400" cy="274320"/>
-          </a:xfrm>
-          <a:prstGeom prst="rect">
-            <a:avLst/>
-          </a:prstGeom>
-          <a:noFill/>
-        </p:spPr>
-        <p:txBody>
-          <a:bodyPr wrap="square" lIns="45720" rIns="45720">
-            <a:spAutoFit/>
-          </a:bodyPr>
-          <a:lstStyle/>
-          <a:p>
-            <a:pPr algn="r"/>
-            <a:r>
-              <a:rPr sz="1000" b="0">
-                <a:solidFill>
-                  <a:srgbClr val="5B6770"/>
-                </a:solidFill>
-              </a:rPr>
-              <a:t>36</a:t>
-            </a:r>
-          </a:p>
-        </p:txBody>
-      </p:sp>
-      <p:sp>
-        <p:nvSpPr>
-          <p:cNvPr id="6" name="TextBox 5"/>
-          <p:cNvSpPr txBox="1"/>
-          <p:nvPr/>
-        </p:nvSpPr>
-        <p:spPr>
-          <a:xfrm>
-            <a:off x="640080" y="548640"/>
-            <a:ext cx="10911535" cy="731520"/>
-          </a:xfrm>
-          <a:prstGeom prst="rect">
-            <a:avLst/>
-          </a:prstGeom>
-          <a:noFill/>
-        </p:spPr>
-        <p:txBody>
-          <a:bodyPr wrap="square" lIns="45720" rIns="45720" anchor="ctr">
-            <a:spAutoFit/>
-          </a:bodyPr>
-          <a:lstStyle/>
-          <a:p>
-            <a:r>
-              <a:rPr sz="3000" b="1">
-                <a:solidFill>
-                  <a:srgbClr val="006D77"/>
-                </a:solidFill>
-              </a:rPr>
-              <a:t>Question 4</a:t>
-            </a:r>
-          </a:p>
-        </p:txBody>
-      </p:sp>
-      <p:sp>
-        <p:nvSpPr>
-          <p:cNvPr id="7" name="TextBox 6"/>
-          <p:cNvSpPr txBox="1"/>
-          <p:nvPr/>
-        </p:nvSpPr>
-        <p:spPr>
-          <a:xfrm>
-            <a:off x="640080" y="1325880"/>
-            <a:ext cx="10911535" cy="439928"/>
-          </a:xfrm>
-          <a:prstGeom prst="rect">
-            <a:avLst/>
-          </a:prstGeom>
-          <a:noFill/>
-        </p:spPr>
-        <p:txBody>
-          <a:bodyPr wrap="square" lIns="45720" rIns="45720">
-            <a:spAutoFit/>
-          </a:bodyPr>
-          <a:lstStyle/>
-          <a:p>
-            <a:pPr algn="l"/>
-            <a:r>
-              <a:rPr sz="2000" b="1">
-                <a:solidFill>
-                  <a:srgbClr val="1F2D3A"/>
-                </a:solidFill>
-              </a:rPr>
-              <a:t>What is your remaining risk? Why is it acceptable?</a:t>
-            </a:r>
-          </a:p>
-        </p:txBody>
-      </p:sp>
-      <p:sp>
-        <p:nvSpPr>
-          <p:cNvPr id="8" name="TextBox 7"/>
-          <p:cNvSpPr txBox="1"/>
-          <p:nvPr/>
-        </p:nvSpPr>
-        <p:spPr>
-          <a:xfrm>
-            <a:off x="640080" y="1875536"/>
-            <a:ext cx="10911535" cy="439928"/>
-          </a:xfrm>
-          <a:prstGeom prst="rect">
-            <a:avLst/>
-          </a:prstGeom>
-          <a:noFill/>
-        </p:spPr>
-        <p:txBody>
-          <a:bodyPr wrap="square" lIns="45720" rIns="45720">
-            <a:spAutoFit/>
-          </a:bodyPr>
-          <a:lstStyle/>
-          <a:p>
-            <a:pPr algn="l"/>
-            <a:r>
-              <a:rPr sz="2000" b="0">
-                <a:solidFill>
-                  <a:srgbClr val="1F2D3A"/>
-                </a:solidFill>
-              </a:rPr>
-              <a:t>Answer honestly and with justification.</a:t>
-            </a:r>
-          </a:p>
-        </p:txBody>
-      </p:sp>
-    </p:spTree>
-  </p:cSld>
-  <p:clrMapOvr>
-    <a:masterClrMapping/>
-  </p:clrMapOvr>
-</p:sld>
-</file>
-
-<file path=ppt/slides/slide37.xml><?xml version="1.0" encoding="utf-8"?>
-<p:sld xmlns:a="http://schemas.openxmlformats.org/drawingml/2006/main" xmlns:p="http://schemas.openxmlformats.org/presentationml/2006/main" xmlns:r="http://schemas.openxmlformats.org/officeDocument/2006/relationships">
-  <p:cSld>
-    <p:bg>
-      <p:bgPr>
-        <a:solidFill>
-          <a:srgbClr val="006D77"/>
-        </a:solidFill>
-        <a:effectLst/>
-      </p:bgPr>
-    </p:bg>
-    <p:spTree>
-      <p:nvGrpSpPr>
-        <p:cNvPr id="1" name=""/>
-        <p:cNvGrpSpPr/>
-        <p:nvPr/>
-      </p:nvGrpSpPr>
-      <p:grpSpPr/>
-      <p:sp>
-        <p:nvSpPr>
-          <p:cNvPr id="2" name="TextBox 1"/>
-          <p:cNvSpPr txBox="1"/>
-          <p:nvPr/>
-        </p:nvSpPr>
-        <p:spPr>
-          <a:xfrm>
-            <a:off x="1051560" y="182880"/>
-            <a:ext cx="7315200" cy="320040"/>
-          </a:xfrm>
-          <a:prstGeom prst="rect">
-            <a:avLst/>
-          </a:prstGeom>
-          <a:noFill/>
-        </p:spPr>
-        <p:txBody>
-          <a:bodyPr wrap="square" lIns="45720" rIns="45720">
-            <a:spAutoFit/>
-          </a:bodyPr>
-          <a:lstStyle/>
-          <a:p>
-            <a:r>
-              <a:rPr sz="1100" b="0">
-                <a:solidFill>
-                  <a:srgbClr val="D8F0F2"/>
-                </a:solidFill>
-              </a:rPr>
-              <a:t>CEN429 Secure Programming · Week 7</a:t>
-            </a:r>
-          </a:p>
-        </p:txBody>
-      </p:sp>
-      <p:sp>
-        <p:nvSpPr>
-          <p:cNvPr id="3" name="TextBox 2"/>
-          <p:cNvSpPr txBox="1"/>
-          <p:nvPr/>
-        </p:nvSpPr>
-        <p:spPr>
-          <a:xfrm>
-            <a:off x="640080" y="6446520"/>
-            <a:ext cx="7315200" cy="274320"/>
-          </a:xfrm>
-          <a:prstGeom prst="rect">
-            <a:avLst/>
-          </a:prstGeom>
-          <a:noFill/>
-        </p:spPr>
-        <p:txBody>
-          <a:bodyPr wrap="square" lIns="45720" rIns="45720">
-            <a:spAutoFit/>
-          </a:bodyPr>
-          <a:lstStyle/>
-          <a:p>
-            <a:r>
-              <a:rPr sz="1000" b="0">
-                <a:solidFill>
-                  <a:srgbClr val="D8F0F2"/>
-                </a:solidFill>
-              </a:rPr>
-              <a:t>RTEU Computer Engineering · 2026-2027 Fall</a:t>
-            </a:r>
-          </a:p>
-        </p:txBody>
-      </p:sp>
-      <p:sp>
-        <p:nvSpPr>
-          <p:cNvPr id="4" name="TextBox 3"/>
-          <p:cNvSpPr txBox="1"/>
-          <p:nvPr/>
-        </p:nvSpPr>
-        <p:spPr>
-          <a:xfrm>
-            <a:off x="10637215" y="6446520"/>
-            <a:ext cx="914400" cy="274320"/>
-          </a:xfrm>
-          <a:prstGeom prst="rect">
-            <a:avLst/>
-          </a:prstGeom>
-          <a:noFill/>
-        </p:spPr>
-        <p:txBody>
-          <a:bodyPr wrap="square" lIns="45720" rIns="45720">
-            <a:spAutoFit/>
-          </a:bodyPr>
-          <a:lstStyle/>
-          <a:p>
-            <a:pPr algn="r"/>
-            <a:r>
-              <a:rPr sz="1000" b="0">
-                <a:solidFill>
-                  <a:srgbClr val="D8F0F2"/>
-                </a:solidFill>
-              </a:rPr>
-              <a:t>37</a:t>
-            </a:r>
-          </a:p>
-        </p:txBody>
-      </p:sp>
-      <p:sp>
-        <p:nvSpPr>
-          <p:cNvPr id="5" name="TextBox 4"/>
-          <p:cNvSpPr txBox="1"/>
-          <p:nvPr/>
-        </p:nvSpPr>
-        <p:spPr>
-          <a:xfrm>
-            <a:off x="640080" y="2743200"/>
-            <a:ext cx="10911535" cy="1280160"/>
-          </a:xfrm>
-          <a:prstGeom prst="rect">
-            <a:avLst/>
-          </a:prstGeom>
-          <a:noFill/>
-        </p:spPr>
-        <p:txBody>
-          <a:bodyPr wrap="square" lIns="45720" rIns="45720">
-            <a:spAutoFit/>
-          </a:bodyPr>
-          <a:lstStyle/>
-          <a:p>
-            <a:pPr algn="l"/>
-            <a:r>
-              <a:rPr sz="4000" b="1">
-                <a:solidFill>
-                  <a:srgbClr val="FFFFFF"/>
-                </a:solidFill>
-              </a:rPr>
-              <a:t>Appendix · Common Mistakes</a:t>
-            </a:r>
-          </a:p>
-        </p:txBody>
-      </p:sp>
-    </p:spTree>
-  </p:cSld>
-  <p:clrMapOvr>
-    <a:masterClrMapping/>
-  </p:clrMapOvr>
-</p:sld>
-</file>
-
-<file path=ppt/slides/slide38.xml><?xml version="1.0" encoding="utf-8"?>
-<p:sld xmlns:a="http://schemas.openxmlformats.org/drawingml/2006/main" xmlns:p="http://schemas.openxmlformats.org/presentationml/2006/main" xmlns:r="http://schemas.openxmlformats.org/officeDocument/2006/relationships">
-  <p:cSld>
-    <p:spTree>
-      <p:nvGrpSpPr>
-        <p:cNvPr id="1" name=""/>
-        <p:cNvGrpSpPr/>
-        <p:nvPr/>
-      </p:nvGrpSpPr>
-      <p:grpSpPr/>
-      <p:pic>
-        <p:nvPicPr>
-          <p:cNvPr id="2" name="Picture 1" descr="rteu_logo_kucuk.jpg"/>
-          <p:cNvPicPr>
-            <a:picLocks noChangeAspect="1"/>
-          </p:cNvPicPr>
-          <p:nvPr/>
-        </p:nvPicPr>
-        <p:blipFill>
-          <a:blip r:embed="rId2"/>
-          <a:stretch>
-            <a:fillRect/>
-          </a:stretch>
-        </p:blipFill>
-        <p:spPr>
-          <a:xfrm>
-            <a:off x="640080" y="164592"/>
-            <a:ext cx="242773" cy="329184"/>
-          </a:xfrm>
-          <a:prstGeom prst="rect">
-            <a:avLst/>
-          </a:prstGeom>
-        </p:spPr>
-      </p:pic>
-      <p:sp>
-        <p:nvSpPr>
-          <p:cNvPr id="3" name="TextBox 2"/>
-          <p:cNvSpPr txBox="1"/>
-          <p:nvPr/>
-        </p:nvSpPr>
-        <p:spPr>
-          <a:xfrm>
-            <a:off x="1051560" y="182880"/>
-            <a:ext cx="7315200" cy="320040"/>
-          </a:xfrm>
-          <a:prstGeom prst="rect">
-            <a:avLst/>
-          </a:prstGeom>
-          <a:noFill/>
-        </p:spPr>
-        <p:txBody>
-          <a:bodyPr wrap="square" lIns="45720" rIns="45720">
-            <a:spAutoFit/>
-          </a:bodyPr>
-          <a:lstStyle/>
-          <a:p>
-            <a:r>
-              <a:rPr sz="1100" b="0">
-                <a:solidFill>
-                  <a:srgbClr val="5B6770"/>
-                </a:solidFill>
-              </a:rPr>
-              <a:t>CEN429 Secure Programming · Week 7</a:t>
-            </a:r>
-          </a:p>
-        </p:txBody>
-      </p:sp>
-      <p:sp>
-        <p:nvSpPr>
-          <p:cNvPr id="4" name="TextBox 3"/>
-          <p:cNvSpPr txBox="1"/>
-          <p:nvPr/>
-        </p:nvSpPr>
-        <p:spPr>
-          <a:xfrm>
-            <a:off x="640080" y="6446520"/>
-            <a:ext cx="7315200" cy="274320"/>
-          </a:xfrm>
-          <a:prstGeom prst="rect">
-            <a:avLst/>
-          </a:prstGeom>
-          <a:noFill/>
-        </p:spPr>
-        <p:txBody>
-          <a:bodyPr wrap="square" lIns="45720" rIns="45720">
-            <a:spAutoFit/>
-          </a:bodyPr>
-          <a:lstStyle/>
-          <a:p>
-            <a:r>
-              <a:rPr sz="1000" b="0">
-                <a:solidFill>
-                  <a:srgbClr val="5B6770"/>
-                </a:solidFill>
-              </a:rPr>
-              <a:t>RTEU Computer Engineering · 2026-2027 Fall</a:t>
-            </a:r>
-          </a:p>
-        </p:txBody>
-      </p:sp>
-      <p:sp>
-        <p:nvSpPr>
-          <p:cNvPr id="5" name="TextBox 4"/>
-          <p:cNvSpPr txBox="1"/>
-          <p:nvPr/>
-        </p:nvSpPr>
-        <p:spPr>
-          <a:xfrm>
-            <a:off x="10637215" y="6446520"/>
-            <a:ext cx="914400" cy="274320"/>
-          </a:xfrm>
-          <a:prstGeom prst="rect">
-            <a:avLst/>
-          </a:prstGeom>
-          <a:noFill/>
-        </p:spPr>
-        <p:txBody>
-          <a:bodyPr wrap="square" lIns="45720" rIns="45720">
-            <a:spAutoFit/>
-          </a:bodyPr>
-          <a:lstStyle/>
-          <a:p>
-            <a:pPr algn="r"/>
-            <a:r>
-              <a:rPr sz="1000" b="0">
-                <a:solidFill>
-                  <a:srgbClr val="5B6770"/>
-                </a:solidFill>
-              </a:rPr>
-              <a:t>38</a:t>
-            </a:r>
-          </a:p>
-        </p:txBody>
-      </p:sp>
-      <p:sp>
-        <p:nvSpPr>
-          <p:cNvPr id="6" name="TextBox 5"/>
-          <p:cNvSpPr txBox="1"/>
-          <p:nvPr/>
-        </p:nvSpPr>
-        <p:spPr>
-          <a:xfrm>
-            <a:off x="640080" y="548640"/>
-            <a:ext cx="10911535" cy="731520"/>
-          </a:xfrm>
-          <a:prstGeom prst="rect">
-            <a:avLst/>
-          </a:prstGeom>
-          <a:noFill/>
-        </p:spPr>
-        <p:txBody>
-          <a:bodyPr wrap="square" lIns="45720" rIns="45720" anchor="ctr">
-            <a:spAutoFit/>
-          </a:bodyPr>
-          <a:lstStyle/>
-          <a:p>
-            <a:r>
-              <a:rPr sz="3000" b="1">
-                <a:solidFill>
-                  <a:srgbClr val="006D77"/>
-                </a:solidFill>
-              </a:rPr>
-              <a:t>Mistake List</a:t>
-            </a:r>
-          </a:p>
-        </p:txBody>
-      </p:sp>
-      <p:sp>
-        <p:nvSpPr>
-          <p:cNvPr id="7" name="TextBox 6"/>
-          <p:cNvSpPr txBox="1"/>
-          <p:nvPr/>
-        </p:nvSpPr>
-        <p:spPr>
-          <a:xfrm>
-            <a:off x="640080" y="1325880"/>
-            <a:ext cx="10911535" cy="1971040"/>
-          </a:xfrm>
-          <a:prstGeom prst="rect">
-            <a:avLst/>
-          </a:prstGeom>
-          <a:noFill/>
-        </p:spPr>
-        <p:txBody>
-          <a:bodyPr wrap="square" lIns="45720" rIns="45720">
-            <a:spAutoFit/>
-          </a:bodyPr>
-          <a:lstStyle/>
-          <a:p>
-            <a:pPr>
-              <a:spcAft>
-                <a:spcPts val="300"/>
-              </a:spcAft>
-            </a:pPr>
-            <a:r>
-              <a:rPr sz="2000" b="1">
-                <a:solidFill>
-                  <a:srgbClr val="006D77"/>
-                </a:solidFill>
-              </a:rPr>
-              <a:t>• </a:t>
-            </a:r>
-            <a:r>
-              <a:rPr sz="2000" b="0">
-                <a:solidFill>
-                  <a:srgbClr val="1F2D3A"/>
-                </a:solidFill>
-              </a:rPr>
-              <a:t>Guide and code version differ.</a:t>
-            </a:r>
-          </a:p>
-          <a:p>
-            <a:pPr>
-              <a:spcAft>
-                <a:spcPts val="300"/>
-              </a:spcAft>
-            </a:pPr>
-            <a:r>
-              <a:rPr sz="2000" b="1">
-                <a:solidFill>
-                  <a:srgbClr val="006D77"/>
-                </a:solidFill>
-              </a:rPr>
-              <a:t>• </a:t>
-            </a:r>
-            <a:r>
-              <a:rPr sz="2000" b="0">
-                <a:solidFill>
-                  <a:srgbClr val="1F2D3A"/>
-                </a:solidFill>
-              </a:rPr>
-              <a:t>"Done" without evidence.</a:t>
-            </a:r>
-          </a:p>
-          <a:p>
-            <a:pPr>
-              <a:spcAft>
-                <a:spcPts val="300"/>
-              </a:spcAft>
-            </a:pPr>
-            <a:r>
-              <a:rPr sz="2000" b="1">
-                <a:solidFill>
-                  <a:srgbClr val="006D77"/>
-                </a:solidFill>
-              </a:rPr>
-              <a:t>• </a:t>
-            </a:r>
-            <a:r>
-              <a:rPr sz="2000" b="0">
-                <a:solidFill>
-                  <a:srgbClr val="1F2D3A"/>
-                </a:solidFill>
-              </a:rPr>
-              <a:t>Live demo crashes (no backup).</a:t>
-            </a:r>
-          </a:p>
-          <a:p>
-            <a:pPr>
-              <a:spcAft>
-                <a:spcPts val="300"/>
-              </a:spcAft>
-            </a:pPr>
-            <a:r>
-              <a:rPr sz="2000" b="1">
-                <a:solidFill>
-                  <a:srgbClr val="006D77"/>
-                </a:solidFill>
-              </a:rPr>
-              <a:t>• </a:t>
-            </a:r>
-            <a:r>
-              <a:rPr sz="2000" b="0">
-                <a:solidFill>
-                  <a:srgbClr val="1F2D3A"/>
-                </a:solidFill>
-              </a:rPr>
-              <a:t>Remaining-risk section is empty.</a:t>
-            </a:r>
-          </a:p>
-          <a:p>
-            <a:pPr>
-              <a:spcAft>
-                <a:spcPts val="300"/>
-              </a:spcAft>
-            </a:pPr>
-            <a:r>
-              <a:rPr sz="2000" b="1">
-                <a:solidFill>
-                  <a:srgbClr val="006D77"/>
-                </a:solidFill>
-              </a:rPr>
-              <a:t>• </a:t>
-            </a:r>
-            <a:r>
-              <a:rPr sz="2000" b="0">
-                <a:solidFill>
-                  <a:srgbClr val="1F2D3A"/>
-                </a:solidFill>
-              </a:rPr>
-              <a:t>Real data in the repo.</a:t>
-            </a:r>
-          </a:p>
-        </p:txBody>
-      </p:sp>
-    </p:spTree>
-  </p:cSld>
-  <p:clrMapOvr>
-    <a:masterClrMapping/>
-  </p:clrMapOvr>
-</p:sld>
-</file>
-
-<file path=ppt/slides/slide39.xml><?xml version="1.0" encoding="utf-8"?>
-<p:sld xmlns:a="http://schemas.openxmlformats.org/drawingml/2006/main" xmlns:p="http://schemas.openxmlformats.org/presentationml/2006/main" xmlns:r="http://schemas.openxmlformats.org/officeDocument/2006/relationships">
-  <p:cSld>
-    <p:spTree>
-      <p:nvGrpSpPr>
-        <p:cNvPr id="1" name=""/>
-        <p:cNvGrpSpPr/>
-        <p:nvPr/>
-      </p:nvGrpSpPr>
-      <p:grpSpPr/>
-      <p:pic>
-        <p:nvPicPr>
-          <p:cNvPr id="2" name="Picture 1" descr="rteu_logo_kucuk.jpg"/>
-          <p:cNvPicPr>
-            <a:picLocks noChangeAspect="1"/>
-          </p:cNvPicPr>
-          <p:nvPr/>
-        </p:nvPicPr>
-        <p:blipFill>
-          <a:blip r:embed="rId2"/>
-          <a:stretch>
-            <a:fillRect/>
-          </a:stretch>
-        </p:blipFill>
-        <p:spPr>
-          <a:xfrm>
-            <a:off x="640080" y="164592"/>
-            <a:ext cx="242773" cy="329184"/>
-          </a:xfrm>
-          <a:prstGeom prst="rect">
-            <a:avLst/>
-          </a:prstGeom>
-        </p:spPr>
-      </p:pic>
-      <p:sp>
-        <p:nvSpPr>
-          <p:cNvPr id="3" name="TextBox 2"/>
-          <p:cNvSpPr txBox="1"/>
-          <p:nvPr/>
-        </p:nvSpPr>
-        <p:spPr>
-          <a:xfrm>
-            <a:off x="1051560" y="182880"/>
-            <a:ext cx="7315200" cy="320040"/>
-          </a:xfrm>
-          <a:prstGeom prst="rect">
-            <a:avLst/>
-          </a:prstGeom>
-          <a:noFill/>
-        </p:spPr>
-        <p:txBody>
-          <a:bodyPr wrap="square" lIns="45720" rIns="45720">
-            <a:spAutoFit/>
-          </a:bodyPr>
-          <a:lstStyle/>
-          <a:p>
-            <a:r>
-              <a:rPr sz="1100" b="0">
-                <a:solidFill>
-                  <a:srgbClr val="5B6770"/>
-                </a:solidFill>
-              </a:rPr>
-              <a:t>CEN429 Secure Programming · Week 7</a:t>
-            </a:r>
-          </a:p>
-        </p:txBody>
-      </p:sp>
-      <p:sp>
-        <p:nvSpPr>
-          <p:cNvPr id="4" name="TextBox 3"/>
-          <p:cNvSpPr txBox="1"/>
-          <p:nvPr/>
-        </p:nvSpPr>
-        <p:spPr>
-          <a:xfrm>
-            <a:off x="640080" y="6446520"/>
-            <a:ext cx="7315200" cy="274320"/>
-          </a:xfrm>
-          <a:prstGeom prst="rect">
-            <a:avLst/>
-          </a:prstGeom>
-          <a:noFill/>
-        </p:spPr>
-        <p:txBody>
-          <a:bodyPr wrap="square" lIns="45720" rIns="45720">
-            <a:spAutoFit/>
-          </a:bodyPr>
-          <a:lstStyle/>
-          <a:p>
-            <a:r>
-              <a:rPr sz="1000" b="0">
-                <a:solidFill>
-                  <a:srgbClr val="5B6770"/>
-                </a:solidFill>
-              </a:rPr>
-              <a:t>RTEU Computer Engineering · 2026-2027 Fall</a:t>
-            </a:r>
-          </a:p>
-        </p:txBody>
-      </p:sp>
-      <p:sp>
-        <p:nvSpPr>
-          <p:cNvPr id="5" name="TextBox 4"/>
-          <p:cNvSpPr txBox="1"/>
-          <p:nvPr/>
-        </p:nvSpPr>
-        <p:spPr>
-          <a:xfrm>
-            <a:off x="10637215" y="6446520"/>
-            <a:ext cx="914400" cy="274320"/>
-          </a:xfrm>
-          <a:prstGeom prst="rect">
-            <a:avLst/>
-          </a:prstGeom>
-          <a:noFill/>
-        </p:spPr>
-        <p:txBody>
-          <a:bodyPr wrap="square" lIns="45720" rIns="45720">
-            <a:spAutoFit/>
-          </a:bodyPr>
-          <a:lstStyle/>
-          <a:p>
-            <a:pPr algn="r"/>
-            <a:r>
-              <a:rPr sz="1000" b="0">
-                <a:solidFill>
-                  <a:srgbClr val="5B6770"/>
-                </a:solidFill>
-              </a:rPr>
-              <a:t>39</a:t>
-            </a:r>
-          </a:p>
-        </p:txBody>
-      </p:sp>
-      <p:sp>
-        <p:nvSpPr>
-          <p:cNvPr id="6" name="TextBox 5"/>
-          <p:cNvSpPr txBox="1"/>
-          <p:nvPr/>
-        </p:nvSpPr>
-        <p:spPr>
-          <a:xfrm>
-            <a:off x="640080" y="548640"/>
-            <a:ext cx="10911535" cy="731520"/>
-          </a:xfrm>
-          <a:prstGeom prst="rect">
-            <a:avLst/>
-          </a:prstGeom>
-          <a:noFill/>
-        </p:spPr>
-        <p:txBody>
-          <a:bodyPr wrap="square" lIns="45720" rIns="45720" anchor="ctr">
-            <a:spAutoFit/>
-          </a:bodyPr>
-          <a:lstStyle/>
-          <a:p>
-            <a:r>
-              <a:rPr sz="3000" b="1">
-                <a:solidFill>
-                  <a:srgbClr val="006D77"/>
-                </a:solidFill>
-              </a:rPr>
-              <a:t>Final Word (RAP1)</a:t>
-            </a:r>
-          </a:p>
-        </p:txBody>
-      </p:sp>
-      <p:sp>
-        <p:nvSpPr>
-          <p:cNvPr id="7" name="Rectangle 6"/>
-          <p:cNvSpPr/>
-          <p:nvPr/>
-        </p:nvSpPr>
-        <p:spPr>
-          <a:xfrm>
-            <a:off x="640080" y="1325880"/>
-            <a:ext cx="10911535" cy="934719"/>
-          </a:xfrm>
-          <a:prstGeom prst="rect">
-            <a:avLst/>
-          </a:prstGeom>
-          <a:solidFill>
-            <a:srgbClr val="EEF7F8"/>
-          </a:solidFill>
-          <a:ln>
-            <a:solidFill>
-              <a:srgbClr val="006D77"/>
-            </a:solidFill>
-          </a:ln>
-        </p:spPr>
-        <p:style>
-          <a:lnRef idx="1">
-            <a:schemeClr val="accent1"/>
-          </a:lnRef>
-          <a:fillRef idx="3">
-            <a:schemeClr val="accent1"/>
-          </a:fillRef>
-          <a:effectRef idx="2">
-            <a:schemeClr val="accent1"/>
-          </a:effectRef>
-          <a:fontRef idx="minor">
-            <a:schemeClr val="lt1"/>
-          </a:fontRef>
-        </p:style>
-        <p:txBody>
-          <a:bodyPr rtlCol="0" anchor="ctr" wrap="square" lIns="182880"/>
-          <a:lstStyle/>
-          <a:p>
-            <a:pPr algn="l"/>
-            <a:r>
-              <a:rPr sz="2000" b="0">
-                <a:solidFill>
-                  <a:srgbClr val="1F2D3A"/>
-                </a:solidFill>
-              </a:rPr>
-              <a:t>A demonstration is a presentation of </a:t>
-            </a:r>
-            <a:r>
-              <a:rPr sz="2000" b="1">
-                <a:solidFill>
-                  <a:srgbClr val="1F2D3A"/>
-                </a:solidFill>
-              </a:rPr>
-              <a:t>evidence</a:t>
-            </a:r>
-            <a:r>
-              <a:rPr sz="2000" b="0">
-                <a:solidFill>
-                  <a:srgbClr val="1F2D3A"/>
-                </a:solidFill>
-              </a:rPr>
-              <a:t>: every claim should be backed by a document, a test, or live output.</a:t>
-            </a:r>
-          </a:p>
-        </p:txBody>
-      </p:sp>
-      <p:sp>
-        <p:nvSpPr>
-          <p:cNvPr id="8" name="TextBox 7"/>
-          <p:cNvSpPr txBox="1"/>
-          <p:nvPr/>
-        </p:nvSpPr>
-        <p:spPr>
-          <a:xfrm>
-            <a:off x="640080" y="2370328"/>
-            <a:ext cx="10911535" cy="439928"/>
-          </a:xfrm>
-          <a:prstGeom prst="rect">
-            <a:avLst/>
-          </a:prstGeom>
-          <a:noFill/>
-        </p:spPr>
-        <p:txBody>
-          <a:bodyPr wrap="square" lIns="45720" rIns="45720">
-            <a:spAutoFit/>
-          </a:bodyPr>
-          <a:lstStyle/>
-          <a:p>
-            <a:pPr algn="l"/>
-            <a:r>
-              <a:rPr sz="2000" b="0">
-                <a:solidFill>
-                  <a:srgbClr val="1F2D3A"/>
-                </a:solidFill>
-              </a:rPr>
-              <a:t>Midterm feedback becomes a </a:t>
-            </a:r>
-            <a:r>
-              <a:rPr sz="2000" b="1">
-                <a:solidFill>
-                  <a:srgbClr val="1F2D3A"/>
-                </a:solidFill>
-              </a:rPr>
-              <a:t>finding–action</a:t>
-            </a:r>
-            <a:r>
-              <a:rPr sz="2000" b="0">
-                <a:solidFill>
-                  <a:srgbClr val="1F2D3A"/>
-                </a:solidFill>
-              </a:rPr>
-              <a:t> list at the final.</a:t>
+              <a:t>Evidence = the relevant guide section + code + test output; show at least one control for every threat.</a:t>
             </a:r>
           </a:p>
         </p:txBody>
@@ -12751,8 +6933,8 @@
         </p:blipFill>
         <p:spPr>
           <a:xfrm>
-            <a:off x="2046645" y="1325880"/>
-            <a:ext cx="8098404" cy="3210484"/>
+            <a:off x="640080" y="1325880"/>
+            <a:ext cx="10911535" cy="2397791"/>
           </a:xfrm>
           <a:prstGeom prst="rect">
             <a:avLst/>
@@ -13352,8 +7534,8 @@
         </p:blipFill>
         <p:spPr>
           <a:xfrm>
-            <a:off x="2046645" y="1325880"/>
-            <a:ext cx="8098404" cy="3778947"/>
+            <a:off x="1907058" y="1325880"/>
+            <a:ext cx="8377579" cy="4828032"/>
           </a:xfrm>
           <a:prstGeom prst="rect">
             <a:avLst/>
@@ -13554,8 +7736,8 @@
                 <a:tableStyleId>{5C22544A-7EE6-4342-B048-85BDC9FD1C3A}</a:tableStyleId>
               </a:tblPr>
               <a:tblGrid>
-                <a:gridCol w="1015026"/>
-                <a:gridCol w="9896508"/>
+                <a:gridCol w="918866"/>
+                <a:gridCol w="9992668"/>
               </a:tblGrid>
               <a:tr h="404426">
                 <a:tc>
@@ -13634,7 +7816,7 @@
                             <a:srgbClr val="1F2D3A"/>
                           </a:solidFill>
                         </a:rPr>
-                        <a:t>Repo + plan · S2 · S3 interface table · S4 STRIDE + attack tree · S5 draft</a:t>
+                        <a:t>Repo + plan · S2 · S3 interface table · S4 STRIDE + attack tree · S5 draft (C/I/I+)</a:t>
                       </a:r>
                     </a:p>
                   </a:txBody>
@@ -14034,7 +8216,7 @@
           <a:lstStyle/>
           <a:p>
             <a:r>
-              <a:rPr sz="3000" b="1">
+              <a:rPr sz="2600" b="1">
                 <a:solidFill>
                   <a:srgbClr val="006D77"/>
                 </a:solidFill>
@@ -14053,7 +8235,7 @@
         <p:spPr>
           <a:xfrm>
             <a:off x="640080" y="1325880"/>
-            <a:ext cx="10911535" cy="1971040"/>
+            <a:ext cx="10911535" cy="2103120"/>
           </a:xfrm>
           <a:prstGeom prst="rect">
             <a:avLst/>
@@ -14072,7 +8254,7 @@
               </a:spcAft>
             </a:pPr>
             <a:r>
-              <a:rPr sz="2000" b="1">
+              <a:rPr sz="1800" b="1">
                 <a:solidFill>
                   <a:srgbClr val="006D77"/>
                 </a:solidFill>
@@ -14080,7 +8262,7 @@
               <a:t>1. </a:t>
             </a:r>
             <a:r>
-              <a:rPr sz="2000" b="1">
+              <a:rPr sz="1800" b="1">
                 <a:solidFill>
                   <a:srgbClr val="1F2D3A"/>
                 </a:solidFill>
@@ -14088,12 +8270,12 @@
               <a:t>Product and architecture</a:t>
             </a:r>
             <a:r>
-              <a:rPr sz="2000" b="0">
+              <a:rPr sz="1800" b="0">
                 <a:solidFill>
                   <a:srgbClr val="1F2D3A"/>
                 </a:solidFill>
               </a:rPr>
-              <a:t> (S2–S3): one diagram, trust boundaries</a:t>
+              <a:t> (S2–S3, ~2 min): one diagram, trust boundaries</a:t>
             </a:r>
           </a:p>
           <a:p>
@@ -14103,7 +8285,7 @@
               </a:spcAft>
             </a:pPr>
             <a:r>
-              <a:rPr sz="2000" b="1">
+              <a:rPr sz="1800" b="1">
                 <a:solidFill>
                   <a:srgbClr val="006D77"/>
                 </a:solidFill>
@@ -14111,7 +8293,7 @@
               <a:t>2. </a:t>
             </a:r>
             <a:r>
-              <a:rPr sz="2000" b="1">
+              <a:rPr sz="1800" b="1">
                 <a:solidFill>
                   <a:srgbClr val="1F2D3A"/>
                 </a:solidFill>
@@ -14119,12 +8301,12 @@
               <a:t>Threats and assets</a:t>
             </a:r>
             <a:r>
-              <a:rPr sz="2000" b="0">
+              <a:rPr sz="1800" b="0">
                 <a:solidFill>
                   <a:srgbClr val="1F2D3A"/>
                 </a:solidFill>
               </a:rPr>
-              <a:t> (S4–S5): the three most critical threats</a:t>
+              <a:t> (S4–S5): the three most critical threats, a control for each</a:t>
             </a:r>
           </a:p>
           <a:p>
@@ -14134,7 +8316,7 @@
               </a:spcAft>
             </a:pPr>
             <a:r>
-              <a:rPr sz="2000" b="1">
+              <a:rPr sz="1800" b="1">
                 <a:solidFill>
                   <a:srgbClr val="006D77"/>
                 </a:solidFill>
@@ -14142,7 +8324,7 @@
               <a:t>3. </a:t>
             </a:r>
             <a:r>
-              <a:rPr sz="2000" b="1">
+              <a:rPr sz="1800" b="1">
                 <a:solidFill>
                   <a:srgbClr val="1F2D3A"/>
                 </a:solidFill>
@@ -14150,7 +8332,7 @@
               <a:t>Live demonstration:</a:t>
             </a:r>
             <a:r>
-              <a:rPr sz="2000" b="0">
+              <a:rPr sz="1800" b="0">
                 <a:solidFill>
                   <a:srgbClr val="1F2D3A"/>
                 </a:solidFill>
@@ -14158,12 +8340,20 @@
               <a:t> at least one control </a:t>
             </a:r>
             <a:r>
-              <a:rPr sz="2000" b="1">
+              <a:rPr sz="1800" b="1">
                 <a:solidFill>
                   <a:srgbClr val="1F2D3A"/>
                 </a:solidFill>
               </a:rPr>
               <a:t>working live</a:t>
+            </a:r>
+            <a:r>
+              <a:rPr sz="1800" b="0">
+                <a:solidFill>
+                  <a:srgbClr val="1F2D3A"/>
+                </a:solidFill>
+              </a:rPr>
+              <a:t> (e.g. encrypted data, signature verification, a RASP trigger) — backup video + commands ready</a:t>
             </a:r>
           </a:p>
           <a:p>
@@ -14173,7 +8363,7 @@
               </a:spcAft>
             </a:pPr>
             <a:r>
-              <a:rPr sz="2000" b="1">
+              <a:rPr sz="1800" b="1">
                 <a:solidFill>
                   <a:srgbClr val="006D77"/>
                 </a:solidFill>
@@ -14181,7 +8371,7 @@
               <a:t>4. </a:t>
             </a:r>
             <a:r>
-              <a:rPr sz="2000" b="1">
+              <a:rPr sz="1800" b="1">
                 <a:solidFill>
                   <a:srgbClr val="1F2D3A"/>
                 </a:solidFill>
@@ -14189,7 +8379,7 @@
               <a:t>Evidence:</a:t>
             </a:r>
             <a:r>
-              <a:rPr sz="2000" b="0">
+              <a:rPr sz="1800" b="0">
                 <a:solidFill>
                   <a:srgbClr val="1F2D3A"/>
                 </a:solidFill>
@@ -14204,7 +8394,7 @@
               </a:spcAft>
             </a:pPr>
             <a:r>
-              <a:rPr sz="2000" b="1">
+              <a:rPr sz="1800" b="1">
                 <a:solidFill>
                   <a:srgbClr val="006D77"/>
                 </a:solidFill>
@@ -14212,7 +8402,7 @@
               <a:t>5. </a:t>
             </a:r>
             <a:r>
-              <a:rPr sz="2000" b="1">
+              <a:rPr sz="1800" b="1">
                 <a:solidFill>
                   <a:srgbClr val="1F2D3A"/>
                 </a:solidFill>
@@ -14220,12 +8410,12 @@
               <a:t>Remaining risk and plan:</a:t>
             </a:r>
             <a:r>
-              <a:rPr sz="2000" b="0">
+              <a:rPr sz="1800" b="0">
                 <a:solidFill>
                   <a:srgbClr val="1F2D3A"/>
                 </a:solidFill>
               </a:rPr>
-              <a:t> what remains before the final?</a:t>
+              <a:t> what remains before the final? (honest analysis earns points)</a:t>
             </a:r>
           </a:p>
         </p:txBody>
@@ -14238,8 +8428,8 @@
         </p:nvSpPr>
         <p:spPr>
           <a:xfrm>
-            <a:off x="640080" y="3406648"/>
-            <a:ext cx="10911535" cy="439928"/>
+            <a:off x="640080" y="3538728"/>
+            <a:ext cx="10911535" cy="406908"/>
           </a:xfrm>
           <a:prstGeom prst="rect">
             <a:avLst/>
@@ -14254,7 +8444,7 @@
           <a:p>
             <a:pPr algn="l"/>
             <a:r>
-              <a:rPr sz="2000" b="0">
+              <a:rPr sz="1800" b="0">
                 <a:solidFill>
                   <a:srgbClr val="1F2D3A"/>
                 </a:solidFill>
@@ -14262,7 +8452,7 @@
               <a:t>For every control: </a:t>
             </a:r>
             <a:r>
-              <a:rPr sz="2000" b="1">
+              <a:rPr sz="1800" b="1">
                 <a:solidFill>
                   <a:srgbClr val="1F2D3A"/>
                 </a:solidFill>
@@ -14463,8 +8653,8 @@
         </p:blipFill>
         <p:spPr>
           <a:xfrm>
-            <a:off x="2046645" y="1325880"/>
-            <a:ext cx="8098404" cy="3864472"/>
+            <a:off x="640080" y="1325880"/>
+            <a:ext cx="10911535" cy="2216477"/>
           </a:xfrm>
           <a:prstGeom prst="rect">
             <a:avLst/>

--- a/docs/week-7/cen429-week-7-sunum.en.pptx
+++ b/docs/week-7/cen429-week-7-sunum.en.pptx
@@ -20,6 +20,7 @@
     <p:sldId id="268" r:id="rId20"/>
     <p:sldId id="269" r:id="rId21"/>
     <p:sldId id="270" r:id="rId22"/>
+    <p:sldId id="271" r:id="rId23"/>
   </p:sldIdLst>
   <p:sldSz cx="12191695" cy="6858000" type="screen4x3"/>
   <p:notesSz cx="6858000" cy="9144000"/>
@@ -3879,12 +3880,12 @@
           <a:lstStyle/>
           <a:p>
             <a:r>
-              <a:rPr sz="2600" b="1">
+              <a:rPr sz="3000" b="1">
                 <a:solidFill>
                   <a:srgbClr val="006D77"/>
                 </a:solidFill>
               </a:rPr>
-              <a:t>Sample Questions</a:t>
+              <a:t>Demo checklist</a:t>
             </a:r>
           </a:p>
         </p:txBody>
@@ -3898,7 +3899,41 @@
         <p:spPr>
           <a:xfrm>
             <a:off x="640080" y="1325880"/>
-            <a:ext cx="10911535" cy="4069080"/>
+            <a:ext cx="10911535" cy="439928"/>
+          </a:xfrm>
+          <a:prstGeom prst="rect">
+            <a:avLst/>
+          </a:prstGeom>
+          <a:noFill/>
+        </p:spPr>
+        <p:txBody>
+          <a:bodyPr wrap="square" lIns="45720" rIns="45720">
+            <a:spAutoFit/>
+          </a:bodyPr>
+          <a:lstStyle/>
+          <a:p>
+            <a:pPr algn="l"/>
+            <a:r>
+              <a:rPr sz="2000" b="0">
+                <a:solidFill>
+                  <a:srgbClr val="1F2D3A"/>
+                </a:solidFill>
+              </a:rPr>
+              <a:t>What you open and show, in this order:</a:t>
+            </a:r>
+          </a:p>
+        </p:txBody>
+      </p:sp>
+      <p:sp>
+        <p:nvSpPr>
+          <p:cNvPr id="8" name="TextBox 7"/>
+          <p:cNvSpPr txBox="1"/>
+          <p:nvPr/>
+        </p:nvSpPr>
+        <p:spPr>
+          <a:xfrm>
+            <a:off x="640080" y="1875536"/>
+            <a:ext cx="10911535" cy="3007360"/>
           </a:xfrm>
           <a:prstGeom prst="rect">
             <a:avLst/>
@@ -3917,20 +3952,70 @@
               </a:spcAft>
             </a:pPr>
             <a:r>
-              <a:rPr sz="1800" b="1">
+              <a:rPr sz="2000" b="1">
                 <a:solidFill>
                   <a:srgbClr val="006D77"/>
                 </a:solidFill>
               </a:rPr>
-              <a:t>• </a:t>
-            </a:r>
-            <a:r>
-              <a:rPr sz="1800" b="0">
+              <a:t>1. </a:t>
+            </a:r>
+            <a:r>
+              <a:rPr sz="2000" b="0">
                 <a:solidFill>
                   <a:srgbClr val="1F2D3A"/>
                 </a:solidFill>
               </a:rPr>
-              <a:t>Which flow crossing a trust boundary is the riskiest?</a:t>
+              <a:t>The </a:t>
+            </a:r>
+            <a:r>
+              <a:rPr sz="2000" b="1">
+                <a:solidFill>
+                  <a:srgbClr val="1F2D3A"/>
+                </a:solidFill>
+              </a:rPr>
+              <a:t>home page</a:t>
+            </a:r>
+            <a:r>
+              <a:rPr sz="2000" b="0">
+                <a:solidFill>
+                  <a:srgbClr val="1F2D3A"/>
+                </a:solidFill>
+              </a:rPr>
+              <a:t> of the local site (</a:t>
+            </a:r>
+            <a:r>
+              <a:rPr sz="2000" b="0">
+                <a:solidFill>
+                  <a:srgbClr val="A1123F"/>
+                </a:solidFill>
+                <a:latin typeface="Consolas"/>
+              </a:rPr>
+              <a:t>9-open-site-...</a:t>
+            </a:r>
+            <a:r>
+              <a:rPr sz="2000" b="0">
+                <a:solidFill>
+                  <a:srgbClr val="1F2D3A"/>
+                </a:solidFill>
+              </a:rPr>
+              <a:t>, on </a:t>
+            </a:r>
+            <a:r>
+              <a:rPr sz="2000" b="0">
+                <a:solidFill>
+                  <a:srgbClr val="A1123F"/>
+                </a:solidFill>
+                <a:latin typeface="Consolas"/>
+              </a:rPr>
+              <a:t>http://localhost</a:t>
+            </a:r>
+            <a:r>
+              <a:rPr sz="2000" b="0">
+                <a:solidFill>
+                  <a:srgbClr val="1F2D3A"/>
+                </a:solidFill>
+              </a:rPr>
+              <a:t>).</a:t>
             </a:r>
           </a:p>
           <a:p>
@@ -3940,20 +4025,28 @@
               </a:spcAft>
             </a:pPr>
             <a:r>
-              <a:rPr sz="1800" b="1">
+              <a:rPr sz="2000" b="1">
                 <a:solidFill>
                   <a:srgbClr val="006D77"/>
                 </a:solidFill>
               </a:rPr>
-              <a:t>• </a:t>
-            </a:r>
-            <a:r>
-              <a:rPr sz="1800" b="0">
+              <a:t>2. </a:t>
+            </a:r>
+            <a:r>
+              <a:rPr sz="2000" b="1">
                 <a:solidFill>
                   <a:srgbClr val="1F2D3A"/>
                 </a:solidFill>
               </a:rPr>
-              <a:t>How long does this asset stay unencrypted in memory, and where is it wiped?</a:t>
+              <a:t>Each report page:</a:t>
+            </a:r>
+            <a:r>
+              <a:rPr sz="2000" b="0">
+                <a:solidFill>
+                  <a:srgbClr val="1F2D3A"/>
+                </a:solidFill>
+              </a:rPr>
+              <a:t> tests, code coverage, documentation coverage (Windows and Linux).</a:t>
             </a:r>
           </a:p>
           <a:p>
@@ -3963,20 +4056,36 @@
               </a:spcAft>
             </a:pPr>
             <a:r>
-              <a:rPr sz="1800" b="1">
+              <a:rPr sz="2000" b="1">
                 <a:solidFill>
                   <a:srgbClr val="006D77"/>
                 </a:solidFill>
               </a:rPr>
-              <a:t>• </a:t>
-            </a:r>
-            <a:r>
-              <a:rPr sz="1800" b="0">
+              <a:t>3. </a:t>
+            </a:r>
+            <a:r>
+              <a:rPr sz="2000" b="0">
                 <a:solidFill>
                   <a:srgbClr val="1F2D3A"/>
                 </a:solidFill>
               </a:rPr>
-              <a:t>Where does the key come from, where does it live, when is it deleted? Can the nonce repeat?</a:t>
+              <a:t>The </a:t>
+            </a:r>
+            <a:r>
+              <a:rPr sz="2000" b="1">
+                <a:solidFill>
+                  <a:srgbClr val="1F2D3A"/>
+                </a:solidFill>
+              </a:rPr>
+              <a:t>API docs</a:t>
+            </a:r>
+            <a:r>
+              <a:rPr sz="2000" b="0">
+                <a:solidFill>
+                  <a:srgbClr val="1F2D3A"/>
+                </a:solidFill>
+              </a:rPr>
+              <a:t>.</a:t>
             </a:r>
           </a:p>
           <a:p>
@@ -3986,20 +4095,36 @@
               </a:spcAft>
             </a:pPr>
             <a:r>
-              <a:rPr sz="1800" b="1">
+              <a:rPr sz="2000" b="1">
                 <a:solidFill>
                   <a:srgbClr val="006D77"/>
                 </a:solidFill>
               </a:rPr>
-              <a:t>• </a:t>
-            </a:r>
-            <a:r>
-              <a:rPr sz="1800" b="0">
+              <a:t>4. </a:t>
+            </a:r>
+            <a:r>
+              <a:rPr sz="2000" b="0">
                 <a:solidFill>
                   <a:srgbClr val="1F2D3A"/>
                 </a:solidFill>
               </a:rPr>
-              <a:t>Which compiler protection is turned off, and why?</a:t>
+              <a:t>The </a:t>
+            </a:r>
+            <a:r>
+              <a:rPr sz="2000" b="1">
+                <a:solidFill>
+                  <a:srgbClr val="1F2D3A"/>
+                </a:solidFill>
+              </a:rPr>
+              <a:t>`release/` folder</a:t>
+            </a:r>
+            <a:r>
+              <a:rPr sz="2000" b="0">
+                <a:solidFill>
+                  <a:srgbClr val="1F2D3A"/>
+                </a:solidFill>
+              </a:rPr>
+              <a:t> listing.</a:t>
             </a:r>
           </a:p>
           <a:p>
@@ -4009,20 +4134,28 @@
               </a:spcAft>
             </a:pPr>
             <a:r>
-              <a:rPr sz="1800" b="1">
+              <a:rPr sz="2000" b="1">
                 <a:solidFill>
                   <a:srgbClr val="006D77"/>
                 </a:solidFill>
               </a:rPr>
-              <a:t>• </a:t>
-            </a:r>
-            <a:r>
-              <a:rPr sz="1800" b="0">
+              <a:t>5. </a:t>
+            </a:r>
+            <a:r>
+              <a:rPr sz="2000" b="1">
                 <a:solidFill>
                   <a:srgbClr val="1F2D3A"/>
                 </a:solidFill>
               </a:rPr>
-              <a:t>What happens when a RASP check fails?</a:t>
+              <a:t>Run the app</a:t>
+            </a:r>
+            <a:r>
+              <a:rPr sz="2000" b="0">
+                <a:solidFill>
+                  <a:srgbClr val="1F2D3A"/>
+                </a:solidFill>
+              </a:rPr>
+              <a:t> from the release archive.</a:t>
             </a:r>
           </a:p>
           <a:p>
@@ -4032,89 +4165,36 @@
               </a:spcAft>
             </a:pPr>
             <a:r>
-              <a:rPr sz="1800" b="1">
+              <a:rPr sz="2000" b="1">
                 <a:solidFill>
                   <a:srgbClr val="006D77"/>
                 </a:solidFill>
               </a:rPr>
-              <a:t>• </a:t>
-            </a:r>
-            <a:r>
-              <a:rPr sz="1800" b="0">
+              <a:t>6. </a:t>
+            </a:r>
+            <a:r>
+              <a:rPr sz="2000" b="0">
                 <a:solidFill>
                   <a:srgbClr val="1F2D3A"/>
                 </a:solidFill>
               </a:rPr>
-              <a:t>Does the SBOM contain a vulnerable component? Are you affected?</a:t>
-            </a:r>
-          </a:p>
-          <a:p>
-            <a:pPr>
-              <a:spcAft>
-                <a:spcPts val="300"/>
-              </a:spcAft>
-            </a:pPr>
-            <a:r>
-              <a:rPr sz="1800" b="1">
-                <a:solidFill>
-                  <a:srgbClr val="006D77"/>
-                </a:solidFill>
-              </a:rPr>
-              <a:t>• </a:t>
-            </a:r>
-            <a:r>
-              <a:rPr sz="1800" b="0">
+              <a:t>The </a:t>
+            </a:r>
+            <a:r>
+              <a:rPr sz="2000" b="1">
                 <a:solidFill>
                   <a:srgbClr val="1F2D3A"/>
                 </a:solidFill>
               </a:rPr>
-              <a:t>What are your three most critical assets, their C/I/I+ labels, and their lifecycle?</a:t>
-            </a:r>
-          </a:p>
-          <a:p>
-            <a:pPr>
-              <a:spcAft>
-                <a:spcPts val="300"/>
-              </a:spcAft>
-            </a:pPr>
-            <a:r>
-              <a:rPr sz="1800" b="1">
-                <a:solidFill>
-                  <a:srgbClr val="006D77"/>
-                </a:solidFill>
-              </a:rPr>
-              <a:t>• </a:t>
-            </a:r>
-            <a:r>
-              <a:rPr sz="1800" b="0">
+              <a:t>GitHub Release page</a:t>
+            </a:r>
+            <a:r>
+              <a:rPr sz="2000" b="0">
                 <a:solidFill>
                   <a:srgbClr val="1F2D3A"/>
                 </a:solidFill>
               </a:rPr>
-              <a:t>Which control addresses a given threat, and how was it verified? (threat → control → evidence)</a:t>
-            </a:r>
-          </a:p>
-          <a:p>
-            <a:pPr>
-              <a:spcAft>
-                <a:spcPts val="300"/>
-              </a:spcAft>
-            </a:pPr>
-            <a:r>
-              <a:rPr sz="1800" b="1">
-                <a:solidFill>
-                  <a:srgbClr val="006D77"/>
-                </a:solidFill>
-              </a:rPr>
-              <a:t>• </a:t>
-            </a:r>
-            <a:r>
-              <a:rPr sz="1800" b="0">
-                <a:solidFill>
-                  <a:srgbClr val="1F2D3A"/>
-                </a:solidFill>
-              </a:rPr>
-              <a:t>What is your remaining risk, and why is it acceptable? (answer honestly and with justification)</a:t>
+              <a:t> of your private repository (the instructor is a collaborator).</a:t>
             </a:r>
           </a:p>
         </p:txBody>
@@ -4257,6 +4337,411 @@
                 </a:solidFill>
               </a:rPr>
               <a:t>11</a:t>
+            </a:r>
+          </a:p>
+        </p:txBody>
+      </p:sp>
+      <p:sp>
+        <p:nvSpPr>
+          <p:cNvPr id="6" name="TextBox 5"/>
+          <p:cNvSpPr txBox="1"/>
+          <p:nvPr/>
+        </p:nvSpPr>
+        <p:spPr>
+          <a:xfrm>
+            <a:off x="640080" y="548640"/>
+            <a:ext cx="10911535" cy="731520"/>
+          </a:xfrm>
+          <a:prstGeom prst="rect">
+            <a:avLst/>
+          </a:prstGeom>
+          <a:noFill/>
+        </p:spPr>
+        <p:txBody>
+          <a:bodyPr wrap="square" lIns="45720" rIns="45720" anchor="ctr">
+            <a:spAutoFit/>
+          </a:bodyPr>
+          <a:lstStyle/>
+          <a:p>
+            <a:r>
+              <a:rPr sz="2600" b="1">
+                <a:solidFill>
+                  <a:srgbClr val="006D77"/>
+                </a:solidFill>
+              </a:rPr>
+              <a:t>Sample Questions</a:t>
+            </a:r>
+          </a:p>
+        </p:txBody>
+      </p:sp>
+      <p:sp>
+        <p:nvSpPr>
+          <p:cNvPr id="7" name="TextBox 6"/>
+          <p:cNvSpPr txBox="1"/>
+          <p:nvPr/>
+        </p:nvSpPr>
+        <p:spPr>
+          <a:xfrm>
+            <a:off x="640080" y="1325880"/>
+            <a:ext cx="10911535" cy="4069080"/>
+          </a:xfrm>
+          <a:prstGeom prst="rect">
+            <a:avLst/>
+          </a:prstGeom>
+          <a:noFill/>
+        </p:spPr>
+        <p:txBody>
+          <a:bodyPr wrap="square" lIns="45720" rIns="45720">
+            <a:spAutoFit/>
+          </a:bodyPr>
+          <a:lstStyle/>
+          <a:p>
+            <a:pPr>
+              <a:spcAft>
+                <a:spcPts val="300"/>
+              </a:spcAft>
+            </a:pPr>
+            <a:r>
+              <a:rPr sz="1800" b="1">
+                <a:solidFill>
+                  <a:srgbClr val="006D77"/>
+                </a:solidFill>
+              </a:rPr>
+              <a:t>• </a:t>
+            </a:r>
+            <a:r>
+              <a:rPr sz="1800" b="0">
+                <a:solidFill>
+                  <a:srgbClr val="1F2D3A"/>
+                </a:solidFill>
+              </a:rPr>
+              <a:t>Which flow crossing a trust boundary is the riskiest?</a:t>
+            </a:r>
+          </a:p>
+          <a:p>
+            <a:pPr>
+              <a:spcAft>
+                <a:spcPts val="300"/>
+              </a:spcAft>
+            </a:pPr>
+            <a:r>
+              <a:rPr sz="1800" b="1">
+                <a:solidFill>
+                  <a:srgbClr val="006D77"/>
+                </a:solidFill>
+              </a:rPr>
+              <a:t>• </a:t>
+            </a:r>
+            <a:r>
+              <a:rPr sz="1800" b="0">
+                <a:solidFill>
+                  <a:srgbClr val="1F2D3A"/>
+                </a:solidFill>
+              </a:rPr>
+              <a:t>How long does this asset stay unencrypted in memory, and where is it wiped?</a:t>
+            </a:r>
+          </a:p>
+          <a:p>
+            <a:pPr>
+              <a:spcAft>
+                <a:spcPts val="300"/>
+              </a:spcAft>
+            </a:pPr>
+            <a:r>
+              <a:rPr sz="1800" b="1">
+                <a:solidFill>
+                  <a:srgbClr val="006D77"/>
+                </a:solidFill>
+              </a:rPr>
+              <a:t>• </a:t>
+            </a:r>
+            <a:r>
+              <a:rPr sz="1800" b="0">
+                <a:solidFill>
+                  <a:srgbClr val="1F2D3A"/>
+                </a:solidFill>
+              </a:rPr>
+              <a:t>Where does the key come from, where does it live, when is it deleted? Can the nonce repeat?</a:t>
+            </a:r>
+          </a:p>
+          <a:p>
+            <a:pPr>
+              <a:spcAft>
+                <a:spcPts val="300"/>
+              </a:spcAft>
+            </a:pPr>
+            <a:r>
+              <a:rPr sz="1800" b="1">
+                <a:solidFill>
+                  <a:srgbClr val="006D77"/>
+                </a:solidFill>
+              </a:rPr>
+              <a:t>• </a:t>
+            </a:r>
+            <a:r>
+              <a:rPr sz="1800" b="0">
+                <a:solidFill>
+                  <a:srgbClr val="1F2D3A"/>
+                </a:solidFill>
+              </a:rPr>
+              <a:t>Which compiler protection is turned off, and why?</a:t>
+            </a:r>
+          </a:p>
+          <a:p>
+            <a:pPr>
+              <a:spcAft>
+                <a:spcPts val="300"/>
+              </a:spcAft>
+            </a:pPr>
+            <a:r>
+              <a:rPr sz="1800" b="1">
+                <a:solidFill>
+                  <a:srgbClr val="006D77"/>
+                </a:solidFill>
+              </a:rPr>
+              <a:t>• </a:t>
+            </a:r>
+            <a:r>
+              <a:rPr sz="1800" b="0">
+                <a:solidFill>
+                  <a:srgbClr val="1F2D3A"/>
+                </a:solidFill>
+              </a:rPr>
+              <a:t>What happens when a RASP check fails?</a:t>
+            </a:r>
+          </a:p>
+          <a:p>
+            <a:pPr>
+              <a:spcAft>
+                <a:spcPts val="300"/>
+              </a:spcAft>
+            </a:pPr>
+            <a:r>
+              <a:rPr sz="1800" b="1">
+                <a:solidFill>
+                  <a:srgbClr val="006D77"/>
+                </a:solidFill>
+              </a:rPr>
+              <a:t>• </a:t>
+            </a:r>
+            <a:r>
+              <a:rPr sz="1800" b="0">
+                <a:solidFill>
+                  <a:srgbClr val="1F2D3A"/>
+                </a:solidFill>
+              </a:rPr>
+              <a:t>Does the SBOM contain a vulnerable component? Are you affected?</a:t>
+            </a:r>
+          </a:p>
+          <a:p>
+            <a:pPr>
+              <a:spcAft>
+                <a:spcPts val="300"/>
+              </a:spcAft>
+            </a:pPr>
+            <a:r>
+              <a:rPr sz="1800" b="1">
+                <a:solidFill>
+                  <a:srgbClr val="006D77"/>
+                </a:solidFill>
+              </a:rPr>
+              <a:t>• </a:t>
+            </a:r>
+            <a:r>
+              <a:rPr sz="1800" b="0">
+                <a:solidFill>
+                  <a:srgbClr val="1F2D3A"/>
+                </a:solidFill>
+              </a:rPr>
+              <a:t>What are your three most critical assets, their C/I/I+ labels, and their lifecycle?</a:t>
+            </a:r>
+          </a:p>
+          <a:p>
+            <a:pPr>
+              <a:spcAft>
+                <a:spcPts val="300"/>
+              </a:spcAft>
+            </a:pPr>
+            <a:r>
+              <a:rPr sz="1800" b="1">
+                <a:solidFill>
+                  <a:srgbClr val="006D77"/>
+                </a:solidFill>
+              </a:rPr>
+              <a:t>• </a:t>
+            </a:r>
+            <a:r>
+              <a:rPr sz="1800" b="0">
+                <a:solidFill>
+                  <a:srgbClr val="1F2D3A"/>
+                </a:solidFill>
+              </a:rPr>
+              <a:t>Which control addresses a given threat, and how was it verified? (threat → control → evidence)</a:t>
+            </a:r>
+          </a:p>
+          <a:p>
+            <a:pPr>
+              <a:spcAft>
+                <a:spcPts val="300"/>
+              </a:spcAft>
+            </a:pPr>
+            <a:r>
+              <a:rPr sz="1800" b="1">
+                <a:solidFill>
+                  <a:srgbClr val="006D77"/>
+                </a:solidFill>
+              </a:rPr>
+              <a:t>• </a:t>
+            </a:r>
+            <a:r>
+              <a:rPr sz="1800" b="0">
+                <a:solidFill>
+                  <a:srgbClr val="1F2D3A"/>
+                </a:solidFill>
+              </a:rPr>
+              <a:t>What is your remaining risk, and why is it acceptable? (answer honestly and with justification)</a:t>
+            </a:r>
+          </a:p>
+        </p:txBody>
+      </p:sp>
+    </p:spTree>
+  </p:cSld>
+  <p:clrMapOvr>
+    <a:masterClrMapping/>
+  </p:clrMapOvr>
+</p:sld>
+</file>
+
+<file path=ppt/slides/slide12.xml><?xml version="1.0" encoding="utf-8"?>
+<p:sld xmlns:a="http://schemas.openxmlformats.org/drawingml/2006/main" xmlns:p="http://schemas.openxmlformats.org/presentationml/2006/main" xmlns:r="http://schemas.openxmlformats.org/officeDocument/2006/relationships">
+  <p:cSld>
+    <p:spTree>
+      <p:nvGrpSpPr>
+        <p:cNvPr id="1" name=""/>
+        <p:cNvGrpSpPr/>
+        <p:nvPr/>
+      </p:nvGrpSpPr>
+      <p:grpSpPr/>
+      <p:pic>
+        <p:nvPicPr>
+          <p:cNvPr id="2" name="Picture 1" descr="rteu_logo_kucuk.jpg"/>
+          <p:cNvPicPr>
+            <a:picLocks noChangeAspect="1"/>
+          </p:cNvPicPr>
+          <p:nvPr/>
+        </p:nvPicPr>
+        <p:blipFill>
+          <a:blip r:embed="rId2"/>
+          <a:stretch>
+            <a:fillRect/>
+          </a:stretch>
+        </p:blipFill>
+        <p:spPr>
+          <a:xfrm>
+            <a:off x="640080" y="164592"/>
+            <a:ext cx="242773" cy="329184"/>
+          </a:xfrm>
+          <a:prstGeom prst="rect">
+            <a:avLst/>
+          </a:prstGeom>
+        </p:spPr>
+      </p:pic>
+      <p:sp>
+        <p:nvSpPr>
+          <p:cNvPr id="3" name="TextBox 2"/>
+          <p:cNvSpPr txBox="1"/>
+          <p:nvPr/>
+        </p:nvSpPr>
+        <p:spPr>
+          <a:xfrm>
+            <a:off x="1051560" y="182880"/>
+            <a:ext cx="7315200" cy="320040"/>
+          </a:xfrm>
+          <a:prstGeom prst="rect">
+            <a:avLst/>
+          </a:prstGeom>
+          <a:noFill/>
+        </p:spPr>
+        <p:txBody>
+          <a:bodyPr wrap="square" lIns="45720" rIns="45720">
+            <a:spAutoFit/>
+          </a:bodyPr>
+          <a:lstStyle/>
+          <a:p>
+            <a:r>
+              <a:rPr sz="1100" b="0">
+                <a:solidFill>
+                  <a:srgbClr val="5B6770"/>
+                </a:solidFill>
+              </a:rPr>
+              <a:t>CEN429 Secure Programming · Week 7</a:t>
+            </a:r>
+          </a:p>
+        </p:txBody>
+      </p:sp>
+      <p:sp>
+        <p:nvSpPr>
+          <p:cNvPr id="4" name="TextBox 3"/>
+          <p:cNvSpPr txBox="1"/>
+          <p:nvPr/>
+        </p:nvSpPr>
+        <p:spPr>
+          <a:xfrm>
+            <a:off x="640080" y="6446520"/>
+            <a:ext cx="7315200" cy="274320"/>
+          </a:xfrm>
+          <a:prstGeom prst="rect">
+            <a:avLst/>
+          </a:prstGeom>
+          <a:noFill/>
+        </p:spPr>
+        <p:txBody>
+          <a:bodyPr wrap="square" lIns="45720" rIns="45720">
+            <a:spAutoFit/>
+          </a:bodyPr>
+          <a:lstStyle/>
+          <a:p>
+            <a:r>
+              <a:rPr sz="1000" b="0">
+                <a:solidFill>
+                  <a:srgbClr val="5B6770"/>
+                </a:solidFill>
+              </a:rPr>
+              <a:t>RTEU Computer Engineering · 2026-2027 Fall</a:t>
+            </a:r>
+          </a:p>
+        </p:txBody>
+      </p:sp>
+      <p:sp>
+        <p:nvSpPr>
+          <p:cNvPr id="5" name="TextBox 4"/>
+          <p:cNvSpPr txBox="1"/>
+          <p:nvPr/>
+        </p:nvSpPr>
+        <p:spPr>
+          <a:xfrm>
+            <a:off x="10637215" y="6446520"/>
+            <a:ext cx="914400" cy="274320"/>
+          </a:xfrm>
+          <a:prstGeom prst="rect">
+            <a:avLst/>
+          </a:prstGeom>
+          <a:noFill/>
+        </p:spPr>
+        <p:txBody>
+          <a:bodyPr wrap="square" lIns="45720" rIns="45720">
+            <a:spAutoFit/>
+          </a:bodyPr>
+          <a:lstStyle/>
+          <a:p>
+            <a:pPr algn="r"/>
+            <a:r>
+              <a:rPr sz="1000" b="0">
+                <a:solidFill>
+                  <a:srgbClr val="5B6770"/>
+                </a:solidFill>
+              </a:rPr>
+              <a:t>12</a:t>
             </a:r>
           </a:p>
         </p:txBody>
@@ -4688,205 +5173,6 @@
 </p:sld>
 </file>
 
-<file path=ppt/slides/slide12.xml><?xml version="1.0" encoding="utf-8"?>
-<p:sld xmlns:a="http://schemas.openxmlformats.org/drawingml/2006/main" xmlns:p="http://schemas.openxmlformats.org/presentationml/2006/main" xmlns:r="http://schemas.openxmlformats.org/officeDocument/2006/relationships">
-  <p:cSld>
-    <p:spTree>
-      <p:nvGrpSpPr>
-        <p:cNvPr id="1" name=""/>
-        <p:cNvGrpSpPr/>
-        <p:nvPr/>
-      </p:nvGrpSpPr>
-      <p:grpSpPr/>
-      <p:pic>
-        <p:nvPicPr>
-          <p:cNvPr id="2" name="Picture 1" descr="rteu_logo_kucuk.jpg"/>
-          <p:cNvPicPr>
-            <a:picLocks noChangeAspect="1"/>
-          </p:cNvPicPr>
-          <p:nvPr/>
-        </p:nvPicPr>
-        <p:blipFill>
-          <a:blip r:embed="rId2"/>
-          <a:stretch>
-            <a:fillRect/>
-          </a:stretch>
-        </p:blipFill>
-        <p:spPr>
-          <a:xfrm>
-            <a:off x="640080" y="164592"/>
-            <a:ext cx="242773" cy="329184"/>
-          </a:xfrm>
-          <a:prstGeom prst="rect">
-            <a:avLst/>
-          </a:prstGeom>
-        </p:spPr>
-      </p:pic>
-      <p:sp>
-        <p:nvSpPr>
-          <p:cNvPr id="3" name="TextBox 2"/>
-          <p:cNvSpPr txBox="1"/>
-          <p:nvPr/>
-        </p:nvSpPr>
-        <p:spPr>
-          <a:xfrm>
-            <a:off x="1051560" y="182880"/>
-            <a:ext cx="7315200" cy="320040"/>
-          </a:xfrm>
-          <a:prstGeom prst="rect">
-            <a:avLst/>
-          </a:prstGeom>
-          <a:noFill/>
-        </p:spPr>
-        <p:txBody>
-          <a:bodyPr wrap="square" lIns="45720" rIns="45720">
-            <a:spAutoFit/>
-          </a:bodyPr>
-          <a:lstStyle/>
-          <a:p>
-            <a:r>
-              <a:rPr sz="1100" b="0">
-                <a:solidFill>
-                  <a:srgbClr val="5B6770"/>
-                </a:solidFill>
-              </a:rPr>
-              <a:t>CEN429 Secure Programming · Week 7</a:t>
-            </a:r>
-          </a:p>
-        </p:txBody>
-      </p:sp>
-      <p:sp>
-        <p:nvSpPr>
-          <p:cNvPr id="4" name="TextBox 3"/>
-          <p:cNvSpPr txBox="1"/>
-          <p:nvPr/>
-        </p:nvSpPr>
-        <p:spPr>
-          <a:xfrm>
-            <a:off x="640080" y="6446520"/>
-            <a:ext cx="7315200" cy="274320"/>
-          </a:xfrm>
-          <a:prstGeom prst="rect">
-            <a:avLst/>
-          </a:prstGeom>
-          <a:noFill/>
-        </p:spPr>
-        <p:txBody>
-          <a:bodyPr wrap="square" lIns="45720" rIns="45720">
-            <a:spAutoFit/>
-          </a:bodyPr>
-          <a:lstStyle/>
-          <a:p>
-            <a:r>
-              <a:rPr sz="1000" b="0">
-                <a:solidFill>
-                  <a:srgbClr val="5B6770"/>
-                </a:solidFill>
-              </a:rPr>
-              <a:t>RTEU Computer Engineering · 2026-2027 Fall</a:t>
-            </a:r>
-          </a:p>
-        </p:txBody>
-      </p:sp>
-      <p:sp>
-        <p:nvSpPr>
-          <p:cNvPr id="5" name="TextBox 4"/>
-          <p:cNvSpPr txBox="1"/>
-          <p:nvPr/>
-        </p:nvSpPr>
-        <p:spPr>
-          <a:xfrm>
-            <a:off x="10637215" y="6446520"/>
-            <a:ext cx="914400" cy="274320"/>
-          </a:xfrm>
-          <a:prstGeom prst="rect">
-            <a:avLst/>
-          </a:prstGeom>
-          <a:noFill/>
-        </p:spPr>
-        <p:txBody>
-          <a:bodyPr wrap="square" lIns="45720" rIns="45720">
-            <a:spAutoFit/>
-          </a:bodyPr>
-          <a:lstStyle/>
-          <a:p>
-            <a:pPr algn="r"/>
-            <a:r>
-              <a:rPr sz="1000" b="0">
-                <a:solidFill>
-                  <a:srgbClr val="5B6770"/>
-                </a:solidFill>
-              </a:rPr>
-              <a:t>12</a:t>
-            </a:r>
-          </a:p>
-        </p:txBody>
-      </p:sp>
-      <p:sp>
-        <p:nvSpPr>
-          <p:cNvPr id="6" name="TextBox 5"/>
-          <p:cNvSpPr txBox="1"/>
-          <p:nvPr/>
-        </p:nvSpPr>
-        <p:spPr>
-          <a:xfrm>
-            <a:off x="640080" y="548640"/>
-            <a:ext cx="10911535" cy="731520"/>
-          </a:xfrm>
-          <a:prstGeom prst="rect">
-            <a:avLst/>
-          </a:prstGeom>
-          <a:noFill/>
-        </p:spPr>
-        <p:txBody>
-          <a:bodyPr wrap="square" lIns="45720" rIns="45720" anchor="ctr">
-            <a:spAutoFit/>
-          </a:bodyPr>
-          <a:lstStyle/>
-          <a:p>
-            <a:r>
-              <a:rPr sz="3000" b="1">
-                <a:solidFill>
-                  <a:srgbClr val="006D77"/>
-                </a:solidFill>
-              </a:rPr>
-              <a:t>Common Mistakes — Diagram</a:t>
-            </a:r>
-          </a:p>
-        </p:txBody>
-      </p:sp>
-      <p:pic>
-        <p:nvPicPr>
-          <p:cNvPr id="7" name="Picture 6" descr="h07-03-sik-hatalar.png"/>
-          <p:cNvPicPr>
-            <a:picLocks noChangeAspect="1"/>
-          </p:cNvPicPr>
-          <p:nvPr/>
-        </p:nvPicPr>
-        <p:blipFill>
-          <a:blip r:embed="rId3"/>
-          <a:stretch>
-            <a:fillRect/>
-          </a:stretch>
-        </p:blipFill>
-        <p:spPr>
-          <a:xfrm>
-            <a:off x="640080" y="1325880"/>
-            <a:ext cx="10911535" cy="3481384"/>
-          </a:xfrm>
-          <a:prstGeom prst="rect">
-            <a:avLst/>
-          </a:prstGeom>
-        </p:spPr>
-      </p:pic>
-    </p:spTree>
-  </p:cSld>
-  <p:clrMapOvr>
-    <a:masterClrMapping/>
-  </p:clrMapOvr>
-</p:sld>
-</file>
-
 <file path=ppt/slides/slide13.xml><?xml version="1.0" encoding="utf-8"?>
 <p:sld xmlns:a="http://schemas.openxmlformats.org/drawingml/2006/main" xmlns:p="http://schemas.openxmlformats.org/presentationml/2006/main" xmlns:r="http://schemas.openxmlformats.org/officeDocument/2006/relationships">
   <p:cSld>
@@ -5049,111 +5335,35 @@
                   <a:srgbClr val="006D77"/>
                 </a:solidFill>
               </a:rPr>
-              <a:t>Academic Integrity</a:t>
-            </a:r>
-          </a:p>
-        </p:txBody>
-      </p:sp>
-      <p:sp>
-        <p:nvSpPr>
-          <p:cNvPr id="7" name="TextBox 6"/>
-          <p:cNvSpPr txBox="1"/>
-          <p:nvPr/>
-        </p:nvSpPr>
+              <a:t>Common Mistakes — Diagram</a:t>
+            </a:r>
+          </a:p>
+        </p:txBody>
+      </p:sp>
+      <p:pic>
+        <p:nvPicPr>
+          <p:cNvPr id="7" name="Picture 6" descr="h07-03-sik-hatalar.png"/>
+          <p:cNvPicPr>
+            <a:picLocks noChangeAspect="1"/>
+          </p:cNvPicPr>
+          <p:nvPr/>
+        </p:nvPicPr>
+        <p:blipFill>
+          <a:blip r:embed="rId3"/>
+          <a:stretch>
+            <a:fillRect/>
+          </a:stretch>
+        </p:blipFill>
         <p:spPr>
           <a:xfrm>
             <a:off x="640080" y="1325880"/>
-            <a:ext cx="10911535" cy="1879600"/>
-          </a:xfrm>
-          <a:prstGeom prst="rect">
-            <a:avLst/>
-          </a:prstGeom>
-          <a:noFill/>
-        </p:spPr>
-        <p:txBody>
-          <a:bodyPr wrap="square" lIns="45720" rIns="45720">
-            <a:spAutoFit/>
-          </a:bodyPr>
-          <a:lstStyle/>
-          <a:p>
-            <a:pPr>
-              <a:spcAft>
-                <a:spcPts val="300"/>
-              </a:spcAft>
-            </a:pPr>
-            <a:r>
-              <a:rPr sz="2000" b="1">
-                <a:solidFill>
-                  <a:srgbClr val="006D77"/>
-                </a:solidFill>
-              </a:rPr>
-              <a:t>• </a:t>
-            </a:r>
-            <a:r>
-              <a:rPr sz="2000" b="0">
-                <a:solidFill>
-                  <a:srgbClr val="1F2D3A"/>
-                </a:solidFill>
-              </a:rPr>
-              <a:t>Uncredited code/text, work from outside the team, fabricated results </a:t>
-            </a:r>
-            <a:r>
-              <a:rPr sz="2000" b="1">
-                <a:solidFill>
-                  <a:srgbClr val="1F2D3A"/>
-                </a:solidFill>
-              </a:rPr>
-              <a:t>are not acceptable</a:t>
-            </a:r>
-          </a:p>
-          <a:p>
-            <a:pPr>
-              <a:spcAft>
-                <a:spcPts val="300"/>
-              </a:spcAft>
-            </a:pPr>
-            <a:r>
-              <a:rPr sz="2000" b="1">
-                <a:solidFill>
-                  <a:srgbClr val="006D77"/>
-                </a:solidFill>
-              </a:rPr>
-              <a:t>• </a:t>
-            </a:r>
-            <a:r>
-              <a:rPr sz="2000" b="0">
-                <a:solidFill>
-                  <a:srgbClr val="1F2D3A"/>
-                </a:solidFill>
-              </a:rPr>
-              <a:t>Every submitted line must be explainable</a:t>
-            </a:r>
-          </a:p>
-          <a:p>
-            <a:pPr>
-              <a:spcAft>
-                <a:spcPts val="300"/>
-              </a:spcAft>
-            </a:pPr>
-            <a:r>
-              <a:rPr sz="2000" b="1">
-                <a:solidFill>
-                  <a:srgbClr val="006D77"/>
-                </a:solidFill>
-              </a:rPr>
-              <a:t>• </a:t>
-            </a:r>
-            <a:r>
-              <a:rPr sz="2000" b="0">
-                <a:solidFill>
-                  <a:srgbClr val="1F2D3A"/>
-                </a:solidFill>
-              </a:rPr>
-              <a:t>Any team member should be able to present their own section; anyone may be asked a question</a:t>
-            </a:r>
-          </a:p>
-        </p:txBody>
-      </p:sp>
+            <a:ext cx="10911535" cy="3481384"/>
+          </a:xfrm>
+          <a:prstGeom prst="rect">
+            <a:avLst/>
+          </a:prstGeom>
+        </p:spPr>
+      </p:pic>
     </p:spTree>
   </p:cSld>
   <p:clrMapOvr>
@@ -5324,7 +5534,7 @@
                   <a:srgbClr val="006D77"/>
                 </a:solidFill>
               </a:rPr>
-              <a:t>After the Demonstration</a:t>
+              <a:t>Academic Integrity</a:t>
             </a:r>
           </a:p>
         </p:txBody>
@@ -5338,7 +5548,7 @@
         <p:spPr>
           <a:xfrm>
             <a:off x="640080" y="1325880"/>
-            <a:ext cx="10911535" cy="1173480"/>
+            <a:ext cx="10911535" cy="1879600"/>
           </a:xfrm>
           <a:prstGeom prst="rect">
             <a:avLst/>
@@ -5370,7 +5580,7 @@
                   <a:srgbClr val="1F2D3A"/>
                 </a:solidFill>
               </a:rPr>
-              <a:t>Write the feedback as a </a:t>
+              <a:t>Uncredited code/text, work from outside the team, fabricated results </a:t>
             </a:r>
             <a:r>
               <a:rPr sz="2000" b="1">
@@ -5378,15 +5588,7 @@
                   <a:srgbClr val="1F2D3A"/>
                 </a:solidFill>
               </a:rPr>
-              <a:t>finding list</a:t>
-            </a:r>
-            <a:r>
-              <a:rPr sz="2000" b="0">
-                <a:solidFill>
-                  <a:srgbClr val="1F2D3A"/>
-                </a:solidFill>
-              </a:rPr>
-              <a:t> (finding · severity · fix · date) → a small model of Week 12</a:t>
+              <a:t>are not acceptable</a:t>
             </a:r>
           </a:p>
           <a:p>
@@ -5409,76 +5611,30 @@
                   <a:srgbClr val="1F2D3A"/>
                 </a:solidFill>
               </a:rPr>
-              <a:t>Final sections: S6 · S8 · S11 · S14 · S15 · S16 results · S17</a:t>
-            </a:r>
-          </a:p>
-        </p:txBody>
-      </p:sp>
-      <p:sp>
-        <p:nvSpPr>
-          <p:cNvPr id="8" name="Rectangle 7"/>
-          <p:cNvSpPr/>
-          <p:nvPr/>
-        </p:nvSpPr>
-        <p:spPr>
-          <a:xfrm>
-            <a:off x="640080" y="2609088"/>
-            <a:ext cx="10911535" cy="934719"/>
-          </a:xfrm>
-          <a:prstGeom prst="rect">
-            <a:avLst/>
-          </a:prstGeom>
-          <a:solidFill>
-            <a:srgbClr val="EEF7F8"/>
-          </a:solidFill>
-          <a:ln>
-            <a:solidFill>
-              <a:srgbClr val="006D77"/>
-            </a:solidFill>
-          </a:ln>
-        </p:spPr>
-        <p:style>
-          <a:lnRef idx="1">
-            <a:schemeClr val="accent1"/>
-          </a:lnRef>
-          <a:fillRef idx="3">
-            <a:schemeClr val="accent1"/>
-          </a:fillRef>
-          <a:effectRef idx="2">
-            <a:schemeClr val="accent1"/>
-          </a:effectRef>
-          <a:fontRef idx="minor">
-            <a:schemeClr val="lt1"/>
-          </a:fontRef>
-        </p:style>
-        <p:txBody>
-          <a:bodyPr rtlCol="0" anchor="ctr" wrap="square" lIns="182880"/>
-          <a:lstStyle/>
-          <a:p>
-            <a:pPr algn="l"/>
+              <a:t>Every submitted line must be explainable</a:t>
+            </a:r>
+          </a:p>
+          <a:p>
+            <a:pPr>
+              <a:spcAft>
+                <a:spcPts val="300"/>
+              </a:spcAft>
+            </a:pPr>
+            <a:r>
+              <a:rPr sz="2000" b="1">
+                <a:solidFill>
+                  <a:srgbClr val="006D77"/>
+                </a:solidFill>
+              </a:rPr>
+              <a:t>• </a:t>
+            </a:r>
             <a:r>
               <a:rPr sz="2000" b="0">
                 <a:solidFill>
                   <a:srgbClr val="1F2D3A"/>
                 </a:solidFill>
               </a:rPr>
-              <a:t>A demonstration is a presentation of </a:t>
-            </a:r>
-            <a:r>
-              <a:rPr sz="2000" b="1">
-                <a:solidFill>
-                  <a:srgbClr val="1F2D3A"/>
-                </a:solidFill>
-              </a:rPr>
-              <a:t>evidence</a:t>
-            </a:r>
-            <a:r>
-              <a:rPr sz="2000" b="0">
-                <a:solidFill>
-                  <a:srgbClr val="1F2D3A"/>
-                </a:solidFill>
-              </a:rPr>
-              <a:t>: every claim should be backed by a document, a test, or live output.</a:t>
+              <a:t>Any team member should be able to present their own section; anyone may be asked a question</a:t>
             </a:r>
           </a:p>
         </p:txBody>
@@ -5621,6 +5777,335 @@
                 </a:solidFill>
               </a:rPr>
               <a:t>15</a:t>
+            </a:r>
+          </a:p>
+        </p:txBody>
+      </p:sp>
+      <p:sp>
+        <p:nvSpPr>
+          <p:cNvPr id="6" name="TextBox 5"/>
+          <p:cNvSpPr txBox="1"/>
+          <p:nvPr/>
+        </p:nvSpPr>
+        <p:spPr>
+          <a:xfrm>
+            <a:off x="640080" y="548640"/>
+            <a:ext cx="10911535" cy="731520"/>
+          </a:xfrm>
+          <a:prstGeom prst="rect">
+            <a:avLst/>
+          </a:prstGeom>
+          <a:noFill/>
+        </p:spPr>
+        <p:txBody>
+          <a:bodyPr wrap="square" lIns="45720" rIns="45720" anchor="ctr">
+            <a:spAutoFit/>
+          </a:bodyPr>
+          <a:lstStyle/>
+          <a:p>
+            <a:r>
+              <a:rPr sz="3000" b="1">
+                <a:solidFill>
+                  <a:srgbClr val="006D77"/>
+                </a:solidFill>
+              </a:rPr>
+              <a:t>After the Demonstration</a:t>
+            </a:r>
+          </a:p>
+        </p:txBody>
+      </p:sp>
+      <p:sp>
+        <p:nvSpPr>
+          <p:cNvPr id="7" name="TextBox 6"/>
+          <p:cNvSpPr txBox="1"/>
+          <p:nvPr/>
+        </p:nvSpPr>
+        <p:spPr>
+          <a:xfrm>
+            <a:off x="640080" y="1325880"/>
+            <a:ext cx="10911535" cy="1173480"/>
+          </a:xfrm>
+          <a:prstGeom prst="rect">
+            <a:avLst/>
+          </a:prstGeom>
+          <a:noFill/>
+        </p:spPr>
+        <p:txBody>
+          <a:bodyPr wrap="square" lIns="45720" rIns="45720">
+            <a:spAutoFit/>
+          </a:bodyPr>
+          <a:lstStyle/>
+          <a:p>
+            <a:pPr>
+              <a:spcAft>
+                <a:spcPts val="300"/>
+              </a:spcAft>
+            </a:pPr>
+            <a:r>
+              <a:rPr sz="2000" b="1">
+                <a:solidFill>
+                  <a:srgbClr val="006D77"/>
+                </a:solidFill>
+              </a:rPr>
+              <a:t>• </a:t>
+            </a:r>
+            <a:r>
+              <a:rPr sz="2000" b="0">
+                <a:solidFill>
+                  <a:srgbClr val="1F2D3A"/>
+                </a:solidFill>
+              </a:rPr>
+              <a:t>Write the feedback as a </a:t>
+            </a:r>
+            <a:r>
+              <a:rPr sz="2000" b="1">
+                <a:solidFill>
+                  <a:srgbClr val="1F2D3A"/>
+                </a:solidFill>
+              </a:rPr>
+              <a:t>finding list</a:t>
+            </a:r>
+            <a:r>
+              <a:rPr sz="2000" b="0">
+                <a:solidFill>
+                  <a:srgbClr val="1F2D3A"/>
+                </a:solidFill>
+              </a:rPr>
+              <a:t> (finding · severity · fix · date) → a small model of Week 12</a:t>
+            </a:r>
+          </a:p>
+          <a:p>
+            <a:pPr>
+              <a:spcAft>
+                <a:spcPts val="300"/>
+              </a:spcAft>
+            </a:pPr>
+            <a:r>
+              <a:rPr sz="2000" b="1">
+                <a:solidFill>
+                  <a:srgbClr val="006D77"/>
+                </a:solidFill>
+              </a:rPr>
+              <a:t>• </a:t>
+            </a:r>
+            <a:r>
+              <a:rPr sz="2000" b="0">
+                <a:solidFill>
+                  <a:srgbClr val="1F2D3A"/>
+                </a:solidFill>
+              </a:rPr>
+              <a:t>Final sections: S6 · S8 · S11 · S14 · S15 · S16 results · S17</a:t>
+            </a:r>
+          </a:p>
+        </p:txBody>
+      </p:sp>
+      <p:sp>
+        <p:nvSpPr>
+          <p:cNvPr id="8" name="Rectangle 7"/>
+          <p:cNvSpPr/>
+          <p:nvPr/>
+        </p:nvSpPr>
+        <p:spPr>
+          <a:xfrm>
+            <a:off x="640080" y="2609088"/>
+            <a:ext cx="10911535" cy="934719"/>
+          </a:xfrm>
+          <a:prstGeom prst="rect">
+            <a:avLst/>
+          </a:prstGeom>
+          <a:solidFill>
+            <a:srgbClr val="EEF7F8"/>
+          </a:solidFill>
+          <a:ln>
+            <a:solidFill>
+              <a:srgbClr val="006D77"/>
+            </a:solidFill>
+          </a:ln>
+        </p:spPr>
+        <p:style>
+          <a:lnRef idx="1">
+            <a:schemeClr val="accent1"/>
+          </a:lnRef>
+          <a:fillRef idx="3">
+            <a:schemeClr val="accent1"/>
+          </a:fillRef>
+          <a:effectRef idx="2">
+            <a:schemeClr val="accent1"/>
+          </a:effectRef>
+          <a:fontRef idx="minor">
+            <a:schemeClr val="lt1"/>
+          </a:fontRef>
+        </p:style>
+        <p:txBody>
+          <a:bodyPr rtlCol="0" anchor="ctr" wrap="square" lIns="182880"/>
+          <a:lstStyle/>
+          <a:p>
+            <a:pPr algn="l"/>
+            <a:r>
+              <a:rPr sz="2000" b="0">
+                <a:solidFill>
+                  <a:srgbClr val="1F2D3A"/>
+                </a:solidFill>
+              </a:rPr>
+              <a:t>A demonstration is a presentation of </a:t>
+            </a:r>
+            <a:r>
+              <a:rPr sz="2000" b="1">
+                <a:solidFill>
+                  <a:srgbClr val="1F2D3A"/>
+                </a:solidFill>
+              </a:rPr>
+              <a:t>evidence</a:t>
+            </a:r>
+            <a:r>
+              <a:rPr sz="2000" b="0">
+                <a:solidFill>
+                  <a:srgbClr val="1F2D3A"/>
+                </a:solidFill>
+              </a:rPr>
+              <a:t>: every claim should be backed by a document, a test, or live output.</a:t>
+            </a:r>
+          </a:p>
+        </p:txBody>
+      </p:sp>
+    </p:spTree>
+  </p:cSld>
+  <p:clrMapOvr>
+    <a:masterClrMapping/>
+  </p:clrMapOvr>
+</p:sld>
+</file>
+
+<file path=ppt/slides/slide16.xml><?xml version="1.0" encoding="utf-8"?>
+<p:sld xmlns:a="http://schemas.openxmlformats.org/drawingml/2006/main" xmlns:p="http://schemas.openxmlformats.org/presentationml/2006/main" xmlns:r="http://schemas.openxmlformats.org/officeDocument/2006/relationships">
+  <p:cSld>
+    <p:spTree>
+      <p:nvGrpSpPr>
+        <p:cNvPr id="1" name=""/>
+        <p:cNvGrpSpPr/>
+        <p:nvPr/>
+      </p:nvGrpSpPr>
+      <p:grpSpPr/>
+      <p:pic>
+        <p:nvPicPr>
+          <p:cNvPr id="2" name="Picture 1" descr="rteu_logo_kucuk.jpg"/>
+          <p:cNvPicPr>
+            <a:picLocks noChangeAspect="1"/>
+          </p:cNvPicPr>
+          <p:nvPr/>
+        </p:nvPicPr>
+        <p:blipFill>
+          <a:blip r:embed="rId2"/>
+          <a:stretch>
+            <a:fillRect/>
+          </a:stretch>
+        </p:blipFill>
+        <p:spPr>
+          <a:xfrm>
+            <a:off x="640080" y="164592"/>
+            <a:ext cx="242773" cy="329184"/>
+          </a:xfrm>
+          <a:prstGeom prst="rect">
+            <a:avLst/>
+          </a:prstGeom>
+        </p:spPr>
+      </p:pic>
+      <p:sp>
+        <p:nvSpPr>
+          <p:cNvPr id="3" name="TextBox 2"/>
+          <p:cNvSpPr txBox="1"/>
+          <p:nvPr/>
+        </p:nvSpPr>
+        <p:spPr>
+          <a:xfrm>
+            <a:off x="1051560" y="182880"/>
+            <a:ext cx="7315200" cy="320040"/>
+          </a:xfrm>
+          <a:prstGeom prst="rect">
+            <a:avLst/>
+          </a:prstGeom>
+          <a:noFill/>
+        </p:spPr>
+        <p:txBody>
+          <a:bodyPr wrap="square" lIns="45720" rIns="45720">
+            <a:spAutoFit/>
+          </a:bodyPr>
+          <a:lstStyle/>
+          <a:p>
+            <a:r>
+              <a:rPr sz="1100" b="0">
+                <a:solidFill>
+                  <a:srgbClr val="5B6770"/>
+                </a:solidFill>
+              </a:rPr>
+              <a:t>CEN429 Secure Programming · Week 7</a:t>
+            </a:r>
+          </a:p>
+        </p:txBody>
+      </p:sp>
+      <p:sp>
+        <p:nvSpPr>
+          <p:cNvPr id="4" name="TextBox 3"/>
+          <p:cNvSpPr txBox="1"/>
+          <p:nvPr/>
+        </p:nvSpPr>
+        <p:spPr>
+          <a:xfrm>
+            <a:off x="640080" y="6446520"/>
+            <a:ext cx="7315200" cy="274320"/>
+          </a:xfrm>
+          <a:prstGeom prst="rect">
+            <a:avLst/>
+          </a:prstGeom>
+          <a:noFill/>
+        </p:spPr>
+        <p:txBody>
+          <a:bodyPr wrap="square" lIns="45720" rIns="45720">
+            <a:spAutoFit/>
+          </a:bodyPr>
+          <a:lstStyle/>
+          <a:p>
+            <a:r>
+              <a:rPr sz="1000" b="0">
+                <a:solidFill>
+                  <a:srgbClr val="5B6770"/>
+                </a:solidFill>
+              </a:rPr>
+              <a:t>RTEU Computer Engineering · 2026-2027 Fall</a:t>
+            </a:r>
+          </a:p>
+        </p:txBody>
+      </p:sp>
+      <p:sp>
+        <p:nvSpPr>
+          <p:cNvPr id="5" name="TextBox 4"/>
+          <p:cNvSpPr txBox="1"/>
+          <p:nvPr/>
+        </p:nvSpPr>
+        <p:spPr>
+          <a:xfrm>
+            <a:off x="10637215" y="6446520"/>
+            <a:ext cx="914400" cy="274320"/>
+          </a:xfrm>
+          <a:prstGeom prst="rect">
+            <a:avLst/>
+          </a:prstGeom>
+          <a:noFill/>
+        </p:spPr>
+        <p:txBody>
+          <a:bodyPr wrap="square" lIns="45720" rIns="45720">
+            <a:spAutoFit/>
+          </a:bodyPr>
+          <a:lstStyle/>
+          <a:p>
+            <a:pPr algn="r"/>
+            <a:r>
+              <a:rPr sz="1000" b="0">
+                <a:solidFill>
+                  <a:srgbClr val="5B6770"/>
+                </a:solidFill>
+              </a:rPr>
+              <a:t>16</a:t>
             </a:r>
           </a:p>
         </p:txBody>
